--- a/lecture_notes/chapter9/chapter9_slides.pptx
+++ b/lecture_notes/chapter9/chapter9_slides.pptx
@@ -135,13 +135,316 @@
 <file path=ppt/revisionInfo.xml><?xml version="1.0" encoding="utf-8"?>
 <p1510:revInfo xmlns:a="http://schemas.openxmlformats.org/drawingml/2006/main" xmlns:r="http://schemas.openxmlformats.org/officeDocument/2006/relationships" xmlns:p1510="http://schemas.microsoft.com/office/powerpoint/2015/10/main">
   <p1510:revLst>
-    <p1510:client id="{AB5C17E0-E4B6-E643-B356-54D7A930B0DF}" v="3" dt="2026-03-04T00:50:38.795"/>
+    <p1510:client id="{AD7EFBF9-7862-184F-B789-7E4741E47F74}" v="3" dt="2026-03-16T17:09:31.259"/>
   </p1510:revLst>
 </p1510:revInfo>
 </file>
 
 <file path=ppt/changesInfos/changesInfo1.xml><?xml version="1.0" encoding="utf-8"?>
 <pc:chgInfo xmlns:a="http://schemas.openxmlformats.org/drawingml/2006/main" xmlns:r="http://schemas.openxmlformats.org/officeDocument/2006/relationships" xmlns:ac="http://schemas.microsoft.com/office/drawing/2013/main/command" xmlns:pc="http://schemas.microsoft.com/office/powerpoint/2013/main/command">
+  <pc:docChgLst>
+    <pc:chgData name="Toby Donaldson" userId="2e6e5431-bb17-4c41-9985-d39c50d83c73" providerId="ADAL" clId="{F31BC264-820E-54C4-A6D1-F92AF9CC222E}"/>
+    <pc:docChg chg="undo custSel modSld">
+      <pc:chgData name="Toby Donaldson" userId="2e6e5431-bb17-4c41-9985-d39c50d83c73" providerId="ADAL" clId="{F31BC264-820E-54C4-A6D1-F92AF9CC222E}" dt="2026-03-16T17:09:31.259" v="222"/>
+      <pc:docMkLst>
+        <pc:docMk/>
+      </pc:docMkLst>
+      <pc:sldChg chg="addSp modSp mod">
+        <pc:chgData name="Toby Donaldson" userId="2e6e5431-bb17-4c41-9985-d39c50d83c73" providerId="ADAL" clId="{F31BC264-820E-54C4-A6D1-F92AF9CC222E}" dt="2026-03-16T16:39:14.797" v="220"/>
+        <pc:sldMkLst>
+          <pc:docMk/>
+          <pc:sldMk cId="0" sldId="257"/>
+        </pc:sldMkLst>
+        <pc:spChg chg="mod">
+          <ac:chgData name="Toby Donaldson" userId="2e6e5431-bb17-4c41-9985-d39c50d83c73" providerId="ADAL" clId="{F31BC264-820E-54C4-A6D1-F92AF9CC222E}" dt="2026-03-16T16:04:47.591" v="196" actId="20577"/>
+          <ac:spMkLst>
+            <pc:docMk/>
+            <pc:sldMk cId="0" sldId="257"/>
+            <ac:spMk id="24" creationId="{00000000-0000-0000-0000-000000000000}"/>
+          </ac:spMkLst>
+        </pc:spChg>
+        <pc:spChg chg="mod">
+          <ac:chgData name="Toby Donaldson" userId="2e6e5431-bb17-4c41-9985-d39c50d83c73" providerId="ADAL" clId="{F31BC264-820E-54C4-A6D1-F92AF9CC222E}" dt="2026-03-16T16:05:01.793" v="218" actId="20577"/>
+          <ac:spMkLst>
+            <pc:docMk/>
+            <pc:sldMk cId="0" sldId="257"/>
+            <ac:spMk id="25" creationId="{00000000-0000-0000-0000-000000000000}"/>
+          </ac:spMkLst>
+        </pc:spChg>
+        <pc:inkChg chg="add">
+          <ac:chgData name="Toby Donaldson" userId="2e6e5431-bb17-4c41-9985-d39c50d83c73" providerId="ADAL" clId="{F31BC264-820E-54C4-A6D1-F92AF9CC222E}" dt="2026-03-16T16:39:14.797" v="220"/>
+          <ac:inkMkLst>
+            <pc:docMk/>
+            <pc:sldMk cId="0" sldId="257"/>
+            <ac:inkMk id="26" creationId="{8ABF1F0A-E30E-8EE1-3932-7CAC6C3CA0E2}"/>
+          </ac:inkMkLst>
+        </pc:inkChg>
+      </pc:sldChg>
+      <pc:sldChg chg="addSp modSp mod">
+        <pc:chgData name="Toby Donaldson" userId="2e6e5431-bb17-4c41-9985-d39c50d83c73" providerId="ADAL" clId="{F31BC264-820E-54C4-A6D1-F92AF9CC222E}" dt="2026-03-16T16:39:14.797" v="220"/>
+        <pc:sldMkLst>
+          <pc:docMk/>
+          <pc:sldMk cId="0" sldId="258"/>
+        </pc:sldMkLst>
+        <pc:spChg chg="mod">
+          <ac:chgData name="Toby Donaldson" userId="2e6e5431-bb17-4c41-9985-d39c50d83c73" providerId="ADAL" clId="{F31BC264-820E-54C4-A6D1-F92AF9CC222E}" dt="2026-03-15T21:54:38.414" v="130" actId="14100"/>
+          <ac:spMkLst>
+            <pc:docMk/>
+            <pc:sldMk cId="0" sldId="258"/>
+            <ac:spMk id="35" creationId="{00000000-0000-0000-0000-000000000000}"/>
+          </ac:spMkLst>
+        </pc:spChg>
+        <pc:spChg chg="mod">
+          <ac:chgData name="Toby Donaldson" userId="2e6e5431-bb17-4c41-9985-d39c50d83c73" providerId="ADAL" clId="{F31BC264-820E-54C4-A6D1-F92AF9CC222E}" dt="2026-03-15T21:55:06.401" v="148" actId="20577"/>
+          <ac:spMkLst>
+            <pc:docMk/>
+            <pc:sldMk cId="0" sldId="258"/>
+            <ac:spMk id="36" creationId="{00000000-0000-0000-0000-000000000000}"/>
+          </ac:spMkLst>
+        </pc:spChg>
+        <pc:inkChg chg="add">
+          <ac:chgData name="Toby Donaldson" userId="2e6e5431-bb17-4c41-9985-d39c50d83c73" providerId="ADAL" clId="{F31BC264-820E-54C4-A6D1-F92AF9CC222E}" dt="2026-03-16T16:39:14.797" v="220"/>
+          <ac:inkMkLst>
+            <pc:docMk/>
+            <pc:sldMk cId="0" sldId="258"/>
+            <ac:inkMk id="37" creationId="{B980FBD9-6779-F3B3-FE18-AB5188207E60}"/>
+          </ac:inkMkLst>
+        </pc:inkChg>
+      </pc:sldChg>
+      <pc:sldChg chg="addSp">
+        <pc:chgData name="Toby Donaldson" userId="2e6e5431-bb17-4c41-9985-d39c50d83c73" providerId="ADAL" clId="{F31BC264-820E-54C4-A6D1-F92AF9CC222E}" dt="2026-03-16T16:39:14.797" v="220"/>
+        <pc:sldMkLst>
+          <pc:docMk/>
+          <pc:sldMk cId="0" sldId="259"/>
+        </pc:sldMkLst>
+        <pc:inkChg chg="add">
+          <ac:chgData name="Toby Donaldson" userId="2e6e5431-bb17-4c41-9985-d39c50d83c73" providerId="ADAL" clId="{F31BC264-820E-54C4-A6D1-F92AF9CC222E}" dt="2026-03-16T16:39:14.797" v="220"/>
+          <ac:inkMkLst>
+            <pc:docMk/>
+            <pc:sldMk cId="0" sldId="259"/>
+            <ac:inkMk id="27" creationId="{C286CF21-8102-4471-4718-F3983EAF6BC6}"/>
+          </ac:inkMkLst>
+        </pc:inkChg>
+      </pc:sldChg>
+      <pc:sldChg chg="addSp modSp mod">
+        <pc:chgData name="Toby Donaldson" userId="2e6e5431-bb17-4c41-9985-d39c50d83c73" providerId="ADAL" clId="{F31BC264-820E-54C4-A6D1-F92AF9CC222E}" dt="2026-03-16T16:55:39.343" v="221"/>
+        <pc:sldMkLst>
+          <pc:docMk/>
+          <pc:sldMk cId="0" sldId="261"/>
+        </pc:sldMkLst>
+        <pc:spChg chg="mod">
+          <ac:chgData name="Toby Donaldson" userId="2e6e5431-bb17-4c41-9985-d39c50d83c73" providerId="ADAL" clId="{F31BC264-820E-54C4-A6D1-F92AF9CC222E}" dt="2026-03-16T16:05:50.255" v="219" actId="207"/>
+          <ac:spMkLst>
+            <pc:docMk/>
+            <pc:sldMk cId="0" sldId="261"/>
+            <ac:spMk id="9" creationId="{00000000-0000-0000-0000-000000000000}"/>
+          </ac:spMkLst>
+        </pc:spChg>
+        <pc:inkChg chg="add">
+          <ac:chgData name="Toby Donaldson" userId="2e6e5431-bb17-4c41-9985-d39c50d83c73" providerId="ADAL" clId="{F31BC264-820E-54C4-A6D1-F92AF9CC222E}" dt="2026-03-16T16:55:39.343" v="221"/>
+          <ac:inkMkLst>
+            <pc:docMk/>
+            <pc:sldMk cId="0" sldId="261"/>
+            <ac:inkMk id="16" creationId="{1CCAD1A3-0194-3C0E-0413-87D5C6ED24D7}"/>
+          </ac:inkMkLst>
+        </pc:inkChg>
+      </pc:sldChg>
+      <pc:sldChg chg="addSp modSp mod">
+        <pc:chgData name="Toby Donaldson" userId="2e6e5431-bb17-4c41-9985-d39c50d83c73" providerId="ADAL" clId="{F31BC264-820E-54C4-A6D1-F92AF9CC222E}" dt="2026-03-16T16:55:39.343" v="221"/>
+        <pc:sldMkLst>
+          <pc:docMk/>
+          <pc:sldMk cId="0" sldId="262"/>
+        </pc:sldMkLst>
+        <pc:spChg chg="mod">
+          <ac:chgData name="Toby Donaldson" userId="2e6e5431-bb17-4c41-9985-d39c50d83c73" providerId="ADAL" clId="{F31BC264-820E-54C4-A6D1-F92AF9CC222E}" dt="2026-03-15T21:56:53.579" v="152" actId="14100"/>
+          <ac:spMkLst>
+            <pc:docMk/>
+            <pc:sldMk cId="0" sldId="262"/>
+            <ac:spMk id="24" creationId="{00000000-0000-0000-0000-000000000000}"/>
+          </ac:spMkLst>
+        </pc:spChg>
+        <pc:spChg chg="mod">
+          <ac:chgData name="Toby Donaldson" userId="2e6e5431-bb17-4c41-9985-d39c50d83c73" providerId="ADAL" clId="{F31BC264-820E-54C4-A6D1-F92AF9CC222E}" dt="2026-03-15T21:57:09.542" v="158" actId="20577"/>
+          <ac:spMkLst>
+            <pc:docMk/>
+            <pc:sldMk cId="0" sldId="262"/>
+            <ac:spMk id="25" creationId="{00000000-0000-0000-0000-000000000000}"/>
+          </ac:spMkLst>
+        </pc:spChg>
+        <pc:spChg chg="mod">
+          <ac:chgData name="Toby Donaldson" userId="2e6e5431-bb17-4c41-9985-d39c50d83c73" providerId="ADAL" clId="{F31BC264-820E-54C4-A6D1-F92AF9CC222E}" dt="2026-03-15T21:56:47.630" v="151" actId="1076"/>
+          <ac:spMkLst>
+            <pc:docMk/>
+            <pc:sldMk cId="0" sldId="262"/>
+            <ac:spMk id="30" creationId="{00000000-0000-0000-0000-000000000000}"/>
+          </ac:spMkLst>
+        </pc:spChg>
+        <pc:inkChg chg="add">
+          <ac:chgData name="Toby Donaldson" userId="2e6e5431-bb17-4c41-9985-d39c50d83c73" providerId="ADAL" clId="{F31BC264-820E-54C4-A6D1-F92AF9CC222E}" dt="2026-03-16T16:55:39.343" v="221"/>
+          <ac:inkMkLst>
+            <pc:docMk/>
+            <pc:sldMk cId="0" sldId="262"/>
+            <ac:inkMk id="31" creationId="{44662D62-A633-8C95-7424-75AEE303D3F8}"/>
+          </ac:inkMkLst>
+        </pc:inkChg>
+      </pc:sldChg>
+      <pc:sldChg chg="addSp modSp mod">
+        <pc:chgData name="Toby Donaldson" userId="2e6e5431-bb17-4c41-9985-d39c50d83c73" providerId="ADAL" clId="{F31BC264-820E-54C4-A6D1-F92AF9CC222E}" dt="2026-03-16T16:55:39.343" v="221"/>
+        <pc:sldMkLst>
+          <pc:docMk/>
+          <pc:sldMk cId="0" sldId="263"/>
+        </pc:sldMkLst>
+        <pc:spChg chg="mod">
+          <ac:chgData name="Toby Donaldson" userId="2e6e5431-bb17-4c41-9985-d39c50d83c73" providerId="ADAL" clId="{F31BC264-820E-54C4-A6D1-F92AF9CC222E}" dt="2026-03-15T21:58:10.732" v="159" actId="113"/>
+          <ac:spMkLst>
+            <pc:docMk/>
+            <pc:sldMk cId="0" sldId="263"/>
+            <ac:spMk id="13" creationId="{00000000-0000-0000-0000-000000000000}"/>
+          </ac:spMkLst>
+        </pc:spChg>
+        <pc:inkChg chg="add">
+          <ac:chgData name="Toby Donaldson" userId="2e6e5431-bb17-4c41-9985-d39c50d83c73" providerId="ADAL" clId="{F31BC264-820E-54C4-A6D1-F92AF9CC222E}" dt="2026-03-16T16:55:39.343" v="221"/>
+          <ac:inkMkLst>
+            <pc:docMk/>
+            <pc:sldMk cId="0" sldId="263"/>
+            <ac:inkMk id="14" creationId="{29769CE4-08CC-C860-C587-8BFD3575B619}"/>
+          </ac:inkMkLst>
+        </pc:inkChg>
+      </pc:sldChg>
+      <pc:sldChg chg="addSp">
+        <pc:chgData name="Toby Donaldson" userId="2e6e5431-bb17-4c41-9985-d39c50d83c73" providerId="ADAL" clId="{F31BC264-820E-54C4-A6D1-F92AF9CC222E}" dt="2026-03-16T17:09:31.259" v="222"/>
+        <pc:sldMkLst>
+          <pc:docMk/>
+          <pc:sldMk cId="0" sldId="265"/>
+        </pc:sldMkLst>
+        <pc:inkChg chg="add">
+          <ac:chgData name="Toby Donaldson" userId="2e6e5431-bb17-4c41-9985-d39c50d83c73" providerId="ADAL" clId="{F31BC264-820E-54C4-A6D1-F92AF9CC222E}" dt="2026-03-16T17:09:31.259" v="222"/>
+          <ac:inkMkLst>
+            <pc:docMk/>
+            <pc:sldMk cId="0" sldId="265"/>
+            <ac:inkMk id="20" creationId="{F01A9EEC-03BC-9ACF-9FF5-BAB0B799EA77}"/>
+          </ac:inkMkLst>
+        </pc:inkChg>
+      </pc:sldChg>
+      <pc:sldChg chg="addSp modSp mod">
+        <pc:chgData name="Toby Donaldson" userId="2e6e5431-bb17-4c41-9985-d39c50d83c73" providerId="ADAL" clId="{F31BC264-820E-54C4-A6D1-F92AF9CC222E}" dt="2026-03-16T17:09:31.259" v="222"/>
+        <pc:sldMkLst>
+          <pc:docMk/>
+          <pc:sldMk cId="0" sldId="266"/>
+        </pc:sldMkLst>
+        <pc:spChg chg="mod">
+          <ac:chgData name="Toby Donaldson" userId="2e6e5431-bb17-4c41-9985-d39c50d83c73" providerId="ADAL" clId="{F31BC264-820E-54C4-A6D1-F92AF9CC222E}" dt="2026-03-15T21:59:19.679" v="165" actId="14100"/>
+          <ac:spMkLst>
+            <pc:docMk/>
+            <pc:sldMk cId="0" sldId="266"/>
+            <ac:spMk id="5" creationId="{00000000-0000-0000-0000-000000000000}"/>
+          </ac:spMkLst>
+        </pc:spChg>
+        <pc:spChg chg="mod">
+          <ac:chgData name="Toby Donaldson" userId="2e6e5431-bb17-4c41-9985-d39c50d83c73" providerId="ADAL" clId="{F31BC264-820E-54C4-A6D1-F92AF9CC222E}" dt="2026-03-15T21:58:54.612" v="160" actId="14100"/>
+          <ac:spMkLst>
+            <pc:docMk/>
+            <pc:sldMk cId="0" sldId="266"/>
+            <ac:spMk id="6" creationId="{00000000-0000-0000-0000-000000000000}"/>
+          </ac:spMkLst>
+        </pc:spChg>
+        <pc:spChg chg="mod">
+          <ac:chgData name="Toby Donaldson" userId="2e6e5431-bb17-4c41-9985-d39c50d83c73" providerId="ADAL" clId="{F31BC264-820E-54C4-A6D1-F92AF9CC222E}" dt="2026-03-15T21:59:56.583" v="168" actId="20577"/>
+          <ac:spMkLst>
+            <pc:docMk/>
+            <pc:sldMk cId="0" sldId="266"/>
+            <ac:spMk id="8" creationId="{00000000-0000-0000-0000-000000000000}"/>
+          </ac:spMkLst>
+        </pc:spChg>
+        <pc:spChg chg="mod">
+          <ac:chgData name="Toby Donaldson" userId="2e6e5431-bb17-4c41-9985-d39c50d83c73" providerId="ADAL" clId="{F31BC264-820E-54C4-A6D1-F92AF9CC222E}" dt="2026-03-15T21:59:07.676" v="163" actId="1076"/>
+          <ac:spMkLst>
+            <pc:docMk/>
+            <pc:sldMk cId="0" sldId="266"/>
+            <ac:spMk id="9" creationId="{00000000-0000-0000-0000-000000000000}"/>
+          </ac:spMkLst>
+        </pc:spChg>
+        <pc:spChg chg="mod">
+          <ac:chgData name="Toby Donaldson" userId="2e6e5431-bb17-4c41-9985-d39c50d83c73" providerId="ADAL" clId="{F31BC264-820E-54C4-A6D1-F92AF9CC222E}" dt="2026-03-15T21:59:07.676" v="163" actId="1076"/>
+          <ac:spMkLst>
+            <pc:docMk/>
+            <pc:sldMk cId="0" sldId="266"/>
+            <ac:spMk id="10" creationId="{00000000-0000-0000-0000-000000000000}"/>
+          </ac:spMkLst>
+        </pc:spChg>
+        <pc:inkChg chg="add">
+          <ac:chgData name="Toby Donaldson" userId="2e6e5431-bb17-4c41-9985-d39c50d83c73" providerId="ADAL" clId="{F31BC264-820E-54C4-A6D1-F92AF9CC222E}" dt="2026-03-16T17:09:31.259" v="222"/>
+          <ac:inkMkLst>
+            <pc:docMk/>
+            <pc:sldMk cId="0" sldId="266"/>
+            <ac:inkMk id="11" creationId="{2E615DBD-E872-71EA-254E-981D31610B1D}"/>
+          </ac:inkMkLst>
+        </pc:inkChg>
+      </pc:sldChg>
+      <pc:sldChg chg="addSp modSp mod">
+        <pc:chgData name="Toby Donaldson" userId="2e6e5431-bb17-4c41-9985-d39c50d83c73" providerId="ADAL" clId="{F31BC264-820E-54C4-A6D1-F92AF9CC222E}" dt="2026-03-16T17:09:31.259" v="222"/>
+        <pc:sldMkLst>
+          <pc:docMk/>
+          <pc:sldMk cId="0" sldId="267"/>
+        </pc:sldMkLst>
+        <pc:spChg chg="mod">
+          <ac:chgData name="Toby Donaldson" userId="2e6e5431-bb17-4c41-9985-d39c50d83c73" providerId="ADAL" clId="{F31BC264-820E-54C4-A6D1-F92AF9CC222E}" dt="2026-03-15T22:00:26.272" v="176" actId="20577"/>
+          <ac:spMkLst>
+            <pc:docMk/>
+            <pc:sldMk cId="0" sldId="267"/>
+            <ac:spMk id="11" creationId="{00000000-0000-0000-0000-000000000000}"/>
+          </ac:spMkLst>
+        </pc:spChg>
+        <pc:spChg chg="mod">
+          <ac:chgData name="Toby Donaldson" userId="2e6e5431-bb17-4c41-9985-d39c50d83c73" providerId="ADAL" clId="{F31BC264-820E-54C4-A6D1-F92AF9CC222E}" dt="2026-03-15T22:00:52.564" v="184" actId="20577"/>
+          <ac:spMkLst>
+            <pc:docMk/>
+            <pc:sldMk cId="0" sldId="267"/>
+            <ac:spMk id="15" creationId="{00000000-0000-0000-0000-000000000000}"/>
+          </ac:spMkLst>
+        </pc:spChg>
+        <pc:inkChg chg="add">
+          <ac:chgData name="Toby Donaldson" userId="2e6e5431-bb17-4c41-9985-d39c50d83c73" providerId="ADAL" clId="{F31BC264-820E-54C4-A6D1-F92AF9CC222E}" dt="2026-03-16T17:09:31.259" v="222"/>
+          <ac:inkMkLst>
+            <pc:docMk/>
+            <pc:sldMk cId="0" sldId="267"/>
+            <ac:inkMk id="18" creationId="{0AADD438-2C0B-7318-870A-0CDB60D34154}"/>
+          </ac:inkMkLst>
+        </pc:inkChg>
+      </pc:sldChg>
+      <pc:sldChg chg="addSp modSp mod">
+        <pc:chgData name="Toby Donaldson" userId="2e6e5431-bb17-4c41-9985-d39c50d83c73" providerId="ADAL" clId="{F31BC264-820E-54C4-A6D1-F92AF9CC222E}" dt="2026-03-16T17:09:31.259" v="222"/>
+        <pc:sldMkLst>
+          <pc:docMk/>
+          <pc:sldMk cId="0" sldId="268"/>
+        </pc:sldMkLst>
+        <pc:spChg chg="mod">
+          <ac:chgData name="Toby Donaldson" userId="2e6e5431-bb17-4c41-9985-d39c50d83c73" providerId="ADAL" clId="{F31BC264-820E-54C4-A6D1-F92AF9CC222E}" dt="2026-03-15T22:01:19.948" v="185" actId="20577"/>
+          <ac:spMkLst>
+            <pc:docMk/>
+            <pc:sldMk cId="0" sldId="268"/>
+            <ac:spMk id="8" creationId="{00000000-0000-0000-0000-000000000000}"/>
+          </ac:spMkLst>
+        </pc:spChg>
+        <pc:spChg chg="mod">
+          <ac:chgData name="Toby Donaldson" userId="2e6e5431-bb17-4c41-9985-d39c50d83c73" providerId="ADAL" clId="{F31BC264-820E-54C4-A6D1-F92AF9CC222E}" dt="2026-03-15T22:04:15.758" v="191" actId="20577"/>
+          <ac:spMkLst>
+            <pc:docMk/>
+            <pc:sldMk cId="0" sldId="268"/>
+            <ac:spMk id="16" creationId="{00000000-0000-0000-0000-000000000000}"/>
+          </ac:spMkLst>
+        </pc:spChg>
+        <pc:inkChg chg="add">
+          <ac:chgData name="Toby Donaldson" userId="2e6e5431-bb17-4c41-9985-d39c50d83c73" providerId="ADAL" clId="{F31BC264-820E-54C4-A6D1-F92AF9CC222E}" dt="2026-03-16T17:09:31.259" v="222"/>
+          <ac:inkMkLst>
+            <pc:docMk/>
+            <pc:sldMk cId="0" sldId="268"/>
+            <ac:inkMk id="17" creationId="{BBE1AEAE-DB96-97A3-A8DF-1E4F5BA51BAC}"/>
+          </ac:inkMkLst>
+        </pc:inkChg>
+      </pc:sldChg>
+    </pc:docChg>
+  </pc:docChgLst>
   <pc:docChgLst>
     <pc:chgData name="Toby Donaldson" userId="2e6e5431-bb17-4c41-9985-d39c50d83c73" providerId="ADAL" clId="{7F9681A8-EEE2-56F4-9B39-ECCBEE0471AC}"/>
     <pc:docChg chg="undo custSel modSld">
@@ -274,22 +577,6 @@
             <ac:spMk id="34" creationId="{00000000-0000-0000-0000-000000000000}"/>
           </ac:spMkLst>
         </pc:spChg>
-        <pc:spChg chg="del">
-          <ac:chgData name="Toby Donaldson" userId="2e6e5431-bb17-4c41-9985-d39c50d83c73" providerId="ADAL" clId="{7F9681A8-EEE2-56F4-9B39-ECCBEE0471AC}" dt="2026-03-04T00:32:43.816" v="34" actId="21"/>
-          <ac:spMkLst>
-            <pc:docMk/>
-            <pc:sldMk cId="0" sldId="258"/>
-            <ac:spMk id="37" creationId="{00000000-0000-0000-0000-000000000000}"/>
-          </ac:spMkLst>
-        </pc:spChg>
-        <pc:spChg chg="del">
-          <ac:chgData name="Toby Donaldson" userId="2e6e5431-bb17-4c41-9985-d39c50d83c73" providerId="ADAL" clId="{7F9681A8-EEE2-56F4-9B39-ECCBEE0471AC}" dt="2026-03-04T00:32:46.037" v="35" actId="21"/>
-          <ac:spMkLst>
-            <pc:docMk/>
-            <pc:sldMk cId="0" sldId="258"/>
-            <ac:spMk id="38" creationId="{00000000-0000-0000-0000-000000000000}"/>
-          </ac:spMkLst>
-        </pc:spChg>
       </pc:sldChg>
       <pc:sldChg chg="addSp delSp modSp mod">
         <pc:chgData name="Toby Donaldson" userId="2e6e5431-bb17-4c41-9985-d39c50d83c73" providerId="ADAL" clId="{7F9681A8-EEE2-56F4-9B39-ECCBEE0471AC}" dt="2026-03-04T00:38:38.513" v="100" actId="21"/>
@@ -401,36 +688,12 @@
             <ac:spMk id="26" creationId="{00000000-0000-0000-0000-000000000000}"/>
           </ac:spMkLst>
         </pc:spChg>
-        <pc:spChg chg="del">
-          <ac:chgData name="Toby Donaldson" userId="2e6e5431-bb17-4c41-9985-d39c50d83c73" providerId="ADAL" clId="{7F9681A8-EEE2-56F4-9B39-ECCBEE0471AC}" dt="2026-03-04T00:36:32.908" v="62" actId="21"/>
-          <ac:spMkLst>
-            <pc:docMk/>
-            <pc:sldMk cId="0" sldId="259"/>
-            <ac:spMk id="27" creationId="{00000000-0000-0000-0000-000000000000}"/>
-          </ac:spMkLst>
-        </pc:spChg>
-        <pc:spChg chg="del">
-          <ac:chgData name="Toby Donaldson" userId="2e6e5431-bb17-4c41-9985-d39c50d83c73" providerId="ADAL" clId="{7F9681A8-EEE2-56F4-9B39-ECCBEE0471AC}" dt="2026-03-04T00:36:34.377" v="63" actId="21"/>
-          <ac:spMkLst>
-            <pc:docMk/>
-            <pc:sldMk cId="0" sldId="259"/>
-            <ac:spMk id="28" creationId="{00000000-0000-0000-0000-000000000000}"/>
-          </ac:spMkLst>
-        </pc:spChg>
         <pc:spChg chg="mod">
           <ac:chgData name="Toby Donaldson" userId="2e6e5431-bb17-4c41-9985-d39c50d83c73" providerId="ADAL" clId="{7F9681A8-EEE2-56F4-9B39-ECCBEE0471AC}" dt="2026-03-04T00:33:53.673" v="46" actId="1076"/>
           <ac:spMkLst>
             <pc:docMk/>
             <pc:sldMk cId="0" sldId="259"/>
             <ac:spMk id="29" creationId="{00000000-0000-0000-0000-000000000000}"/>
-          </ac:spMkLst>
-        </pc:spChg>
-        <pc:spChg chg="del mod">
-          <ac:chgData name="Toby Donaldson" userId="2e6e5431-bb17-4c41-9985-d39c50d83c73" providerId="ADAL" clId="{7F9681A8-EEE2-56F4-9B39-ECCBEE0471AC}" dt="2026-03-04T00:33:21.714" v="40" actId="21"/>
-          <ac:spMkLst>
-            <pc:docMk/>
-            <pc:sldMk cId="0" sldId="259"/>
-            <ac:spMk id="30" creationId="{00000000-0000-0000-0000-000000000000}"/>
           </ac:spMkLst>
         </pc:spChg>
         <pc:spChg chg="add del mod">
@@ -495,14 +758,6 @@
             <ac:spMk id="30" creationId="{00000000-0000-0000-0000-000000000000}"/>
           </ac:spMkLst>
         </pc:spChg>
-        <pc:spChg chg="del">
-          <ac:chgData name="Toby Donaldson" userId="2e6e5431-bb17-4c41-9985-d39c50d83c73" providerId="ADAL" clId="{7F9681A8-EEE2-56F4-9B39-ECCBEE0471AC}" dt="2026-03-04T00:40:56.833" v="154" actId="21"/>
-          <ac:spMkLst>
-            <pc:docMk/>
-            <pc:sldMk cId="0" sldId="262"/>
-            <ac:spMk id="31" creationId="{00000000-0000-0000-0000-000000000000}"/>
-          </ac:spMkLst>
-        </pc:spChg>
         <pc:spChg chg="add mod">
           <ac:chgData name="Toby Donaldson" userId="2e6e5431-bb17-4c41-9985-d39c50d83c73" providerId="ADAL" clId="{7F9681A8-EEE2-56F4-9B39-ECCBEE0471AC}" dt="2026-03-04T00:42:09.793" v="190" actId="207"/>
           <ac:spMkLst>
@@ -564,46 +819,6 @@
             <ac:spMk id="9" creationId="{00000000-0000-0000-0000-000000000000}"/>
           </ac:spMkLst>
         </pc:spChg>
-        <pc:spChg chg="del">
-          <ac:chgData name="Toby Donaldson" userId="2e6e5431-bb17-4c41-9985-d39c50d83c73" providerId="ADAL" clId="{7F9681A8-EEE2-56F4-9B39-ECCBEE0471AC}" dt="2026-03-04T00:46:39.102" v="257" actId="21"/>
-          <ac:spMkLst>
-            <pc:docMk/>
-            <pc:sldMk cId="0" sldId="266"/>
-            <ac:spMk id="11" creationId="{00000000-0000-0000-0000-000000000000}"/>
-          </ac:spMkLst>
-        </pc:spChg>
-        <pc:spChg chg="del">
-          <ac:chgData name="Toby Donaldson" userId="2e6e5431-bb17-4c41-9985-d39c50d83c73" providerId="ADAL" clId="{7F9681A8-EEE2-56F4-9B39-ECCBEE0471AC}" dt="2026-03-04T00:46:46.161" v="258" actId="21"/>
-          <ac:spMkLst>
-            <pc:docMk/>
-            <pc:sldMk cId="0" sldId="266"/>
-            <ac:spMk id="12" creationId="{00000000-0000-0000-0000-000000000000}"/>
-          </ac:spMkLst>
-        </pc:spChg>
-        <pc:spChg chg="del">
-          <ac:chgData name="Toby Donaldson" userId="2e6e5431-bb17-4c41-9985-d39c50d83c73" providerId="ADAL" clId="{7F9681A8-EEE2-56F4-9B39-ECCBEE0471AC}" dt="2026-03-04T00:46:46.161" v="258" actId="21"/>
-          <ac:spMkLst>
-            <pc:docMk/>
-            <pc:sldMk cId="0" sldId="266"/>
-            <ac:spMk id="13" creationId="{00000000-0000-0000-0000-000000000000}"/>
-          </ac:spMkLst>
-        </pc:spChg>
-        <pc:spChg chg="del mod">
-          <ac:chgData name="Toby Donaldson" userId="2e6e5431-bb17-4c41-9985-d39c50d83c73" providerId="ADAL" clId="{7F9681A8-EEE2-56F4-9B39-ECCBEE0471AC}" dt="2026-03-04T00:46:52.073" v="261" actId="21"/>
-          <ac:spMkLst>
-            <pc:docMk/>
-            <pc:sldMk cId="0" sldId="266"/>
-            <ac:spMk id="14" creationId="{00000000-0000-0000-0000-000000000000}"/>
-          </ac:spMkLst>
-        </pc:spChg>
-        <pc:spChg chg="del">
-          <ac:chgData name="Toby Donaldson" userId="2e6e5431-bb17-4c41-9985-d39c50d83c73" providerId="ADAL" clId="{7F9681A8-EEE2-56F4-9B39-ECCBEE0471AC}" dt="2026-03-04T00:46:46.161" v="258" actId="21"/>
-          <ac:spMkLst>
-            <pc:docMk/>
-            <pc:sldMk cId="0" sldId="266"/>
-            <ac:spMk id="15" creationId="{00000000-0000-0000-0000-000000000000}"/>
-          </ac:spMkLst>
-        </pc:spChg>
       </pc:sldChg>
       <pc:sldChg chg="modSp mod">
         <pc:chgData name="Toby Donaldson" userId="2e6e5431-bb17-4c41-9985-d39c50d83c73" providerId="ADAL" clId="{7F9681A8-EEE2-56F4-9B39-ECCBEE0471AC}" dt="2026-03-04T00:47:43.779" v="287" actId="20577"/>
@@ -647,30 +862,6 @@
             <pc:docMk/>
             <pc:sldMk cId="0" sldId="271"/>
             <ac:spMk id="9" creationId="{00000000-0000-0000-0000-000000000000}"/>
-          </ac:spMkLst>
-        </pc:spChg>
-        <pc:spChg chg="del">
-          <ac:chgData name="Toby Donaldson" userId="2e6e5431-bb17-4c41-9985-d39c50d83c73" providerId="ADAL" clId="{7F9681A8-EEE2-56F4-9B39-ECCBEE0471AC}" dt="2026-03-04T00:50:18.964" v="299" actId="21"/>
-          <ac:spMkLst>
-            <pc:docMk/>
-            <pc:sldMk cId="0" sldId="271"/>
-            <ac:spMk id="12" creationId="{00000000-0000-0000-0000-000000000000}"/>
-          </ac:spMkLst>
-        </pc:spChg>
-        <pc:spChg chg="del">
-          <ac:chgData name="Toby Donaldson" userId="2e6e5431-bb17-4c41-9985-d39c50d83c73" providerId="ADAL" clId="{7F9681A8-EEE2-56F4-9B39-ECCBEE0471AC}" dt="2026-03-04T00:50:18.964" v="299" actId="21"/>
-          <ac:spMkLst>
-            <pc:docMk/>
-            <pc:sldMk cId="0" sldId="271"/>
-            <ac:spMk id="15" creationId="{00000000-0000-0000-0000-000000000000}"/>
-          </ac:spMkLst>
-        </pc:spChg>
-        <pc:spChg chg="del">
-          <ac:chgData name="Toby Donaldson" userId="2e6e5431-bb17-4c41-9985-d39c50d83c73" providerId="ADAL" clId="{7F9681A8-EEE2-56F4-9B39-ECCBEE0471AC}" dt="2026-03-04T00:50:18.964" v="299" actId="21"/>
-          <ac:spMkLst>
-            <pc:docMk/>
-            <pc:sldMk cId="0" sldId="271"/>
-            <ac:spMk id="16" creationId="{00000000-0000-0000-0000-000000000000}"/>
           </ac:spMkLst>
         </pc:spChg>
         <pc:spChg chg="mod">
@@ -727,28 +918,12 @@
           <pc:docMk/>
           <pc:sldMk cId="0" sldId="274"/>
         </pc:sldMkLst>
-        <pc:spChg chg="del">
-          <ac:chgData name="Toby Donaldson" userId="2e6e5431-bb17-4c41-9985-d39c50d83c73" providerId="ADAL" clId="{7F9681A8-EEE2-56F4-9B39-ECCBEE0471AC}" dt="2026-03-04T00:53:33.573" v="319" actId="21"/>
-          <ac:spMkLst>
-            <pc:docMk/>
-            <pc:sldMk cId="0" sldId="274"/>
-            <ac:spMk id="26" creationId="{00000000-0000-0000-0000-000000000000}"/>
-          </ac:spMkLst>
-        </pc:spChg>
         <pc:spChg chg="mod">
           <ac:chgData name="Toby Donaldson" userId="2e6e5431-bb17-4c41-9985-d39c50d83c73" providerId="ADAL" clId="{7F9681A8-EEE2-56F4-9B39-ECCBEE0471AC}" dt="2026-03-04T00:53:37.643" v="320" actId="1076"/>
           <ac:spMkLst>
             <pc:docMk/>
             <pc:sldMk cId="0" sldId="274"/>
             <ac:spMk id="27" creationId="{00000000-0000-0000-0000-000000000000}"/>
-          </ac:spMkLst>
-        </pc:spChg>
-        <pc:spChg chg="del">
-          <ac:chgData name="Toby Donaldson" userId="2e6e5431-bb17-4c41-9985-d39c50d83c73" providerId="ADAL" clId="{7F9681A8-EEE2-56F4-9B39-ECCBEE0471AC}" dt="2026-03-04T00:53:33.573" v="319" actId="21"/>
-          <ac:spMkLst>
-            <pc:docMk/>
-            <pc:sldMk cId="0" sldId="274"/>
-            <ac:spMk id="28" creationId="{00000000-0000-0000-0000-000000000000}"/>
           </ac:spMkLst>
         </pc:spChg>
         <pc:spChg chg="mod">
@@ -779,6 +954,362 @@
     </pc:docChg>
   </pc:docChgLst>
 </pc:chgInfo>
+</file>
+
+<file path=ppt/ink/ink1.xml><?xml version="1.0" encoding="utf-8"?>
+<inkml:ink xmlns:inkml="http://www.w3.org/2003/InkML">
+  <inkml:definitions>
+    <inkml:context xml:id="ctx0">
+      <inkml:inkSource xml:id="inkSrc0">
+        <inkml:traceFormat>
+          <inkml:channel name="X" type="integer" min="-2.14748E9" max="2.14748E9" units="cm"/>
+          <inkml:channel name="Y" type="integer" min="-2.14748E9" max="2.14748E9" units="cm"/>
+          <inkml:channel name="F" type="integer" max="32767" units="dev"/>
+        </inkml:traceFormat>
+        <inkml:channelProperties>
+          <inkml:channelProperty channel="X" name="resolution" value="1000" units="1/cm"/>
+          <inkml:channelProperty channel="Y" name="resolution" value="1000" units="1/cm"/>
+          <inkml:channelProperty channel="F" name="resolution" value="0" units="1/dev"/>
+        </inkml:channelProperties>
+      </inkml:inkSource>
+      <inkml:timestamp xml:id="ts0" timeString="2026-03-16T16:32:13.827"/>
+    </inkml:context>
+    <inkml:brush xml:id="br0">
+      <inkml:brushProperty name="width" value="0.05292" units="cm"/>
+      <inkml:brushProperty name="height" value="0.05292" units="cm"/>
+      <inkml:brushProperty name="color" value="#FF0000"/>
+    </inkml:brush>
+  </inkml:definitions>
+  <inkml:trace contextRef="#ctx0" brushRef="#br0">1389 6324 24575,'15'0'0,"8"0"0,10 0 0,3 0 0,-8 0 0,2 0 0,-4 0 0,1 0 0,2 0 0,2 0 0,2-6 0,0 0 0,-9 4 0,1 1 0,11-4 0,1-2 0,-11-2 0,-1 0 0,6 7 0,-1 0 0,-4-7 0,-2 0 0,4 9 0,4 0 0,0 0 0,-9-5 0,0-1 0,14 3 0,-15-3 0,0 0 0,10 6 0,-12 0 0,0 0 0,0 0 0,1 0 0,-1 0 0,0 0 0,5 0 0,0 0 0,5 0 0,0 0 0,2 0 0,-8 0 0,1 0 0,8 0 0,0 0 0,-8 0 0,-2 0 0,0 0 0,-2 0 0,12 0 0,-5 0 0,-9 0 0,0 0 0,9 0 0,4 0 0,-10 0 0,0 0 0,9 0 0,-6 0 0,0 0 0,-2 0 0,0 0 0,13 0 0,-13 0 0,-1 0 0,10 0 0,-4 0 0,-8 0 0,4 0 0,-21 0 0,9 0 0,-12 0 0,17 0 0,-1 0 0,5 0 0,-9 0 0,-12 0 0</inkml:trace>
+  <inkml:trace contextRef="#ctx0" brushRef="#br0" timeOffset="20582">3466 6416 24575,'0'0'0</inkml:trace>
+  <inkml:trace contextRef="#ctx0" brushRef="#br0" timeOffset="21563">3466 6416 24575,'0'0'0</inkml:trace>
+  <inkml:trace contextRef="#ctx0" brushRef="#br0" timeOffset="23732">3651 6456 24575,'22'0'0,"0"0"0,8 0 0,1 0 0,-3 0 0,1 0 0,1 0 0,-3 0 0,-6 0 0,-9 0 0,-12 0 0,0 0 0</inkml:trace>
+  <inkml:trace contextRef="#ctx0" brushRef="#br0" timeOffset="25548">7779 6363 24575,'-22'0'0,"-8"0"0,27 0 0,-20 0 0,2 0 0,5 0 0,-13 0 0,26 0 0,-27 0 0,26 0 0,-25 0 0,26 0 0,-9 0 0</inkml:trace>
+  <inkml:trace contextRef="#ctx0" brushRef="#br0" timeOffset="27798">3625 8467 24575,'22'0'0,"0"0"0,2 0 0,0 0 0,6 0 0,1 0 0,-4 0 0,-1 0 0,-6 0 0,-1 0 0,14 0 0,-1 0 0,-10 0 0,2 0 0,0-6 0,0 0 0,3 5 0,-1-1 0,-5-3 0,-2-2 0,13-10 0,-10 14 0,0 1 0,-4-7 0,1 1 0,4 7 0,-1 2 0,11-13 0,-10 11 0,-2-1 0,-2-10 0,3 11 0,-3 2 0,-16-1 0,9 0 0</inkml:trace>
+  <inkml:trace contextRef="#ctx0" brushRef="#br0" timeOffset="39815">4723 6416 24575,'15'0'0,"14"0"0,-25 0 0,26 0 0,-16 0 0,1 0 0,15 0 0,-14 0 0,4 0 0,-8 0 0,-12 0 0</inkml:trace>
+  <inkml:trace contextRef="#ctx0" brushRef="#br0" timeOffset="42082">6165 6324 24575,'22'0'0,"7"0"0,-26 0 0,9 0 0,-12 0 0,12 0 0,-9 0 0,8 0 0,-11 0 0</inkml:trace>
+  <inkml:trace contextRef="#ctx0" brushRef="#br0" timeOffset="71381">16087 5067 24575,'22'0'0,"0"0"0,5 0 0,6 0 0,-3 0 0,6 0 0,3 0 0,0 0 0,-2 0-656,-5 0 1,-2 0-1,1 0 1,1 0 0,2 0 232,-2 0 1,3 0 0,1 0-1,0 0 1,0 0 0,-1 0 0,-1 0 422,2 0 0,-1 0 0,-1 0 0,0 0 0,0 0 0,0 0 0,1 0 0,-1 0 0,0 0 0,0 0-182,-2 0 0,-1 0 0,1 0 1,-1 0-1,1 0 182,2 0 0,0 0 0,0 0 0,0 0 0,1 0 0,0 0 0,1 0 0,0 0 0,0 0 0,0 0 0,1 0 0,1 0 0,-1 0 0,1 0 0,-1 0 0,-1 0 0,0 0 0,0 0 0,0 0 0,-1 0 0,0 0 0,0 0 0,-1 0 0,0 0 0,-1 0 0,0 0 0,0 0 0,-2 0 0,1 0 182,-1 0 0,0 0 1,0 0-1,-2 0-182,3 0 0,-1 0 0,-1 0-73,-3 0 0,0 0 1,-1 0 72,1 0 0,-1 0 0,-1 0 1377,6 0 1,-1 0-1378,2 0 0,0 0 1249,-7 0 0,-1 0-1249,-1 0 0,-1 0 1060,11 0-1060,-19 0 318,16 0-318,-26 0 0,26 0 0,-16 0 0,19 0 0,-5 0 0,-10 0 0,2 0 0,0 0 0,-1 0 0,2 0 0,0 0 0,-1 0 0,-1 0 0,14 0 0,-11 0 0,0 0 0,15 0 0,-10 0 0,3 0 0,1 0 0,3 0-501,-5 0 0,2 0 1,1 0 500,-4 0 0,0 0 0,1 1 0,1-2 0,1-2 0,1 0 0,0 0 0,-1 0 0,-2 2 0,-1 1 0,1-1 0,-2 0-217,9-3 1,-1 0-1,-1 0 217,-6 4 0,-2 1 0,1-2 0,-1-4 0,0-2 0,-1 2 0,10 3 0,-3-1 0,-7-6 0,-2 1 0,9 8 0,-8 0 1451,-21 0-1451,26 0 701,-24 0-701,24 0 0,-14 0 0,0 0 0,14 0 0,-25 0 0,26 0 0,-10 0 0,8 0 0,5 0 0,-1 0 0,-16 0 0,2 0 0,-18 0 0,0 0 0</inkml:trace>
+  <inkml:trace contextRef="#ctx0" brushRef="#br0" timeOffset="76415">16153 8057 24575,'26'0'0,"0"0"0,4 0 0,-4 0 0,1 0 0,1 0-488,4 0 1,0 0-1,1 0 488,0 0 0,0 0 0,-1 0 0,-1 0 0,-1 0 0,-1 0 0,-2 0 0,0 0 0,0 0 0,3 0 0,1 0 0,1 0 0,-2 0 0,1 0 0,0 0 158,5 0 1,0 0 0,2 0-159,-4-3 0,1 0 0,0-1 0,0 2 0,-5 1 0,0 1 0,0 0 0,0-2-118,1-4 1,1-3 0,-2 1 0,-1 1 117,-2 6 0,-1 1 0,-1-3 0,1-6 0,0-3 0,0 4 0,9 5 0,-1 3 0,-4-6 0,0 0 0,2 5 0,-2 2 718,1-1-718,-1-8 0,2-2 0,-8 2 0,0 0 0,9-2 0,0 0 0,-3-3 0,1 2 0,1 10 0,0-1 0,-1-13 0,-1 1 0,-6 11 0,0 1 0,8-6 0,-2-1 738,1-3-738,-6 10 0,0 1 0,3-11 0,-4 11 0,1 2 0,-1-1 0,1 0 0,4 0 0,2 0 0,-6 0 0,1 0 0,0 0-277,0 0 0,1 0 0,1 0 277,6 0 0,1 0 0,1 0-422,-6 0 1,-1 1 0,1-1 0,0-1 421,0-1 0,0-1 0,0-1 0,1 1 0,4 2 0,2 1 0,-1 0 0,-1-1 0,3-3 0,-2-1 0,1 2-234,-6 2 1,0 1-1,0 0 1,-2 1 233,3-1 0,-1 1 0,-1-2-99,-3-4 0,0-2 1,0 1 98,-1 4 0,0 2 0,0-2 0,7-7 0,0 0 0,0 8 0,0 2 353,-9-1 1,0 0-354,8 0 0,-2 0 1637,1 0-1637,-9 0 0,0 0 1046,10 0-1046,-4 0 178,-8 0 0,-1 0-178,-3 0 0,13 0 0,-14 0 0,0 0 0,14 0 0,-25 0 0,14-12 0,-18 9 0,0-8 0,12 11 0,-9 0 0,20 0 0,-20 0 0,9 0 0</inkml:trace>
+  <inkml:trace contextRef="#ctx0" brushRef="#br0" timeOffset="78915">16047 10200 24575,'31'0'0,"0"0"0,0 0 0,1 0 0,-1 0 0,-1 0 0,2 0 0,0 0 0,0 0 0,0 0 0,1 0 0,1 0 0,1 0 0,0 0 0,0 0 0,0 0 0,1 0-469,-3 0 1,1 0 0,0 0 0,0 0 0,0 0 0,0 0 0,0 0-79,3 0 1,0 0 0,-1 0 0,1 0 0,-1 0 0,0 0 425,-2 0 1,1 0-1,-1 0 1,0 0 0,0 0-1,1 0 10,-1 0 1,0 0 0,1 0 0,-1 0-1,-1 0 1,-1 0 110,1 0 0,-1 0 0,-1 0 0,0 0 0,0 0 173,5 0 1,1 0 0,-2 0 0,-1 0-174,4 0 0,-1 0 0,-2 0 0,-3 0 0,-1 0 0,1 0 0,0 0 0,1 0 0,0 0 0,-2 0 0,0 0 0,0 0 0,-1 0 0,1 0 0,0 0 0,6 0 0,1 0 0,-3 0 0,-8 0 0,-1 0 0,1 0-92,8 0 1,2 0 0,-3 0 91,-2 0 0,-1 0 0,-5 0 0,1 0 0,-2 0 1590,-1 0 1,0 0-1591,7 0 0,0 0 1290,-6 0 1,-1 0-1291,0 0 0,0 0 665,2 0 0,-2 0-665,4 0 426,4 0-426,-10-9 0,0 0 0,15 5 0,-8-5 0,-1 0 0,-7 2 0,0 2 0,-1 4 0,-1-1 0,14-9 0,-19 11 0,16 0 0,-26 0 0,26 0 0,2 0 0,-1 0 0,-1 0 0,2 0 0,-8 0 0,0 0 0,0 0 0,1 0 0,6 0 0,-1 0 0,1 0 0,-6 1 0,0-2 0,3-11 0,-9 10 0,0 1 0,9-11 0,-7 12 0,-9 0 0</inkml:trace>
+  <inkml:trace contextRef="#ctx0" brushRef="#br0" timeOffset="82165">16179 12806 24575,'22'0'0,"0"0"0,8 0 0,5 0 0,2 0 0,-8 0 0,2 0 0,1 0 0,2 0 0,1 0-469,-1 0 1,0 0 0,2 0 0,1 0 0,1 0 0,-1 0 0,-1 0-1,-1 0 1,0 0 0,0 0 0,0 0 0,0 0 0,1 0 0,0 0 234,-2 0 1,1 0 0,0 0 0,1 0-1,-1 0 1,0 0 0,-1 0 0,0 0 233,4 0 0,-1 0 0,0 0 0,-1 0 0,1 0 0,0 0-133,0 0 1,1 0 0,-1 0-1,1 0 1,-1 0 0,-1 0 132,2 0 0,0 0 0,-1 0 0,0 0 0,0 0 88,-1 0 0,0 0 0,0 0 1,-1 0-1,-2 0-88,1 0 0,-1 0 0,-2 0 0,0 0-24,6 0 1,-2 0-1,-2 0 24,1 0 0,-4 0 1638,-9 0 0,-2 0-1513,1 0 1,-2 0 2928,10 0-3054,-7 0 2138,2 0-2138,-2 0 125,7 0-125,-3 0 0,0 0 0,6 0 0,0 0 0,-1 0 0,1 0 0,-6 0 0,0 0 0,-1 0 0,-2 0 0,15 0 0,-6 0 0,-1 0 0,1 0 0,-9 0 0,0 0 0,11 0 0,-5 0 0,-9 0 0,0 0 0,9 0 0,-8 0 0,4 0 0,-4 0 0,-1 1 0,2-2 0,-1-5 0,1 0 0,8 5 0,0-1 0,-5-4 0,0 0 0,8 5 0,1 2 0,-2 1 0,-2-4 0,-4-6 0,-1-1 0,1 7 0,0-1 0,2-14 0,6 17 0,-1 0 0,-4 0 0,-9-6 0,0 0 0,1 4 0,0 1 0,0-5 0,1 0 0,4 6 0,2 0 0,-1-5 0,0-2 0,4 6 0,1 0 0,1-5 0,2 0 0,1 0 0,3-1 0,-4 2 0,-4 3 0,-1 0 0,5-4 0,4-1 0,-7 2 0,0 5 0,-9 0 0,0 0 0,10 0 0,-4 0 0,-8 0 0,-2 0 0,-2 0 0,14 0 0,-15-12 0,17 9 0,-4-8 0,-9 10 0,0 2 0,9-1 0,4 0 0,1 0 0,-17 0 0,13 0 0,-26 0 0,9 0 0,0 0 0,-9 0 0,26 0 0,-13 0 0,3 0 0,0 0 0,9 0 0,5 0 0,-19 0 0,16 0 0,-14 0 0,16 0 0,1 0 0,-11 0 0,1 0 0,1-6 0,1 0 0,7 5 0,0-1 0,-1-13 0,-1 1 0,-6 11 0,0 1 0,3-7 0,-4 0 0,-7 9 0,2 0 0</inkml:trace>
+  <inkml:trace contextRef="#ctx0" brushRef="#br0" timeOffset="109231">3122 10385 24575,'28'0'0,"0"0"0,3 0 0,1 0 0,-2 0 0,1 0 0,1 0-606,-1 0 0,-1 0 0,1 0 606,2 0 0,0 0 0,0 0 0,-2 0 0,0 0 0,1 0 0,1 0 0,0 1 0,-1-2 0,-4-3 0,-1 0 0,-1 0 293,11 3 1,-2-1-294,-7-4 0,-3 0 301,3 6-301,-10 0 0,-6 0 0,-10 0 0,10 0 0</inkml:trace>
+  <inkml:trace contextRef="#ctx0" brushRef="#br0" timeOffset="117432">4220 10358 24575,'28'0'0,"0"0"0,2 0 0,3 0 0,2 0 0,3 0 0,-1 0-744,-4 0 0,-1 0 0,0 0 744,5 0 0,1 0 0,-2 0 0,-8 0 0,-2 0 0,1 0 67,-1 0 0,0 0 0,-1 0-67,2 0 0,-1 0 0,-1 0 0,10 0 0,-1 0 0,3 0 0,-2 0 0,-2 0 0,-1 0 0,-2 0 0,0 0 0,-4 0 0,0 0 0,0 0 0,9 0 0,-1 0 0,-7 0 0,-1 0 0,-1 0 244,0 0 0,-1 0-244,8 0 0,-2 0 0,0 0 0,3 0 1124,-10 0-1124,10 0 419,3 0-419,-13 0 0,0 0 0,9 0 0,1 0 0,-6 0 0,-6 0 0,8 0 0,-12 0 0,15 0 0,0 0 0,-16 0 0,14 0 0,-15 0 0,5 0 0,4 0 0,12 0 0,-13 0 0,0 0 0,9 0 0,-10-8 0,0-1 0,2 6 0,1 1 0,8-6 0,0-1 0,-3 2 0,0 2 0,3 4 0,-1-1 0,-2-10 0,0 1 0,-4 8 0,0 3 0,0 0 0,9-7 0,-1 2 0,-3 4 0,-1 2 0,1-1 0,-1 0 0,-5 0 0,-1 0 0,-1 0 0,2 0 0,11 0 0,2 0 0,-7 0 0,1 0-222,-2 0 0,2 0 0,-1 0 222,-4 0 0,0 1 0,-1-2 0,1-4 0,-1-2 0,-1 1 0,9 4 0,-1 0 0,-3-7 0,0 0 0,2 8 0,0 2 0,-7-1 0,-1 0 0,-1 0 0,0 0 0,9 0 0,-17 0 666,14 0-666,-25 0 0,14 0 0,-6 0 0,-9 0 0,26 0 0,-13 0 0,17 0 0,-1 0 0,-16 0 0,14 0 0,-28 0 0,10 0 0,0 0 0,-9 0 0,9 0 0,-12 0 0,0 0 0,17 0 0,-1 0 0,5 0 0,8 0 0,-24 0 0,24 0 0,-26 18 0,9-14 0,-12 14 0,0-18 0,12 0 0,-9 0 0,8 0 0</inkml:trace>
+  <inkml:trace contextRef="#ctx0" brushRef="#br0" timeOffset="128132">16298 12647 24575,'32'0'0,"0"0"0,0 0 0,0 0 0,4 0 0,1 0 0,1 0 0,-2 0 0,-3 0 0,-1 0 0,-1 0 0,2 0 0,1 0-469,-1 0 1,1 0 0,2 0 0,0 0 0,0 0 0,-2 0 0,-2 0-116,3 0 1,-2 0 0,-1 0 0,0 0-1,0 0 584,0 0 0,0 0 0,0 0 0,-1 0 0,0 0 62,6 0 0,-1 0 0,0 0 0,-2 0-62,3 0 0,-1 0 0,0 0 0,1 0 0,0 0 0,-1 0 304,-8 0 1,-1 0 0,-1 0-305,11 0 0,-2 0 0,-8 0 0,-1 0 0,-6 0 0,-1 0 1524,1 0 0,-1 0-1524,9 0 1484,4 0-1484,-10 0 0,0 0 500,9 0-500,-2 0 0,4 0 0,-3 0 0,0 0 0,4 0 0,1 0 0,-9 0 0,0 0 0,0 0 0,8 0 0,-2 0 0,-8 0 0,1 0 0,6-1 0,-1 2 0,-8 7 0,-1 2 0,10-2 0,3 0 0,-4 2 0,0 0 0,3 2 0,0 0 0,-9-1 0,0-1 0,8-3 0,-2 2 0,-14 6 0,-1-1 0,15-12 0,2-1 0,-8 14 0,0-1 0,9-10 0,0-3 0,-2 8 0,-1 0 0,2-8 0,0-2 0,-2 1 0,1 0 0,2 0 0,0 0 0,-9 0 0,0 0 0,7 0 0,0 0 0,-9 0 0,-1 0 0,5 0 0,1 0 0,2 0 0,-1 0 0,9 0 0,-15 0 0,0 0 0,10 0 0,-9 0 0,0 0 0,13 0 0,-5 0 0,0 0 0,-10 0 0,1 0 0,10-9 0,0 0 0,-7 7 0,-1-1 0,4-6 0,1 1 0,-2 7 0,-1 2 0,5-1 0,-2 0 0,-4 0 0,-1 0 0,8 0 0,-2 0 0,1 0 0,-6 0 0,0 0 0,2 0 0,6 0 0,-11 0 0,0 0 0,15 0 0,-9 0 0,1 0 0,-3 0 0,1 0 0,3 0 0,0 0 0,-6 0 0,1 0 0,6 1 0,-1-2 0,-5-5 0,-1 0 0,1 5 0,-2-1 0,10-10 0,-4 12 0,-13 0 0,5 0 0,-9 0 0,-1 0 0,-8 0 0,27 0 0,-26 0 0,26 0 0,-27 0 0,8 0 0,-11 0 0,0 0 0</inkml:trace>
+</inkml:ink>
+</file>
+
+<file path=ppt/ink/ink10.xml><?xml version="1.0" encoding="utf-8"?>
+<inkml:ink xmlns:inkml="http://www.w3.org/2003/InkML">
+  <inkml:definitions>
+    <inkml:context xml:id="ctx0">
+      <inkml:inkSource xml:id="inkSrc0">
+        <inkml:traceFormat>
+          <inkml:channel name="X" type="integer" min="-2.14748E9" max="2.14748E9" units="cm"/>
+          <inkml:channel name="Y" type="integer" min="-2.14748E9" max="2.14748E9" units="cm"/>
+          <inkml:channel name="F" type="integer" max="32767" units="dev"/>
+        </inkml:traceFormat>
+        <inkml:channelProperties>
+          <inkml:channelProperty channel="X" name="resolution" value="1000" units="1/cm"/>
+          <inkml:channelProperty channel="Y" name="resolution" value="1000" units="1/cm"/>
+          <inkml:channelProperty channel="F" name="resolution" value="0" units="1/dev"/>
+        </inkml:channelProperties>
+      </inkml:inkSource>
+      <inkml:timestamp xml:id="ts0" timeString="2026-03-16T17:05:41.971"/>
+    </inkml:context>
+    <inkml:brush xml:id="br0">
+      <inkml:brushProperty name="width" value="0.05292" units="cm"/>
+      <inkml:brushProperty name="height" value="0.05292" units="cm"/>
+      <inkml:brushProperty name="color" value="#FF0000"/>
+    </inkml:brush>
+  </inkml:definitions>
+  <inkml:trace contextRef="#ctx0" brushRef="#br0">1389 3215 24575,'26'0'0,"-1"0"0,0 0 0,1 0 0,-1 0 0,1 0 0,6 0 0,1 0 0,0 0-758,2 0 0,0 0 0,0 0 758,-1 0 0,-1 0 0,1 0 0,1 0 0,1 0 0,-1 0 0,2 0 0,0 0 0,-1 0 0,-4 0 0,-1 0 0,2 0 0,-4 0 0,2 0 0,0 0 0,0 0 0,5 0 0,0 0 0,1 0 0,-9 0 0,0 0 0,0 0 0,1 0 0,1 0 0,1 0 0,0 0 0,-1 0 0,3 0 0,-2 0 0,2 0 0,3 0 0,2 0 0,-2 0 0,-5 0 0,0 0 0,0 0 0,2 0 0,0 0 0,-1 0 92,-6 0 1,-1 0 0,1 0-93,5 0 0,1 0 0,-1 0 0,1 0 0,-1 0 240,2 0 0,0 0-240,-3 0 0,-3 0 0,-6 0 0,-1 0 0,0 0 0,0 0 575,5 0-1,0 0-574,-1 0 0,1 0 0,4 0 0,2 0 0,-4 0 0,1 0 0,-1 0 0,3 0 0,-1 0 0,-2 0 0,1 1 0,-1-2 0,4-8 0,-1 0 0,3 7 0,0 0 183,-9-7 1,0 0-184,8 8 0,-2 2 0,1-1 0,-8 0 0,-2 0 0,-6 0 0,14 0 0,-25 0 0,14 0 0</inkml:trace>
+  <inkml:trace contextRef="#ctx0" brushRef="#br0" timeOffset="17201">18534 2738 24575,'34'0'0,"-2"0"0,-10 0 0,0 0 0,2 0 0,1 0 0,7 0 0,2 0 0,-1 0 0,0 0 0,-3 0 0,0 0 0,3 0 0,-1 0 0,-1 0 0,-2 0 0,-4 0 0,-1 0 0,2 0 0,-2 0 0,4 0 0,4 0 0,0 0 0,-15 0 0,12 0 0,-26 0 0,20 0 0,10 0 0,4 0 0,-15 0 0,1 0 0,3 0 0,-2 0 0,7 0 0,-8 0 0,-2 0 0,-6 0 0,14-11 0,-24 8 0,12-9 0</inkml:trace>
+  <inkml:trace contextRef="#ctx0" brushRef="#br0" timeOffset="27237">14473 2858 24575,'22'0'0,"7"0"0,-8 0 0,-2 0 0,1 0 0,1 0 0,0 0 0,-2 0 0,1 0 0,6 0 0,-2 0 0,7 0 0,0-1 0,0 2 0,0-1 0,0 0 0,-1 0 0,1 0 0,-1 0 0,2 0 0,-2-1 0,0 2-147,-2-1 0,2 0 0,-1 0 147,-3 0 0,-1 0 0,0 0 0,12 0 0,-3 0 0,-13 0 0,-2 0 0,13 0 0,0 0 0,-15 0 0,0 0 0,-17 0 0</inkml:trace>
+  <inkml:trace contextRef="#ctx0" brushRef="#br0" timeOffset="56650">11986 5133 24575,'31'0'0,"1"0"0,1 0 0,3 0 0,-8 0 0,3 1 0,1-1 0,-1-1-724,-2-3 1,1-1-1,-1 0 1,1 1 723,1 3 0,1 0 0,-1 1 0,1-2 0,-1-2 0,-1 0 0,1-1 0,-1 0 0,-1 2 0,-1-1 0,0 2 0,0-1 0,8 2 0,0 1 0,1-1 0,-7-2 0,2-1 0,-1 1 0,-2 1 11,0 1 0,-2 2 0,1-1-11,5-4 0,2 0 0,-2 0 338,2 3 0,-1-1-338,-4-2 0,1 0 0,-2 0 0,0 4 0,-1 0 0,7 0 0,-1 0 0,-12 0 0,-3 0 723,1 0 1,0 0-724,5 0 0,0 0 738,6 0-738,-1 0 0,2 0 0,-8 0 0,0 0 0,0 0 0,1 0 0,6 0 0,-1 0 0,-5 0 0,-1 0 0,0 0 0,0 0 0,8 0 0,-2 0 0,-8 0 0,-1 0 0,5 0 0,1 0 0,2 0 0,-1 0 0,9 0 0,-7 0 0,2 0 0,-3 0 0,2 0 0,2 0 0,3 0 0,-7 0 0,2 0 0,-1 0-250,-3 0 1,-1 0-1,1 0 250,4 0 0,0 0 0,0 0 0,-4 0 0,0 0 0,0 0 0,3 0 0,0 0 0,0 0 0,5 0 0,-1 0-94,2 0 1,0 0 93,-4 0 0,0 0 0,-2 0 0,1 0 0,1 0 0,2 0 0,-1 0 0,0 0 0,-3 0 0,0 0 0,2 0 0,1 0 0,-3 0 0,0 0 0,3 0 0,0 0 0,-7 1 0,1 0 0,-2-3 0,7-6 0,-1-1 0,-5 7 0,0 1 0,-1-1 0,6-7 0,-2 1 0,-5 7 0,1 2 0,6-1 0,-1 0 0,1 0 0,-1 0 0,2 0 0,-8 0 0,0 0 0,9-6 0,1 0 371,-1 4 0,0 1-371,-3-5 0,0 0 97,-3 6 0,-1 0-97,0 0 0,-1 0 0,-3 0 0,-3 0 0,9 0 0,2 0 0,-27 0 0,26 0 0,-13 0 0,8-8 0,2-1 0,-5 6 0,1 1 0,9-7 0,3 0 0,1 9 0,2 0-484,-6-3 0,2-2 1,1 2 483,2 2 0,0 1 0,1-2 0,-8-3 0,1-2 0,0 0 0,0 2 0,-1 3 0,1 2 0,0 0 0,-1-1 0,5-2 0,0-1 0,-1 0-161,-2-2 1,0-1 0,0 2 160,-5 3 0,1 2 0,-3-2 0,7-8 0,-1 2 0,-4 7 0,1 2 0,1-1 0,1 0 0,-5 0 0,0 0 0,0 0 0,2 0 0,1 0 207,3 0 0,1 0 0,0 0-207,1 0 0,1 0 0,0 0 0,3 0 0,1 0 0,0 0 0,-6 0 0,0 0 0,-1 0 0,3 0 0,1 0 0,-2 0 0,-6 0 0,-1 0 0,0 0 165,3 0 1,0 0-1,-1 0-165,3 0 0,0 0 0,3 0 0,0 0 0,-9 0 0,1 0 0,6 0 0,-1 0 0,1 0 0,-9 0 0,0 0 815,11 0-815,-6 0 0,-6 0 0,8 0 0,-24 0 0,24 0 0,-26 18 0,9-14 0,-12 14 0,0-18 0,0 0 0,0 11 0,-12-8 0,9 9 0,-8-12 0,11 0 0,0 0 0,0-12 0,0-8 0,0-8 0,0-5 0,0 19 0,0 2 0,0 12 0</inkml:trace>
+  <inkml:trace contextRef="#ctx0" brushRef="#br0" timeOffset="88901">913 7276 24575,'26'0'0,"0"0"0,0 0 0,9 0 0,2 0 0,1 0 0,-2 0 0,1 0 0,2 0-656,-10 0 1,2 0-1,0 0 1,1 0 0,-1 0 231,0 0 1,-1 1-1,0-1 1,1 0 0,0-1 423,1-2 0,0 0 0,0-2 0,1 1 0,0 1 0,0 2 0,2 0 0,-1 1 0,0 0 0,0-2 0,-2-1 0,0-1 0,0 0 0,-1 0 0,1 1 0,0 2 0,-1 2 0,1-1 0,0 1 0,0-2 0,-1 0 0,1-2 0,0 0 0,0 1 0,-1 0 0,1 1 0,0 0 0,0 1 0,0 0 0,-1-1-146,5-2 0,-1 1 0,0-2 0,0 1 146,1-1 0,0-1 0,-1 0 0,1 1 0,-2 3 0,0 1 0,1-1 0,0-1-184,-4-3 1,0-1-1,1-1 1,0 0 0,1 2 183,1 3 0,0 2 0,1 1 0,0-1 0,0-1-368,-3-2 0,-1-1 0,1 0 0,0-1 0,0 1 0,0 0 368,0 1 0,-1-1 0,1 1 0,-1 0 0,0-1 0,-1 0 0,3-1 0,0 0 0,-1-1 0,0 0 0,0 0 294,5 1 0,0 1 0,-2-1 1,-2-1-295,-2-4 0,-2-1 0,-1 3 468,1 5 0,-1 3 0,-2-2-468,-4-7 0,-2 0 1142,6 8 1,-2 2-1143,4-1 3152,-7 0-3152,-1 0 0,1 0 1085,-2 0-1085,5 0 0,2 0 0,2 0 0,4-11 0,-17 8 0,-3-9 0</inkml:trace>
+  <inkml:trace contextRef="#ctx0" brushRef="#br0" timeOffset="103500">16047 6760 24575,'22'0'0,"7"0"0,-8 0 0,7 0 0,-7 0 0,2 0 0,-2 0 0,7 0 0,-4 0 0,2 0 0,-2 1 0,0-2 0,0-5 0,1 0 0,6 5 0,-1-1 0,1-9 0,-8 10 0,-2 2 0,-6-1 0,14 0 0,-24 0 0,12 0 0,-5 0 0,-9 0 0,26 0 0,-1 0 0,-8-6 0,2 0 0,3 4 0,1 1 0,-5-5 0,-1 0 0,1 5 0,-2 2 0,1-1 0,10-17 0,-26 12 0,14-12 0</inkml:trace>
+  <inkml:trace contextRef="#ctx0" brushRef="#br0" timeOffset="109133">14354 7422 24575,'14'0'0,"-2"0"0,-12 0 0,0 0 0,18 0 0,-14 0 0,14 0 0,-6 0 0,-10 0 0,10 0 0,0 0 0,-9 17 0,9-12 0,-12 12 0,0-17 0</inkml:trace>
+  <inkml:trace contextRef="#ctx0" brushRef="#br0" timeOffset="111467">15174 8030 24575,'15'0'0,"14"0"0,-7 0 0,2 0 0,9 0 0,3 0 0,-10 0 0,1 0 0,0 0 0,4 0 0,-1 0 0,-1 0 0,3 0 0,-1 0 0,-5 0 0,0 0 0,-1 0 0,0 0 0,-2 0 0,1 0 0,-2 0 0,10 0 0,1 0 0,-17 0 0,4 0 0,1 0 0,2 0 0,5 0 0,2 0 0,6 0 0,-14 0 0,1 0 0,-2 0 0,2 0 0,0 0 0,2 0 0,0 0 0,1 0 0,1 0-154,0 0 0,-1 0 0,2 0 154,2 0 0,1 0 0,0 0-332,6 0 0,0 0 0,0 0 332,-5 0 0,0 0 0,1 0-401,-4 0 1,2 0 0,0 0-1,0 0 401,0 0 0,0 0 0,0 0 0,1 0 0,0 0 0,-1 0 0,2 0 0,0 0 0,-2 0 0,0 0 0,1 0 0,0 0 0,-2 0 0,0 0 0,0 0 0,-2 0 0,1 0 0,2 0 0,0 0 0,0 0 0,-2 0-100,4 0 1,-2 0-1,-2 0 100,6 0 0,-1 0 197,3 0 1,-5 0-198,-8 0 458,-3 0 1,-1 0-459,-4 0 1695,16 0-1695,1 0 352,-5 0-352,-9 0 0,0 0 0,9 0 0,4 0 0,0 0 0,-9 0 0,0 0 0,1 0 0,1 0 0,1 0 0,0 0 0,-5 0 0,-2 0 0,14 0 0,-1 0 0,-16 0 0,13 0 0,-26 0 0,27 0 0,-26 12 0,14-9 0,-18 9 0,0-12 0,0 0 0,-18-12 0,2 2 0,-2-1 0,-7-5 0,-4-2 0</inkml:trace>
+  <inkml:trace contextRef="#ctx0" brushRef="#br0" timeOffset="198966">4842 12277 24575,'26'0'0,"-1"0"0,-1 0 0,1 0 0,7 0 0,1 0 0,-3 0 0,0 0 0,-6 0 0,0 0 0,8 0 0,-2 0 0,1 0 0,-6 0 0,0 0 0,3 0 0,-4 0 0,2 0 0,-2 0 0,0 0 0,6 0 0,1 0 0,1 0 0,0 0 0,4 0 0,0 0-171,-9 0 1,0 0 0,0 0 170,0 0 0,0 1 0,0-2 0,3-4 0,0-2 0,0 1 0,-3 4 0,0 2 0,-1-2 0,1-4 0,0-1 0,0 2 0,3 4 0,1 1 0,-2 1 0,6-1 0,-1 0 0,-8 0 0,0 0 0,0 0 0,8 0 0,-2 0 0,-8 0 0,1 0 0,6 0 0,-1 0 0,1 0 0,-8 0 0,-2 0 0,-6 0 0,-3 0 0,-12 0 0</inkml:trace>
+</inkml:ink>
+</file>
+
+<file path=ppt/ink/ink2.xml><?xml version="1.0" encoding="utf-8"?>
+<inkml:ink xmlns:inkml="http://www.w3.org/2003/InkML">
+  <inkml:definitions>
+    <inkml:context xml:id="ctx0">
+      <inkml:inkSource xml:id="inkSrc0">
+        <inkml:traceFormat>
+          <inkml:channel name="X" type="integer" min="-2.14748E9" max="2.14748E9" units="cm"/>
+          <inkml:channel name="Y" type="integer" min="-2.14748E9" max="2.14748E9" units="cm"/>
+          <inkml:channel name="F" type="integer" max="32767" units="dev"/>
+        </inkml:traceFormat>
+        <inkml:channelProperties>
+          <inkml:channelProperty channel="X" name="resolution" value="1000" units="1/cm"/>
+          <inkml:channelProperty channel="Y" name="resolution" value="1000" units="1/cm"/>
+          <inkml:channelProperty channel="F" name="resolution" value="0" units="1/dev"/>
+        </inkml:channelProperties>
+      </inkml:inkSource>
+      <inkml:timestamp xml:id="ts0" timeString="2026-03-16T16:35:02.825"/>
+    </inkml:context>
+    <inkml:brush xml:id="br0">
+      <inkml:brushProperty name="width" value="0.05292" units="cm"/>
+      <inkml:brushProperty name="height" value="0.05292" units="cm"/>
+      <inkml:brushProperty name="color" value="#FF0000"/>
+    </inkml:brush>
+  </inkml:definitions>
+  <inkml:trace contextRef="#ctx0" brushRef="#br0">2646 4630 24575,'15'0'0,"5"0"0,1 0 0,-2 0 0,10 0 0,4 0 0,3 0 0,-13 0 0,0 0 0,9 0 0,-17 0 0,14 0 0,-13 0 0,5 0 0,-9 0 0,-12 0 0,12 0 0,-10 0 0,28 0 0,-26 0 0,14 0 0</inkml:trace>
+  <inkml:trace contextRef="#ctx0" brushRef="#br0" timeOffset="13068">20902 3268 24575,'0'26'0,"0"0"0,0 0 0,0 0 0,0 1 0,0 0 0,0 6 0,0 0 0,0 0-584,0-2 0,0 0 1,0 1 583,0 1 0,0 0 0,0-1 0,0-4 0,0-1 0,0-1 283,0 11 0,0-2-283,0-1 0,0-3 145,0-10 0,0 1-145,0 8 0,0 1 0,0-7 0,0 1 0,0 6 0,0 4 0,2-7 0,2 2 0,-1 2 0,0-3 0,-2 2 0,0-2 0,0 2-30,1-1 1,2 1 0,-1 1 0,0-3 29,-3 2 0,0-1 0,0-1 0,-1-2 0,0 0 0,3 0-139,3 0 1,2 0-1,-2 0 139,-3-1 0,-2 0 0,3-1 0,6 6 0,-1-1 0,-7 2 0,-2 0 0,1-6 0,0-3 0,0 11 0,0-17 0,0-17 0</inkml:trace>
+  <inkml:trace contextRef="#ctx0" brushRef="#br0" timeOffset="28484">15544 4749 24575,'34'0'0,"-10"0"0,2 0 0,3 0 0,2 0 0,-5 0 0,1 0 0,1 0-350,3 0 0,0 0 1,0 0 349,-4 0 0,0 0 0,0 0 0,-1 0 0,1 0 0,-2 0 171,-1 0 1,0 0-172,2 0 0,-2 0 174,4 0-174,4 0 0,1 0 0,-14 0 0,1 0 266,1 0 0,-1 0-266,8 0 0,2 0 0,-27 0 0,8 0 0,7 0 0,-2 0 0,17 0 0,-11 0 0,0 0 0,9 0 0,-6 0 0,0 0 0,2 0 0,-7 0 0,-1 0 0,-3 0 0,2 0 0,-18 0 0</inkml:trace>
+  <inkml:trace contextRef="#ctx0" brushRef="#br0" timeOffset="31333">15584 4974 24575,'26'0'0,"0"0"0,5 0 0,-2 0 0,0 0 0,0 0 0,1 0 0,1 0 0,-2 0 0,5 0 0,-6 0 0,-9 0 0,5 0 0,-1 0 0,-7 0 0,5 0 0,2 0 0,-2 0 0,6 6 0,3 0 0,-10-5 0,0 1 0,11 4 0,0 0 0,-3-6 0,-8 0 0,4 0 0,-21 17 0,26-12 0,-25 12 0,26-17 0,-10 0 0,-3 0 0,12 0 0,-26 0 0,20 0 0,-20 0 0,9 0 0,6 0 0,-2 0 0,4 0 0,-8 0 0,0 0 0,-9 0 0,26 0 0,-24 0 0,12 0 0,-17 0 0</inkml:trace>
+  <inkml:trace contextRef="#ctx0" brushRef="#br0" timeOffset="32870">19354 5067 24575,'22'0'0,"8"0"0,2 0 0,-12 0 0,3 0 0,8 0 0,2 0 0,-2 0 0,-1 0 0,-6 0 0,0 0 0,2 0 0,-2 0 0,4 0 0,-3 0 0,0 0 0,6 0 0,1 0 0,-2 0 0,-14 0 0,4 0 0,4 0 0,8-12 0,5 9 0,-9-3 0,1 0 0,-3 6 0,1 0 0,8 0 0,2 0 0,-10 0 0,0 0 0,0 0 0,0 0 0,0 0 0,0 0 0,-1 0 0,0 0 0,0 0 0,8 0 0,-2 0 0,-7 0 0,-2 0 0,1 0 0,-3 0 0,-7 0 0,-2 0 0,-12 0 0</inkml:trace>
+  <inkml:trace contextRef="#ctx0" brushRef="#br0" timeOffset="35099">21974 5067 24575,'22'0'0,"0"0"0,6 0 0,4 0 0,-3 0 0,3 0 0,0 0-692,1 0 1,1 0 0,0 0 691,1 0 0,1 0 0,-1 0 0,-2 0 0,-1 0 0,1 0 0,2 0 0,0 0 0,0 0 0,-1 0 0,-1 0 0,1 0 0,1 0 0,1 0 0,-1 0 0,-2 0 0,0 0 0,-1 0 0,0 0 0,-2 0 0,1 0 0,-1 0 0,1 0 0,1 0 0,0 0 0,2 0 0,1 0 0,-3 0 0,3 0 0,-2 0 0,2 0 0,-1 0 0,3 0 0,-2 0 0,-1 0 0,-1 0 0,-3 0 0,1 0 0,2 0 0,0 0 0,0 0 101,-6 0 0,0 0 0,-1 0-101,11 0 0,-2 0 0,-2 0 0,-1 0 0,4 0 0,0 0 0,-2 0 0,1 0 0,-9 0 0,0 0 0,0 0 0,8 0 0,-2 0 214,-7 0 0,-1 0-214,7 0 0,-1 0 0,-8 0 0,-1 0 0,6 0 0,-1 0 524,-5 0 1,-2 0-525,1 0 73,-8 0 1,-12 0-1,0 0 1</inkml:trace>
+  <inkml:trace contextRef="#ctx0" brushRef="#br0" timeOffset="49784">13944 7144 24575,'-33'0'0,"5"0"0,4 0 0,-2 0 0,2 0 0,0 0 0,-1 0 0,1 0 0,1 0 0,2 0 0,6 0 0,4 0 0,11 0 0,0 0 0,11 0 0,-8 0 0,21 0 0,-3 0 0,-5 0 0,13 0 0,-14 0 0,17 0 0,-4 0 0,-3 0 0,0 0 0,6 0 0,-6 0 0,0 0 0,3 0 0,4 0 0,0 0 0,-4 0 0,-8 0 0,-1 0 0,9 0 0,4 0 0,-17 0 0,14 0 0,-13 0 0,3 0 0,0 0 0,-2 0 0,12 0 0,-26 0 0,9 0 0,-12 0 0,0 0 0</inkml:trace>
+  <inkml:trace contextRef="#ctx0" brushRef="#br0" timeOffset="56216">11364 7236 24575,'30'0'0,"0"0"0,-3 0 0,2 0 0,-3 0 0,4 1 0,-1-2 0,1-2 0,3-2 0,-2 2-621,-3 2 1,-2 1 0,1-2 620,4-7 0,0-3 0,1 3 0,1 7 0,0 2 0,0-2 0,-2-7 0,-1-3 0,1 3 0,0 7 0,0 2 0,0 0 0,-4-4 0,0-1 0,0 2 115,-1 2 0,1 2 1,-2-1-116,6-6 0,-2 0 184,-2 5 0,-1-1-184,-6-4 0,0 0 0,-1 6 0,0 0 0,9 0 235,-8 0 1,-8 0 0,-12 0 0</inkml:trace>
+  <inkml:trace contextRef="#ctx0" brushRef="#br0" timeOffset="58017">9102 7303 24575,'22'0'0,"0"0"0,7 0 0,2 0 0,3-1 0,1 2-314,-5-2 0,0 1 1,0 1 313,5-2 0,-1 2 154,-4-2 1,0 2-155,2-1 0,-2 0 156,1 0-156,0 0 0,-1 0 0,1 0 0,2 0 476,-4 0-476,-13 0 0,5 0 0,2 0 0,10 0 0,-14 0 0,10 0 0,-29 0 0</inkml:trace>
+  <inkml:trace contextRef="#ctx0" brushRef="#br0" timeOffset="60733">2394 7144 24575,'31'0'0,"-1"0"0,-5 0 0,1 0 0,-1 0 0,7 0 0,-1 0 0,-5 0 0,0 0 0,0 0-344,0 0 1,0 0 0,0 0 343,1 0 0,0 0 0,0 0 0,0 0 0,0 0 0,0 0 0,3 0 0,1 0 0,-2 0 0,0 0 0,-1 0 168,2 0 1,-3 0-169,6 0 171,-19 0-171,-2 0 0,-12 0 0,0 0 0,0 0 0</inkml:trace>
+  <inkml:trace contextRef="#ctx0" brushRef="#br0" timeOffset="68734">19447 6099 24575,'22'0'0,"7"0"0,-14 0 0,0 0 0,-4 0 0,7 0 0,-2 0 0,8 0 0,2 0 0,5 0 0,-1 0 0,2 0 0,-8 0 0,0 0 0,8 0 0,3 0 0,-10 0 0,2 0 0,-2 0 0,11 0 0,-2 0 0,-4 0 0,0 0 0,-7 0 0,-2 0 0,11 0 0,-13 0 0,2 0 0,5 0 0,1 0 0,-2 0 0,-2 0 0,11 0 0,-4 0 0,-28 0 0,10 0 0,0 0 0,-9 0 0,26 0 0,-13 0 0,17 0 0,-1 0 0,-16 0 0,2 0 0</inkml:trace>
+  <inkml:trace contextRef="#ctx0" brushRef="#br0" timeOffset="70983">13626 5980 24575,'23'0'0,"0"0"0,3 0 0,1 0 0,2 0 0,2 0 0,2 0 0,0 0 0,-8 0 0,-2 0 0,0 0 0,-1 0 0,10 0 0,-4 0 0,4 0 0,0 0 0,-15 0 0,0 0 0,-17 0 0,0 0 0,30 0 0,-3 0 0,6 0 0,-7-3 0,2 0 0,1-1 0,1 2-472,2 1 0,0 1 0,1 0 1,-1-2 471,1-4 0,-1-3 0,0 1 0,-2 1 0,2 5 0,-1 2 0,-1-2 0,4-7 0,-4 0 0,-9 9 0,-2 0 0,1 0 0,-2 0 0,-2 0 0,2 0 0</inkml:trace>
+  <inkml:trace contextRef="#ctx0" brushRef="#br0" timeOffset="74683">9128 6046 24575,'30'0'0,"0"0"0,0 0 0,-3 0 0,1 0 0,1 0 0,0 0 0,3 0 0,0 0 0,1 0 0,-1 0-339,1 0 0,-1 0 0,0 0 0,-2 0 339,-2 0 0,-1 0 0,-1 0 221,8-2 0,-7 4-221,-11 9 224,2-8-224,-36 9 0,-15-12 0,9 0 0,-1 0 345,-7 0 0,-1 0-345,12 0 0,0 0 0,-10 0 0,0 0 0,-6 0 0,1 0 0,-3 0 0,11 0 0,-1 0 0,0 0 0,-2 0 0,1 0 0,-2 0 0,1 0 0,7 0 0,1 0 0,-3 0 0,11 0 0,28 0 0,-14 0 0,20 0 0,12 0 0,0 0 0,1 0 0,-9 0 0,-2 0 0,-5 0 0,14 0 0,-27 0 0,26 0 0,-25 0 0,14 0 0</inkml:trace>
+  <inkml:trace contextRef="#ctx0" brushRef="#br0" timeOffset="78086">2580 7170 24575,'22'0'0,"0"0"0,7 0 0,2 0 0,3 0 0,1 0 0,-1 0 0,-2 0 0,-8 0 0,-2 0 0,10 0 0,1 0 0,-6 0 0,6 0 0,-19 0 0,16 0 0,-26 0 0,14 0 0</inkml:trace>
+  <inkml:trace contextRef="#ctx0" brushRef="#br0" timeOffset="88766">12091 10292 24575,'30'0'0,"-1"0"0,0 0 0,1 0 0,1 0 0,1 0 0,0 0 0,1 0-530,-5 0 1,0 0-1,1 0 1,-1 0 529,7 0 0,0 0 0,-1 0 0,3 0 0,-1 0 0,2 0-439,-7 0 0,0 0 1,1 0-1,0 0 439,0 1 0,0-1 0,1 0 0,-1-1 0,4-1 0,1-1 0,-1-1 0,-2 2 0,3 0 0,-1 2 0,0-1 144,1-3 1,1-1-1,-3 2-144,-8 3 0,-1 0 0,2 0 0,1-4 0,1-1 0,1 0 0,-2 1 0,1 2 0,-1 2 0,0-2 0,8-4 0,1-1 0,-3 2 0,3 4 0,-4 2 0,-7-1 0,-1 0 0,3 0 0,0 0 478,-5 0 0,0 0-478,8 0 0,1 0 972,-3 0 1,0 0-973,4 0 0,-2 0 269,-7 0 1,-1 0-270,8 0 0,-2 0 0,0 0 0,-4 0 0,-2 0 0,-7 0 0,12 0 0,-14 0 0,17 0 0,-12 0 0,0 0 0,0 0 0,1 0 0,8 0 0,-1 0 0,9 0 0,-7 0 0,2 0 0,-3 0 0,2 0-470,-2 0 0,2 0 1,2 0 469,-6 0 0,1 0 0,1 0 0,0 0 0,1 0 0,0 0 0,1 0 0,-2 0 0,6 0 0,-1 0 0,-1 0 0,-2 0 0,1 0 0,-6 0 0,11 0 0,-14 0 0,-5 0 0,-15 0 0,-3 0 0,-3 0 1409,-9 0-1409,12 0 0,0 0 0,0 0 0</inkml:trace>
+  <inkml:trace contextRef="#ctx0" brushRef="#br0" timeOffset="92817">15703 10200 24575,'26'0'0,"0"0"0,0 0 0,1 0 0,-1 0 0,2 0 0,2 0 0,1 0 0,0 0-758,6 0 1,0 0-1,0 0 758,-5 0 0,0 0 0,1 0 0,3 0 0,1 0 0,0 0 0,0 0 0,-1 0 0,1 0 0,-1 0 0,0 0 0,1 0 0,-5 0 0,0 0 0,1 0 0,1 0-490,0 0 0,0 0 1,1 0-1,0 0 490,1 0 0,1 0 0,0 0 0,0 0 0,-7-1 0,1 1 0,0 0 0,-1 0 0,1 1 0,6 1 0,-1 1 0,0 1 0,0-2 0,-2 0 0,-1-2 0,0 0 0,0 1-49,-3 2 1,0 0 0,-1 1-1,1-2 49,-1-1 0,1-1 0,-1-1 0,0 1 0,6 0 0,-2 0 0,1 0-260,0-1 1,1 1-1,0 1 260,-1 4 0,-1 2 0,-2-1 0,-5-4 0,-1-2 0,1 2 0,5 4 0,2 1 0,-3-2 403,2-5 0,-1 0-403,-5 3 0,0 2 0,0-1 0,8-3 0,-2 1 978,-1 3 0,-1 1-978,-4 1 0,0-2 652,4-4 1,-2 1-653,-10 4 0,1 0 493,4-5 0,-2-2-493,-7 1 152,16 17-152,-26-12 0,14 12 0,-18-17 0</inkml:trace>
+  <inkml:trace contextRef="#ctx0" brushRef="#br0" timeOffset="105681">2831 10610 24575,'0'0'0</inkml:trace>
+  <inkml:trace contextRef="#ctx0" brushRef="#br0" timeOffset="107583">2712 10200 24575,'22'0'0,"0"0"0,1 0 0,3 0 0,-2 0 0,3 0 0,-1 0-433,1 0 1,0 0 0,0 0 432,4 0 0,0 0 0,0 0 0,-4 0 0,0 0 0,0 0 211,9 0 1,0 0-212,-3 0 0,-2 0 0,0 0 0,-1 0 107,-6 0 1,0 0-108,7 0 0,0 0 0,-6 0 0,-1 0 0,-1 0 0,2 0 329,6 0 1,0 0-330,-7 0 0,0 0 0,1 0 0,3 0 0,-3 0 0,1 0 0,0 0 0,11 0 0,-1 0 0,-5 0 0,-6-9 0,0 0 0,3 5 0,-8-14 0,10 18 0,-26 0 0,26 0 0,-16 0 0,19 0 0,-14 0 0,1 0 0,0 0 0,2 0 0,6 0 0,1 0 0,8 0 0,-6 0 0,-1 0 0,1 0 0,-9 0 0,0 0 0,11 0 0,-17 0 0,1 0 0,-5 0 0,21 0 0,-3 0 0,-4 0 0,-2 0 0,4 0 0,5 0 0,-1 0 0,-16 0 0,2 0 0</inkml:trace>
+  <inkml:trace contextRef="#ctx0" brushRef="#br0" timeOffset="110784">8599 10067 24575,'22'0'0,"0"0"0,-1 0 0,1 0 0,9 0 0,2 0 0,3 0 0,0 0 0,-1 0 0,-1 0 0,-3 0 0,-1 0 0,-4 0 0,-2 0 0,4 0 0,-8 0 0,10 0 0,-14 0 0,16 0 0,0 0 0,-4 0 0,-7 0 0,2 0 0,-20 0 0,27 0 0,-26 0 0,26 0 0,-27 0 0,26 0 0,-25 0 0,14 18 0,-18-14 0,12 14 0,-9-18 0,15 0 0,5 0 0,-4 0 0,5 0 0,2 0 0,-6 0 0,0 0 0,1 0 0,-1 0 0,8 0 0,1 0 0,-26 0 0,9 0 0,-12 0 0,0 0 0,12 0 0,8 0 0,8 12 0,-8-11 0,-2 1 0,-2 10 0,14-12 0,-27 0 0,9 0 0,-12 0 0</inkml:trace>
+  <inkml:trace contextRef="#ctx0" brushRef="#br0" timeOffset="113750">10517 10067 24575,'15'0'0,"8"0"0,1 0 0,2 0 0,-3 0 0,1 0 0,12 0 0,-1 0 0,-8 0 0,-3 0 0,-3 0 0,0 0 0,-2 0 0,1 0 0,6 0 0,-2 0 0,-5 0 0,4 0 0,-4 0 0,-17 0 0,28 0 0,-26 0 0,26 0 0,-27 0 0,8 18 0,-11-14 0,0 14 0</inkml:trace>
+</inkml:ink>
+</file>
+
+<file path=ppt/ink/ink3.xml><?xml version="1.0" encoding="utf-8"?>
+<inkml:ink xmlns:inkml="http://www.w3.org/2003/InkML">
+  <inkml:definitions>
+    <inkml:context xml:id="ctx0">
+      <inkml:inkSource xml:id="inkSrc0">
+        <inkml:traceFormat>
+          <inkml:channel name="X" type="integer" min="-2.14748E9" max="2.14748E9" units="cm"/>
+          <inkml:channel name="Y" type="integer" min="-2.14748E9" max="2.14748E9" units="cm"/>
+          <inkml:channel name="F" type="integer" max="32767" units="dev"/>
+        </inkml:traceFormat>
+        <inkml:channelProperties>
+          <inkml:channelProperty channel="X" name="resolution" value="1000" units="1/cm"/>
+          <inkml:channelProperty channel="Y" name="resolution" value="1000" units="1/cm"/>
+          <inkml:channelProperty channel="F" name="resolution" value="0" units="1/dev"/>
+        </inkml:channelProperties>
+      </inkml:inkSource>
+      <inkml:timestamp xml:id="ts0" timeString="2026-03-16T16:37:19.791"/>
+    </inkml:context>
+    <inkml:brush xml:id="br0">
+      <inkml:brushProperty name="width" value="0.05292" units="cm"/>
+      <inkml:brushProperty name="height" value="0.05292" units="cm"/>
+      <inkml:brushProperty name="color" value="#FF0000"/>
+    </inkml:brush>
+  </inkml:definitions>
+  <inkml:trace contextRef="#ctx0" brushRef="#br0">5569 7990 24575,'15'0'0,"4"0"0,3 0 0,1 0 0,3 0 0,4 0 0,4 0 0,0 0-891,-2 0 1,0 0 0,1 0 890,-2 0 0,2 0 0,0 0 0,-2 0 0,3 0 0,-2 0 0,-1 0-13,0 0 0,0 0 1,0 0 12,1 0 0,0 0 0,-2 0 171,-1 0 1,1 0-172,0 0 0,3 0 0,-2 0 0,0 0 0,1 0 0,-3 0 0,1 0 0,1 0 0,1 0 0,1 0 0,0 0-281,-1 0 1,0 0 0,1 0 280,4 0 0,0 0 0,-1 0 0,-4 0 0,-2 0 0,1 0 0,0 0 0,1 0 0,-2 0 625,5 0 0,-1 0-625,-5 0 0,-1 0 344,-1 0 1,-4 0-345,-4 0 158,2 0 0,-1 0-158,1 0 952,-5 0-952,13 0 0,-26 0 0,9 0 0,-12 0 0,12 0 0,-9 0 0,9 0 0</inkml:trace>
+  <inkml:trace contextRef="#ctx0" brushRef="#br0" timeOffset="3835">4154 4723 24575,'24'0'0,"0"0"0,2 0 0,-2 0 0,-3 0 0,-2 0 0,5 0 0,-3 0 0,-1 0 0,-4 0 0,16 0 0,1 0 0,-5 0 0,-8 0 0,10 0 0,-26 0 0,25 0 0,-14 0 0,17 0 0,-15 0 0,12 0 0,-26 0 0,9 0 0</inkml:trace>
+  <inkml:trace contextRef="#ctx0" brushRef="#br0" timeOffset="6450">10319 4683 24575,'34'0'0,"-10"0"0,2 0 0,3 0 0,2 0 0,-5 0 0,1 0 0,1 0-291,2 0 0,2 0 1,-2 0 290,-2 0 0,-1 0 0,-1 0 143,5 0 0,-2 0-143,-2 0 0,-4 0 145,-6 0-145,12 0 0,-26 0 0,9 0 441,5 0-441,-12 0 0,12 0 0,-5 0 0,-9 0 0,9 0 0,-12 0 0,0 0 0,0 0 0</inkml:trace>
+  <inkml:trace contextRef="#ctx0" brushRef="#br0" timeOffset="18701">6257 7898 24575,'22'0'0,"1"0"0,1 0 0,7 0 0,-7 0 0,3 0 0,-1 0 0,5 0 0,1 0 0,-6 0 0,0 0 0,0 0 0,7 0 0,0 0 0,0 0 0,0 0 0,-3 0 0,0 0 0,3 0 0,-1 0 0,-2 0 0,0 0 0,3 0 0,1 0 0,-4 0 0,0 0 0,-3 0 0,-1 0 0,-5 0 0,-3 0 0,3 0 0,-9 0 0,-12 0 0</inkml:trace>
+  <inkml:trace contextRef="#ctx0" brushRef="#br0" timeOffset="31901">5001 3149 24575,'33'0'0,"0"0"0,-11 0 0,0 0 0,15 0 0,-10 0 0,3 0 0,2 0 0,1 0 0,-2 0 0,1 0 0,-6 0 0,1 0 0,-2 0 0,0 0 0,-2 0 0,4 0 0,-4 0 0,-7 0 0,14 0 0,-16 0 0,1 0 0,4-1 0,3 2 0,10 4 0,2 1 0,3-5 0,0 1-156,-7 7 0,0 3 0,0-3 156,-4-7 0,-1-2 0,0 2 0,7 7 0,-1 0 0,-5-8 0,0-2 0,0 1 0,8 0 0,-2 0 0,-1 0 0,-1 0 0,-3 0 0,-1 0 0,-6 0 0,-1 0 0,1 0 0,-2 0 0,-1 0 0,12 0 468,-14 11-468,-1-8 0,16 9 0,-14-12 0,8 0 0,2 0 0,5 0 0,-7 0 0,2 0 0,-6 0 0,-1 0 0,7 6 0,1 0 0,3-5 0,1 1 0,2 12 0,0 1 0,-3-13 0,0 1 0,3 12 0,-1-1 0,-8-12 0,0-1 0,0 5 0,-2 0 0,-2-6 0,4 0 0,-4 0 0,-3 0 0,12 0 0,-26 0 0,9 0 0,0 0 0,8-12 0,8 9 0,-9-3 0,0 0 0,9 6 0,5-17 0,-1 12 0,-4-12 0,-8 17 0,4 0 0,-4 0 0,8 17 0,-9-15 0,1 1 0,8 14 0,4-17 0,0 0 0,-16 0 0,2 0 0,-18 0 0,0 0 0</inkml:trace>
+  <inkml:trace contextRef="#ctx0" brushRef="#br0" timeOffset="40468">9287 2963 24575,'30'0'0,"0"0"0,-3 0 0,1 0 0,-1 0 0,-1 0 0,-1 0 0,1 0-526,6 0 1,1 0-1,0 0 526,-2 0 0,0 0 0,0 0 0,0 0 0,0 0 0,0 0 0,0 0 0,0 0 0,-1 0 0,-2 0 0,-2 0 0,1 0 170,0 0 1,-1 0 0,-1 0-171,0 0 0,-2 0 130,9 0 1,-2 0-131,1 0 0,-6 0 0,0 0 0,3 0 804,-7 0-804,2 0 0,-20 0 0,26 0 0,-24 0 0,24 0 0,-8 0 0,7 0 0,-8 0 0,4 0 0,-21 0 0,26 0 0,-24 12 0,12-9 0,-17 9 0</inkml:trace>
+  <inkml:trace contextRef="#ctx0" brushRef="#br0" timeOffset="43286">13692 3082 24575,'15'0'0,"14"0"0,-1 0 0,-3 0 0,3 0 0,2 0 0,0 0 0,3 0 0,1 0 0,-4 0 0,0 0 0,2 0 0,0 0 0,-1 0 0,-1 0 0,3 0 0,0 0 0,1 0 0,-2 0 0,-8 0 0,1 0 0,6 0 0,-1 0 0,1 0 0,-1 0 0,2 0 0,-2 0 0,0 0 0,-4 0 0,0 0 0,6 2 0,-3-4 0,-1-9 0,5 8 0,-1-9 0,-10 11 0,2 2 0,12-1 0,-14 0 0,0 0 0,11 0 0,-5 0 0,-4 0 0,2 0 0,4 0 0,-4 0 0,-2 0 0,-7 0 0,12 0 0,-26 0 0,20 0 0,-20 0 0,9 0 0,6 0 0,-2 0 0,2 0 0,2 0 0,0 0 0,0 0 0,1 0 0,-1 0 0,8 0 0,1 0 0,-26 0 0,-3 0 0,-20 0 0,4 0 0,-2 0 0</inkml:trace>
+  <inkml:trace contextRef="#ctx0" brushRef="#br0" timeOffset="48934">14949 5159 24575,'15'0'0,"4"0"0,3 0 0,1 0 0,2 0 0,9 0 0,1 0 0,-9 0 0,1 0 0,-2 0 0,9 0 0,-2 0 0,-7 0 0,-1 0 0,8 0 0,-2 0 0,1 0 0,-6 0 0,0 0 0,2 0 0,6 0 0,-1 0 0,-16 0 0,14 0 0,-27 0 0,8 0 0</inkml:trace>
+  <inkml:trace contextRef="#ctx0" brushRef="#br0" timeOffset="52734">14764 6707 24575,'32'0'0,"-13"0"0,2 0 0,4 0 0,3 0 0,7 0 0,2 0-571,-11 0 0,1 0 1,1 0 570,4 0 0,1 0 0,0 0 0,-2 0 0,1 0 0,-1 0 0,2 0 0,0 0 0,0 0 0,-5 0 0,-1 0 0,-2 0 277,6 0 0,-1 0-277,2 0 0,-3 0 283,2 0-283,-1 0 0,2 0 0,-7 0 0,-1 0 0,0 0 0,0 0 437,-2 0 1,0 0-438,1 0 0,-2 0 0,10 0 0,-6 0 0,0 0 0,-2 0 0,0 0 0,0 0 0,2 0 0,7 0 0,1 0 0,3 0 0,0 0 0,-2 0 0,1 0 0,-9 0 0,0 0 0,0 0 0,7 0 0,0 0 0,-3 0 0,0 0 0,3 0 0,-1 0 0,-1 0 0,-2 0 0,-4 0 0,-1 0 0,2 0 0,-2 0 0,4 0 0,-8 0 0,4 0 0,-4 0 0,8 0 0,5 0 0,-1 12 0,-9-11 0,-1 1 0,-3 4 0,-1 0 0,13-5 0,0-2 0,0 1 0,-6 0 0,0 0 0,3 0 0,4 0 0,-10 0 0,0 0 0,2 0 0,1 0 0,-1 0 0,0 0 0,8 0 0,-2 0 0,1 0 0,0 0 0,0 0 0,-1 0 0,-4 5 0,-2 1 0,4-3 0,-9 3 0,1 0 0,7-6 0,6 0 0,-1 0 0,-16 0 0,14 0 0,-16 0 0,19 0 0,-5 0 0,-8 0 0,10 0 0,-14 0 0,4 0 0,-8 0 0,-12 0 0,0 0 0,0 0 0</inkml:trace>
+  <inkml:trace contextRef="#ctx0" brushRef="#br0" timeOffset="59501">14473 8189 24575,'34'0'0,"-16"0"0,2 0 0,8 0 0,1 0 0,-4 0 0,2 0 0,3 0 0,3 0 0,-2 0 0,-2 0 0,0 0 0,-1 0 0,1 0 0,-3 0 0,-4 1 0,-2-2 0,6-8 0,-2 0 0,4 5 0,-3-5 0,0 0 0,6 9 0,-6 0 0,0 0 0,3 0 0,-9 0 0,0 0 0,9 0 0,-7 0 0,2 0 0,-2 0 0,-5 0 0,13 0 0,-14 0 0,0 0 0,14-12 0,5 9 0,-16-3 0,1 1 0,3 4 0,0 2 0,10-1 0,-4 0 0,4 0 0,-17 0 0,-3 0 0,-12 0 0</inkml:trace>
+  <inkml:trace contextRef="#ctx0" brushRef="#br0" timeOffset="78967">14764 9287 24575,'22'0'0,"0"0"0,9 0 0,0 0 0,-1 0 0,1 0 0,-6 0 0,0 0 0,3 0 0,-9 0 0,0 0 0,1 0 0,0 0 0,0 0 0,1 0 0,8 0 0,0 0 0,7 0 0,-4 0 0,-2 0 0,1 0 0,-8 0 0,-2 0 0,-6 0 0,-3 0 0</inkml:trace>
+</inkml:ink>
+</file>
+
+<file path=ppt/ink/ink4.xml><?xml version="1.0" encoding="utf-8"?>
+<inkml:ink xmlns:inkml="http://www.w3.org/2003/InkML">
+  <inkml:definitions>
+    <inkml:context xml:id="ctx0">
+      <inkml:inkSource xml:id="inkSrc0">
+        <inkml:traceFormat>
+          <inkml:channel name="X" type="integer" min="-2.14748E9" max="2.14748E9" units="cm"/>
+          <inkml:channel name="Y" type="integer" min="-2.14748E9" max="2.14748E9" units="cm"/>
+          <inkml:channel name="F" type="integer" max="32767" units="dev"/>
+        </inkml:traceFormat>
+        <inkml:channelProperties>
+          <inkml:channelProperty channel="X" name="resolution" value="1000" units="1/cm"/>
+          <inkml:channelProperty channel="Y" name="resolution" value="1000" units="1/cm"/>
+          <inkml:channelProperty channel="F" name="resolution" value="0" units="1/dev"/>
+        </inkml:channelProperties>
+      </inkml:inkSource>
+      <inkml:timestamp xml:id="ts0" timeString="2026-03-16T16:51:51.105"/>
+    </inkml:context>
+    <inkml:brush xml:id="br0">
+      <inkml:brushProperty name="width" value="0.05292" units="cm"/>
+      <inkml:brushProperty name="height" value="0.05292" units="cm"/>
+      <inkml:brushProperty name="color" value="#FF0000"/>
+    </inkml:brush>
+  </inkml:definitions>
+  <inkml:trace contextRef="#ctx0" brushRef="#br0">15015 4405 24575,'32'0'0,"-4"0"0,-3 0 0,0 0 0,6 0 0,0 0 0,0 0 0,0 0 0,-6 0 0,0 0 0,3 0 0,-3 0 0,0 0 0,6 0 0,-6 0 0,0 0 0,2 0 0,6 0 0,-1 0 0,-16 0 0,14 0 0,-27 0 0,20 0 0,-2 0 0,7 0 0,-8 0 0,10 0 0,-26 0 0,25 0 0,-26 0 0,9 0 0,0 0 0,-9 0 0,9 0 0,-12 0 0,17 0 0,-12 0 0,24 0 0,-14 0 0,-1 0 0,16 0 0,4 0 0,2 0 0,-13 0 0,-1 0 0,10 0 0,-10 0 0,1 0 0,14 0 0,-15 0 0,0 0 0,11 0 0,-5 0 0,4 0 0,0 0 0,-16 0 0,14 0 0,-10 0 0,8 0 0,-7 0 0,2 0 0,-2 0 0,-5 0 0,14 0 0,-16 0 0,7 0 0,2 0 0,14 0 0,-14 0 0,0 0 0,9 0 0,0 0 0,-16 0 0,14 0 0,-27 0 0,20 0 0,-20 0 0,27 0 0,-26 0 0,14 0 0,-18 0 0,11 0 0,-8 0 0,27 0 0,-26 0 0,26 0 0,-16 0 0,1 0 0,14 0 0,-24 0 0,24 0 0,-26 0 0,9 0 0,-12 0 0,0 0 0,-12 0 0,9 0 0,-9 0 0,12 0 0,0 0 0</inkml:trace>
+  <inkml:trace contextRef="#ctx0" brushRef="#br0" timeOffset="18084">1601 6046 24575,'22'0'0,"-3"0"0,3 0 0,9 0 0,3 0-739,-9 0 0,1 0 1,2 0 738,2 0 0,3 1 0,0-1 0,-1-1 0,5-4 0,-1-2 0,0 1 0,-2 5 0,0 1 0,-1-3 236,-2-6 1,0-3 0,-3 3-237,-3 7 0,-2 1 183,-1-5 0,0 1-183,0 4 0,0 2 0,2-1 0,1 0 0,8 0 0,0 0 0,-3 0 0,0 0 570,3 0 0,-1 0-570,-2 0 0,0 0 0,3-6 0,0 0 0,-7 4 0,1 2 0,-2-1 0,10-5 0,-1 0 0,3 5 0,-2 2 0,-1 0 0,-3-2 0,-6-7 0,-1-2 0,-1 9 0,-1-2 0,11-15 0,-1 18 0,-4 0 0,4 0 0,0 0 0,-4 0 0,-3 0 0,0 0 0,6 0 0,-6 0 0,0 0 0,3 0 0,5 0 0,-1-11 0,-4 8 0,-9-3 0,0 0 0,9 6 0,4 0 0,1 0 0,-5 0 0,-9 0 0,0 0 0,9 0 0,4 0 0,0 0 0,-15 0 0,12 0 0,-26 0 0,9 0 0,-12 0 0</inkml:trace>
+</inkml:ink>
+</file>
+
+<file path=ppt/ink/ink5.xml><?xml version="1.0" encoding="utf-8"?>
+<inkml:ink xmlns:inkml="http://www.w3.org/2003/InkML">
+  <inkml:definitions>
+    <inkml:context xml:id="ctx0">
+      <inkml:inkSource xml:id="inkSrc0">
+        <inkml:traceFormat>
+          <inkml:channel name="X" type="integer" min="-2.14748E9" max="2.14748E9" units="cm"/>
+          <inkml:channel name="Y" type="integer" min="-2.14748E9" max="2.14748E9" units="cm"/>
+          <inkml:channel name="F" type="integer" max="32767" units="dev"/>
+        </inkml:traceFormat>
+        <inkml:channelProperties>
+          <inkml:channelProperty channel="X" name="resolution" value="1000" units="1/cm"/>
+          <inkml:channelProperty channel="Y" name="resolution" value="1000" units="1/cm"/>
+          <inkml:channelProperty channel="F" name="resolution" value="0" units="1/dev"/>
+        </inkml:channelProperties>
+      </inkml:inkSource>
+      <inkml:timestamp xml:id="ts0" timeString="2026-03-16T16:53:32.442"/>
+    </inkml:context>
+    <inkml:brush xml:id="br0">
+      <inkml:brushProperty name="width" value="0.05292" units="cm"/>
+      <inkml:brushProperty name="height" value="0.05292" units="cm"/>
+      <inkml:brushProperty name="color" value="#FF0000"/>
+    </inkml:brush>
+  </inkml:definitions>
+  <inkml:trace contextRef="#ctx0" brushRef="#br0">1323 7964 24575,'28'0'0,"0"0"0,5 0 0,3 0 0,-6 0 0,2 0 0,0 0-556,1 0 1,0 0 0,-1 0 555,0 0 0,-1 0 0,-1 0 0,-3 1 0,0-1 0,0-1 0,3-4 0,0-2 0,0 1 0,-4 4 0,1 2 0,0-2 0,9-4 0,2-1 0,-1 2 0,-5 4 0,0 2 0,1-1 0,3 1 0,2-1 0,-2-1 0,-4-2 0,-2-2 0,0 2 0,-2 1 0,-1 2 0,-1-1 0,10-5 0,0 0 0,-1 1 0,2 1 0,-3 1 0,2 2 0,-1-1 0,-4-2 0,3 0 0,-4 0 270,1 5 0,-4-2-270,-7-7 0,1-1 0,4 6 0,1 1 0,9-6 0,1-1-165,-12 4 1,2 1 0,0 1 164,9 2 0,3 1 0,-1-2-300,-8-3 0,-1-2 0,0 0 0,1 2 300,7 4 0,0 2 0,0-3 0,-8-5 0,0-1 0,0-1 0,-1 3 0,4 4 0,0 2 0,-1-2 76,-2-7 1,-2-3 0,1 3-77,3 7 0,0 2 0,0-1 0,-3-2 0,0-2 0,0 2 0,-1 2 0,1 1 0,0 1 0,7-1 0,0 1 0,0-2 0,-4-4 0,-1-2 0,2 1 0,3 4 0,2 1 0,-1 0-349,-2-5 1,0-1-1,0 2 349,1 4 0,1 1 0,0 1 0,-7-1 0,0 0 0,1 0 0,-1 0 0,2 0 0,0 0 0,0 0 0,1 0 0,1 0 0,1 0 0,0 0 0,0 0 0,-3 0 0,0 0 0,0 0 0,0 0 0,0 0 0,0 0 0,0 0 0,-1 0 0,1 0 0,0 0 0,-1 0 0,0 0 0,5 0 0,0 0 0,-1 0 0,-1 0 0,-2 0 0,1 0 124,-1 0 1,1 0 0,-2 0-125,6 0 0,-1 0 585,-4 0 0,0 0-585,-4 0 0,-2 0 550,4 0-550,4 0 1176,1 0-1176,-6 0 182,-7-1 1,-1 2-183,9 17 0,4-14 0,-11 11 0,2-1 0,1-11 0,1-3 0,7 5 0,2 2 0,-4 2 0,0 0 0,3-7 0,-1 0 0,-10 7 0,-2 0 0,13-9 0,-4 0 0,-25 0-820,-4 0 1,-4 0 0,-14 0 0</inkml:trace>
+  <inkml:trace contextRef="#ctx0" brushRef="#br0" timeOffset="4616">1191 9446 24575,'33'0'0,"-3"0"0,2 0 0,-1 0 0,1 0-910,3 0 1,3 0 0,0 0 909,-2 0 0,-1 0 0,2 0 0,-5 0 0,1 0 0,0 0 0,0 0-457,1 0 1,1 0 0,-1 0-1,1 0 457,2 0 0,-1 0 0,1 0 0,0 0 0,-5 0 0,-1 0 0,1 1 0,0-1 0,0-1 0,0-2 0,0-1 0,1 0 0,-2 0 0,0 1 0,2 1 0,-1 2 0,0-1 0,0 0 76,2-3 0,1-2 1,-1 1-1,-3 2-76,-2 2 0,-2 2 0,1-1 0,5-3 0,1-2 0,0 1 0,-1 3 0,0 1 0,0-2 0,-1-1 0,0-2 0,1 1 0,-4 4 0,2 0 0,0 0 0,0 0-284,-3 1 0,0-1 0,0 0 1,1-1 283,1-1 0,0-1 0,0-1 0,0 2 0,3 1 0,0 0 0,0 1 0,-1-1 0,-1-1 0,-1-1 0,0 0 0,0-1 0,0 0 0,0-1 0,0 0 0,-1 1 0,7 3 0,-1 1 0,0-3 125,-2-6 1,0-3-1,-1 4-125,-1 6 0,1 3 0,-2-3 0,-3-7 0,0-3 0,0 3 920,9 7 0,0 0-920,-4-7 0,0 0 0,4 9 0,0 0 104,-9-3 1,0-2 0,0 1-105,0 3 0,0 1 0,0-2 0,-1-1 0,1-1 0,-2 0 0,9-3 0,-2 2 662,-2 4 1,0-1-663,3-3 0,-1-2 0,-2-2 0,0 1 0,3 5 0,0 1 0,-7-3 0,0-2 0,0 2 0,1 3 0,0 3 0,0 0 0,0-1 0,0 0 0,0 0 0,-1 0 0,1 0 0,-2 0 0,5 0 0,0 0 454,3 0 1,-1 0-455,-11 0 0,0 0 47,11 0 0,-2 0-47,7 0 263,-9 0 0,1 0-263,-2 0 0,-1 0 0,-4 0 0,-1 0 0,4 0 0,0 0 0,-2 0 0,-1 0 0,15 0 0,-7-2 0,2 4 0,-3 6 0,2 1-351,-5-7 0,1-2 0,1 3 351,-1 2 0,0 4 0,2-1 0,-2-1 0,6-2 0,-1-1 0,0 2 0,-4 1 0,0 1 0,-1 1 0,0-1 0,5 2 0,-2-1 0,1 0 0,0-1 0,0-1 0,0-1-33,-4-2 1,1-1-1,-2 1 33,5 6 0,-2-2 0,-3-7 0,-2 2 0,-4 12 0,-1 0 0,2-13 0,0-1 0,-1 4 0,-1 1 523,1 1 1,-1-2-524,8-2 52,-2 12 0,0 0-52,6-11 0,-9 4 0,0 2 0,11 1 0,-11-9 0,1-1 0,-4 5 0,-1 0 0,4-5 0,0-2 0,1 0 0,-2 2 0,10 11 0,-5-11 0,-2 1 0,-8 10 0,14-24 0,-27 9 0,8-9 0,-11 12 0</inkml:trace>
+  <inkml:trace contextRef="#ctx0" brushRef="#br0" timeOffset="14198">1072 11073 24575,'27'0'0,"1"0"0,-2 0 0,1 0 0,1 0 0,7 0 0,1 0 0,2 0-656,-8 0 1,2 0-1,1 0 1,0 0 0,-1 0 130,-1 0 1,-1 0 0,1 0 0,1 0 0,2 0 524,0 0 0,2 0 0,3 0 0,0 0 0,0 0 0,-1 0 0,-2 0 0,-1 0 0,-1 0 0,-1 0 0,0 0 0,0 0 0,2 0 0,-1 0 0,1 0 0,1 0 0,0 0 0,0 0 0,-2 0 0,-1 0 0,3 0 0,-1 0 0,-2 0 0,0 0 0,1 0 0,-2 0 0,0 0 0,0 0 0,-1 0 0,0 0-9,7 0 1,-1 0-1,-1 0 1,0 0 8,-3 0 0,-1 0 0,-1 0 0,0 0 0,7 0 0,-1 0 0,-2 0 254,-7 0 1,-2 0 0,1 0-255,2 0 0,2 0 0,-2 0 0,-1 0 0,-2 0 0,1 0 0,4 0 0,0 0 0,0 0 0,-4 0 0,0 0 0,0 0 0,2 0 0,1 1 0,0-2 0,3-3 0,0 0 0,0 0 0,2 3 0,0 0 0,4 0 0,-10 0 0,3-1 0,2 0 0,0 0 0,0-1 0,-2 1 0,3 0 0,-1-1 0,-1 1 0,2-1 0,0 2-391,0 0 1,1 0 0,1 1 0,-1 0-1,1 0 1,-2-1 390,-2-1 0,-2 0 0,1 0 0,-1-1 0,0 1 0,-1 1 0,3 0 0,0 1 0,-1 0 0,0 1 0,0-1 91,2 0 0,0 0 1,1 0-1,-1 0 1,0 0-92,-2 0 0,0 0 0,0 0 0,-1 0 0,0 0 0,5 0 0,0 0 0,-1 0 0,-1 0 87,-2 0 1,0 0-1,-1 0 1,-1 0-88,6 0 0,-1 0 0,-1 0 11,-7 0 1,0 0-1,0 0-11,3 0 0,0 0 0,-1 0 0,7 0 0,-3 0 1247,-2 0 0,-1 0-1247,0 0 0,1 0 0,-1 0 0,1 0 0,2 0 0,3 0 529,-7 0 0,1 0 0,0 0-529,-3 0 0,0 0 0,0 0 0,3 0 0,1 0 0,1 0 0,-3 0 0,2 0 0,0 0 0,0 0-124,-2 0 1,0-1-1,0 1 1,1 1 123,4 1 0,1 2 0,0-1 0,0 0 0,-2-2 0,0-1 0,0 0 0,-2 2 2,3 1 1,-2 2 0,-1-2-3,0-2 0,0-1 0,-3-1 0,0 1 0,-3 0 0,-4 0 0,-2 0 753,1 0-753,-8 0 1689,-12 0-1689,18 0 632,-14 12-632,25-9-820,-26 9 1,9-12 0,-12 0 0</inkml:trace>
+  <inkml:trace contextRef="#ctx0" brushRef="#br0" timeOffset="15898">6800 10769 24575,'28'0'0,"0"0"0,5 0 0,3 0 0,-3 0 0,3 0 0,1 0-663,-8 0 1,1 0-1,0 0 1,0 0 662,6 0 0,0 0 0,0 0 0,2 0 0,0 0 0,-3 0 421,-3 0 1,-1 0-422,2 0 0,-4 0 436,-13 0-436,13 0 0,-38 0 0,18 0 1371,-21 0-1371,-5 0 0,1 0 0,-3 0 0,-1 0 0,-8 0 0,-4 0 0,0 0 0,4 0 0,-4 0 0,10 0 0,-1 0 0,0 0 0,-2 0 0,-8 0 0,0 0 0,7 0 0,3 0 0,-9 0 0,20 0 0,12 0 0</inkml:trace>
+  <inkml:trace contextRef="#ctx0" brushRef="#br0" timeOffset="18898">3215 10663 24575,'14'0'0,"10"0"0,-21 17 0,26-12 0,-24 12 0,24-5 0,-8-9 0,7 9 0,4-12 0,0 0 0,-16 0 0,14 0 0,-15 0 0,-1 0 0,-2 0 0,-12 17 0,-12-12 0,-2 13 0,-19-7 0,5-8 0,8 9 0,-4-12 0,21 0 0,-9 0 0,-5 0 0,12 0 0,-12 0 0,5 0 0,9 0 0,-9 0 0,12 0 0,-17 0 0,12 0 0,-12 0 0,5 0 0,9 0 0,-9 0 0,12 0 0,-12 0 0,9 0 0,-8 0 0,-7 0 0,2-12 0,-5 9 0,-2-8 0,2 11 0,5 0 0,-2 0 0,7 0 0,8 0 0,-9 0 0,12 0 0,-18 0 0,14 0 0,-26 0 0,28 0 0,-22 0 0,21 0 0,-9 0 0,24 0 0,-9 0 0,21 0 0,-22 0 0,28 0 0,-14 0 0,3 0 0,0 0 0,-3 0 0,14 0 0,-27 0 0,9 0 0,-12 0 0</inkml:trace>
+  <inkml:trace contextRef="#ctx0" brushRef="#br0" timeOffset="22148">2990 12462 24575,'14'0'0,"20"0"0,3 0 0,-15 0 0,0 0-338,11 0 0,6 0 0,-4 0 338,1 0 0,-2 0 166,-3 0 0,-2 0-166,-6 0 0,-2 0 168,11 0-168,-4 0 0,5 0 0,-1 0 514,-4 0-514,-9 0 0,0 0 0,9 0 0,4 0 0,1 0 0,-5 0 0,-8 0 0,9 0 0,-24 0 0,13 12 0,-18-9 0,0 8 0</inkml:trace>
+</inkml:ink>
+</file>
+
+<file path=ppt/ink/ink6.xml><?xml version="1.0" encoding="utf-8"?>
+<inkml:ink xmlns:inkml="http://www.w3.org/2003/InkML">
+  <inkml:definitions>
+    <inkml:context xml:id="ctx0">
+      <inkml:inkSource xml:id="inkSrc0">
+        <inkml:traceFormat>
+          <inkml:channel name="X" type="integer" min="-2.14748E9" max="2.14748E9" units="cm"/>
+          <inkml:channel name="Y" type="integer" min="-2.14748E9" max="2.14748E9" units="cm"/>
+          <inkml:channel name="F" type="integer" max="32767" units="dev"/>
+        </inkml:traceFormat>
+        <inkml:channelProperties>
+          <inkml:channelProperty channel="X" name="resolution" value="1000" units="1/cm"/>
+          <inkml:channelProperty channel="Y" name="resolution" value="1000" units="1/cm"/>
+          <inkml:channelProperty channel="F" name="resolution" value="0" units="1/dev"/>
+        </inkml:channelProperties>
+      </inkml:inkSource>
+      <inkml:timestamp xml:id="ts0" timeString="2026-03-16T16:54:34.341"/>
+    </inkml:context>
+    <inkml:brush xml:id="br0">
+      <inkml:brushProperty name="width" value="0.05292" units="cm"/>
+      <inkml:brushProperty name="height" value="0.05292" units="cm"/>
+      <inkml:brushProperty name="color" value="#FF0000"/>
+    </inkml:brush>
+  </inkml:definitions>
+  <inkml:trace contextRef="#ctx0" brushRef="#br0">6641 1323 24575,'15'0'0,"14"0"0,5 0 0,3 0 0,-16 0 0,2 0 0,-1 0 0,0 0 0,2 0 0,0 0 0,9 0 0,1 0 0,-10 0 0,0 0 0,0 0 0,-4 0 0,-5 0 0,-3 0 0,5 0 0,-12 0 0,24 0 0,-26 0 0,21 12 0,-22-9 0,10 8 0</inkml:trace>
+  <inkml:trace contextRef="#ctx0" brushRef="#br0" timeOffset="1550">12687 1164 24575,'22'0'0,"0"0"0,2 0 0,0 0 0,6 0 0,1 0 0,1 0 0,0 0 0,-7 0 0,-1 0 0,-1 0 0,-1 0 0,11 0 0,-1 0 0,-4 0 0,4 0 0,-17 0 0,14 0 0,-24 0 0,12 12 0,-17-9 0,0 9 0,0-12 0,0 0 0,0 0 0</inkml:trace>
+  <inkml:trace contextRef="#ctx0" brushRef="#br0" timeOffset="15065">1416 7144 24575,'22'0'0,"0"0"0,1 0 0,2 0 0,-1 0 0,3 0 0,0 0-667,5 0 1,1 0 0,1 0 666,-3 0 0,1 0 0,2 0 0,-5 0 0,2 0 0,0 0 0,0 0 0,-3 0 0,1 0 0,-1 0 0,0 0 0,8 0 0,0 0 0,0 0 0,-5 0 0,-1 0 0,1 0 0,-1 0 0,-1 0 0,-1 0 0,0 0 0,1 0 0,1 0 0,0 0 0,0 0 0,0 0 0,0 0 0,0 0 0,0 0 0,-1 0-320,1 0 0,-1 0 0,0 0 0,1 0 320,0 0 0,-1 0 0,1 0 0,0 0 0,0 0 0,0 0 0,0 0 0,0 0 0,2 0 0,0 0 0,1 0 0,1 0 0,1-2 0,1 0 0,0 0 0,1-1 0,-1 0 0,-4 0 0,-1-1 0,0-1 0,0 1 0,1-1-259,4 0 1,1-1 0,0 1-1,0-1 1,-2 0 258,2 1 0,-1-1 0,-1 1 0,0 1 0,-4 1 0,-1 0 0,0 0 0,-1 0-223,0-1 1,-1-1-1,1 0 1,-2 2 222,9 1 0,0 1 0,-3-1 395,3-7 1,-3 0-396,-3 9 0,-3 0 654,-7 0 0,-2 0-654,10 0 2215,-7 0-2215,-9 0 1147,-1 0-1147,10 0 0,7 18 0,-4-15 0,2-1 0,-2 7 0,0-1 0,0-7 0,1-2 0,7 1 0,-2 0 0,1 0 0,-1 0 0,1 0 0,0 0 0,-6 0 0,0 0 0,-5 0 0,0 0 0,0 0 0,1 0 0,-1 0 0,0 0 0,-1 0 0,0 0 0,1 0 0,0 0 0,0 0 0,1 0 0,4 0 0,1 0 0,-5 0 0,-1 0 0,9 0 0,0 0 0,-5 1 0,0-2 0,8-7 0,1-1 0,-2 7 0,-2-1 0,-4-6 0,-1 0 0,2 8 0,-2 2 0,-8-1 0,1 0 0,-5 0 0,-9 0 0,9 0 0,-12 0 0,12 0 0,-9 0 0,8 0 0,-11 0 0</inkml:trace>
+  <inkml:trace contextRef="#ctx0" brushRef="#br0" timeOffset="35600">15796 6416 24575,'22'0'0,"1"0"0,11 0 0,3 0 0,-12 0 0,0 0 0,1 0-696,6 0 1,2 0 0,-1 0 695,-2 0 0,0 0 0,-1 0 0,1 0 0,0 0 0,0 0 0,-1 0 0,1 0 0,0 0 0,6 0 0,0 0 0,0 0 0,-1 0 0,0 0 0,0 0 0,-3 0 0,0 0 0,0 0 0,-1 0 0,5 0 0,-1 0 0,0 0 0,1 0 0,1 0 0,-3 0 0,-7 0 0,-1 0 0,-1 0 223,1 0 1,0 0 0,-3 0-224,1 0 0,-1 0 172,-2 0 0,0 0-172,1 0 0,-2 0 0,-2 0 0,5 0 0,-1 0 1071,-7 0-1071,5 0 0,-10 0 0,1 0 0,-9 0 0,27 0 0,-26 0 0,25 0 0,-14 0 0,0 0 0,-3 0 0,-12 18 0,0-14 0,0 14 0</inkml:trace>
+  <inkml:trace contextRef="#ctx0" brushRef="#br0" timeOffset="45632">19169 7170 24575,'0'34'0,"0"-4"0,0 2 0,0-7 0,0 1-599,0 8 0,0 3 1,0 0 598,0-9 0,1 0 0,-2 1 0,-1 0 0,-2 2 0,1 0 0,0 0 0,3-3 0,0 1 0,0-1 0,-3 0 0,-3 0 0,-2-1 0,-1 0 0,3 0 0,4 7 0,3 0 0,-4-4 0,-12 2 0,0-4 290,13-5 0,1-1-290,-11 10 297,12-4-297,0-9 0,0 0 0,0 1 0,0 0 0,0 1 0,0-1 919,0 8-919,0 1 0,0-26 0,0 21 0,0 8 0,0 5 0,0-14 0,0-1 0,0 11 0,0-1 0,0-16 0,0 2 0,0-6 0,0-9 0,0 8 0,0 1 0,0-9 0,0 9 0,0 5 0,0-12 0,0 24 0,0-26 0,0 9 0,0 6 0,0-14 0,0 14 0,0-18 0</inkml:trace>
+</inkml:ink>
+</file>
+
+<file path=ppt/ink/ink7.xml><?xml version="1.0" encoding="utf-8"?>
+<inkml:ink xmlns:inkml="http://www.w3.org/2003/InkML">
+  <inkml:definitions>
+    <inkml:context xml:id="ctx0">
+      <inkml:inkSource xml:id="inkSrc0">
+        <inkml:traceFormat>
+          <inkml:channel name="X" type="integer" min="-2.14748E9" max="2.14748E9" units="cm"/>
+          <inkml:channel name="Y" type="integer" min="-2.14748E9" max="2.14748E9" units="cm"/>
+          <inkml:channel name="F" type="integer" max="32767" units="dev"/>
+        </inkml:traceFormat>
+        <inkml:channelProperties>
+          <inkml:channelProperty channel="X" name="resolution" value="1000" units="1/cm"/>
+          <inkml:channelProperty channel="Y" name="resolution" value="1000" units="1/cm"/>
+          <inkml:channelProperty channel="F" name="resolution" value="0" units="1/dev"/>
+        </inkml:channelProperties>
+      </inkml:inkSource>
+      <inkml:timestamp xml:id="ts0" timeString="2026-03-16T17:00:08.139"/>
+    </inkml:context>
+    <inkml:brush xml:id="br0">
+      <inkml:brushProperty name="width" value="0.05292" units="cm"/>
+      <inkml:brushProperty name="height" value="0.05292" units="cm"/>
+      <inkml:brushProperty name="color" value="#FF0000"/>
+    </inkml:brush>
+  </inkml:definitions>
+  <inkml:trace contextRef="#ctx0" brushRef="#br0">2990 5159 24575,'33'0'0,"0"0"0,-8 0 0,2 0 0,-1 0 0,0 0 0,1 0 0,1 0-660,2 0 0,1 0 0,0 0 660,4 0 0,0 0 0,0 0 0,-2 0 0,1 0 0,0 0 0,-5 0 0,1 0 0,0 0 0,-1 0 0,5 0 0,0 0 0,-1 0 0,-2 0 0,0 0 0,0 0 0,-1 0 0,0 0 0,-1 0 6,6-1 0,-1 2-6,-7 4 0,0 2 0,-3-1 237,2-4 0,-3 0-237,-1 8 0,0-2 0,10-8 0,-4 0 495,-9 0 0,0 0-495,9 0 504,5 0-504,-1 0 0,-16 0 0,14 0 0,-27 0 0,8 0 0,1 0 0,9 0 0,1 0 0,1 0 0,14 0 0,-15 0 0,0 0 0,10 0 0,-4 0 0,-7 0 0,-9 0 0,-12 0 0</inkml:trace>
+  <inkml:trace contextRef="#ctx0" brushRef="#br0" timeOffset="6334">2765 7422 24575,'33'0'0,"0"0"0,-7 0 0,0 0 0,0 0 0,8 0 0,1 0 0,-9 0 0,1 0 0,-2 0 0,0 0 0,-2 0 0,0 0 0,-1 0 0,0 0 0,0 0 0,9 0 0,-7 0 0,1 0 0,-2 0 0,0 0 0,1 0 0,1 0 0,6-6 0,2 0 0,-3 4 0,1 1 0,1-5 0,2 0 0,-9 5 0,1 2 0,1-1-281,-1 0 0,1 1 1,0-2 280,7-2 0,0-2 0,3 1-645,-3 3 0,1 2 1,2-1-1,-1-3 645,-5-1 0,0-3 0,0 0 0,1 1 0,1 1 0,0 3 0,1 1 0,2 2 0,-1-1 0,1 0 0,-2-2-517,-2-2 0,0-1 0,-1-1 0,0 0 0,1 1 0,0 1 517,4 2 0,0 2 0,1 0 0,0 1 0,1-1 0,-2-2 0,1-1 0,0-1 0,-1-1 0,1 1 0,-1 0 0,0 1 0,0 1 0,-1 2 0,0 0 0,0 0 0,0 0 0,0-1 0,1-1 0,0 0 0,0 0 0,0-1 0,0 1 0,-2 1 0,2 0 0,-1 1 0,0 1 0,-1-1 0,0 0-264,-2 0 1,1 1-1,-1 0 1,-1-2-1,-1 0 264,4-3 0,-2-1 0,0 0 0,-3 1 143,-1 3 0,-1 0 1,-1-1-144,0-4 0,0-1 0,-5 2 1975,-2 5-1975,2 0 0,-1 0 3276,1 0-3208,-5 0 890,4 0 1,1 0-959,3 0 0,9 0 0,3 0 0,-7 0 0,-1 0 0,8 0 0,0 0 0,-2 0 0,-3 0 87,-10 0 1,1 0-88,3 0 0,3 0 0,-2 0 0,-3 0 0,1 0 0,2 0 0,3 0 0,-2 0 0,4 0 0,-1 0 0,3 0 0,0 0 0,-3 0 0,0 0 0,-2 0 0,-3 0 0,3 0 0,1 0 0,-26 0 0,27 0 0,-14 0 0,8 0 0,2 0 0,5 0 0,-9 0 0,0 0 0,10 0 0,-16 0 0,14 0 0,-27 0 0,8 0 0,7 0 0,10 0 0,-3 0 0,3 0 0,2 0 0,0 0 0,-6 0 0,1 0 0,7 0 0,-3 0 0,-10 0 0,2 0 0,0 0 0,-1 0 0,8 0 0,-9 0 0,0 0 0,9 0 0,5 0 0,-11 0 0,0 0 0,9 0 0,1 0 0,-3 0 0,-24 0 0,12 0 0,-17 0 0,0 0 0,0 0 0</inkml:trace>
+</inkml:ink>
+</file>
+
+<file path=ppt/ink/ink8.xml><?xml version="1.0" encoding="utf-8"?>
+<inkml:ink xmlns:inkml="http://www.w3.org/2003/InkML">
+  <inkml:definitions>
+    <inkml:context xml:id="ctx0">
+      <inkml:inkSource xml:id="inkSrc0">
+        <inkml:traceFormat>
+          <inkml:channel name="X" type="integer" min="-2.14748E9" max="2.14748E9" units="cm"/>
+          <inkml:channel name="Y" type="integer" min="-2.14748E9" max="2.14748E9" units="cm"/>
+          <inkml:channel name="F" type="integer" max="32767" units="dev"/>
+        </inkml:traceFormat>
+        <inkml:channelProperties>
+          <inkml:channelProperty channel="X" name="resolution" value="1000" units="1/cm"/>
+          <inkml:channelProperty channel="Y" name="resolution" value="1000" units="1/cm"/>
+          <inkml:channelProperty channel="F" name="resolution" value="0" units="1/dev"/>
+        </inkml:channelProperties>
+      </inkml:inkSource>
+      <inkml:timestamp xml:id="ts0" timeString="2026-03-16T17:00:52.457"/>
+    </inkml:context>
+    <inkml:brush xml:id="br0">
+      <inkml:brushProperty name="width" value="0.05292" units="cm"/>
+      <inkml:brushProperty name="height" value="0.05292" units="cm"/>
+      <inkml:brushProperty name="color" value="#FF0000"/>
+    </inkml:brush>
+  </inkml:definitions>
+  <inkml:trace contextRef="#ctx0" brushRef="#br0">2805 4180 24575,'32'0'0,"-13"0"0,2 0 0,10 0 0,2 0 0,-7 0 0,1 0 0,1 0-703,6 0 1,2 0 0,0 0 702,-2 0 0,0 0 0,-1 0 0,-1 0 0,-1 0 0,-1 0 225,-3 0 1,0 0 0,-3 0-226,0 0 0,0 0 174,8 0 0,-2 0-174,1 0 0,1 0 0,-2 0 0,-11 0 541,1 0 0,1 0-541,0 0 0,7 0 0,-10 0 0,2 0 0,-1 0 0,1 0 0,6 0 0,1 0 0,3 0 0,1 0 0,2 0 0,0 0 0,-9 0 0,0 0 0,8 0 0,-2 0 0,1 0 0,-10 0 0,2 0 0,-1 0 0,0 0 0,15 0 0,-15 0 0,1 0 0,2 0 0,0 0 0,-3 0 0,-1 0 0,5 0 0,1 0 0,2 0 0,-1 0 0,9 0 0,-15 0 0,0 0 0,1 0 0,-2 0 0,10 0 0,-7 1 0,2-2 0,-3-4 0,0-1 0,0 4 0,2 1 0,7-5 0,1 0 0,3 6 0,0 0 0,-2-6 0,1 0 0,-9 5 0,0 1 0,0-2 0,7-4 0,0 1 0,-3 4 0,0 2 0,3-1 0,-1 0 0,-2 0 0,0 0 0,3 1 0,0-2 0,-3-8 0,1 0 0,-7 7 0,2 1 0,0-1-246,1-3 1,-1-2 0,2 2 245,2 3 0,2 3 0,0 0 0,4-1 0,2 0 0,-2 0 0,-4 0 0,0 0 0,0 0 0,4 0 0,1 0 0,0 0-380,-2 0 0,1 0 0,-1 0 380,-1 0 0,-1 0 0,1 0 0,1 0 0,-1 0 0,2 0 0,0 0 0,1 0 0,0 0 0,-5 0 0,0 0 0,1 0 0,-2 0 0,2 0 0,0 0 0,-2 0 0,2 0 0,-2 0 0,2 0 0,-4 0 0,2 0 0,0 0 0,0 0 0,-3 0 0,0 0 0,0 0 0,1 0 0,1 0 0,0 0 0,0 0 0,0 0 0,3 0 0,0 0 0,0 0 0,-1 0 0,5 0 0,-1 0 0,0 0 0,2 0 0,0 0 0,-4 0 0,-1 0 0,-3 0 0,4 0 0,-6 0 0,-12 0 0,14 0 0,-27 0 173,8 0 1,-11 0-1,0 0 1</inkml:trace>
+  <inkml:trace contextRef="#ctx0" brushRef="#br0" timeOffset="30564">2897 5980 24575,'22'0'0,"0"0"0,2 0 0,1 0 0,0 0 0,1 0 0,1 0 0,7 0 0,1 0 0,1 0 0,0 0 0,-3 0 0,-2 0 0,0 0 0,-1 0 0,3 0 0,0 0 0,-8 0 0,-2 0 0,0 0 0,-1 0 0,10 0 0,-4 0 0,-9 0 0,0 0 0,9 0 0,-3 0 0,0 0 0,6 0 0,-6 0 0,0 0 0,3 0 0,4 0 0,-10 0 0,0 0 0,9 0 0,-6 0 0,0 0 0,3 0 0,-9 0 0,0 0 0,9 0 0,4 0 0,1 0 0,-14 0 0,1 0 0,7 0 0,-1 0 0,-2 0 0,1 0 0,3 0 0,1 0 0,-2 0 0,-1 0 0,4 0 0,0 0 0,4 0 0,-2 0 0,-7 0 0,-1 0 0,8 0 0,-2 0 0,1 0 0,-1 0 0,1 0 0,0 0 0,-6 0 0,0 0 0,-5 0 0,0 0 0,6 0 0,1 0 0,3 0 0,0 0 0,-6 0 0,1 0 0,6 0 0,-1 0 0,1 0 0,-5 0 0,-2 0 0,-8 0 0,14 0 0,-27 0 0,26 0 0,-25-12 0,14 9 0,-18-9 0,0 12 0</inkml:trace>
+  <inkml:trace contextRef="#ctx0" brushRef="#br0" timeOffset="44566">7779 6615 24575,'22'0'0,"0"0"0,1 0 0,2 0 0,0 0 0,2 0 0,-1 0 0,6 0 0,-1 0 0,-5-1 0,0 1 0,-1 1 0,6 4 0,-2 1 0,-5-4 0,1-1 0,6 5 0,-1 0 0,1-6 0,2 0 0,-4 0 0,-25 0 0,26 0 0,-27 0 0,26 0 0,-13 0 0,5 0 0,-9 0 0,-12 0 0</inkml:trace>
+  <inkml:trace contextRef="#ctx0" brushRef="#br0" timeOffset="60931">7580 10517 24575,'0'30'0,"0"-1"0,0-1 0,0 3 0,0 0 0,0 0 0,0 2 0,0 0-775,0-6 0,0 1 0,0 1 0,0 0 775,0 4 0,0 0 0,0 1 0,0 0-510,1-2 0,-1-1 1,0 1-1,-1 2 510,0-2 0,-2 2 0,0 1 0,1 0 0,0-1-275,1 2 0,1 0 0,0 0 0,-1 0 0,0 0 275,-2-5 0,-1 1 0,0-1 0,0 1 0,-1-1 0,1-2 0,0 3 0,0-2 0,0 0 0,-1 0 0,2-2-84,-2 5 0,2-2 0,-1 0 0,-1-4 84,-4 11 0,1-4 583,8-7 0,0-1-583,-6 4 0,0-2 2132,3 8-2132,-3-5 0,0 0 1529,6-7 1,0 1-1530,1 4 0,-2 2 0,-7 1 0,-1 1 0,7-3 0,-1 0 246,-6-6 1,1 0-247,6 7 0,4 0 0,-2-7 0,0 1 0,0 4 0,0 2 0,0 1 0,0 1 0,0-3 0,0 0 0,0-6 0,0 0 0,0 3 0,0-4 0,0-7 0,0 2 0</inkml:trace>
+</inkml:ink>
+</file>
+
+<file path=ppt/ink/ink9.xml><?xml version="1.0" encoding="utf-8"?>
+<inkml:ink xmlns:inkml="http://www.w3.org/2003/InkML">
+  <inkml:definitions>
+    <inkml:context xml:id="ctx0">
+      <inkml:inkSource xml:id="inkSrc0">
+        <inkml:traceFormat>
+          <inkml:channel name="X" type="integer" min="-2.14748E9" max="2.14748E9" units="cm"/>
+          <inkml:channel name="Y" type="integer" min="-2.14748E9" max="2.14748E9" units="cm"/>
+          <inkml:channel name="F" type="integer" max="32767" units="dev"/>
+        </inkml:traceFormat>
+        <inkml:channelProperties>
+          <inkml:channelProperty channel="X" name="resolution" value="1000" units="1/cm"/>
+          <inkml:channelProperty channel="Y" name="resolution" value="1000" units="1/cm"/>
+          <inkml:channelProperty channel="F" name="resolution" value="0" units="1/dev"/>
+        </inkml:channelProperties>
+      </inkml:inkSource>
+      <inkml:timestamp xml:id="ts0" timeString="2026-03-16T17:02:42.722"/>
+    </inkml:context>
+    <inkml:brush xml:id="br0">
+      <inkml:brushProperty name="width" value="0.05292" units="cm"/>
+      <inkml:brushProperty name="height" value="0.05292" units="cm"/>
+      <inkml:brushProperty name="color" value="#FF0000"/>
+    </inkml:brush>
+  </inkml:definitions>
+  <inkml:trace contextRef="#ctx0" brushRef="#br0">3559 4498 24575,'0'22'0,"0"7"0,0-14 0,-18 17 0,14-4 0,-14-7 0,18 2 0,0-20 0,-12 27 0,9-26 0,-8 14 0,11-6 0,0-9 0,-12 26 0,9-25 0,-9 26 0,12-27 0,0 20 0,-18-20 0,14 9 0,-14 6 0,18-14 0,0 25 0,0-26 0,0 21 0,0-21 0,0 8 0,0-11 0,0 0 0,0 18 0,0-13 0,0 24 0,0-26 0,0 26 0,0-24 0,0 24 0,0-26 0,0 9 0,0 0 0,0-10 0,0 28 0,0-26 0,0 14 0,0-18 0,0 0 0</inkml:trace>
+  <inkml:trace contextRef="#ctx0" brushRef="#br0" timeOffset="14199">6615 5702 24575,'14'0'0,"10"0"0,-4 0 0,2 0 0,2 0 0,13 0 0,-7 0 0,1 0 0,-1 0 0,1 0 0,-5 0 0,1 0 0,1 0 0,-1 0 0,0 1 0,-1-2 0,11-8 0,-2 0 0,-2 7 0,-1 0 0,-1-7 0,-2 0 0,-4 8 0,-1 2 0,8-1 0,-2 0 0,0 0 0,-5 0 0,0 0 0,-1 0 0,-2 0 0,15 0 0,-6 0 0,-1 0 0,1 0 0,-5 0 0,-2 0 0,-7 0 0,12 0 0,-26 0 0,20 0 0,-2 0 0,7 0 0,4 0 0,1 0 0,-6 0 0,-7 0 0,-1 0 0,-3 0 0,13 0 0,-14 0 0,0 0 0,14 0 0,-25 0 0,26 0 0,-15 0 0,17 0 0,-4 0 0,-3 0 0,0 0 0,-6 0 0,3 0 0,-3 0 0,-16 0 0,26 0 0,-12 18 0,3-14 0,4 14 0,-21-18 0,26 0 0,-13 0 0,8 0 0,2 0 0,5 0 0,-5 0 0,-2 0 0,-8 0 0,14 0 0,-10 0 0,-4 0 0,2 12 0,-6-10 0,2 10 0,19-12 0,-5 0 0,4 0 0,-10 0 0,0 0 0,15 0 0,-3 0 0,-5 0 0,-26 0 0,-3 0 0,-3 0 0,-9 0 0</inkml:trace>
+  <inkml:trace contextRef="#ctx0" brushRef="#br0" timeOffset="18751">9194 6231 24575,'22'0'0,"0"0"0,9 0 0,-1 0 0,2 0 0,-7 0 0,-2 0 0,1 0 0,1 0 0,6 0 0,0 0 0,-7 0 0,0 0 0,5 0 0,2 0 0,-3 0 0,1 0 0,-3 0 0,-2 0 0,-1 0 0,8 0 0,0 0 0,1 0 0,-16 0 0,2 0 0,-18 0 0</inkml:trace>
+  <inkml:trace contextRef="#ctx0" brushRef="#br0" timeOffset="20684">10636 6866 24575,'23'0'0,"0"0"0,-3 0 0,1 0 0,4 0 0,1 0 0,1 0 0,-1 0 0,5 0 0,-1 0 0,-6 0 0,0 0 0,8 0 0,-2 0 0,1 0 0,-1 0 0,1 0 0,-6 0 0,-1 0 0,0 0 0,0 0 0,7 0 0,0 0 0,-7 0 0,1 0 0,-1 0 0,3 0 0,0 0 0,7 0 0,1 0 0,-10 0 0,1 0 0,1 0-163,-1 0 1,-1 0 0,2 0 162,-1 0 0,1 0 0,0 0 0,0 0 0,1 0 0,-2 0 0,11 0 0,-2 0 0,-2 0 0,-1 0 0,-1 0 0,-2 0 0,-5 0 0,1 0 0,6 0 0,-1 0 0,1 0 0,0 0 0,0 0 487,6 0-487,-14 0 0,-1 0 0,-1 0 0,-9 0 0,-12 0 0</inkml:trace>
+  <inkml:trace contextRef="#ctx0" brushRef="#br0" timeOffset="69218">2514 10702 24575,'22'0'0,"1"0"0,11 0 0,3 0 0,-13 0 0,1 0 0,2 0-790,3 0 0,3 0 0,0 0 0,-1 0 790,6 0 0,-2 0 0,2 0 0,-7 0 0,0 0 0,1 0 0,-1 0 0,4 0 0,-1 0 0,1 0-86,2 0 1,0 0 0,-1 0 85,-3 0 0,-2 0 0,2 0 0,-2 0 0,2 0 0,0 0 0,-2 0 0,2 0 0,-2 0 0,2 0 0,-3 1 0,2 0 0,-1-1 0,-2-2 0,0-3 0,-2-2 0,1 2 0,6 3 0,1 2 0,-3-3 173,3-5 1,-1-1-174,-4 4 0,1 1 0,-2 1 0,6 2 0,-1-1 0,-8-2 0,1 0 0,-2 0 0,6 4 0,-2 0 0,4 1 0,-1-2 0,-10-5 0,-1 0 761,4 5 0,0 0-761,3-11 515,-4 11 1,2 2-516,4-1 0,0 0 0,2 0 0,-2 0 0,0 0 0,4 1 0,2-2 0,-7-4 0,2-2 0,-2 1 0,6 4 0,-1 0 0,-8-4 0,0-1 0,0 2 0,0 4 0,0 1 0,0 1 0,8-1 0,1 0-118,-6 0 1,1 0-1,1 0 118,-1 0 0,1 1 0,0-2-319,-3-1 1,0-2 0,1 1-1,0 0 319,0 2 0,1 1 0,1-1 0,-1 0-426,2-1 0,1-1 0,0 0 0,0 0 426,1-1 0,1 1 0,0 0 0,-1 1 0,-1 1 0,-1 0 0,0 1 0,0-1 0,4-1 0,1-1 0,-1 0 0,-2-1 0,3-2 0,-1 0 0,0 1-278,1 3 0,0 1 0,-1-1 278,-4-3 0,-2-2 0,1 2 0,0 3 0,0 3 0,-1 0 0,-3-1 0,0 0 0,0 0 0,3 0 0,0 0 0,0 0 0,-3-1 0,0 2 0,0-1 97,-1 0 1,1 0 0,0 0-98,3 0 0,0 0 0,0 0 0,-3 0 0,0 0 0,0 0 0,0-4 0,0-1 0,0 2 0,3 1 0,0 2 0,0-1 0,4-5 0,1 0 0,-9 5 0,0 2 0,0-1 559,4 0 0,0 0-559,2 0 0,0 0 0,-1 0 0,-1 0 0,2 0 0,2 0 0,-8 0 0,1 0 0,-2 0 0,1 0 0,-1 0 882,7 0 0,-2 0-882,-2 0 1001,4 0-1001,1 0 505,-6 0-505,-7 0 0,-1 0 0,-3 0 0,4 0 0,1 0 0,3 0 0,-6-8 0,3-2 0,4 8 0,0 0 0,-1-7 0,1 0 0,-1 8 0,4 1 0,-2 1 0,5-1 0,1 0-288,-2 0 0,3 0 0,-2 0 288,-5 0 0,-1 0 0,0 0 0,4 0 0,-1 0 0,2 0 0,4 0 0,0 0 0,-1 0 0,-5 0 0,-1 0 0,2 0 0,1 0 0,1 0 0,1 0 0,-3 0 0,-1 0 0,-3 0 0,2 0 0,5 0 0,0 0 0,-2 0 0,-5 0 0,-2 0 0,1 0 0,-2 0 0,-2 0 0,-8 0 0</inkml:trace>
+  <inkml:trace contextRef="#ctx0" brushRef="#br0" timeOffset="72434">2990 11483 24575,'32'0'0,"-4"0"0,1 0 0,0 0 0,0 0 0,7 0 0,0 0 0,-3 0 0,-2 0 0,0 0 0,-1 0 0,-6 0 0,0 0 0,7 0 0,0 0 0,-6 0 0,-1 0 0,0 0 0,0 0 0,1 0 0,0 0 0,-5 0 0,0 0 0,0 0 0,1 0 0,13 0 0,1 0 0,-7-1 0,1 2-164,0 4 0,2 2 0,-1-1 164,4-4 0,1 0 0,-5 4 0,1 1 0,-2-2 0,-3-5 0,-1 0 0,4-1 0,-2 2 0,5 10 0,-4-8 0,-3 3 0,0 0 0,6-6 246,-6 0 0,0 0-246,3 0 0,4 0 0,1 0 0,-5 0 0,-4 0 0,2 0 0,-2 0 0,0 0 0,5 0 0,2 0 0,-4 0 0,2 0 0,-2 0 0,2 0 0,0 0 0,-1 0 0,0 0 0,-1 0 0,-2 0 0,-2 0 0,11 0 0,-16 0 0,-18-12 0,0 9 0,0-8 0</inkml:trace>
+  <inkml:trace contextRef="#ctx0" brushRef="#br0" timeOffset="81300">7739 10001 24575,'34'0'0,"-9"0"0,0 0 0,6 0 0,-6 0 0,0 0 0,3 0 0,-3 8 0,0 2 0,5 6 0,-8 3 0,1 0 0,-1-5 0,0 0 0,-3 2 0,-2 1 0,0 0 0,0-2 0,13 1 0,-27 13 0,20-26 0,-20 9 0,26-12 0,-12 18 0,15-2 0,-17 5 0,14-10 0,-25-11 0,14 0 0</inkml:trace>
+  <inkml:trace contextRef="#ctx0" brushRef="#br0" timeOffset="82966">8374 10041 24575,'-22'12'0,"4"8"0,18-4 0,-11 2 0,8-18 0,-9 12 0,0 20 0,-3-17 0,-2 1 0,2 14 0,-1 2 0,-10-8 0,2 0 0,15 0 0,2 1 0,-9-1 0,2-4 0,11-5 0,-8-4 0</inkml:trace>
+  <inkml:trace contextRef="#ctx0" brushRef="#br0" timeOffset="121151">15888 4471 24575,'34'0'0,"-10"0"0,2 0 0,4 0 0,0 0 0,4 0 0,1 0 0,-8 0 0,-1 0 0,-1 0 0,0 0 0,-1 0 0,-2 6 0,0 0 0,10-3 0,-4 9 0,-9-11 0,0-2 0,9 1 0,5 0 0,-11-1 0,0 2 0,9 17 0,-7-16 0,2 0 0,-3 7 0,-1 0 0,15-9 0,-15-1 0,0 2 0,10 10 0,-4-8 0,5 9 0,-19-12 0,-2 0 0,-12 0 0,18 0 0,-14 0 0,25 0 0,-8 0 0,7 0 0,-7 0 0,-10-12 0,1 9 0,-9-8 0,9 11 0</inkml:trace>
+  <inkml:trace contextRef="#ctx0" brushRef="#br0" timeOffset="126916">17939 5847 24575,'22'0'0,"-2"0"0,1 0 0,14 0 0,-6 0 0,3 0 0,-7 0 0,1 0 0,0 0 0,9 0 0,-1 0 0,3 0 0,-1 0 0,-4 0 0,0 0 0,-1 0 0,-2 0 0,-4 0 0,-1 0 0,8 0 0,-2 0 0,1 0 0,-6 0 0,0 0 0,2 0 0,-7 0 0,-1 0 0,9 0 0,-4-5 0,2-1 0,4 3 0,-4-4 0,-2 2 0,4 5 0,5 0 0,-1 0 0,-4 0 0,4 0 0,1 0 0,-5 0 0,-4 0 0,2 0 0,4 0 0,1 0 0,0 0 0,0 0 0,-6 0 0,0 0 0,3 0 0,-9 0 0,0 0 0,9 0 0,4 0 0,1 0 0,-5 0 0,-8 0 0,4 0 0,-4 0 0,-3 0 0,12 0 0,-8 0 0,6 0 0,6 0 0,-1 0 0,-4 0 0,-9 0 0,0 0 0,9 0 0,-7 0 0,2 0 0,-2 0 0,-5 0 0,2 0 0,-18 0 0,11 0 0,-8 0 0,21 0 0,-21 0 0,26 0 0,-24 0 0,24 0 0,-26 0 0,26 12 0,-24-9 0,12 8 0,-5-11 0,-9 0 0,9 0 0,0 0 0,-9 0 0,26 0 0,-25 0 0,26 0 0,-27 0 0,20 0 0,-20 0 0,27 0 0,-14 18 0,2-16 0,2 0 0,8 16 0,-8-18 0,4 0 0,-3 0 0,-5 0 0,13 0 0,-26 0 0,9 0 0,-12 0 0,12 0 0,-9 0 0,8 0 0,7 0 0,-14 0 0,14 0 0,-6 0 0,8 0 0,-1 0 0,2 0 0,5 0 0,1 0 0,-3 0 0,0 0 0,5 0 0,0 0 0,-8 0 0,-1 0 0,8 0 0,1 0 0,-14 0 0,0 0 0,14 0 0,-25 0 0,26 0 0,-10 0 0,8 0 0,-7 0 0,2 0 0,-20 0 0,27 0 0,-26 0 0,14 0 0,-18 0 0,12 0 0,-9 0 0,20 0 0,-20 0 0,26 0 0,-12 0 0,7 0 0,2 0 0,4 0 0,-4 0 0,-2 0 0,4 0 0,5 0 0,-1 0 0,-16 0 0,14 0 0,-28 0 0,28 0 0,-26 0 0,14 0 0,-18 0 0,12 0 0,-9 0 0,20 0 0,-20 0 0,26 0 0,-24 0 0,13 0 0,-18 0 0,0 0 0,0 0 0</inkml:trace>
+  <inkml:trace contextRef="#ctx0" brushRef="#br0" timeOffset="133366">19103 6456 24575,'-32'0'0,"4"0"0,7 0 0,-2 0 0,20 0 0,-9 0 0,-6 0 0,14 0 0,-26 0 0,-2 0 0,9 0 0,-2 0 0,-5 0 0,-1 0 0,4 0 0,1 0 0,6 0 0,1 0 0,-1 0 0,1 0 0,3 0 0,-13 0 0,26 0 0,-9 0 0,0 0 0,-8 0 0,-8 0 0,-4 0 0,-1 0 0,5 0 0,8 0 0,-10 0 0,26 0 0,-14 0 0,7 0 0,-4 0 0,-17 0 0,12 0 0,0 0 0,0 0 0,-1 0 0,-8 0 0,0 0 0,-7 0 0,13 0 0,2 0 0,-12 0 0,5 0 0,8 0 0,-4 0 0,4 0 0,-8 0 0,9 0 0,-1 0 0,-8 0 0,-4 0 0,17 0 0,4 0 0,11 0 0,-18 0 0,14 0 0,-26 0 0,27 0 0,-15 0 0,-5 0 0,4 0 0,-5 0 0,-2 0 0,-2 0 0,-4 0 0,-1 0 0,6 0 0,6 0 0,-8 0 0,12 0 0,-15 0 0,17 0 0,-14 0 0,25 0 0,-14 0 0,6 0 0,9 0 0,-9 0 0,1 0 0,-10 0 0,-7 0 0,9-1 0,0 2 0,-9 11 0,-4-9 0,-1 8 0,17-11 0,-1 0 0,17 0 0,-12 0 0,9 0 0,-21 0 0,21 0 0,-8 0 0,11 0 0</inkml:trace>
+  <inkml:trace contextRef="#ctx0" brushRef="#br0" timeOffset="141250">18256 7580 24575,'33'0'0,"-5"0"0,1 0 0,3 0 0,-1 0 0,1 0-609,-2 0 1,1 0 0,1 0 608,1 0 0,-1 0 0,2 0 0,0 0 0,1 0 0,1 0-334,-4 1 0,2-1 0,-1 0 0,-1-1 334,6-2 0,-2-2 0,2 2 0,-3 1 0,1 2 0,0 0 0,-3-1 0,-6-3 0,-2-1 0,2 2 91,10 2 1,2 1 0,-3 1-92,-6-1 0,-2 0 0,8 0 0,-1 0 0,-8 0 0,-3 0 420,-3 0 0,0 0-420,7 0 0,1 0 1517,8 0-1517,-7 0 0,1 0 0,-1 0 0,1 0 0,2 0 0,3 0 0,-7 0 0,2 0 0,-2 0 0,6 0 0,0 0 0,1 0 0,0 0 0,-4 0 0,0 0 0,-1 0 0,-2 0 264,-4 0 1,-1 0-265,2 0 0,-2 0 0,4 0 0,-8 0 0,-8 0 0,0 0 0,9 0 0,6 0 0,6 0 0,-1 0 0,-4 0 0,-3 0 0,0 0 0,6 0 0,-1 0 0,2 0 0,4 0 0,-13 6 0,0 0 0,9-3 0,-17 8 0,14-11 0,-12 18 0,6-15 0,4-2 0,-3 8 0,0 0 0,6-2 0,0-2 0,-3-4 0,-1 1 0,0 3 0,0 1 0,-5 1 0,-1-2 0,0-3 0,0-1 0,-1 5 0,0 0 0,9-6 0,-3 0 0,0 0 0,6 0 0,-1 0 0,1 0 0,-6 0 0,-1 0 0,0-1 0,0 2 0,-1 7 0,-2 2 0,12-6 0,-17 14 0,2-18 0,-7 0 0,-8 0 0,9 0 0,-12 0 0,12 0 0,8 0 0,2 1 0,2-2 0,0-8 0,0 0 0,8 7 0,1 0 0,-3-13 0,0 0 0,4 13 0,-1 1 0,-15-5 0,0 0 0,6 6 0,-7 0 0,-14 0 0,9 0 0,-12 0 0</inkml:trace>
+</inkml:ink>
 </file>
 
 <file path=ppt/notesMasters/notesMaster1.xml><?xml version="1.0" encoding="utf-8"?>
@@ -4241,6 +4772,57 @@
           </a:p>
         </p:txBody>
       </p:sp>
+      <mc:AlternateContent xmlns:mc="http://schemas.openxmlformats.org/markup-compatibility/2006">
+        <mc:Choice xmlns:p14="http://schemas.microsoft.com/office/powerpoint/2010/main" Requires="p14">
+          <p:contentPart p14:bwMode="auto" r:id="rId3">
+            <p14:nvContentPartPr>
+              <p14:cNvPr id="20" name="Ink 19">
+                <a:extLst>
+                  <a:ext uri="{FF2B5EF4-FFF2-40B4-BE49-F238E27FC236}">
+                    <a16:creationId xmlns:a16="http://schemas.microsoft.com/office/drawing/2014/main" id="{F01A9EEC-03BC-9ACF-9FF5-BAB0B799EA77}"/>
+                  </a:ext>
+                </a:extLst>
+              </p14:cNvPr>
+              <p14:cNvContentPartPr/>
+              <p14:nvPr/>
+            </p14:nvContentPartPr>
+            <p14:xfrm>
+              <a:off x="995400" y="1856880"/>
+              <a:ext cx="1838520" cy="815400"/>
+            </p14:xfrm>
+          </p:contentPart>
+        </mc:Choice>
+        <mc:Fallback>
+          <p:pic>
+            <p:nvPicPr>
+              <p:cNvPr id="20" name="Ink 19">
+                <a:extLst>
+                  <a:ext uri="{FF2B5EF4-FFF2-40B4-BE49-F238E27FC236}">
+                    <a16:creationId xmlns:a16="http://schemas.microsoft.com/office/drawing/2014/main" id="{F01A9EEC-03BC-9ACF-9FF5-BAB0B799EA77}"/>
+                  </a:ext>
+                </a:extLst>
+              </p:cNvPr>
+              <p:cNvPicPr/>
+              <p:nvPr/>
+            </p:nvPicPr>
+            <p:blipFill>
+              <a:blip r:embed="rId4"/>
+              <a:stretch>
+                <a:fillRect/>
+              </a:stretch>
+            </p:blipFill>
+            <p:spPr>
+              <a:xfrm>
+                <a:off x="986040" y="1847520"/>
+                <a:ext cx="1857240" cy="834120"/>
+              </a:xfrm>
+              <a:prstGeom prst="rect">
+                <a:avLst/>
+              </a:prstGeom>
+            </p:spPr>
+          </p:pic>
+        </mc:Fallback>
+      </mc:AlternateContent>
     </p:spTree>
   </p:cSld>
   <p:clrMapOvr>
@@ -4386,7 +4968,7 @@
         <p:spPr>
           <a:xfrm>
             <a:off x="320040" y="768096"/>
-            <a:ext cx="8503920" cy="365760"/>
+            <a:ext cx="5099453" cy="365760"/>
           </a:xfrm>
           <a:prstGeom prst="rect">
             <a:avLst/>
@@ -4425,7 +5007,7 @@
         <p:spPr>
           <a:xfrm>
             <a:off x="320040" y="1207008"/>
-            <a:ext cx="5029200" cy="2377440"/>
+            <a:ext cx="5029200" cy="1751782"/>
           </a:xfrm>
           <a:prstGeom prst="rect">
             <a:avLst/>
@@ -4575,8 +5157,8 @@
         </p:nvSpPr>
         <p:spPr>
           <a:xfrm>
-            <a:off x="320040" y="3712464"/>
-            <a:ext cx="8503920" cy="329184"/>
+            <a:off x="320040" y="3305556"/>
+            <a:ext cx="5029200" cy="329184"/>
           </a:xfrm>
           <a:prstGeom prst="rect">
             <a:avLst/>
@@ -4600,7 +5182,7 @@
                 <a:ea typeface="Calibri" pitchFamily="34" charset="-122"/>
                 <a:cs typeface="Calibri" pitchFamily="34" charset="-120"/>
               </a:rPr>
-              <a:t>Common use — guard with  if:</a:t>
+              <a:t>Common uses:</a:t>
             </a:r>
             <a:endParaRPr lang="en-US" sz="1350" dirty="0"/>
           </a:p>
@@ -4614,7 +5196,7 @@
         </p:nvSpPr>
         <p:spPr>
           <a:xfrm>
-            <a:off x="320040" y="4069080"/>
+            <a:off x="320040" y="3662172"/>
             <a:ext cx="5029200" cy="1074420"/>
           </a:xfrm>
           <a:prstGeom prst="rect">
@@ -4646,7 +5228,7 @@
         </p:nvSpPr>
         <p:spPr>
           <a:xfrm>
-            <a:off x="438912" y="4160520"/>
+            <a:off x="438912" y="3753612"/>
             <a:ext cx="4791456" cy="621792"/>
           </a:xfrm>
           <a:prstGeom prst="rect">
@@ -4734,6 +5316,57 @@
           </a:p>
         </p:txBody>
       </p:sp>
+      <mc:AlternateContent xmlns:mc="http://schemas.openxmlformats.org/markup-compatibility/2006">
+        <mc:Choice xmlns:p14="http://schemas.microsoft.com/office/powerpoint/2010/main" Requires="p14">
+          <p:contentPart p14:bwMode="auto" r:id="rId3">
+            <p14:nvContentPartPr>
+              <p14:cNvPr id="11" name="Ink 10">
+                <a:extLst>
+                  <a:ext uri="{FF2B5EF4-FFF2-40B4-BE49-F238E27FC236}">
+                    <a16:creationId xmlns:a16="http://schemas.microsoft.com/office/drawing/2014/main" id="{2E615DBD-E872-71EA-254E-981D31610B1D}"/>
+                  </a:ext>
+                </a:extLst>
+              </p14:cNvPr>
+              <p14:cNvContentPartPr/>
+              <p14:nvPr/>
+            </p14:nvContentPartPr>
+            <p14:xfrm>
+              <a:off x="1009800" y="1470960"/>
+              <a:ext cx="2038680" cy="3187080"/>
+            </p14:xfrm>
+          </p:contentPart>
+        </mc:Choice>
+        <mc:Fallback>
+          <p:pic>
+            <p:nvPicPr>
+              <p:cNvPr id="11" name="Ink 10">
+                <a:extLst>
+                  <a:ext uri="{FF2B5EF4-FFF2-40B4-BE49-F238E27FC236}">
+                    <a16:creationId xmlns:a16="http://schemas.microsoft.com/office/drawing/2014/main" id="{2E615DBD-E872-71EA-254E-981D31610B1D}"/>
+                  </a:ext>
+                </a:extLst>
+              </p:cNvPr>
+              <p:cNvPicPr/>
+              <p:nvPr/>
+            </p:nvPicPr>
+            <p:blipFill>
+              <a:blip r:embed="rId4"/>
+              <a:stretch>
+                <a:fillRect/>
+              </a:stretch>
+            </p:blipFill>
+            <p:spPr>
+              <a:xfrm>
+                <a:off x="1000440" y="1461600"/>
+                <a:ext cx="2057400" cy="3205800"/>
+              </a:xfrm>
+              <a:prstGeom prst="rect">
+                <a:avLst/>
+              </a:prstGeom>
+            </p:spPr>
+          </p:pic>
+        </mc:Fallback>
+      </mc:AlternateContent>
     </p:spTree>
   </p:cSld>
   <p:clrMapOvr>
@@ -5197,7 +5830,7 @@
                 <a:ea typeface="Consolas" pitchFamily="34" charset="-122"/>
                 <a:cs typeface="Consolas" pitchFamily="34" charset="-120"/>
               </a:rPr>
-              <a:t>last = who.pop()     # last == "Dan"</a:t>
+              <a:t>last = who.pop()     # removes "Dan"</a:t>
             </a:r>
             <a:endParaRPr lang="en-US" sz="1200" dirty="0"/>
           </a:p>
@@ -5436,7 +6069,7 @@
                 <a:ea typeface="Consolas" pitchFamily="34" charset="-122"/>
                 <a:cs typeface="Consolas" pitchFamily="34" charset="-120"/>
               </a:rPr>
-              <a:t># x   == "Cam"</a:t>
+              <a:t># removes "Cam"</a:t>
             </a:r>
             <a:endParaRPr lang="en-US" sz="1100" dirty="0"/>
           </a:p>
@@ -5570,6 +6203,57 @@
           </a:p>
         </p:txBody>
       </p:sp>
+      <mc:AlternateContent xmlns:mc="http://schemas.openxmlformats.org/markup-compatibility/2006">
+        <mc:Choice xmlns:p14="http://schemas.microsoft.com/office/powerpoint/2010/main" Requires="p14">
+          <p:contentPart p14:bwMode="auto" r:id="rId3">
+            <p14:nvContentPartPr>
+              <p14:cNvPr id="18" name="Ink 17">
+                <a:extLst>
+                  <a:ext uri="{FF2B5EF4-FFF2-40B4-BE49-F238E27FC236}">
+                    <a16:creationId xmlns:a16="http://schemas.microsoft.com/office/drawing/2014/main" id="{0AADD438-2C0B-7318-870A-0CDB60D34154}"/>
+                  </a:ext>
+                </a:extLst>
+              </p14:cNvPr>
+              <p14:cNvContentPartPr/>
+              <p14:nvPr/>
+            </p14:nvContentPartPr>
+            <p14:xfrm>
+              <a:off x="905040" y="1609560"/>
+              <a:ext cx="7015320" cy="2548440"/>
+            </p14:xfrm>
+          </p:contentPart>
+        </mc:Choice>
+        <mc:Fallback>
+          <p:pic>
+            <p:nvPicPr>
+              <p:cNvPr id="18" name="Ink 17">
+                <a:extLst>
+                  <a:ext uri="{FF2B5EF4-FFF2-40B4-BE49-F238E27FC236}">
+                    <a16:creationId xmlns:a16="http://schemas.microsoft.com/office/drawing/2014/main" id="{0AADD438-2C0B-7318-870A-0CDB60D34154}"/>
+                  </a:ext>
+                </a:extLst>
+              </p:cNvPr>
+              <p:cNvPicPr/>
+              <p:nvPr/>
+            </p:nvPicPr>
+            <p:blipFill>
+              <a:blip r:embed="rId4"/>
+              <a:stretch>
+                <a:fillRect/>
+              </a:stretch>
+            </p:blipFill>
+            <p:spPr>
+              <a:xfrm>
+                <a:off x="895680" y="1600200"/>
+                <a:ext cx="7034040" cy="2567160"/>
+              </a:xfrm>
+              <a:prstGeom prst="rect">
+                <a:avLst/>
+              </a:prstGeom>
+            </p:spPr>
+          </p:pic>
+        </mc:Fallback>
+      </mc:AlternateContent>
     </p:spTree>
   </p:cSld>
   <p:clrMapOvr>
@@ -5849,7 +6533,7 @@
                 <a:ea typeface="Consolas" pitchFamily="34" charset="-122"/>
                 <a:cs typeface="Consolas" pitchFamily="34" charset="-120"/>
               </a:rPr>
-              <a:t>who = ["Al","Bob","Cam","Bob"]</a:t>
+              <a:t>who = ["Al", "Bob","Cam","Bob"]</a:t>
             </a:r>
             <a:endParaRPr lang="en-US" sz="1100" dirty="0"/>
           </a:p>
@@ -6238,7 +6922,7 @@
                 <a:ea typeface="Consolas" pitchFamily="34" charset="-122"/>
                 <a:cs typeface="Consolas" pitchFamily="34" charset="-120"/>
               </a:rPr>
-              <a:t>who = ["Al","Bob","Cam","Dan"]</a:t>
+              <a:t>who = ["Al", "Bob", "Cam", "Dan"]</a:t>
             </a:r>
             <a:endParaRPr lang="en-US" sz="1100" dirty="0"/>
           </a:p>
@@ -6272,12 +6956,63 @@
                 <a:ea typeface="Consolas" pitchFamily="34" charset="-122"/>
                 <a:cs typeface="Consolas" pitchFamily="34" charset="-120"/>
               </a:rPr>
-              <a:t>print(who)  # ["Dan","Cam","Bob","Al"]</a:t>
+              <a:t>print(who)  # ["Dan", "Cam", "Bob", "Al"]</a:t>
             </a:r>
             <a:endParaRPr lang="en-US" sz="1100" dirty="0"/>
           </a:p>
         </p:txBody>
       </p:sp>
+      <mc:AlternateContent xmlns:mc="http://schemas.openxmlformats.org/markup-compatibility/2006">
+        <mc:Choice xmlns:p14="http://schemas.microsoft.com/office/powerpoint/2010/main" Requires="p14">
+          <p:contentPart p14:bwMode="auto" r:id="rId3">
+            <p14:nvContentPartPr>
+              <p14:cNvPr id="17" name="Ink 16">
+                <a:extLst>
+                  <a:ext uri="{FF2B5EF4-FFF2-40B4-BE49-F238E27FC236}">
+                    <a16:creationId xmlns:a16="http://schemas.microsoft.com/office/drawing/2014/main" id="{BBE1AEAE-DB96-97A3-A8DF-1E4F5BA51BAC}"/>
+                  </a:ext>
+                </a:extLst>
+              </p14:cNvPr>
+              <p14:cNvContentPartPr/>
+              <p14:nvPr/>
+            </p14:nvContentPartPr>
+            <p14:xfrm>
+              <a:off x="328680" y="976320"/>
+              <a:ext cx="6720120" cy="3444120"/>
+            </p14:xfrm>
+          </p:contentPart>
+        </mc:Choice>
+        <mc:Fallback>
+          <p:pic>
+            <p:nvPicPr>
+              <p:cNvPr id="17" name="Ink 16">
+                <a:extLst>
+                  <a:ext uri="{FF2B5EF4-FFF2-40B4-BE49-F238E27FC236}">
+                    <a16:creationId xmlns:a16="http://schemas.microsoft.com/office/drawing/2014/main" id="{BBE1AEAE-DB96-97A3-A8DF-1E4F5BA51BAC}"/>
+                  </a:ext>
+                </a:extLst>
+              </p:cNvPr>
+              <p:cNvPicPr/>
+              <p:nvPr/>
+            </p:nvPicPr>
+            <p:blipFill>
+              <a:blip r:embed="rId4"/>
+              <a:stretch>
+                <a:fillRect/>
+              </a:stretch>
+            </p:blipFill>
+            <p:spPr>
+              <a:xfrm>
+                <a:off x="319320" y="966960"/>
+                <a:ext cx="6738840" cy="3462840"/>
+              </a:xfrm>
+              <a:prstGeom prst="rect">
+                <a:avLst/>
+              </a:prstGeom>
+            </p:spPr>
+          </p:pic>
+        </mc:Fallback>
+      </mc:AlternateContent>
     </p:spTree>
   </p:cSld>
   <p:clrMapOvr>
@@ -12387,7 +13122,7 @@
                 <a:ea typeface="Calibri" pitchFamily="34" charset="-122"/>
                 <a:cs typeface="Calibri" pitchFamily="34" charset="-120"/>
               </a:rPr>
-              <a:t>Empty</a:t>
+              <a:t>Lists</a:t>
             </a:r>
             <a:endParaRPr lang="en-US" sz="1100" dirty="0"/>
           </a:p>
@@ -12426,12 +13161,63 @@
                 <a:ea typeface="Consolas" pitchFamily="34" charset="-122"/>
                 <a:cs typeface="Consolas" pitchFamily="34" charset="-120"/>
               </a:rPr>
-              <a:t>[]</a:t>
+              <a:t>[[0, 1], [1, 1], [2, 0]]</a:t>
             </a:r>
             <a:endParaRPr lang="en-US" sz="1200" dirty="0"/>
           </a:p>
         </p:txBody>
       </p:sp>
+      <mc:AlternateContent xmlns:mc="http://schemas.openxmlformats.org/markup-compatibility/2006">
+        <mc:Choice xmlns:p14="http://schemas.microsoft.com/office/powerpoint/2010/main" Requires="p14">
+          <p:contentPart p14:bwMode="auto" r:id="rId3">
+            <p14:nvContentPartPr>
+              <p14:cNvPr id="26" name="Ink 25">
+                <a:extLst>
+                  <a:ext uri="{FF2B5EF4-FFF2-40B4-BE49-F238E27FC236}">
+                    <a16:creationId xmlns:a16="http://schemas.microsoft.com/office/drawing/2014/main" id="{8ABF1F0A-E30E-8EE1-3932-7CAC6C3CA0E2}"/>
+                  </a:ext>
+                </a:extLst>
+              </p14:cNvPr>
+              <p14:cNvContentPartPr/>
+              <p14:nvPr/>
+            </p14:nvContentPartPr>
+            <p14:xfrm>
+              <a:off x="500040" y="1800360"/>
+              <a:ext cx="7229880" cy="2824920"/>
+            </p14:xfrm>
+          </p:contentPart>
+        </mc:Choice>
+        <mc:Fallback>
+          <p:pic>
+            <p:nvPicPr>
+              <p:cNvPr id="26" name="Ink 25">
+                <a:extLst>
+                  <a:ext uri="{FF2B5EF4-FFF2-40B4-BE49-F238E27FC236}">
+                    <a16:creationId xmlns:a16="http://schemas.microsoft.com/office/drawing/2014/main" id="{8ABF1F0A-E30E-8EE1-3932-7CAC6C3CA0E2}"/>
+                  </a:ext>
+                </a:extLst>
+              </p:cNvPr>
+              <p:cNvPicPr/>
+              <p:nvPr/>
+            </p:nvPicPr>
+            <p:blipFill>
+              <a:blip r:embed="rId4"/>
+              <a:stretch>
+                <a:fillRect/>
+              </a:stretch>
+            </p:blipFill>
+            <p:spPr>
+              <a:xfrm>
+                <a:off x="490680" y="1791000"/>
+                <a:ext cx="7248600" cy="2843640"/>
+              </a:xfrm>
+              <a:prstGeom prst="rect">
+                <a:avLst/>
+              </a:prstGeom>
+            </p:spPr>
+          </p:pic>
+        </mc:Fallback>
+      </mc:AlternateContent>
     </p:spTree>
   </p:cSld>
   <p:clrMapOvr>
@@ -15135,8 +15921,8 @@
         </p:nvSpPr>
         <p:spPr>
           <a:xfrm>
-            <a:off x="320040" y="3200400"/>
-            <a:ext cx="8503920" cy="566928"/>
+            <a:off x="320039" y="3200400"/>
+            <a:ext cx="6430165" cy="566928"/>
           </a:xfrm>
           <a:prstGeom prst="rect">
             <a:avLst/>
@@ -15167,8 +15953,8 @@
         </p:nvSpPr>
         <p:spPr>
           <a:xfrm>
-            <a:off x="457200" y="3200400"/>
-            <a:ext cx="8321040" cy="566928"/>
+            <a:off x="365760" y="3209544"/>
+            <a:ext cx="7060952" cy="566928"/>
           </a:xfrm>
           <a:prstGeom prst="rect">
             <a:avLst/>
@@ -15192,12 +15978,140 @@
                 <a:ea typeface="Calibri" pitchFamily="34" charset="-122"/>
                 <a:cs typeface="Calibri" pitchFamily="34" charset="-120"/>
               </a:rPr>
-              <a:t>Valid indices:   0  to  len(L)−1  (positive)     ·     −len(L)  to  −1  (negative)     ·     L[-1]  =  last item</a:t>
+              <a:t>Positive</a:t>
+            </a:r>
+            <a:r>
+              <a:rPr lang="en-US" sz="1300" dirty="0">
+                <a:solidFill>
+                  <a:srgbClr val="1E8449"/>
+                </a:solidFill>
+                <a:latin typeface="Calibri" pitchFamily="34" charset="0"/>
+                <a:ea typeface="Calibri" pitchFamily="34" charset="-122"/>
+                <a:cs typeface="Calibri" pitchFamily="34" charset="-120"/>
+              </a:rPr>
+              <a:t>: 0  to  len(L)−1           </a:t>
+            </a:r>
+            <a:r>
+              <a:rPr lang="en-US" sz="1300" b="1" dirty="0">
+                <a:solidFill>
+                  <a:srgbClr val="1E8449"/>
+                </a:solidFill>
+                <a:latin typeface="Calibri" pitchFamily="34" charset="0"/>
+                <a:ea typeface="Calibri" pitchFamily="34" charset="-122"/>
+                <a:cs typeface="Calibri" pitchFamily="34" charset="-120"/>
+              </a:rPr>
+              <a:t>Negative</a:t>
+            </a:r>
+            <a:r>
+              <a:rPr lang="en-US" sz="1300" dirty="0">
+                <a:solidFill>
+                  <a:srgbClr val="1E8449"/>
+                </a:solidFill>
+                <a:latin typeface="Calibri" pitchFamily="34" charset="0"/>
+                <a:ea typeface="Calibri" pitchFamily="34" charset="-122"/>
+                <a:cs typeface="Calibri" pitchFamily="34" charset="-120"/>
+              </a:rPr>
+              <a:t>: −len(L)  to  −1         </a:t>
+            </a:r>
+            <a:r>
+              <a:rPr lang="en-US" sz="1300" b="1" dirty="0">
+                <a:solidFill>
+                  <a:srgbClr val="1E8449"/>
+                </a:solidFill>
+                <a:latin typeface="Calibri" pitchFamily="34" charset="0"/>
+                <a:ea typeface="Calibri" pitchFamily="34" charset="-122"/>
+                <a:cs typeface="Calibri" pitchFamily="34" charset="-120"/>
+              </a:rPr>
+              <a:t>First item</a:t>
+            </a:r>
+            <a:r>
+              <a:rPr lang="en-US" sz="1300" dirty="0">
+                <a:solidFill>
+                  <a:srgbClr val="1E8449"/>
+                </a:solidFill>
+                <a:latin typeface="Calibri" pitchFamily="34" charset="0"/>
+                <a:ea typeface="Calibri" pitchFamily="34" charset="-122"/>
+                <a:cs typeface="Calibri" pitchFamily="34" charset="-120"/>
+              </a:rPr>
+              <a:t>: L[0]          </a:t>
+            </a:r>
+            <a:r>
+              <a:rPr lang="en-US" sz="1300" b="1" dirty="0">
+                <a:solidFill>
+                  <a:srgbClr val="1E8449"/>
+                </a:solidFill>
+                <a:latin typeface="Calibri" pitchFamily="34" charset="0"/>
+                <a:ea typeface="Calibri" pitchFamily="34" charset="-122"/>
+                <a:cs typeface="Calibri" pitchFamily="34" charset="-120"/>
+              </a:rPr>
+              <a:t>Last item</a:t>
+            </a:r>
+            <a:r>
+              <a:rPr lang="en-US" sz="1300" dirty="0">
+                <a:solidFill>
+                  <a:srgbClr val="1E8449"/>
+                </a:solidFill>
+                <a:latin typeface="Calibri" pitchFamily="34" charset="0"/>
+                <a:ea typeface="Calibri" pitchFamily="34" charset="-122"/>
+                <a:cs typeface="Calibri" pitchFamily="34" charset="-120"/>
+              </a:rPr>
+              <a:t>: L[-1]</a:t>
             </a:r>
             <a:endParaRPr lang="en-US" sz="1300" dirty="0"/>
           </a:p>
         </p:txBody>
       </p:sp>
+      <mc:AlternateContent xmlns:mc="http://schemas.openxmlformats.org/markup-compatibility/2006">
+        <mc:Choice xmlns:p14="http://schemas.microsoft.com/office/powerpoint/2010/main" Requires="p14">
+          <p:contentPart p14:bwMode="auto" r:id="rId3">
+            <p14:nvContentPartPr>
+              <p14:cNvPr id="37" name="Ink 36">
+                <a:extLst>
+                  <a:ext uri="{FF2B5EF4-FFF2-40B4-BE49-F238E27FC236}">
+                    <a16:creationId xmlns:a16="http://schemas.microsoft.com/office/drawing/2014/main" id="{B980FBD9-6779-F3B3-FE18-AB5188207E60}"/>
+                  </a:ext>
+                </a:extLst>
+              </p14:cNvPr>
+              <p14:cNvContentPartPr/>
+              <p14:nvPr/>
+            </p14:nvContentPartPr>
+            <p14:xfrm>
+              <a:off x="861840" y="1176480"/>
+              <a:ext cx="7930080" cy="2643480"/>
+            </p14:xfrm>
+          </p:contentPart>
+        </mc:Choice>
+        <mc:Fallback>
+          <p:pic>
+            <p:nvPicPr>
+              <p:cNvPr id="37" name="Ink 36">
+                <a:extLst>
+                  <a:ext uri="{FF2B5EF4-FFF2-40B4-BE49-F238E27FC236}">
+                    <a16:creationId xmlns:a16="http://schemas.microsoft.com/office/drawing/2014/main" id="{B980FBD9-6779-F3B3-FE18-AB5188207E60}"/>
+                  </a:ext>
+                </a:extLst>
+              </p:cNvPr>
+              <p:cNvPicPr/>
+              <p:nvPr/>
+            </p:nvPicPr>
+            <p:blipFill>
+              <a:blip r:embed="rId4"/>
+              <a:stretch>
+                <a:fillRect/>
+              </a:stretch>
+            </p:blipFill>
+            <p:spPr>
+              <a:xfrm>
+                <a:off x="852480" y="1167120"/>
+                <a:ext cx="7948800" cy="2662200"/>
+              </a:xfrm>
+              <a:prstGeom prst="rect">
+                <a:avLst/>
+              </a:prstGeom>
+            </p:spPr>
+          </p:pic>
+        </mc:Fallback>
+      </mc:AlternateContent>
     </p:spTree>
   </p:cSld>
   <p:clrMapOvr>
@@ -16479,6 +17393,57 @@
           </a:p>
         </p:txBody>
       </p:sp>
+      <mc:AlternateContent xmlns:mc="http://schemas.openxmlformats.org/markup-compatibility/2006">
+        <mc:Choice xmlns:p14="http://schemas.microsoft.com/office/powerpoint/2010/main" Requires="p14">
+          <p:contentPart p14:bwMode="auto" r:id="rId3">
+            <p14:nvContentPartPr>
+              <p14:cNvPr id="27" name="Ink 26">
+                <a:extLst>
+                  <a:ext uri="{FF2B5EF4-FFF2-40B4-BE49-F238E27FC236}">
+                    <a16:creationId xmlns:a16="http://schemas.microsoft.com/office/drawing/2014/main" id="{C286CF21-8102-4471-4718-F3983EAF6BC6}"/>
+                  </a:ext>
+                </a:extLst>
+              </p14:cNvPr>
+              <p14:cNvContentPartPr/>
+              <p14:nvPr/>
+            </p14:nvContentPartPr>
+            <p14:xfrm>
+              <a:off x="1495440" y="1066680"/>
+              <a:ext cx="4929480" cy="2277000"/>
+            </p14:xfrm>
+          </p:contentPart>
+        </mc:Choice>
+        <mc:Fallback>
+          <p:pic>
+            <p:nvPicPr>
+              <p:cNvPr id="27" name="Ink 26">
+                <a:extLst>
+                  <a:ext uri="{FF2B5EF4-FFF2-40B4-BE49-F238E27FC236}">
+                    <a16:creationId xmlns:a16="http://schemas.microsoft.com/office/drawing/2014/main" id="{C286CF21-8102-4471-4718-F3983EAF6BC6}"/>
+                  </a:ext>
+                </a:extLst>
+              </p:cNvPr>
+              <p:cNvPicPr/>
+              <p:nvPr/>
+            </p:nvPicPr>
+            <p:blipFill>
+              <a:blip r:embed="rId4"/>
+              <a:stretch>
+                <a:fillRect/>
+              </a:stretch>
+            </p:blipFill>
+            <p:spPr>
+              <a:xfrm>
+                <a:off x="1486080" y="1057320"/>
+                <a:ext cx="4948200" cy="2295720"/>
+              </a:xfrm>
+              <a:prstGeom prst="rect">
+                <a:avLst/>
+              </a:prstGeom>
+            </p:spPr>
+          </p:pic>
+        </mc:Fallback>
+      </mc:AlternateContent>
     </p:spTree>
   </p:cSld>
   <p:clrMapOvr>
@@ -17152,7 +18117,7 @@
             <a:r>
               <a:rPr lang="en-US" sz="1150" dirty="0">
                 <a:solidFill>
-                  <a:srgbClr val="A9CCE3"/>
+                  <a:srgbClr val="FFFF00"/>
                 </a:solidFill>
                 <a:latin typeface="Consolas" pitchFamily="34" charset="0"/>
                 <a:ea typeface="Consolas" pitchFamily="34" charset="-122"/>
@@ -17160,7 +18125,11 @@
               </a:rPr>
               <a:t>s[0] = "H"</a:t>
             </a:r>
-            <a:endParaRPr lang="en-US" sz="1150" dirty="0"/>
+            <a:endParaRPr lang="en-US" sz="1150" dirty="0">
+              <a:solidFill>
+                <a:srgbClr val="FFFF00"/>
+              </a:solidFill>
+            </a:endParaRPr>
           </a:p>
           <a:p>
             <a:pPr marL="0" indent="0">
@@ -17595,6 +18564,57 @@
           </a:p>
         </p:txBody>
       </p:sp>
+      <mc:AlternateContent xmlns:mc="http://schemas.openxmlformats.org/markup-compatibility/2006">
+        <mc:Choice xmlns:p14="http://schemas.microsoft.com/office/powerpoint/2010/main" Requires="p14">
+          <p:contentPart p14:bwMode="auto" r:id="rId3">
+            <p14:nvContentPartPr>
+              <p14:cNvPr id="16" name="Ink 15">
+                <a:extLst>
+                  <a:ext uri="{FF2B5EF4-FFF2-40B4-BE49-F238E27FC236}">
+                    <a16:creationId xmlns:a16="http://schemas.microsoft.com/office/drawing/2014/main" id="{1CCAD1A3-0194-3C0E-0413-87D5C6ED24D7}"/>
+                  </a:ext>
+                </a:extLst>
+              </p14:cNvPr>
+              <p14:cNvContentPartPr/>
+              <p14:nvPr/>
+            </p14:nvContentPartPr>
+            <p14:xfrm>
+              <a:off x="576360" y="1585800"/>
+              <a:ext cx="5553360" cy="591480"/>
+            </p14:xfrm>
+          </p:contentPart>
+        </mc:Choice>
+        <mc:Fallback>
+          <p:pic>
+            <p:nvPicPr>
+              <p:cNvPr id="16" name="Ink 15">
+                <a:extLst>
+                  <a:ext uri="{FF2B5EF4-FFF2-40B4-BE49-F238E27FC236}">
+                    <a16:creationId xmlns:a16="http://schemas.microsoft.com/office/drawing/2014/main" id="{1CCAD1A3-0194-3C0E-0413-87D5C6ED24D7}"/>
+                  </a:ext>
+                </a:extLst>
+              </p:cNvPr>
+              <p:cNvPicPr/>
+              <p:nvPr/>
+            </p:nvPicPr>
+            <p:blipFill>
+              <a:blip r:embed="rId4"/>
+              <a:stretch>
+                <a:fillRect/>
+              </a:stretch>
+            </p:blipFill>
+            <p:spPr>
+              <a:xfrm>
+                <a:off x="567000" y="1576440"/>
+                <a:ext cx="5572080" cy="610200"/>
+              </a:xfrm>
+              <a:prstGeom prst="rect">
+                <a:avLst/>
+              </a:prstGeom>
+            </p:spPr>
+          </p:pic>
+        </mc:Fallback>
+      </mc:AlternateContent>
     </p:spTree>
   </p:cSld>
   <p:clrMapOvr>
@@ -18439,7 +19459,7 @@
         <p:spPr>
           <a:xfrm>
             <a:off x="7040880" y="1261872"/>
-            <a:ext cx="1828800" cy="3401568"/>
+            <a:ext cx="1828800" cy="2024021"/>
           </a:xfrm>
           <a:prstGeom prst="rect">
             <a:avLst/>
@@ -18458,7 +19478,7 @@
           <a:bodyPr/>
           <a:lstStyle/>
           <a:p>
-            <a:endParaRPr lang="en-US"/>
+            <a:endParaRPr lang="en-US" dirty="0"/>
           </a:p>
         </p:txBody>
       </p:sp>
@@ -18495,7 +19515,7 @@
                 <a:ea typeface="Calibri" pitchFamily="34" charset="-122"/>
                 <a:cs typeface="Calibri" pitchFamily="34" charset="-120"/>
               </a:rPr>
-              <a:t>For == to be True:</a:t>
+              <a:t>For L1 == L2 to be True:</a:t>
             </a:r>
             <a:endParaRPr lang="en-US" sz="1250" dirty="0"/>
           </a:p>
@@ -18654,7 +19674,7 @@
         </p:nvSpPr>
         <p:spPr>
           <a:xfrm>
-            <a:off x="7150608" y="3127248"/>
+            <a:off x="7150608" y="2862072"/>
             <a:ext cx="1600200" cy="329184"/>
           </a:xfrm>
           <a:prstGeom prst="rect">
@@ -18773,6 +19793,57 @@
           </a:fontRef>
         </p:style>
       </p:cxnSp>
+      <mc:AlternateContent xmlns:mc="http://schemas.openxmlformats.org/markup-compatibility/2006">
+        <mc:Choice xmlns:p14="http://schemas.microsoft.com/office/powerpoint/2010/main" Requires="p14">
+          <p:contentPart p14:bwMode="auto" r:id="rId3">
+            <p14:nvContentPartPr>
+              <p14:cNvPr id="31" name="Ink 30">
+                <a:extLst>
+                  <a:ext uri="{FF2B5EF4-FFF2-40B4-BE49-F238E27FC236}">
+                    <a16:creationId xmlns:a16="http://schemas.microsoft.com/office/drawing/2014/main" id="{44662D62-A633-8C95-7424-75AEE303D3F8}"/>
+                  </a:ext>
+                </a:extLst>
+              </p14:cNvPr>
+              <p14:cNvContentPartPr/>
+              <p14:nvPr/>
+            </p14:nvContentPartPr>
+            <p14:xfrm>
+              <a:off x="385920" y="2761920"/>
+              <a:ext cx="2328480" cy="1734120"/>
+            </p14:xfrm>
+          </p:contentPart>
+        </mc:Choice>
+        <mc:Fallback>
+          <p:pic>
+            <p:nvPicPr>
+              <p:cNvPr id="31" name="Ink 30">
+                <a:extLst>
+                  <a:ext uri="{FF2B5EF4-FFF2-40B4-BE49-F238E27FC236}">
+                    <a16:creationId xmlns:a16="http://schemas.microsoft.com/office/drawing/2014/main" id="{44662D62-A633-8C95-7424-75AEE303D3F8}"/>
+                  </a:ext>
+                </a:extLst>
+              </p:cNvPr>
+              <p:cNvPicPr/>
+              <p:nvPr/>
+            </p:nvPicPr>
+            <p:blipFill>
+              <a:blip r:embed="rId4"/>
+              <a:stretch>
+                <a:fillRect/>
+              </a:stretch>
+            </p:blipFill>
+            <p:spPr>
+              <a:xfrm>
+                <a:off x="376560" y="2752560"/>
+                <a:ext cx="2347200" cy="1752840"/>
+              </a:xfrm>
+              <a:prstGeom prst="rect">
+                <a:avLst/>
+              </a:prstGeom>
+            </p:spPr>
+          </p:pic>
+        </mc:Fallback>
+      </mc:AlternateContent>
     </p:spTree>
   </p:cSld>
   <p:clrMapOvr>
@@ -19402,7 +20473,7 @@
               <a:buNone/>
             </a:pPr>
             <a:r>
-              <a:rPr lang="en-US" sz="1350" dirty="0">
+              <a:rPr lang="en-US" sz="1350" b="1" dirty="0">
                 <a:solidFill>
                   <a:srgbClr val="1E2A3A"/>
                 </a:solidFill>
@@ -19410,12 +20481,74 @@
                 <a:ea typeface="Calibri" pitchFamily="34" charset="-122"/>
                 <a:cs typeface="Calibri" pitchFamily="34" charset="-120"/>
               </a:rPr>
-              <a:t>Note:  am + pm  creates a new list — it does NOT change  am  or  pm.  + and * don’t change the original lists</a:t>
+              <a:t>Note</a:t>
+            </a:r>
+            <a:r>
+              <a:rPr lang="en-US" sz="1350" dirty="0">
+                <a:solidFill>
+                  <a:srgbClr val="1E2A3A"/>
+                </a:solidFill>
+                <a:latin typeface="Calibri" pitchFamily="34" charset="0"/>
+                <a:ea typeface="Calibri" pitchFamily="34" charset="-122"/>
+                <a:cs typeface="Calibri" pitchFamily="34" charset="-120"/>
+              </a:rPr>
+              <a:t>:  am + pm  creates a new list — it does NOT change  am  or  pm.  + and * don’t change the original lists</a:t>
             </a:r>
             <a:endParaRPr lang="en-US" sz="1350" dirty="0"/>
           </a:p>
         </p:txBody>
       </p:sp>
+      <mc:AlternateContent xmlns:mc="http://schemas.openxmlformats.org/markup-compatibility/2006">
+        <mc:Choice xmlns:p14="http://schemas.microsoft.com/office/powerpoint/2010/main" Requires="p14">
+          <p:contentPart p14:bwMode="auto" r:id="rId3">
+            <p14:nvContentPartPr>
+              <p14:cNvPr id="14" name="Ink 13">
+                <a:extLst>
+                  <a:ext uri="{FF2B5EF4-FFF2-40B4-BE49-F238E27FC236}">
+                    <a16:creationId xmlns:a16="http://schemas.microsoft.com/office/drawing/2014/main" id="{29769CE4-08CC-C860-C587-8BFD3575B619}"/>
+                  </a:ext>
+                </a:extLst>
+              </p14:cNvPr>
+              <p14:cNvContentPartPr/>
+              <p14:nvPr/>
+            </p14:nvContentPartPr>
+            <p14:xfrm>
+              <a:off x="509760" y="419040"/>
+              <a:ext cx="6391800" cy="2710440"/>
+            </p14:xfrm>
+          </p:contentPart>
+        </mc:Choice>
+        <mc:Fallback>
+          <p:pic>
+            <p:nvPicPr>
+              <p:cNvPr id="14" name="Ink 13">
+                <a:extLst>
+                  <a:ext uri="{FF2B5EF4-FFF2-40B4-BE49-F238E27FC236}">
+                    <a16:creationId xmlns:a16="http://schemas.microsoft.com/office/drawing/2014/main" id="{29769CE4-08CC-C860-C587-8BFD3575B619}"/>
+                  </a:ext>
+                </a:extLst>
+              </p:cNvPr>
+              <p:cNvPicPr/>
+              <p:nvPr/>
+            </p:nvPicPr>
+            <p:blipFill>
+              <a:blip r:embed="rId4"/>
+              <a:stretch>
+                <a:fillRect/>
+              </a:stretch>
+            </p:blipFill>
+            <p:spPr>
+              <a:xfrm>
+                <a:off x="500400" y="409680"/>
+                <a:ext cx="6410520" cy="2729160"/>
+              </a:xfrm>
+              <a:prstGeom prst="rect">
+                <a:avLst/>
+              </a:prstGeom>
+            </p:spPr>
+          </p:pic>
+        </mc:Fallback>
+      </mc:AlternateContent>
     </p:spTree>
   </p:cSld>
   <p:clrMapOvr>

--- a/lecture_notes/chapter9/chapter9_slides.pptx
+++ b/lecture_notes/chapter9/chapter9_slides.pptx
@@ -5,7 +5,7 @@
     <p:sldMasterId id="2147483648" r:id="rId1"/>
   </p:sldMasterIdLst>
   <p:notesMasterIdLst>
-    <p:notesMasterId r:id="rId23"/>
+    <p:notesMasterId r:id="rId26"/>
   </p:notesMasterIdLst>
   <p:sldIdLst>
     <p:sldId id="256" r:id="rId2"/>
@@ -26,9 +26,12 @@
     <p:sldId id="271" r:id="rId17"/>
     <p:sldId id="272" r:id="rId18"/>
     <p:sldId id="273" r:id="rId19"/>
-    <p:sldId id="274" r:id="rId20"/>
-    <p:sldId id="275" r:id="rId21"/>
-    <p:sldId id="276" r:id="rId22"/>
+    <p:sldId id="277" r:id="rId20"/>
+    <p:sldId id="274" r:id="rId21"/>
+    <p:sldId id="278" r:id="rId22"/>
+    <p:sldId id="279" r:id="rId23"/>
+    <p:sldId id="275" r:id="rId24"/>
+    <p:sldId id="276" r:id="rId25"/>
   </p:sldIdLst>
   <p:sldSz cx="9144000" cy="5143500" type="screen16x9"/>
   <p:notesSz cx="5143500" cy="9144000"/>
@@ -135,7 +138,7 @@
 <file path=ppt/revisionInfo.xml><?xml version="1.0" encoding="utf-8"?>
 <p1510:revInfo xmlns:a="http://schemas.openxmlformats.org/drawingml/2006/main" xmlns:r="http://schemas.openxmlformats.org/officeDocument/2006/relationships" xmlns:p1510="http://schemas.microsoft.com/office/powerpoint/2015/10/main">
   <p1510:revLst>
-    <p1510:client id="{AD7EFBF9-7862-184F-B789-7E4741E47F74}" v="3" dt="2026-03-16T17:09:31.259"/>
+    <p1510:client id="{AD7EFBF9-7862-184F-B789-7E4741E47F74}" v="5" dt="2026-03-18T17:04:39.452"/>
   </p1510:revLst>
 </p1510:revInfo>
 </file>
@@ -144,8 +147,8 @@
 <pc:chgInfo xmlns:a="http://schemas.openxmlformats.org/drawingml/2006/main" xmlns:r="http://schemas.openxmlformats.org/officeDocument/2006/relationships" xmlns:ac="http://schemas.microsoft.com/office/drawing/2013/main/command" xmlns:pc="http://schemas.microsoft.com/office/powerpoint/2013/main/command">
   <pc:docChgLst>
     <pc:chgData name="Toby Donaldson" userId="2e6e5431-bb17-4c41-9985-d39c50d83c73" providerId="ADAL" clId="{F31BC264-820E-54C4-A6D1-F92AF9CC222E}"/>
-    <pc:docChg chg="undo custSel modSld">
-      <pc:chgData name="Toby Donaldson" userId="2e6e5431-bb17-4c41-9985-d39c50d83c73" providerId="ADAL" clId="{F31BC264-820E-54C4-A6D1-F92AF9CC222E}" dt="2026-03-16T17:09:31.259" v="222"/>
+    <pc:docChg chg="undo custSel addSld delSld modSld">
+      <pc:chgData name="Toby Donaldson" userId="2e6e5431-bb17-4c41-9985-d39c50d83c73" providerId="ADAL" clId="{F31BC264-820E-54C4-A6D1-F92AF9CC222E}" dt="2026-03-18T17:04:39.449" v="245"/>
       <pc:docMkLst>
         <pc:docMk/>
       </pc:docMkLst>
@@ -327,7 +330,7 @@
         </pc:inkChg>
       </pc:sldChg>
       <pc:sldChg chg="addSp modSp mod">
-        <pc:chgData name="Toby Donaldson" userId="2e6e5431-bb17-4c41-9985-d39c50d83c73" providerId="ADAL" clId="{F31BC264-820E-54C4-A6D1-F92AF9CC222E}" dt="2026-03-16T17:09:31.259" v="222"/>
+        <pc:chgData name="Toby Donaldson" userId="2e6e5431-bb17-4c41-9985-d39c50d83c73" providerId="ADAL" clId="{F31BC264-820E-54C4-A6D1-F92AF9CC222E}" dt="2026-03-18T16:44:32.387" v="244"/>
         <pc:sldMkLst>
           <pc:docMk/>
           <pc:sldMk cId="0" sldId="266"/>
@@ -380,9 +383,17 @@
             <ac:inkMk id="11" creationId="{2E615DBD-E872-71EA-254E-981D31610B1D}"/>
           </ac:inkMkLst>
         </pc:inkChg>
+        <pc:inkChg chg="add">
+          <ac:chgData name="Toby Donaldson" userId="2e6e5431-bb17-4c41-9985-d39c50d83c73" providerId="ADAL" clId="{F31BC264-820E-54C4-A6D1-F92AF9CC222E}" dt="2026-03-18T16:44:32.387" v="244"/>
+          <ac:inkMkLst>
+            <pc:docMk/>
+            <pc:sldMk cId="0" sldId="266"/>
+            <ac:inkMk id="12" creationId="{36DFCCDD-9E8D-3426-57E5-25475990E15A}"/>
+          </ac:inkMkLst>
+        </pc:inkChg>
       </pc:sldChg>
       <pc:sldChg chg="addSp modSp mod">
-        <pc:chgData name="Toby Donaldson" userId="2e6e5431-bb17-4c41-9985-d39c50d83c73" providerId="ADAL" clId="{F31BC264-820E-54C4-A6D1-F92AF9CC222E}" dt="2026-03-16T17:09:31.259" v="222"/>
+        <pc:chgData name="Toby Donaldson" userId="2e6e5431-bb17-4c41-9985-d39c50d83c73" providerId="ADAL" clId="{F31BC264-820E-54C4-A6D1-F92AF9CC222E}" dt="2026-03-18T16:44:32.387" v="244"/>
         <pc:sldMkLst>
           <pc:docMk/>
           <pc:sldMk cId="0" sldId="267"/>
@@ -411,9 +422,17 @@
             <ac:inkMk id="18" creationId="{0AADD438-2C0B-7318-870A-0CDB60D34154}"/>
           </ac:inkMkLst>
         </pc:inkChg>
+        <pc:inkChg chg="add">
+          <ac:chgData name="Toby Donaldson" userId="2e6e5431-bb17-4c41-9985-d39c50d83c73" providerId="ADAL" clId="{F31BC264-820E-54C4-A6D1-F92AF9CC222E}" dt="2026-03-18T16:44:32.387" v="244"/>
+          <ac:inkMkLst>
+            <pc:docMk/>
+            <pc:sldMk cId="0" sldId="267"/>
+            <ac:inkMk id="19" creationId="{F36B5213-4988-3A14-5177-1C1DCC96DE62}"/>
+          </ac:inkMkLst>
+        </pc:inkChg>
       </pc:sldChg>
       <pc:sldChg chg="addSp modSp mod">
-        <pc:chgData name="Toby Donaldson" userId="2e6e5431-bb17-4c41-9985-d39c50d83c73" providerId="ADAL" clId="{F31BC264-820E-54C4-A6D1-F92AF9CC222E}" dt="2026-03-16T17:09:31.259" v="222"/>
+        <pc:chgData name="Toby Donaldson" userId="2e6e5431-bb17-4c41-9985-d39c50d83c73" providerId="ADAL" clId="{F31BC264-820E-54C4-A6D1-F92AF9CC222E}" dt="2026-03-18T16:44:32.387" v="244"/>
         <pc:sldMkLst>
           <pc:docMk/>
           <pc:sldMk cId="0" sldId="268"/>
@@ -440,6 +459,165 @@
             <pc:docMk/>
             <pc:sldMk cId="0" sldId="268"/>
             <ac:inkMk id="17" creationId="{BBE1AEAE-DB96-97A3-A8DF-1E4F5BA51BAC}"/>
+          </ac:inkMkLst>
+        </pc:inkChg>
+        <pc:inkChg chg="add">
+          <ac:chgData name="Toby Donaldson" userId="2e6e5431-bb17-4c41-9985-d39c50d83c73" providerId="ADAL" clId="{F31BC264-820E-54C4-A6D1-F92AF9CC222E}" dt="2026-03-18T16:44:32.387" v="244"/>
+          <ac:inkMkLst>
+            <pc:docMk/>
+            <pc:sldMk cId="0" sldId="268"/>
+            <ac:inkMk id="18" creationId="{961775C1-9E93-5339-9A96-21B61FF4DB12}"/>
+          </ac:inkMkLst>
+        </pc:inkChg>
+      </pc:sldChg>
+      <pc:sldChg chg="addSp">
+        <pc:chgData name="Toby Donaldson" userId="2e6e5431-bb17-4c41-9985-d39c50d83c73" providerId="ADAL" clId="{F31BC264-820E-54C4-A6D1-F92AF9CC222E}" dt="2026-03-18T16:44:32.387" v="244"/>
+        <pc:sldMkLst>
+          <pc:docMk/>
+          <pc:sldMk cId="0" sldId="270"/>
+        </pc:sldMkLst>
+        <pc:inkChg chg="add">
+          <ac:chgData name="Toby Donaldson" userId="2e6e5431-bb17-4c41-9985-d39c50d83c73" providerId="ADAL" clId="{F31BC264-820E-54C4-A6D1-F92AF9CC222E}" dt="2026-03-18T16:44:32.387" v="244"/>
+          <ac:inkMkLst>
+            <pc:docMk/>
+            <pc:sldMk cId="0" sldId="270"/>
+            <ac:inkMk id="21" creationId="{0790BBD7-B8CE-07A3-1EEE-4CE0F5F1AD9E}"/>
+          </ac:inkMkLst>
+        </pc:inkChg>
+      </pc:sldChg>
+      <pc:sldChg chg="addSp">
+        <pc:chgData name="Toby Donaldson" userId="2e6e5431-bb17-4c41-9985-d39c50d83c73" providerId="ADAL" clId="{F31BC264-820E-54C4-A6D1-F92AF9CC222E}" dt="2026-03-18T17:04:39.449" v="245"/>
+        <pc:sldMkLst>
+          <pc:docMk/>
+          <pc:sldMk cId="0" sldId="271"/>
+        </pc:sldMkLst>
+        <pc:inkChg chg="add">
+          <ac:chgData name="Toby Donaldson" userId="2e6e5431-bb17-4c41-9985-d39c50d83c73" providerId="ADAL" clId="{F31BC264-820E-54C4-A6D1-F92AF9CC222E}" dt="2026-03-18T17:04:39.449" v="245"/>
+          <ac:inkMkLst>
+            <pc:docMk/>
+            <pc:sldMk cId="0" sldId="271"/>
+            <ac:inkMk id="12" creationId="{06EA1499-FDD5-117C-4DD0-8046AE05BF9B}"/>
+          </ac:inkMkLst>
+        </pc:inkChg>
+      </pc:sldChg>
+      <pc:sldChg chg="addSp modSp mod">
+        <pc:chgData name="Toby Donaldson" userId="2e6e5431-bb17-4c41-9985-d39c50d83c73" providerId="ADAL" clId="{F31BC264-820E-54C4-A6D1-F92AF9CC222E}" dt="2026-03-18T17:04:39.449" v="245"/>
+        <pc:sldMkLst>
+          <pc:docMk/>
+          <pc:sldMk cId="0" sldId="273"/>
+        </pc:sldMkLst>
+        <pc:spChg chg="mod">
+          <ac:chgData name="Toby Donaldson" userId="2e6e5431-bb17-4c41-9985-d39c50d83c73" providerId="ADAL" clId="{F31BC264-820E-54C4-A6D1-F92AF9CC222E}" dt="2026-03-18T02:52:32.101" v="224" actId="20577"/>
+          <ac:spMkLst>
+            <pc:docMk/>
+            <pc:sldMk cId="0" sldId="273"/>
+            <ac:spMk id="11" creationId="{00000000-0000-0000-0000-000000000000}"/>
+          </ac:spMkLst>
+        </pc:spChg>
+        <pc:inkChg chg="add">
+          <ac:chgData name="Toby Donaldson" userId="2e6e5431-bb17-4c41-9985-d39c50d83c73" providerId="ADAL" clId="{F31BC264-820E-54C4-A6D1-F92AF9CC222E}" dt="2026-03-18T17:04:39.449" v="245"/>
+          <ac:inkMkLst>
+            <pc:docMk/>
+            <pc:sldMk cId="0" sldId="273"/>
+            <ac:inkMk id="14" creationId="{A3D62174-7328-BB48-1F49-BA4C9068F9A4}"/>
+          </ac:inkMkLst>
+        </pc:inkChg>
+      </pc:sldChg>
+      <pc:sldChg chg="addSp modSp mod">
+        <pc:chgData name="Toby Donaldson" userId="2e6e5431-bb17-4c41-9985-d39c50d83c73" providerId="ADAL" clId="{F31BC264-820E-54C4-A6D1-F92AF9CC222E}" dt="2026-03-18T17:04:39.449" v="245"/>
+        <pc:sldMkLst>
+          <pc:docMk/>
+          <pc:sldMk cId="0" sldId="274"/>
+        </pc:sldMkLst>
+        <pc:spChg chg="mod">
+          <ac:chgData name="Toby Donaldson" userId="2e6e5431-bb17-4c41-9985-d39c50d83c73" providerId="ADAL" clId="{F31BC264-820E-54C4-A6D1-F92AF9CC222E}" dt="2026-03-18T02:53:27.384" v="227" actId="20577"/>
+          <ac:spMkLst>
+            <pc:docMk/>
+            <pc:sldMk cId="0" sldId="274"/>
+            <ac:spMk id="43" creationId="{00000000-0000-0000-0000-000000000000}"/>
+          </ac:spMkLst>
+        </pc:spChg>
+        <pc:inkChg chg="add">
+          <ac:chgData name="Toby Donaldson" userId="2e6e5431-bb17-4c41-9985-d39c50d83c73" providerId="ADAL" clId="{F31BC264-820E-54C4-A6D1-F92AF9CC222E}" dt="2026-03-18T17:04:39.449" v="245"/>
+          <ac:inkMkLst>
+            <pc:docMk/>
+            <pc:sldMk cId="0" sldId="274"/>
+            <ac:inkMk id="26" creationId="{8EDCE6FF-1EC2-CDD1-F089-5515B7D8FAE5}"/>
+          </ac:inkMkLst>
+        </pc:inkChg>
+      </pc:sldChg>
+      <pc:sldChg chg="addSp modSp mod">
+        <pc:chgData name="Toby Donaldson" userId="2e6e5431-bb17-4c41-9985-d39c50d83c73" providerId="ADAL" clId="{F31BC264-820E-54C4-A6D1-F92AF9CC222E}" dt="2026-03-18T17:04:39.449" v="245"/>
+        <pc:sldMkLst>
+          <pc:docMk/>
+          <pc:sldMk cId="0" sldId="276"/>
+        </pc:sldMkLst>
+        <pc:spChg chg="mod">
+          <ac:chgData name="Toby Donaldson" userId="2e6e5431-bb17-4c41-9985-d39c50d83c73" providerId="ADAL" clId="{F31BC264-820E-54C4-A6D1-F92AF9CC222E}" dt="2026-03-18T02:55:14.237" v="243" actId="20577"/>
+          <ac:spMkLst>
+            <pc:docMk/>
+            <pc:sldMk cId="0" sldId="276"/>
+            <ac:spMk id="28" creationId="{00000000-0000-0000-0000-000000000000}"/>
+          </ac:spMkLst>
+        </pc:spChg>
+        <pc:inkChg chg="add">
+          <ac:chgData name="Toby Donaldson" userId="2e6e5431-bb17-4c41-9985-d39c50d83c73" providerId="ADAL" clId="{F31BC264-820E-54C4-A6D1-F92AF9CC222E}" dt="2026-03-18T17:04:39.449" v="245"/>
+          <ac:inkMkLst>
+            <pc:docMk/>
+            <pc:sldMk cId="0" sldId="276"/>
+            <ac:inkMk id="29" creationId="{6E4A094A-126A-EB60-BE51-89025A6026B0}"/>
+          </ac:inkMkLst>
+        </pc:inkChg>
+      </pc:sldChg>
+      <pc:sldChg chg="addSp add">
+        <pc:chgData name="Toby Donaldson" userId="2e6e5431-bb17-4c41-9985-d39c50d83c73" providerId="ADAL" clId="{F31BC264-820E-54C4-A6D1-F92AF9CC222E}" dt="2026-03-18T17:04:39.449" v="245"/>
+        <pc:sldMkLst>
+          <pc:docMk/>
+          <pc:sldMk cId="2288439714" sldId="277"/>
+        </pc:sldMkLst>
+        <pc:inkChg chg="add">
+          <ac:chgData name="Toby Donaldson" userId="2e6e5431-bb17-4c41-9985-d39c50d83c73" providerId="ADAL" clId="{F31BC264-820E-54C4-A6D1-F92AF9CC222E}" dt="2026-03-18T17:04:39.449" v="245"/>
+          <ac:inkMkLst>
+            <pc:docMk/>
+            <pc:sldMk cId="2288439714" sldId="277"/>
+            <ac:inkMk id="14" creationId="{464EE540-5604-CDFB-F16E-CCBC64640B76}"/>
+          </ac:inkMkLst>
+        </pc:inkChg>
+      </pc:sldChg>
+      <pc:sldChg chg="modSp add mod">
+        <pc:chgData name="Toby Donaldson" userId="2e6e5431-bb17-4c41-9985-d39c50d83c73" providerId="ADAL" clId="{F31BC264-820E-54C4-A6D1-F92AF9CC222E}" dt="2026-03-18T02:54:07.531" v="233" actId="20577"/>
+        <pc:sldMkLst>
+          <pc:docMk/>
+          <pc:sldMk cId="2689411123" sldId="278"/>
+        </pc:sldMkLst>
+        <pc:spChg chg="mod">
+          <ac:chgData name="Toby Donaldson" userId="2e6e5431-bb17-4c41-9985-d39c50d83c73" providerId="ADAL" clId="{F31BC264-820E-54C4-A6D1-F92AF9CC222E}" dt="2026-03-18T02:54:07.531" v="233" actId="20577"/>
+          <ac:spMkLst>
+            <pc:docMk/>
+            <pc:sldMk cId="2689411123" sldId="278"/>
+            <ac:spMk id="43" creationId="{2BE5DF54-9B94-8A59-0D12-753A3ADFECC1}"/>
+          </ac:spMkLst>
+        </pc:spChg>
+      </pc:sldChg>
+      <pc:sldChg chg="add del">
+        <pc:chgData name="Toby Donaldson" userId="2e6e5431-bb17-4c41-9985-d39c50d83c73" providerId="ADAL" clId="{F31BC264-820E-54C4-A6D1-F92AF9CC222E}" dt="2026-03-18T02:53:36.184" v="229" actId="2890"/>
+        <pc:sldMkLst>
+          <pc:docMk/>
+          <pc:sldMk cId="215279212" sldId="279"/>
+        </pc:sldMkLst>
+      </pc:sldChg>
+      <pc:sldChg chg="addSp add">
+        <pc:chgData name="Toby Donaldson" userId="2e6e5431-bb17-4c41-9985-d39c50d83c73" providerId="ADAL" clId="{F31BC264-820E-54C4-A6D1-F92AF9CC222E}" dt="2026-03-18T17:04:39.449" v="245"/>
+        <pc:sldMkLst>
+          <pc:docMk/>
+          <pc:sldMk cId="1683319995" sldId="279"/>
+        </pc:sldMkLst>
+        <pc:inkChg chg="add">
+          <ac:chgData name="Toby Donaldson" userId="2e6e5431-bb17-4c41-9985-d39c50d83c73" providerId="ADAL" clId="{F31BC264-820E-54C4-A6D1-F92AF9CC222E}" dt="2026-03-18T17:04:39.449" v="245"/>
+          <ac:inkMkLst>
+            <pc:docMk/>
+            <pc:sldMk cId="1683319995" sldId="279"/>
+            <ac:inkMk id="26" creationId="{0067D845-3E70-37BA-D631-FF990E39F2DE}"/>
           </ac:inkMkLst>
         </pc:inkChg>
       </pc:sldChg>
@@ -1014,6 +1192,74 @@
           <inkml:channelProperty channel="F" name="resolution" value="0" units="1/dev"/>
         </inkml:channelProperties>
       </inkml:inkSource>
+      <inkml:timestamp xml:id="ts0" timeString="2026-03-16T17:02:42.722"/>
+    </inkml:context>
+    <inkml:brush xml:id="br0">
+      <inkml:brushProperty name="width" value="0.05292" units="cm"/>
+      <inkml:brushProperty name="height" value="0.05292" units="cm"/>
+      <inkml:brushProperty name="color" value="#FF0000"/>
+    </inkml:brush>
+  </inkml:definitions>
+  <inkml:trace contextRef="#ctx0" brushRef="#br0">3559 4498 24575,'0'22'0,"0"7"0,0-14 0,-18 17 0,14-4 0,-14-7 0,18 2 0,0-20 0,-12 27 0,9-26 0,-8 14 0,11-6 0,0-9 0,-12 26 0,9-25 0,-9 26 0,12-27 0,0 20 0,-18-20 0,14 9 0,-14 6 0,18-14 0,0 25 0,0-26 0,0 21 0,0-21 0,0 8 0,0-11 0,0 0 0,0 18 0,0-13 0,0 24 0,0-26 0,0 26 0,0-24 0,0 24 0,0-26 0,0 9 0,0 0 0,0-10 0,0 28 0,0-26 0,0 14 0,0-18 0,0 0 0</inkml:trace>
+  <inkml:trace contextRef="#ctx0" brushRef="#br0" timeOffset="14199">6615 5702 24575,'14'0'0,"10"0"0,-4 0 0,2 0 0,2 0 0,13 0 0,-7 0 0,1 0 0,-1 0 0,1 0 0,-5 0 0,1 0 0,1 0 0,-1 0 0,0 1 0,-1-2 0,11-8 0,-2 0 0,-2 7 0,-1 0 0,-1-7 0,-2 0 0,-4 8 0,-1 2 0,8-1 0,-2 0 0,0 0 0,-5 0 0,0 0 0,-1 0 0,-2 0 0,15 0 0,-6 0 0,-1 0 0,1 0 0,-5 0 0,-2 0 0,-7 0 0,12 0 0,-26 0 0,20 0 0,-2 0 0,7 0 0,4 0 0,1 0 0,-6 0 0,-7 0 0,-1 0 0,-3 0 0,13 0 0,-14 0 0,0 0 0,14 0 0,-25 0 0,26 0 0,-15 0 0,17 0 0,-4 0 0,-3 0 0,0 0 0,-6 0 0,3 0 0,-3 0 0,-16 0 0,26 0 0,-12 18 0,3-14 0,4 14 0,-21-18 0,26 0 0,-13 0 0,8 0 0,2 0 0,5 0 0,-5 0 0,-2 0 0,-8 0 0,14 0 0,-10 0 0,-4 0 0,2 12 0,-6-10 0,2 10 0,19-12 0,-5 0 0,4 0 0,-10 0 0,0 0 0,15 0 0,-3 0 0,-5 0 0,-26 0 0,-3 0 0,-3 0 0,-9 0 0</inkml:trace>
+  <inkml:trace contextRef="#ctx0" brushRef="#br0" timeOffset="18751">9194 6231 24575,'22'0'0,"0"0"0,9 0 0,-1 0 0,2 0 0,-7 0 0,-2 0 0,1 0 0,1 0 0,6 0 0,0 0 0,-7 0 0,0 0 0,5 0 0,2 0 0,-3 0 0,1 0 0,-3 0 0,-2 0 0,-1 0 0,8 0 0,0 0 0,1 0 0,-16 0 0,2 0 0,-18 0 0</inkml:trace>
+  <inkml:trace contextRef="#ctx0" brushRef="#br0" timeOffset="20684">10636 6866 24575,'23'0'0,"0"0"0,-3 0 0,1 0 0,4 0 0,1 0 0,1 0 0,-1 0 0,5 0 0,-1 0 0,-6 0 0,0 0 0,8 0 0,-2 0 0,1 0 0,-1 0 0,1 0 0,-6 0 0,-1 0 0,0 0 0,0 0 0,7 0 0,0 0 0,-7 0 0,1 0 0,-1 0 0,3 0 0,0 0 0,7 0 0,1 0 0,-10 0 0,1 0 0,1 0-163,-1 0 1,-1 0 0,2 0 162,-1 0 0,1 0 0,0 0 0,0 0 0,1 0 0,-2 0 0,11 0 0,-2 0 0,-2 0 0,-1 0 0,-1 0 0,-2 0 0,-5 0 0,1 0 0,6 0 0,-1 0 0,1 0 0,0 0 0,0 0 487,6 0-487,-14 0 0,-1 0 0,-1 0 0,-9 0 0,-12 0 0</inkml:trace>
+  <inkml:trace contextRef="#ctx0" brushRef="#br0" timeOffset="69218">2514 10702 24575,'22'0'0,"1"0"0,11 0 0,3 0 0,-13 0 0,1 0 0,2 0-790,3 0 0,3 0 0,0 0 0,-1 0 790,6 0 0,-2 0 0,2 0 0,-7 0 0,0 0 0,1 0 0,-1 0 0,4 0 0,-1 0 0,1 0-86,2 0 1,0 0 0,-1 0 85,-3 0 0,-2 0 0,2 0 0,-2 0 0,2 0 0,0 0 0,-2 0 0,2 0 0,-2 0 0,2 0 0,-3 1 0,2 0 0,-1-1 0,-2-2 0,0-3 0,-2-2 0,1 2 0,6 3 0,1 2 0,-3-3 173,3-5 1,-1-1-174,-4 4 0,1 1 0,-2 1 0,6 2 0,-1-1 0,-8-2 0,1 0 0,-2 0 0,6 4 0,-2 0 0,4 1 0,-1-2 0,-10-5 0,-1 0 761,4 5 0,0 0-761,3-11 515,-4 11 1,2 2-516,4-1 0,0 0 0,2 0 0,-2 0 0,0 0 0,4 1 0,2-2 0,-7-4 0,2-2 0,-2 1 0,6 4 0,-1 0 0,-8-4 0,0-1 0,0 2 0,0 4 0,0 1 0,0 1 0,8-1 0,1 0-118,-6 0 1,1 0-1,1 0 118,-1 0 0,1 1 0,0-2-319,-3-1 1,0-2 0,1 1-1,0 0 319,0 2 0,1 1 0,1-1 0,-1 0-426,2-1 0,1-1 0,0 0 0,0 0 426,1-1 0,1 1 0,0 0 0,-1 1 0,-1 1 0,-1 0 0,0 1 0,0-1 0,4-1 0,1-1 0,-1 0 0,-2-1 0,3-2 0,-1 0 0,0 1-278,1 3 0,0 1 0,-1-1 278,-4-3 0,-2-2 0,1 2 0,0 3 0,0 3 0,-1 0 0,-3-1 0,0 0 0,0 0 0,3 0 0,0 0 0,0 0 0,-3-1 0,0 2 0,0-1 97,-1 0 1,1 0 0,0 0-98,3 0 0,0 0 0,0 0 0,-3 0 0,0 0 0,0 0 0,0-4 0,0-1 0,0 2 0,3 1 0,0 2 0,0-1 0,4-5 0,1 0 0,-9 5 0,0 2 0,0-1 559,4 0 0,0 0-559,2 0 0,0 0 0,-1 0 0,-1 0 0,2 0 0,2 0 0,-8 0 0,1 0 0,-2 0 0,1 0 0,-1 0 882,7 0 0,-2 0-882,-2 0 1001,4 0-1001,1 0 505,-6 0-505,-7 0 0,-1 0 0,-3 0 0,4 0 0,1 0 0,3 0 0,-6-8 0,3-2 0,4 8 0,0 0 0,-1-7 0,1 0 0,-1 8 0,4 1 0,-2 1 0,5-1 0,1 0-288,-2 0 0,3 0 0,-2 0 288,-5 0 0,-1 0 0,0 0 0,4 0 0,-1 0 0,2 0 0,4 0 0,0 0 0,-1 0 0,-5 0 0,-1 0 0,2 0 0,1 0 0,1 0 0,1 0 0,-3 0 0,-1 0 0,-3 0 0,2 0 0,5 0 0,0 0 0,-2 0 0,-5 0 0,-2 0 0,1 0 0,-2 0 0,-2 0 0,-8 0 0</inkml:trace>
+  <inkml:trace contextRef="#ctx0" brushRef="#br0" timeOffset="72434">2990 11483 24575,'32'0'0,"-4"0"0,1 0 0,0 0 0,0 0 0,7 0 0,0 0 0,-3 0 0,-2 0 0,0 0 0,-1 0 0,-6 0 0,0 0 0,7 0 0,0 0 0,-6 0 0,-1 0 0,0 0 0,0 0 0,1 0 0,0 0 0,-5 0 0,0 0 0,0 0 0,1 0 0,13 0 0,1 0 0,-7-1 0,1 2-164,0 4 0,2 2 0,-1-1 164,4-4 0,1 0 0,-5 4 0,1 1 0,-2-2 0,-3-5 0,-1 0 0,4-1 0,-2 2 0,5 10 0,-4-8 0,-3 3 0,0 0 0,6-6 246,-6 0 0,0 0-246,3 0 0,4 0 0,1 0 0,-5 0 0,-4 0 0,2 0 0,-2 0 0,0 0 0,5 0 0,2 0 0,-4 0 0,2 0 0,-2 0 0,2 0 0,0 0 0,-1 0 0,0 0 0,-1 0 0,-2 0 0,-2 0 0,11 0 0,-16 0 0,-18-12 0,0 9 0,0-8 0</inkml:trace>
+  <inkml:trace contextRef="#ctx0" brushRef="#br0" timeOffset="81300">7739 10001 24575,'34'0'0,"-9"0"0,0 0 0,6 0 0,-6 0 0,0 0 0,3 0 0,-3 8 0,0 2 0,5 6 0,-8 3 0,1 0 0,-1-5 0,0 0 0,-3 2 0,-2 1 0,0 0 0,0-2 0,13 1 0,-27 13 0,20-26 0,-20 9 0,26-12 0,-12 18 0,15-2 0,-17 5 0,14-10 0,-25-11 0,14 0 0</inkml:trace>
+  <inkml:trace contextRef="#ctx0" brushRef="#br0" timeOffset="82966">8374 10041 24575,'-22'12'0,"4"8"0,18-4 0,-11 2 0,8-18 0,-9 12 0,0 20 0,-3-17 0,-2 1 0,2 14 0,-1 2 0,-10-8 0,2 0 0,15 0 0,2 1 0,-9-1 0,2-4 0,11-5 0,-8-4 0</inkml:trace>
+  <inkml:trace contextRef="#ctx0" brushRef="#br0" timeOffset="121151">15888 4471 24575,'34'0'0,"-10"0"0,2 0 0,4 0 0,0 0 0,4 0 0,1 0 0,-8 0 0,-1 0 0,-1 0 0,0 0 0,-1 0 0,-2 6 0,0 0 0,10-3 0,-4 9 0,-9-11 0,0-2 0,9 1 0,5 0 0,-11-1 0,0 2 0,9 17 0,-7-16 0,2 0 0,-3 7 0,-1 0 0,15-9 0,-15-1 0,0 2 0,10 10 0,-4-8 0,5 9 0,-19-12 0,-2 0 0,-12 0 0,18 0 0,-14 0 0,25 0 0,-8 0 0,7 0 0,-7 0 0,-10-12 0,1 9 0,-9-8 0,9 11 0</inkml:trace>
+  <inkml:trace contextRef="#ctx0" brushRef="#br0" timeOffset="126916">17939 5847 24575,'22'0'0,"-2"0"0,1 0 0,14 0 0,-6 0 0,3 0 0,-7 0 0,1 0 0,0 0 0,9 0 0,-1 0 0,3 0 0,-1 0 0,-4 0 0,0 0 0,-1 0 0,-2 0 0,-4 0 0,-1 0 0,8 0 0,-2 0 0,1 0 0,-6 0 0,0 0 0,2 0 0,-7 0 0,-1 0 0,9 0 0,-4-5 0,2-1 0,4 3 0,-4-4 0,-2 2 0,4 5 0,5 0 0,-1 0 0,-4 0 0,4 0 0,1 0 0,-5 0 0,-4 0 0,2 0 0,4 0 0,1 0 0,0 0 0,0 0 0,-6 0 0,0 0 0,3 0 0,-9 0 0,0 0 0,9 0 0,4 0 0,1 0 0,-5 0 0,-8 0 0,4 0 0,-4 0 0,-3 0 0,12 0 0,-8 0 0,6 0 0,6 0 0,-1 0 0,-4 0 0,-9 0 0,0 0 0,9 0 0,-7 0 0,2 0 0,-2 0 0,-5 0 0,2 0 0,-18 0 0,11 0 0,-8 0 0,21 0 0,-21 0 0,26 0 0,-24 0 0,24 0 0,-26 0 0,26 12 0,-24-9 0,12 8 0,-5-11 0,-9 0 0,9 0 0,0 0 0,-9 0 0,26 0 0,-25 0 0,26 0 0,-27 0 0,20 0 0,-20 0 0,27 0 0,-14 18 0,2-16 0,2 0 0,8 16 0,-8-18 0,4 0 0,-3 0 0,-5 0 0,13 0 0,-26 0 0,9 0 0,-12 0 0,12 0 0,-9 0 0,8 0 0,7 0 0,-14 0 0,14 0 0,-6 0 0,8 0 0,-1 0 0,2 0 0,5 0 0,1 0 0,-3 0 0,0 0 0,5 0 0,0 0 0,-8 0 0,-1 0 0,8 0 0,1 0 0,-14 0 0,0 0 0,14 0 0,-25 0 0,26 0 0,-10 0 0,8 0 0,-7 0 0,2 0 0,-20 0 0,27 0 0,-26 0 0,14 0 0,-18 0 0,12 0 0,-9 0 0,20 0 0,-20 0 0,26 0 0,-12 0 0,7 0 0,2 0 0,4 0 0,-4 0 0,-2 0 0,4 0 0,5 0 0,-1 0 0,-16 0 0,14 0 0,-28 0 0,28 0 0,-26 0 0,14 0 0,-18 0 0,12 0 0,-9 0 0,20 0 0,-20 0 0,26 0 0,-24 0 0,13 0 0,-18 0 0,0 0 0,0 0 0</inkml:trace>
+  <inkml:trace contextRef="#ctx0" brushRef="#br0" timeOffset="133366">19103 6456 24575,'-32'0'0,"4"0"0,7 0 0,-2 0 0,20 0 0,-9 0 0,-6 0 0,14 0 0,-26 0 0,-2 0 0,9 0 0,-2 0 0,-5 0 0,-1 0 0,4 0 0,1 0 0,6 0 0,1 0 0,-1 0 0,1 0 0,3 0 0,-13 0 0,26 0 0,-9 0 0,0 0 0,-8 0 0,-8 0 0,-4 0 0,-1 0 0,5 0 0,8 0 0,-10 0 0,26 0 0,-14 0 0,7 0 0,-4 0 0,-17 0 0,12 0 0,0 0 0,0 0 0,-1 0 0,-8 0 0,0 0 0,-7 0 0,13 0 0,2 0 0,-12 0 0,5 0 0,8 0 0,-4 0 0,4 0 0,-8 0 0,9 0 0,-1 0 0,-8 0 0,-4 0 0,17 0 0,4 0 0,11 0 0,-18 0 0,14 0 0,-26 0 0,27 0 0,-15 0 0,-5 0 0,4 0 0,-5 0 0,-2 0 0,-2 0 0,-4 0 0,-1 0 0,6 0 0,6 0 0,-8 0 0,12 0 0,-15 0 0,17 0 0,-14 0 0,25 0 0,-14 0 0,6 0 0,9 0 0,-9 0 0,1 0 0,-10 0 0,-7 0 0,9-1 0,0 2 0,-9 11 0,-4-9 0,-1 8 0,17-11 0,-1 0 0,17 0 0,-12 0 0,9 0 0,-21 0 0,21 0 0,-8 0 0,11 0 0</inkml:trace>
+  <inkml:trace contextRef="#ctx0" brushRef="#br0" timeOffset="141250">18256 7580 24575,'33'0'0,"-5"0"0,1 0 0,3 0 0,-1 0 0,1 0-609,-2 0 1,1 0 0,1 0 608,1 0 0,-1 0 0,2 0 0,0 0 0,1 0 0,1 0-334,-4 1 0,2-1 0,-1 0 0,-1-1 334,6-2 0,-2-2 0,2 2 0,-3 1 0,1 2 0,0 0 0,-3-1 0,-6-3 0,-2-1 0,2 2 91,10 2 1,2 1 0,-3 1-92,-6-1 0,-2 0 0,8 0 0,-1 0 0,-8 0 0,-3 0 420,-3 0 0,0 0-420,7 0 0,1 0 1517,8 0-1517,-7 0 0,1 0 0,-1 0 0,1 0 0,2 0 0,3 0 0,-7 0 0,2 0 0,-2 0 0,6 0 0,0 0 0,1 0 0,0 0 0,-4 0 0,0 0 0,-1 0 0,-2 0 264,-4 0 1,-1 0-265,2 0 0,-2 0 0,4 0 0,-8 0 0,-8 0 0,0 0 0,9 0 0,6 0 0,6 0 0,-1 0 0,-4 0 0,-3 0 0,0 0 0,6 0 0,-1 0 0,2 0 0,4 0 0,-13 6 0,0 0 0,9-3 0,-17 8 0,14-11 0,-12 18 0,6-15 0,4-2 0,-3 8 0,0 0 0,6-2 0,0-2 0,-3-4 0,-1 1 0,0 3 0,0 1 0,-5 1 0,-1-2 0,0-3 0,0-1 0,-1 5 0,0 0 0,9-6 0,-3 0 0,0 0 0,6 0 0,-1 0 0,1 0 0,-6 0 0,-1 0 0,0-1 0,0 2 0,-1 7 0,-2 2 0,12-6 0,-17 14 0,2-18 0,-7 0 0,-8 0 0,9 0 0,-12 0 0,12 0 0,8 0 0,2 1 0,2-2 0,0-8 0,0 0 0,8 7 0,1 0 0,-3-13 0,0 0 0,4 13 0,-1 1 0,-15-5 0,0 0 0,6 6 0,-7 0 0,-14 0 0,9 0 0,-12 0 0</inkml:trace>
+</inkml:ink>
+</file>
+
+<file path=ppt/ink/ink11.xml><?xml version="1.0" encoding="utf-8"?>
+<inkml:ink xmlns:inkml="http://www.w3.org/2003/InkML">
+  <inkml:definitions>
+    <inkml:context xml:id="ctx0">
+      <inkml:inkSource xml:id="inkSrc0">
+        <inkml:traceFormat>
+          <inkml:channel name="X" type="integer" min="-2.14748E9" max="2.14748E9" units="cm"/>
+          <inkml:channel name="Y" type="integer" min="-2.14748E9" max="2.14748E9" units="cm"/>
+          <inkml:channel name="F" type="integer" max="32767" units="dev"/>
+        </inkml:traceFormat>
+        <inkml:channelProperties>
+          <inkml:channelProperty channel="X" name="resolution" value="1000" units="1/cm"/>
+          <inkml:channelProperty channel="Y" name="resolution" value="1000" units="1/cm"/>
+          <inkml:channelProperty channel="F" name="resolution" value="0" units="1/dev"/>
+        </inkml:channelProperties>
+      </inkml:inkSource>
+      <inkml:timestamp xml:id="ts0" timeString="2026-03-18T16:38:10.932"/>
+    </inkml:context>
+    <inkml:brush xml:id="br0">
+      <inkml:brushProperty name="width" value="0.05292" units="cm"/>
+      <inkml:brushProperty name="height" value="0.05292" units="cm"/>
+      <inkml:brushProperty name="color" value="#FF0000"/>
+    </inkml:brush>
+  </inkml:definitions>
+  <inkml:trace contextRef="#ctx0" brushRef="#br0">3969 11483 24575,'22'0'0,"0"0"0,7 0 0,2 0 0,3 0 0,1 0 0,-8 0 0,-1 0 0,-1 0 0,0 0 0,-1 0 0,-2 0 0,0 0 0,10 0 0,-16 0 0,2 0 0,-6 0 0,-9 0 0,20 0 0,-2 0 0,-5 0 0,13 0 0,-8 0 0,2-3 0,7-1 0,-2-1 0,3-1 0,1-3 0,0 0 0,4-3 0,-3 1 0,-6 2 0,-1 0 0,-1-1 0,-1-2 0,-1-2 0,-1 2 0,4 3 0,-3 2 0,6-11 0,-41 6 0,9 9 0,-8-8 0,11 11 0,-18 0 0,14 0 0,-14 0 0</inkml:trace>
+  <inkml:trace contextRef="#ctx0" brushRef="#br0" timeOffset="8136">1164 11483 24575,'0'22'0,"0"-4"0</inkml:trace>
+</inkml:ink>
+</file>
+
+<file path=ppt/ink/ink12.xml><?xml version="1.0" encoding="utf-8"?>
+<inkml:ink xmlns:inkml="http://www.w3.org/2003/InkML">
+  <inkml:definitions>
+    <inkml:context xml:id="ctx0">
+      <inkml:inkSource xml:id="inkSrc0">
+        <inkml:traceFormat>
+          <inkml:channel name="X" type="integer" min="-2.14748E9" max="2.14748E9" units="cm"/>
+          <inkml:channel name="Y" type="integer" min="-2.14748E9" max="2.14748E9" units="cm"/>
+          <inkml:channel name="F" type="integer" max="32767" units="dev"/>
+        </inkml:traceFormat>
+        <inkml:channelProperties>
+          <inkml:channelProperty channel="X" name="resolution" value="1000" units="1/cm"/>
+          <inkml:channelProperty channel="Y" name="resolution" value="1000" units="1/cm"/>
+          <inkml:channelProperty channel="F" name="resolution" value="0" units="1/dev"/>
+        </inkml:channelProperties>
+      </inkml:inkSource>
       <inkml:timestamp xml:id="ts0" timeString="2026-03-16T17:05:41.971"/>
     </inkml:context>
     <inkml:brush xml:id="br0">
@@ -1031,6 +1277,230 @@
   <inkml:trace contextRef="#ctx0" brushRef="#br0" timeOffset="109133">14354 7422 24575,'14'0'0,"-2"0"0,-12 0 0,0 0 0,18 0 0,-14 0 0,14 0 0,-6 0 0,-10 0 0,10 0 0,0 0 0,-9 17 0,9-12 0,-12 12 0,0-17 0</inkml:trace>
   <inkml:trace contextRef="#ctx0" brushRef="#br0" timeOffset="111467">15174 8030 24575,'15'0'0,"14"0"0,-7 0 0,2 0 0,9 0 0,3 0 0,-10 0 0,1 0 0,0 0 0,4 0 0,-1 0 0,-1 0 0,3 0 0,-1 0 0,-5 0 0,0 0 0,-1 0 0,0 0 0,-2 0 0,1 0 0,-2 0 0,10 0 0,1 0 0,-17 0 0,4 0 0,1 0 0,2 0 0,5 0 0,2 0 0,6 0 0,-14 0 0,1 0 0,-2 0 0,2 0 0,0 0 0,2 0 0,0 0 0,1 0 0,1 0-154,0 0 0,-1 0 0,2 0 154,2 0 0,1 0 0,0 0-332,6 0 0,0 0 0,0 0 332,-5 0 0,0 0 0,1 0-401,-4 0 1,2 0 0,0 0-1,0 0 401,0 0 0,0 0 0,0 0 0,1 0 0,0 0 0,-1 0 0,2 0 0,0 0 0,-2 0 0,0 0 0,1 0 0,0 0 0,-2 0 0,0 0 0,0 0 0,-2 0 0,1 0 0,2 0 0,0 0 0,0 0 0,-2 0-100,4 0 1,-2 0-1,-2 0 100,6 0 0,-1 0 197,3 0 1,-5 0-198,-8 0 458,-3 0 1,-1 0-459,-4 0 1695,16 0-1695,1 0 352,-5 0-352,-9 0 0,0 0 0,9 0 0,4 0 0,0 0 0,-9 0 0,0 0 0,1 0 0,1 0 0,1 0 0,0 0 0,-5 0 0,-2 0 0,14 0 0,-1 0 0,-16 0 0,13 0 0,-26 0 0,27 0 0,-26 12 0,14-9 0,-18 9 0,0-12 0,0 0 0,-18-12 0,2 2 0,-2-1 0,-7-5 0,-4-2 0</inkml:trace>
   <inkml:trace contextRef="#ctx0" brushRef="#br0" timeOffset="198966">4842 12277 24575,'26'0'0,"-1"0"0,-1 0 0,1 0 0,7 0 0,1 0 0,-3 0 0,0 0 0,-6 0 0,0 0 0,8 0 0,-2 0 0,1 0 0,-6 0 0,0 0 0,3 0 0,-4 0 0,2 0 0,-2 0 0,0 0 0,6 0 0,1 0 0,1 0 0,0 0 0,4 0 0,0 0-171,-9 0 1,0 0 0,0 0 170,0 0 0,0 1 0,0-2 0,3-4 0,0-2 0,0 1 0,-3 4 0,0 2 0,-1-2 0,1-4 0,0-1 0,0 2 0,3 4 0,1 1 0,-2 1 0,6-1 0,-1 0 0,-8 0 0,0 0 0,0 0 0,8 0 0,-2 0 0,-8 0 0,1 0 0,6 0 0,-1 0 0,1 0 0,-8 0 0,-2 0 0,-6 0 0,-3 0 0,-12 0 0</inkml:trace>
+</inkml:ink>
+</file>
+
+<file path=ppt/ink/ink13.xml><?xml version="1.0" encoding="utf-8"?>
+<inkml:ink xmlns:inkml="http://www.w3.org/2003/InkML">
+  <inkml:definitions>
+    <inkml:context xml:id="ctx0">
+      <inkml:inkSource xml:id="inkSrc0">
+        <inkml:traceFormat>
+          <inkml:channel name="X" type="integer" min="-2.14748E9" max="2.14748E9" units="cm"/>
+          <inkml:channel name="Y" type="integer" min="-2.14748E9" max="2.14748E9" units="cm"/>
+          <inkml:channel name="F" type="integer" max="32767" units="dev"/>
+        </inkml:traceFormat>
+        <inkml:channelProperties>
+          <inkml:channelProperty channel="X" name="resolution" value="1000" units="1/cm"/>
+          <inkml:channelProperty channel="Y" name="resolution" value="1000" units="1/cm"/>
+          <inkml:channelProperty channel="F" name="resolution" value="0" units="1/dev"/>
+        </inkml:channelProperties>
+      </inkml:inkSource>
+      <inkml:timestamp xml:id="ts0" timeString="2026-03-18T16:38:57.631"/>
+    </inkml:context>
+    <inkml:brush xml:id="br0">
+      <inkml:brushProperty name="width" value="0.05292" units="cm"/>
+      <inkml:brushProperty name="height" value="0.05292" units="cm"/>
+      <inkml:brushProperty name="color" value="#FF0000"/>
+    </inkml:brush>
+  </inkml:definitions>
+  <inkml:trace contextRef="#ctx0" brushRef="#br0">1296 3307 24575,'24'0'0,"-1"0"0,-3 0 0,0 0 0,6 0 0,-2 0 0,-5 0 0,4 0 0,-5 0 0,-15 0 0,27 0 0,-2 0 0,-3 0 0,3 0 0,7 0 0,2 0-290,-11 0 1,1 0 0,0 0 289,6 0 0,0-1 0,0 2 0,-2 3 0,1 0 0,-1 0 0,1-3 0,1 0 0,1 0 0,-5 2 0,2 0 0,1 0 0,-2 0 0,3-3 0,0-1 0,0 2 0,-3 2 0,1 2 0,0 0 0,-1-1 0,1-2 0,1-2 0,-2 1 0,-1 1 0,2 3 0,-3 2 0,2-2-28,4-3 1,1-3-1,-3 0 28,-3 1 0,-5 0 0,4 0 0,-10 0 0,-7 0 0,10 0 432,5 0 0,5 0-432,-5 1 0,2 0 0,-1-3 0,1-3 0,0-2 0,0 2 29,3 3 0,0 2 0,-3-3-29,-3-5 0,-2-1 0,-1 2 0,0 2 0,0 3 0,0 1 0,2-5 0,1 0 0,8 5 0,0 2 0,-8-1 0,-2 0 0,0 0 0,-1 0 0,10 0 0,-4-8 0,1-1 0,-9 7 0,0-1 0,4-6 0,2-3 0,-3 4 0,14 5 0,-13-2 0,-2-2 0,-2-5 0,4 9 0,-21-8 0,26-7 0,-13 14 0,0-11 0,1 0 0,15 12 0,-16-8 0,2 11 0,-18 0 0,0 0 0</inkml:trace>
+  <inkml:trace contextRef="#ctx0" brushRef="#br0" timeOffset="10537">14221 5001 24575,'26'0'0,"0"0"0,-2-1 0,1 1 0,4 1 0,0 1 0,4 1 0,2 1 0,0 0 0,-1 0-656,-3-1 1,-1 0-1,0 0 1,1 0 0,1 1 342,0 1 0,1 0 1,1 0-1,0 0 1,0 1-1,-1 1 313,-1 0 0,1 0 0,-1 1 0,-1 0 0,-1 0 0,-3-2 352,7 1 1,-3-2 0,0 2-353,-1 1 0,3 1 0,-3-1 0,-9-4 940,-6-4-940,15 0 0,-26 0 0,-4 18 900,-17-14 1,-11-4-1,-2 0-900,-3 6 0,-2 2 0,-3-4 0,10-5 0,-2-2 0,-1-2 0,0 0 0,-2 1-213,2 2 1,-1 0 0,-1 0 0,0-1-1,-1 0 1,-1-1 212,4 0 0,-2-2 0,1 0 0,-2-1 0,1 0 0,-1 1 0,1-1 0,0 0 0,-4 0 0,0 0 0,0 0 0,0 0 0,1 0 0,0 0 0,1 1 0,-1-1 0,-1 1 0,1 0 0,1 0 0,2 0 0,3 0 0,-15-5 0,5 0 0,22 4 0,43 5 0,21 4 0,-18-2 0,4 0 0,3 0 0,1 0 0,0 0 0,0 0-547,-2 0 1,0 0 0,1 0 0,0 0 0,0 0 0,2 0 489,-4 0 0,1 0 0,2 0 0,0 0 0,0 0 1,-2 0-1,-1 0 0,-2 0 57,4 0 0,-2 0 0,-2 0 0,-1 0 0,0 0 0,3-1 0,-1 0 0,-1 1 0,-1 2 0,6 3 0,-3 2 0,-3-2 692,-1-4 0,-10 3-692,-19 13 0,-19-17 0,-10 0 0,-3 0 1638,7 0 0,1 0-1238,-9 0 0,0 0-400,8 0 0,1 0 0,1 0 0,2 0 0,7 0 0,2 0 0,12 0 0,0 0 0</inkml:trace>
+  <inkml:trace contextRef="#ctx0" brushRef="#br0" timeOffset="40723">1164 11020 24575,'22'0'0,"0"0"0,2-5 0,3-2 0,0 1 0,1 4 0,0 2 0,1-2-820,0-4 1,2-2 0,0 0 0,0 0 762,0 3 0,0-1 0,1 1 0,-1 1 57,4 0 0,0 0 0,1 0 0,-1 0 0,2-3 0,0-2 0,0 1 0,-1 2 0,-1 4 0,0 3 0,0-1 0,-1-2 0,-1-3 0,0-1 0,0-1 0,-2 2 0,6 4 0,-1 1 0,0-2 54,-8-4 0,0-3 1,0 1-1,-2 2-54,6 3 0,-1 4 0,-1-4 0,1-6 0,-1-2 0,2 2 0,4 6 0,2 4 0,-2-2 0,-7-6 0,-1-3 0,0 3 0,2 5 0,0 2 0,0-1 256,-4-2 0,0-1 1,-2 0-257,8-6 0,-1 2 0,3 6 0,-1-1 0,-10-6 0,-1 1 883,4 7 1,-2 2-884,7-1 376,-9 0 0,0 0-376,0 0 0,0 0 0,7-1 0,3 2 0,-6 3 0,1 3 0,0-1 0,1-1 0,0 0 0,-3 2 0,0 9 0,-1 0 0,1-8 0,-3-1 0,-6 4 0,4-11 0,13 8 0,5 2 0,-5-2 0,2 0 0,-8-1 0,2 0 0,-2 0 0,14 0 0,-8-2 0,-17-5 0,2 0 0</inkml:trace>
+  <inkml:trace contextRef="#ctx0" brushRef="#br0" timeOffset="41286">3969 10888 24575,'0'0'0</inkml:trace>
+  <inkml:trace contextRef="#ctx0" brushRef="#br0" timeOffset="47600">11642 10517 24575,'0'22'0,"0"0"0,0 9 0,0-9 0,0 0 0,0 11 0,0-5 0,0-5 0,0 3 0,0 4 0,0 1 0,0 2 0,0 3-167,0-7 1,0 2 0,0-1 166,0 4 0,0 1 0,0-5 0,0 1 0,0-3 0,0-1 0,0-2 0,0 7 0,0-3 0,0-1 0,0 5 0,0-1 0,0-4 249,0-3 1,0 0-250,0 6 0,0-7 0,0 2 0,0-6 0,0-1 0,0 7 0,0 1 0,0 4 0,0-1 0,0-5 0,0-2 0,0 10 0,0-4 0,0-25 0,0 14 0,0-6 0,0-9 0,0 20 0,0-20 0,0 9 0</inkml:trace>
+</inkml:ink>
+</file>
+
+<file path=ppt/ink/ink14.xml><?xml version="1.0" encoding="utf-8"?>
+<inkml:ink xmlns:inkml="http://www.w3.org/2003/InkML">
+  <inkml:definitions>
+    <inkml:context xml:id="ctx0">
+      <inkml:inkSource xml:id="inkSrc0">
+        <inkml:traceFormat>
+          <inkml:channel name="X" type="integer" min="-2.14748E9" max="2.14748E9" units="cm"/>
+          <inkml:channel name="Y" type="integer" min="-2.14748E9" max="2.14748E9" units="cm"/>
+          <inkml:channel name="F" type="integer" max="32767" units="dev"/>
+        </inkml:traceFormat>
+        <inkml:channelProperties>
+          <inkml:channelProperty channel="X" name="resolution" value="1000" units="1/cm"/>
+          <inkml:channelProperty channel="Y" name="resolution" value="1000" units="1/cm"/>
+          <inkml:channelProperty channel="F" name="resolution" value="0" units="1/dev"/>
+        </inkml:channelProperties>
+      </inkml:inkSource>
+      <inkml:timestamp xml:id="ts0" timeString="2026-03-18T16:40:50.451"/>
+    </inkml:context>
+    <inkml:brush xml:id="br0">
+      <inkml:brushProperty name="width" value="0.05292" units="cm"/>
+      <inkml:brushProperty name="height" value="0.05292" units="cm"/>
+      <inkml:brushProperty name="color" value="#FF0000"/>
+    </inkml:brush>
+  </inkml:definitions>
+  <inkml:trace contextRef="#ctx0" brushRef="#br0">1548 4657 24575,'32'0'0,"0"0"0,1 0 0,-1 0 0,1 0 0,-1 0 0,0 0 0,6 0 0,-2 0 0,0 0 0,1 0 0,0 0 0,-2 0 0,1 0 0,0 0 0,0 0 0,-1 0 0,-1 0-820,4 0 1,-1 0 0,-1 0 0,0 0 691,-1 0 1,-1 0 0,1 0 0,-1 0 127,-1 0 0,0 0 0,-1 0 0,1 0 0,-3 0 0,0 0 0,-1 0 0,2 0 251,4 0 0,1 0 0,0 0 0,0 0-251,-1 0 0,1 0 0,-1 0 0,0 0 0,-2 0 0,-1 0 0,0 0 0,0 0 164,-1 0 1,-1 0-1,1 0 1,-1 0-165,1 0 0,0 0 0,0 0 0,-2 0 0,5 0 0,-1 0 0,0 0 0,1 0 0,1 0 0,-5 0 0,-5 0 0,-5 0 0,-2 0 0,-18 0 0</inkml:trace>
+  <inkml:trace contextRef="#ctx0" brushRef="#br0" timeOffset="5117">12779 4432 24575,'33'0'0,"-6"0"0,3 0 0,-2 0 0,1 0 0,7 0 0,0 0 0,-4 0 0,1 0 0,-7 0 0,3 0 0,0 0 0,0 0 0,7 0 0,0 0 0,1 0-820,-1 0 1,3 0 0,-1 0 0,-1 0 794,-7 0 1,0 0-1,-1 0 1,1 0 24,6-3 0,2 0 0,-1 0 0,-1 0 0,1 2 0,-2 0 0,2 0 0,-5-2 0,2 0 0,0 0 0,0 0 224,-1 2 0,0 2 0,1-1 0,-1 0-224,0 0 0,0 0 0,0 0 0,1 0 0,-3 0 0,1 0 0,0 0 0,0 0 0,-1 0 0,5 0 0,-1 0 0,-1 0 0,0 0 147,-5 0 1,-1 0-1,0 0 1,0 0-148,10 0 0,-1 0 0,-2 0 0,-2 0 0,-1 0 0,0 1 0,-3-2 1751,4-10-1751,-14 9 0,1 1 69,6-5 0,1 0-69,2 5 0,3 2 0,-2-1 0,3 0 0,-1 0 0,-3 0 0,-1 0 0,0 0 0,4 0 0,-1 0 0,-1 0 0,5 0 0,-5 0 0,-2 0 0,1 0 0,3 0 0,-1 0 0,-5 0 0,-2 0 0,-8 0 0,2 0 0</inkml:trace>
+  <inkml:trace contextRef="#ctx0" brushRef="#br0" timeOffset="7768">10954 5569 24575,'14'0'0,"6"0"0,2 0 0,14 0 0,-12 0 0,3 0 0,0 0 0,5 0 0,1 0 0,1 0-674,-5 0 1,1 0-1,0 0 1,1 0 673,5 0 0,0 0 0,1 0 0,0 0 0,-7 0 0,1 0 0,-1 0 0,1 0 0,0 0 0,0 0 0,2 0 0,-1 0 0,0 0 0,-2 0 0,4 0 0,-2 0 0,-1 0 0,2 0 0,1 0 0,0 0 0,1 0 0,1 0 0,-3 0 0,1 0 0,0 0 0,0 0 0,-1 0 0,-2 0 0,0 0 0,0 0 0,1 0 0,0 0 0,0 1 0,0-1 0,1 0 0,1 0 0,0 0 0,1-1 0,0 0 0,0 0 0,1-1 0,0 0 0,1 0 0,0 0 0,0 1 0,-2 0 0,0 1 0,0-1 0,0 1 0,1 0 0,-1 0 0,1 0 0,-1-1-364,0 0 1,0-1 0,0 0 0,0 1 0,0-1 0,0 0 0,-1 1-1,0 0 364,2 0 0,0 1 0,-1 0 0,0 0 0,0 1 0,-2-1 0,-2 0 0,2 0 0,-1 0 0,-1 0 0,-2 0 0,0 0-6,3 0 1,-2 0 0,0 0-1,2 0 6,-2 0 0,0 0 0,1 0 0,1 0 0,-1 0 0,3 0 0,1 0 0,0 0 0,-1 0 0,-1 0-212,-1 0 1,-1 0 0,0 0-1,0 0 212,3 0 0,2 0 0,-1 0 0,-4 0 521,-3 0 0,-2 0 1,-2 0-522,8 0 0,0 0 1092,-2 0 0,2 0 0,0 0-948,-7 0 1,0 0-1,1 0-135,9 0 1,3 0 0,-1 0-10,-9 0 0,1 0 0,-1 0 0,0 0 291,2 0 1,1 0-1,-1 0 1,0 0-292,-1 0 0,-1 0 0,0 0 0,0 0 0,9 0 0,0 0 0,-1 0 0,-4 0 0,-2 0 0,2 0 0,-1 0 0,1 0 0,0 0 0,1 0 0,2 0 0,0 0 0,0 0 0,1 0-82,-2 0 1,1-1 0,0 1 0,0 0 0,0 1 81,-2 1 0,1 0 0,-1 1 0,-2 0 0,0-1 0,7-1 0,-1-1 0,-4 2 0,7 4 0,-6-1 0,-2-5 0,-4 0 0,-8 0 0,-2 0 0,-1 0 406,12 0-406,-26 12 0,17-10 0,1-1 0,-14 11 0,23-12 0,-30 0 0</inkml:trace>
+  <inkml:trace contextRef="#ctx0" brushRef="#br0" timeOffset="41718">1296 11681 24575,'23'0'0,"-1"0"0,7 0 0,2 0 0,3 0 0,1 0-623,-6 0 1,1 0 0,1 0 622,-1 1 0,1-1 0,0-1 0,-4-2 0,1-1 0,1-2 0,0 2-620,5 0 0,0 1 0,1-1 0,1-1 620,-5-2 0,0-1 0,1-1 0,0 1 0,0 1 0,0 3 0,0 1 0,0 0 0,0 1 0,2-2 0,0 0 0,2-2 0,1 0 0,-1 1 0,0 0 0,-3 2 0,3 1 0,-1 2 0,-2 0 0,2-1 0,-2-1 0,1-1 0,0 0 0,-1 1 0,-4 0 330,3 2 0,-3 0 0,3 0-330,-4-2 0,3 0 0,0-1 0,1 0 0,-3 1 0,2 2 0,-2 0 0,0 0 0,2-3 0,4-2 0,2-3 0,-1-1 0,-2 2 0,1 1 0,-2 1 0,1 0 279,-2-2 1,1 0-1,0 0-279,3-1 0,0 0 0,1 1 0,-7 1 0,0 1 0,0 0 0,-1 0 0,2 0 0,-2 0 0,-1-1 0,9-4 0,-3 2 1258,-13 8 1,-3 0-1259,3 0 0,-9 0 1,-12 0-1,0 0 1</inkml:trace>
+  <inkml:trace contextRef="#ctx0" brushRef="#br0" timeOffset="52214">10702 11298 24575,'15'0'0,"14"0"0,-12 0 0,15 0 0,0 0 0,-15 0 0,0 0 0,-17 0 0,12 0 0,20-12 0,-5 10 0,5 2 0,-1-1 0,-6-2 0,0-1 0,1-1 0,8 0 0,2-1 0,-4 0 0,-4-2 0,-3-1 0,-6-1 0,1 0 0,10 2 0,2 4 0,-6 3 0,1 2 0,1-1 0,8 0 0,2 0 0,-3 0 0,1 0 0,0 0 0,-6 0 0,1 0 0,-10 0 0,-14 0 0,13 0 0,2 0 0,-2 0 0,2 0 0,2 0 0,12 0 0,-3 0 0,-4 0 0,-10 0 0,11 0 0,-7 0 0,13 0 0,-9 1 0,5 0 0,-2-3 0,-5-3 0,-1-2 0,1 1 0,2 5 0,0 1 0,-3-3 0,8-15 0,-12 17 0,1 2 0,10-1 0,-6 0 0,4 0 0,-1 0 0,2 0 0,-1 0 0,-2 0 0,1 0 0,-1 0 0,10 0 0,-2 0 0,-5 0 0,-2 0 0,-5 0 0,-1 0 0,8 0 0,2 0 0,-3 0 0,2 0 0,-5 0 0,0 0 0,7 0 0,-5 0 0,-11 0 0,2 0 0,3 0 0,0 1 0,3-2 0,0-2 0,3-2 0,0 2 0,-3 1 0,1 2 0,-1-1 0,12-5 0,-3 0 0,-14 5 0,-1 2 0,0-1 0,1 0 0,0 0 0,-1 0 0,5 0 0,-4 0 0,1 0 0,7 0 0,-2 0 0,1 0 0,4 0 0,-5 0 0,-5 0 0,-17 0 0,25 0 0,-14 0 0,18 0 0,-6 0 0,6 0 0,-4-1 0,4 2 0,-9 2 0,2 2 0,0-1 0,4-3 0,0-1 0,0 2 0,8 4 0,-4-1 0,-2-5 0,-3 0 0,-1 0 0,-8 0 0,1 0 0,0 0 0,-2 0 0,2 0 0,8 0 0,-1 0 0,3-1 0,3 2 0,-9 8 0,1 0 0,2-7 0,3-2 0,-3 2 0,1 8 0,-1-2 0,7-7 0,2-2 0,-10 1 0,1 0 0,0 0 0,-3 0 0,0 0 0,1 0 0,7 0 0,1 0 0,-2 0 0,0 0 0,-1 0 0,1 0 0,-3 0 0,-1 0 0,5 0 0,-11 0 0,0 0 0,15 0 0,-14 0 0,-1 0 0,10 0 0,-17 0 0,15 0 0,-14 0 0,4 0 0,4 0 0,-4 0 0,-3 0 0,0 0 0</inkml:trace>
+  <inkml:trace contextRef="#ctx0" brushRef="#br0" timeOffset="63197">11179 11893 24575,'26'0'0,"3"0"0,4 0 0,-9 0 0,1 0 0,2 0-820,3 0 1,3 0 0,1 0 0,0 0 641,1 0 1,-1 0 0,2 0 0,0 0 177,-3 0 0,1 0 0,0 0 0,0 0 0,2 0 0,-3 0 0,1 0 0,1 0 0,0 0 0,-1 0 0,-2 0 0,4 0 0,-2 0 0,0 0 0,1 0 0,-2 0 0,1 0 0,0 0 0,-3 0 0,-3 0 353,8-1 1,-2 2-354,-5 4 0,2 2 0,-2-1 0,6-5 0,-1 2 0,-4 6 0,0 3 0,0-4 0,-3-5 0,-1-3 0,2 0 255,5 4 1,2 0 0,1 0-256,-2-1 0,3 1 0,-1-1 0,0-1 0,-4-1 0,-1-1 0,1 1 0,1 0 0,-2 1 0,1 1 0,1-1 0,-1 1 0,0-1 0,3-2 0,0 0 0,-1 0 0,0 0 0,-1 0 0,0 0 0,-1 0 0,-1 0 0,4 0 0,-1 0 0,-1 0 684,-5 0 1,-1 0-1,-1 0-684,5 0 0,2 0 153,0 0 0,2 0 0,2 0-153,-9 0 0,1 0 0,1 0 0,0 0 0,4 0 0,1 0 0,0 0 0,-1 0 0,-3 0 0,0 0 0,-2 0 0,-1 0 0,3 0 0,-2 0 0,0 0 0,-1 0 0,0 0 0,-2 0 0,5 0 0,-2 0 0,4 0 0,0 0 0,-7 0 0,0 0 0,0 0 0,4 0 0,0 0 0,3 0 0,-1-2 0,3-1 0,0-1 0,0 1 0,-2 0 0,0 0 0,0-1 0,0-1 0,-1-2 0,0-2 0,0 0 0,-2 2 0,4 1 0,-2 2 0,-2-2 0,1-10 0,-2 2 0,3 12 0,1 1 0,1-5 0,4 1 0,-10 3 0,3 2 0,1 0 0,-1 2 0,-1 0 0,1 1 0,-1 1 0,-1-2 0,9-1 0,-1 0 0,-3 0 0,1 6 0,-8-2 0,-15-5 0</inkml:trace>
+  <inkml:trace contextRef="#ctx0" brushRef="#br0" timeOffset="99900">10795 12687 24575,'15'0'0,"14"0"0,-24 0 0,24 0 0,-9 0 0,-3 0 0,12 0 0,-26 0 0,9 0 0,-12 0 0,0 0 0,12 0 0,7 0 0,6 0 0,8 0 0,3 0 0,-11 0 0,1 1 0,-1-2 0,11-8 0,-1 0 0,-5 7 0,-3 0 0,-8-7 0,-1 0 0,4 2 0,0 2 0,10 2 0,-4-8 0,-7 11 0,2 0 0,-20 0 0,9 0 0,6 0 0,-2 0 0,2 0 0,2 0 0,-1 0 0,2 0 0,4 0 0,3 0 0,2 0 0,0 0 0,7 0 0,-14 0 0,-5 0 0,-15 0 0,26 0 0,-13 0 0,5 0 0,2 0 0,-2 0 0,-1 0 0,0 0 0,3 0 0,0 0 0,-5 0 0,-13 0 0,12 0 0,-17 0 0,0 0 0</inkml:trace>
+  <inkml:trace contextRef="#ctx0" brushRef="#br0" timeOffset="117733">13533 12779 24575,'33'0'0,"-5"0"0,-4 1 0,2-2 0,-2-7 0,0-1 0,13 4 0,-8-12 0,-17 17 0,-9 0 0,21 0 0,-4 0 0,2 0 0,2 0 0,-1 0 0,2 0 0,0 0 0,1 0 0,0 0 0,6 1 0,-1-2 0,-6-5 0,-2 0 0,3 5 0,-5-1 0,-4-10 0,15 12 0,0 0 0,-16 0 0,14 0 0,-27 0 0,9 0 0</inkml:trace>
+  <inkml:trace contextRef="#ctx0" brushRef="#br0" timeOffset="152067">1349 8242 24575,'33'0'0,"1"0"0,-9 0 0,1 0 0,0 0 0,1 0 0,0 0 0,0 0-758,3 0 0,1 1 0,1-2 758,4-3 0,1 0 0,0 0 0,-1 3 0,1 1 0,-1-2 0,-8-3 0,0-2 0,1 0 0,-1 3 0,10 2 0,-1 3 0,-2-3 0,-8-7 0,-3-3 0,2 3 242,2 7 1,1 2 0,-4-2-243,-3-7 0,-1 0 187,9 2 1,1 2-188,-6 4 0,-1-1 0,9-4 0,0 1 0,-2 5 0,-2 0 0,-2-9 0,-1 0 0,9 7 0,-1 0 0,-5-7 0,0 0 0,-5 7 0,3 3 0,0 0 390,2-1 0,0 0 1,2 0-391,-4 0 0,1 0 0,1 0 0,0 0 0,6 0 0,0 0 0,1 0 0,0 0 0,-1 0 0,0 0 0,0 0 0,1 0 0,-6 0 0,1 0 0,0 0 0,0 0 0,0 0 0,5 0 0,-1 0 0,0 0 0,0 0 0,-2 0 0,0 0 0,-1 0 0,-1 0 0,9 0 0,-2 0 0,-5 0 0,-8 0 0,-2 0 0,1 0 0,-7 0 0,-14 0 0,9 0 0,-12 0 0,18 0 0,-14 18 0,14-14 0,-4 11 0,1-1 0,4-11 0,4 4 0,-2-2 0,-6-5 0,-3 0 0</inkml:trace>
+  <inkml:trace contextRef="#ctx0" brushRef="#br0" timeOffset="169017">12898 7898 24575,'34'0'0,"-13"0"0,-9 0 0,17 0 0,-10 0 0,6 0 0,0 0 0,-9 0 0,14 0 0,-27 0 0,20 0 0,-2 0 0,7 0 0,-8 0 0,10 0 0,-14 0 0,8 0 0,2 0 0,-7 0 0,9 0 0,3 0 0,-1 0 0,-2 0 0,6 0 0,-1 0 0,-7 0 0,0 1 0,1-2 0,5-3 0,2 0 0,-2 0 0,-1 3 0,-1 1 0,-1-2 0,6-3 0,-1-2 0,2-2 0,0 1 0,-3 6 0,-1-1 0,-2-11 0,0-1 0,3 12 0,0 3 0,-7-4 0,0 0 0,0 0 0,8 4 0,1 0 0,-5 0 0,1 0 0,-2 0 0,-3 0 0,-1 0 0,13 0 0,-2 0 0,-5 0 0,4 0 0,3 0 0,-12 0 0,0 0 0,4 0 0,0 0 0,-4 0 0,-2 0 0,4 0 0,-8 0 0,-2 0 0,-2 0 0,4 0 0,1 0 0,3 0 0,4 0 0,1 0 0,4 0 0,-14 0 0,0 0 0,3 0 0,7 0 0,4 0 0,-8 0 0,1 0 0,2 0 0,-1 1 0,2-1 0,0 0 0,-1-1 0,4-2 0,-1-2 0,-1 1 0,4 3 0,-2 0 0,-8-6 0,-3 2 0,12 5 0,-1 0 0,-16 0 0,14 0 0,-27 0 0,20 0 0,-20 0 0,9 0 0,-12 0 0</inkml:trace>
+  <inkml:trace contextRef="#ctx0" brushRef="#br0" timeOffset="172718">10729 7805 24575,'34'0'0,"-2"0"0,0 0 0,-4 0 0,-7 0 0,8 0 0,-13 0 0,17 0 0,-19 0 0,-2 0 0,-12 0 0,18 0 0,-2 0 0,16 0 0,1 0 0,-17 0 0,13 0 0,-26 0 0,27 0 0,-14 0 0,16 0 0,-17 0 0,-3 0 0,-12 0 0,17 0 0,-12 0 0,24 0 0,-26 0 0,9 0 0,5 0 0,-12 0 0,12 0 0,-5 0 0,-9 0 0,9 0 0,-12 0 0</inkml:trace>
+  <inkml:trace contextRef="#ctx0" brushRef="#br0" timeOffset="195647">10729 9194 24575,'22'0'0,"-4"0"0,-18 0 0,0 0 0,11 0 0,-8 0 0,9 0 0,-12 0 0,12 0 0,-9 0 0,8 0 0,-11 0 0,18 0 0,-13 0 0,12 0 0,-17 0 0,12 0 0,-9 0 0,9 0 0,-12 0 0,17 0 0,-12 0 0,12 0 0,-17 0 0,12 0 0,-9 0 0,9 0 0</inkml:trace>
+</inkml:ink>
+</file>
+
+<file path=ppt/ink/ink15.xml><?xml version="1.0" encoding="utf-8"?>
+<inkml:ink xmlns:inkml="http://www.w3.org/2003/InkML">
+  <inkml:definitions>
+    <inkml:context xml:id="ctx0">
+      <inkml:inkSource xml:id="inkSrc0">
+        <inkml:traceFormat>
+          <inkml:channel name="X" type="integer" min="-2.14748E9" max="2.14748E9" units="cm"/>
+          <inkml:channel name="Y" type="integer" min="-2.14748E9" max="2.14748E9" units="cm"/>
+          <inkml:channel name="F" type="integer" max="32767" units="dev"/>
+        </inkml:traceFormat>
+        <inkml:channelProperties>
+          <inkml:channelProperty channel="X" name="resolution" value="1000" units="1/cm"/>
+          <inkml:channelProperty channel="Y" name="resolution" value="1000" units="1/cm"/>
+          <inkml:channelProperty channel="F" name="resolution" value="0" units="1/dev"/>
+        </inkml:channelProperties>
+      </inkml:inkSource>
+      <inkml:timestamp xml:id="ts0" timeString="2026-03-18T16:57:57.905"/>
+    </inkml:context>
+    <inkml:brush xml:id="br0">
+      <inkml:brushProperty name="width" value="0.05292" units="cm"/>
+      <inkml:brushProperty name="height" value="0.05292" units="cm"/>
+      <inkml:brushProperty name="color" value="#FF0000"/>
+    </inkml:brush>
+  </inkml:definitions>
+  <inkml:trace contextRef="#ctx0" brushRef="#br0">1257 5318 24575,'26'0'0,"0"0"0,0 0 0,6 0 0,2 0 0,-2 0 0,2 1 0,0-2 0,-3-2 0,2-2 0,-6 1 0,4 1 0,-9-3 0,0 1 0,10 5 0,-4 0 0,-7 0 0,8 0 0,-24 0 0,12 0 0,7 0 0,-1 0 0,-4 0 0,2 0 0,5 0 0,-2 0 0,-5 0 0,10 0 0,1 0 0,-11 0 0,2 0 0,2 0 0,9 0 0,-4 0 0,-2 0 0,-2 0 0,-5 0 0,11 0 0</inkml:trace>
+  <inkml:trace contextRef="#ctx0" brushRef="#br0" timeOffset="2083">1323 5821 24575,'22'0'0,"0"0"0,1 0 0,3 0 0,-2 0 0,3 0 0,-1 0 0,1 0 0,0 0 0,0 0 0,1 0 0,-1 0 0,-1 0 0,5 0 0,-2 0 0,-2 0 0,-4 0 0,-6 0 0,12 0 0,-26 0 0,20 0 0,-2 0 0,7 0 0,-3 0 0,0 0 0,6 0 0,1 0 0,-3 0 0,-12 0 0,3 0 0,-8 0 0,0 0 0,-9 0 0,15 0 0,5 0 0,2 0 0,3 0 0,1 0 0,-8 0 0,-1 0 0,0 0 0,0 0 0,12 0 0,-17 0 0,-3 0 0,-12 0 0</inkml:trace>
+  <inkml:trace contextRef="#ctx0" brushRef="#br0" timeOffset="16914">13441 4432 24575,'0'25'0,"0"1"0,0-2 0,0 1 0,0 7 0,0 0 0,0-2 0,0 1 0,0-7 0,0 2 0,0 2 0,0 6 0,0 3 0,0 2 0,0-6 0,0 2 0,0 1 0,0 1-438,0-7 1,0 2 0,0 1-1,0-1 1,0 1 0,0-2 437,0 2 0,0-1 0,0 0 0,0 0 0,0-1 0,0 1 0,0-1 0,0 1 0,0-2 0,0 0 0,0 8 0,0-2 0,0 0-26,0-2 1,0 1 0,0 2 25,0-7 0,0 2 0,0 1 0,0 0 0,0-1 0,0 1 0,0-1 0,0 1 0,0 0 0,0-3 0,0 0 0,0 1 0,0 1 0,0-1 0,0 2 0,0 1 0,0-1 0,0 0 0,0-3 0,0 6 0,0-2 0,0 3 0,0-5 0,0 4 0,0 1 0,0 0 0,0-1 0,0-3 0,0-2 0,0-2 0,0-1 0,0 3 0,0 4 0,0 3 0,0 1 0,0-1 0,0-5 0,0 3 0,0-4 0,0 0 0,0 5 0,0 0 0,0-3 0,0 0 0,0-2 0,0-7 0,0-2 0,0 0 0,0-1 2613,0 10-2613,-12-16 87,9 13-87,-9-14 0,11 5 0,2 4 0,-1 0 0,0 1 0,0-1 0,0 0 0,0 3 0,0-4 0,0-7 0,0-16 0,0-4 0,0-14 0</inkml:trace>
+  <inkml:trace contextRef="#ctx0" brushRef="#br0" timeOffset="31862">1257 6866 24575,'34'0'0,"-5"0"0,3 0 0,-6 0 0,1 0 0,1 0-781,3 0 0,2 0 0,0 0 781,-3 0 0,1 0 0,0 0 0,-1 0 0,3 0 0,-2 0 0,1 0 0,4 0 0,2 0 0,-2 0 0,-4 0 0,-1 0 0,0 0 250,-4 0 0,-1 1 0,2-2-250,8-4 0,1-2 0,-4 1 0,-7 4 0,-2 0 193,8-7 0,-3 0-193,1 9 0,-26 0 0,14 0 1207,-18 0-1207,23 0 0,-17 0 0,14-5 0,1-2 0,-4 5 0,7-5 0,2 2 0,4 5 0,0 1 0,2-2 0,-6-4 0,1-2 0,-2 1 0,3 4 0,0 0 0,-3-4 0,1-1 0,-4 2 0,11 5 0,-5 0 0,-9 0 0,0 0 0,9 0 0,4 0 0,1 0 0,-6 0 0,-6 0 0,3 0 0,-22 0 0,28 0 0,-26 0 0,26 0 0,-27 0 0,26 0 0,-13 0 0,17 0 0,3 0 0,1 0 0,-18 0 0,0 0 0,7 0 0,3 0 0,-4 0 0,3 0 0,-8 0 0,-8 0 0</inkml:trace>
+  <inkml:trace contextRef="#ctx0" brushRef="#br0" timeOffset="33984">16682 5252 24575,'32'0'0,"-13"0"0,2 0 0,13 0 0,3 0-504,-13 0 0,2 0 1,0 0 503,6 0 0,2 0 0,-2 0 0,-4 0 0,-1 0 0,-1 0 245,11 0 1,-2 0-246,-7 0 0,-3 0 125,-4 0 0,-2 0-125,2 0 0,8 0 0,-25 0 770,14 0-770,-6 0 0,2 0 0,19 0 0,-5 0 0,-8 0 0,4 0 0,-21 18 0,26-14 0,-24 14 0,12-18 0,-17 0 0</inkml:trace>
+</inkml:ink>
+</file>
+
+<file path=ppt/ink/ink16.xml><?xml version="1.0" encoding="utf-8"?>
+<inkml:ink xmlns:inkml="http://www.w3.org/2003/InkML">
+  <inkml:definitions>
+    <inkml:context xml:id="ctx0">
+      <inkml:inkSource xml:id="inkSrc0">
+        <inkml:traceFormat>
+          <inkml:channel name="X" type="integer" min="-2.14748E9" max="2.14748E9" units="cm"/>
+          <inkml:channel name="Y" type="integer" min="-2.14748E9" max="2.14748E9" units="cm"/>
+          <inkml:channel name="F" type="integer" max="32767" units="dev"/>
+        </inkml:traceFormat>
+        <inkml:channelProperties>
+          <inkml:channelProperty channel="X" name="resolution" value="1000" units="1/cm"/>
+          <inkml:channelProperty channel="Y" name="resolution" value="1000" units="1/cm"/>
+          <inkml:channelProperty channel="F" name="resolution" value="0" units="1/dev"/>
+        </inkml:channelProperties>
+      </inkml:inkSource>
+      <inkml:timestamp xml:id="ts0" timeString="2026-03-18T16:59:29.152"/>
+    </inkml:context>
+    <inkml:brush xml:id="br0">
+      <inkml:brushProperty name="width" value="0.05292" units="cm"/>
+      <inkml:brushProperty name="height" value="0.05292" units="cm"/>
+      <inkml:brushProperty name="color" value="#FF0000"/>
+    </inkml:brush>
+  </inkml:definitions>
+  <inkml:trace contextRef="#ctx0" brushRef="#br0">7078 4247 24575,'0'22'0,"0"1"0,0-3 0,0 1 0,0 13 0,0 1 0,0-1 0,0 1-773,0-5 0,0 1 0,0 1 773,0 4 0,0 1 0,0 0 0,0-1 0,0 0 0,0 1 0,0-5 0,0 1 0,0 0 0,0 0 0,0 2 0,0 0 0,0 0 0,0-2 0,0 1 0,0-1 0,0 0 185,0-4 1,0 2 0,0-1-1,0-2-185,0 0 0,0-2 0,0 0 0,0 0 0,0-1 0,0 1 127,-4 5 1,0 1 0,0-1-128,3-3 0,0-1 0,0-1 0,-5 6 0,0 0 0,5-5 0,2 1 0,-1-3 0,0-4 0,0 0 597,0 10 0,0 3-597,1-1 0,-1 2 0,-1-1 0,-2-5 0,-2 0 0,1 1 0,3 7 0,1 2 0,-2-5 0,-4-8 0,1-3 0,4-2 0,2-1 0,-1 0 0,0-4 0,0 2 0,0-18 0,0 12 0,0-9 0,0 9 0,0-12 0</inkml:trace>
+  <inkml:trace contextRef="#ctx0" brushRef="#br0" timeOffset="20286">19143 4405 24575,'33'0'0,"1"0"0,-7 6 0,1 0 0,0-4 0,4-2 0,-3 1 0,6 5 0,-4 0 0,-6-6 0,-1 0 0,0 0 0,-4 0 0,-5 0 0,-4 0 0,7 0 0,-2 0 0,3 0 0,1 0 0,7 0 0,6 0 0,-1 0 0,-4 0 0,-8 0 0,-2 0 0,-2 0 0,2 0 0,-18 0 0,12 0 0,-9 0 0,20 0 0,-20 0 0,27 0 0,-26 0 0,14 0 0,-18 0 0</inkml:trace>
+  <inkml:trace contextRef="#ctx0" brushRef="#br0" timeOffset="40264">18759 5067 24575,'15'0'0,"-4"0"0,7 0 0,-14 0 0,14 0 0,-18 0 0,12 0 0,8 0 0,-1-6 0,2 0 0,10 4 0,3 1 0,-8-3 0,2 0 0,-1 0 0,6 4 0,-2 0 0,3 0 0,-6 0 0,-13 0 0,14 0 0,-24 0 0,24 0 0,-14 0 0,18 0 0,7 0 0,-6 0 0,0 0 0,-7 0 0,0 0 0,0 0 0,7 0 0,-7 0 0,-10 0 0,12 0 0,-26 0 0,9 0 0,-12 0 0</inkml:trace>
+  <inkml:trace contextRef="#ctx0" brushRef="#br0" timeOffset="57467">17595 5821 24575,'28'0'0,"0"0"0,0 0 0,3 0 0,2 0 0,-2 0 0,1 0 0,1 0 0,1 0-820,2 0 1,0 0 0,1 0 0,1 0 601,-7 0 0,1 0 0,-1 0 0,1 0 0,-3 0 218,2 0 0,-2 0 0,-1 0 0,2 0-27,3 0 0,2 0 0,-1 0 0,-2 0 27,1 0 0,-2 0 0,0 0 0,6 0 0,0 0 0,0 0 0,-6 0 0,0 0 0,1 0 0,0 0 0,1 0 0,0 0 110,-2 0 1,0 0 0,0 0-111,0 0 0,-1 0 0,1 0 0,0 0 0,1 0 0,-2 0 0,-2 0 0,-1 0 0,-1 0 0,4 0 0,0 0 0,1 0 0,0 0 1040,-7 0 1,0 0-1041,8 0 0,2 0 0,-8 0 0,0 0 0,0 0 10,4 0 1,1 0 0,1 0-11,-5 0 0,1 0 0,1 0 0,0 0 0,5-1 0,2 1 0,0 0 0,-4 1 0,-1 2 0,-2 2 0,-1-1 0,5-4 0,-1 0 0,-5 3 774,1 8-774,-8-22 0,-8 8 0,-12-9 0,0 12 0</inkml:trace>
+</inkml:ink>
+</file>
+
+<file path=ppt/ink/ink17.xml><?xml version="1.0" encoding="utf-8"?>
+<inkml:ink xmlns:inkml="http://www.w3.org/2003/InkML">
+  <inkml:definitions>
+    <inkml:context xml:id="ctx0">
+      <inkml:inkSource xml:id="inkSrc0">
+        <inkml:traceFormat>
+          <inkml:channel name="X" type="integer" min="-2.14748E9" max="2.14748E9" units="cm"/>
+          <inkml:channel name="Y" type="integer" min="-2.14748E9" max="2.14748E9" units="cm"/>
+          <inkml:channel name="F" type="integer" max="32767" units="dev"/>
+        </inkml:traceFormat>
+        <inkml:channelProperties>
+          <inkml:channelProperty channel="X" name="resolution" value="1000" units="1/cm"/>
+          <inkml:channelProperty channel="Y" name="resolution" value="1000" units="1/cm"/>
+          <inkml:channelProperty channel="F" name="resolution" value="0" units="1/dev"/>
+        </inkml:channelProperties>
+      </inkml:inkSource>
+      <inkml:timestamp xml:id="ts0" timeString="2026-03-18T17:01:06.484"/>
+    </inkml:context>
+    <inkml:brush xml:id="br0">
+      <inkml:brushProperty name="width" value="0.05292" units="cm"/>
+      <inkml:brushProperty name="height" value="0.05292" units="cm"/>
+      <inkml:brushProperty name="color" value="#FF0000"/>
+    </inkml:brush>
+  </inkml:definitions>
+  <inkml:trace contextRef="#ctx0" brushRef="#br0">12025 7554 24575,'30'0'0,"0"0"0,0 0 0,-2 0 0,-1 0 0,2 0 0,0 0 0,2 0 0,0 0 0,0 0-798,5 0 1,0 0-1,1 0 798,-9 0 0,0 0 0,0 0 0,1 0 0,8 0 0,0 0 0,-1 0 0,-4 0 0,0 1 0,-2-2-1,-3-3 0,0 0 0,0 0 1,4 3 0,1 1 0,-1-2 0,-5-2 0,-2 0 0,2 0 0,10 3 0,2 2 0,-1-1-144,-5 0 0,-1 0 0,1 0 144,5 1 0,0 0 0,-1-3 0,-4-3 0,-1-2 0,0 2 0,6 3 0,0 2 0,0-3 0,-5-6 0,-2-2 0,3 2 0,0 6 0,1 3 0,1 1 0,-3-2 0,-1-2 0,-3-1 0,1-1 0,7-1 0,2 0 0,-4 1 0,-3 4 0,-2-3 0,-2-11 0,-1 1 566,-6 12 0,-1 1-566,1-5 0,-1 0 297,0 5 1,1 2-298,0-1 0,1 0 550,13 0 1,2 0-551,-2 0 0,1 0 0,-4 0 0,1 0 0,4 0 0,1 0 0,-11 0 0,1 0 0,-2 0 0,9 0 0,0 0 0,-4 1 0,2-1 0,0-1 0,-2-2 0,1-2 0,-2 1 0,4 3 0,1-1 0,-3-1 0,2-2 0,-3 2 0,2 2 0,-3 2 0,-6-1 0,2 0 0,1 0 0,2 0 0,-3 0 0,-1 0 0,-1 0 0,13 0 0,-1 0 0,-9 0 0,-1 0 0,11 0 0,-1 0 0,-11 0 0,-1 0 0,7-1 0,2 2 0,6 4 0,-3 1 0,-16-4 0,1-1 0,8 3 0,4 0 0,-1 0 0,-1 2 0,0 0 0,4-5 0,1 1 0,-10 1 0,1 2 0,1-1 0,2-3 0,2-2 0,-1 1 0,-3 0 0,1 0 0,0 0 0,6-1 0,0 1 0,3 1 0,-9 1 0,3 2 0,0 0 0,0 0 0,-1-1-729,4-1 0,-1-1 0,1-1 0,2 2 729,-5 0 0,1 1 0,1 1 0,2-1 0,-1 0 0,1-1 0,-3-1 0,2 0 0,0-1 0,0-1 0,-1 1 0,0-1 0,-1 1 0,5 0 0,-2 0 0,-1 0 0,1 0 0,0 0 0,-2 0 0,0 0 0,0 0 0,0 0 0,0 0 0,-1 0-419,6 0 1,-1 0 0,0 0 0,-2 0 0,-1 0 418,-2 0 0,-3 0 0,0 0 0,3 0 0,0 0 0,3 0 0,1 0 0,1-1 0,0 2 0,-1-1 0,-3 1 0,-1 1 0,1 0 0,0 0 0,0 0 0,-1 0 0,0-1 0,3 0 0,-1-1 0,0 1 0,1-1 0,0 0 0,1 1 0,-4 0 0,1 0 0,1 0 0,1 1 0,0 0 0,-1-1 0,1 1 0,0 0 0,1 0 0,1 0 0,0 1 0,0-1 0,-1 0 0,1 1 0,-2-1 0,0-1 0,-1 0 0,-2 0 0,0-1 0,0 1 0,0-1 0,0 1 0,2 0 0,0 0 0,1 1 0,2 1 0,-1-1 0,1 1 0,-1-1 0,-1 0 0,0 0 0,0 0 0,-1 0 0,0-1 0,-1 1 0,0-1 0,-1 1 0,-1 0 0,4 1 0,-1 0 0,-2 0 0,1 0 0,1 0 0,2 0 0,2 0 0,0 0 0,-1 0 0,-3 0 0,-1 0 0,-2 0 0,-2 0 0,0-1-278,4-1 0,-1-1 1,0-1 277,5 1 0,0 0 0,0 0 0,-3 0 0,1 0 0,0 0 0,-7 0 0,0 0 0,1 0 0,-1 0 0,8 0 0,0 0 0,1 0 0,-3 0 0,2 0 0,0 0 0,-2 0 0,0 0 0,-1 0 0,0 0 0,0 0 0,1 0 0,-3 0 0,0 0 0,-5 0 2430,7 0-2430,-11 0 0,0 0 2307,9 0-2307,-7 0 0,2 0 551,-4 0 1,1 0-552,2 0 0,2 0 0,-1 0 0,10 0 0,0 0-198,-3 0 1,3 0 0,-3 0 197,2 0 0,-1 0 0,1 0 0,2 0 0,-6 0 0,1 0 0,-1 0 0,3 0 0,-1 0 0,-6 1 0,-1-1 0,-1-1 0,1-4 0,-2-1 0,-4 4 0,0 1 0,5-5 0,3 0 0,3 4 0,5 3 0,-2 0 0,-4-1 0,-1 0 0,0 0 0,3 0 0,-1 0 0,-1 0 0,4 0 0,-6 0 592,-12 0-592,13-12 0,-37 9 0,16-9 0,-19 12 0,11 0 0</inkml:trace>
+  <inkml:trace contextRef="#ctx0" brushRef="#br0" timeOffset="6735">17687 7276 24575,'15'0'0,"-3"0"0,5 0 0,0 0 0,6 0 0,4 0 0,-4 0 0,2 0 0,8 0 0,4 0 0,0 0 0,-3 0 0,-2 0 0,2 0 0,-3 0 0,1 0 0,0 0 0,-2 0 0,3 0 0,-2 0 0,-2 0 0,2 0 0,-2 0 0,-3-1 0,-2 2 0,-2 5 0,2 0 0,3-5 0,4-1 0,0 2 0,-2 2 0,0 2 0,1 1 0,-1-1 0,5 1 0,-1 0 0,0 0 0,-3-2 0,0 0 0,-4 1 0,-5 4 0,-4-2 0,11-8 0,5 0 0,-19 0 0,16 0 0,-26 0 0,14 0 0,5 0 0,9 0 0,1 0 0,0 0 0,2 0 0,-9 0 0,2 0 0,-4 0 0,8 0 0,-9 0 0,-20 0 0,-3 0 0,-3 0 0,-8 0 0,11 0 0</inkml:trace>
+  <inkml:trace contextRef="#ctx0" brushRef="#br0" timeOffset="8538">19420 7369 24575,'31'0'0,"-1"0"0,-4 0 0,2 0 0,0 0 0,-3 0 0,0 0 0,1 0-535,6 0 1,2 0 0,-1 0 534,-2 0 0,-1 0 0,2 0 118,-3 0 0,1 0 0,1 0 0,1 0-118,0 0 0,0 0 0,0 0 0,1 0 0,-1 0 0,1 0 0,-1 0 0,0 0-288,-1 0 0,-1 0 1,1 0-1,-1 0 288,1 0 0,-1 0 0,0 0 0,1 0 0,0 0 0,0 0 0,2 0 0,2 0 0,-6 0 0,4 0 0,1 0 0,1 0 0,-1 0 0,-1 0 0,-2 0 0,7 0 0,-2 0 0,0 0 0,1 0 0,-6 0 0,2 1 0,1-1 0,0 1 0,-3-2 0,-2 0 0,9-5 0,-4-1 0,-1 2-74,-4 3 0,-2 2 0,1-2 74,-2-4 0,-1-1 0,1 2 0,4 4 0,0 1 0,-3 1 0,-5-1 0,-1 0 249,6 0 1,4 0-1,-4 0-249,10 0 17,-14 0 1,-1 0-18,11 0 368,-30 0 0,6 0 0,-21 0 0</inkml:trace>
+  <inkml:trace contextRef="#ctx0" brushRef="#br0" timeOffset="22489">22384 7011 24575,'22'0'0,"0"0"0,7 0 0,2 0 0,-5 0 0,0 0 0,3 0 0,0 0 0,2 0 0,0 0 0,0 0 0,6 0 0,-1 0 0,3 0 0,-10 0 0,2 0 0,1 0 0,0 0 0,-2 0 0,3 0 0,0 0 0,-1 0 0,-1 0-192,-1 0 1,0 0 0,-2 0 0,-1 0 191,0 0 0,-2 0 0,1 0 0,3 0 0,0 0 0,-2 0 0,0 0 0,1 0 0,0 0 0,3 0 0,-1 0 0,-3 0 0,-1 0 0,-1 0 0,10 0 0,-1 0 0,-7 0 0,-1 0 0,-1 0 94,0 0 1,-1 0-95,-2 0 0,0 0 0,10 0 0,-4 0 0,-8 0 0,-2 0 0,-2 0 0,2 0 0,-18 0 0</inkml:trace>
+</inkml:ink>
+</file>
+
+<file path=ppt/ink/ink18.xml><?xml version="1.0" encoding="utf-8"?>
+<inkml:ink xmlns:inkml="http://www.w3.org/2003/InkML">
+  <inkml:definitions>
+    <inkml:context xml:id="ctx0">
+      <inkml:inkSource xml:id="inkSrc0">
+        <inkml:traceFormat>
+          <inkml:channel name="X" type="integer" min="-2.14748E9" max="2.14748E9" units="cm"/>
+          <inkml:channel name="Y" type="integer" min="-2.14748E9" max="2.14748E9" units="cm"/>
+          <inkml:channel name="F" type="integer" max="32767" units="dev"/>
+        </inkml:traceFormat>
+        <inkml:channelProperties>
+          <inkml:channelProperty channel="X" name="resolution" value="1000" units="1/cm"/>
+          <inkml:channelProperty channel="Y" name="resolution" value="1000" units="1/cm"/>
+          <inkml:channelProperty channel="F" name="resolution" value="0" units="1/dev"/>
+        </inkml:channelProperties>
+      </inkml:inkSource>
+      <inkml:timestamp xml:id="ts0" timeString="2026-03-18T17:02:26.667"/>
+    </inkml:context>
+    <inkml:brush xml:id="br0">
+      <inkml:brushProperty name="width" value="0.05292" units="cm"/>
+      <inkml:brushProperty name="height" value="0.05292" units="cm"/>
+      <inkml:brushProperty name="color" value="#FF0000"/>
+    </inkml:brush>
+  </inkml:definitions>
+  <inkml:trace contextRef="#ctx0" brushRef="#br0">15134 4723 24575,'26'0'0,"0"0"0,-2 0 0,0 0 0,2 0 0,1 0 0,-2 0 0,1 0 0,9 0 0,1 0-336,-11 0 0,0 0 1,1 0 335,7 1 0,0-1 0,0-1 0,-5-4 0,-1-2 0,-1 1 123,5 4 1,-2 0-124,-5-8 0,-4 2 0,-5 8 0,-3 0 0</inkml:trace>
+  <inkml:trace contextRef="#ctx0" brushRef="#br0" timeOffset="3033">15333 5199 24575,'26'0'0,"6"0"0,-9 0 0,0 0 0,1 0 0,0 0 0,8 0 0,1 0 0,-3 0 0,0 0 0,4 0 0,-1 0 0,-9 0 0,0 0 0,0 0 0,-4 0 0,-5 0 0,14 0 0,-13 0 0,17 0 0,-1 0 0,-16 0 0,2 0 0,-18 0 0,12 0 0,8 0 0,8 0 0,2 0 0,2 0 0,-12 0 0,0 0 0,9 0 0,-1 0 0,-7 0 0,2 0 0,-20 0 0,26 0 0,-12 0 0,3 0 0,4 0 0,-4 0 0,8 0 0,-4 0 0,2 0 0,4 0 0,0 0 0,-4 0 0,0 0 0,11-1 0,-1 2 0,-11 5 0,-1 0 0,1-5 0,-2 1 0,10 10 0,-7-11 0,1-2 0,1 1 0,7 0 0,4 0 0,-4 0 0,-3 0 0,-12 0 0,-1 0 0,9 0 0,-3 0 0,-4 0 0,-5 0 0,13 0 0,-14 0 0,17 0 0,-12 0 0,0 0 0,6 0 0,1 0 0,-2-6 0,-1 0 0,-1 4 0,-1 1 0,10-11 0,-17 12 0,15 0 0,-14 0 0,16-18 0,0 14 0,-8-4 0,-2-2 0,3-1 0,-2 10 0,-5-1 0,-15-10 0,9 12 0,17 0 0,-10 0 0,2 0 0,2 0 0,9 0 0,-2 0 0,5 0 0,-4-8 0,0-2 0,1 6 0,-4-14 0,-7 18 0,8 0 0,-24 0 0,12 0 0,-17 0 0</inkml:trace>
+</inkml:ink>
+</file>
+
+<file path=ppt/ink/ink19.xml><?xml version="1.0" encoding="utf-8"?>
+<inkml:ink xmlns:inkml="http://www.w3.org/2003/InkML">
+  <inkml:definitions>
+    <inkml:context xml:id="ctx0">
+      <inkml:inkSource xml:id="inkSrc0">
+        <inkml:traceFormat>
+          <inkml:channel name="X" type="integer" min="-2.14748E9" max="2.14748E9" units="cm"/>
+          <inkml:channel name="Y" type="integer" min="-2.14748E9" max="2.14748E9" units="cm"/>
+          <inkml:channel name="F" type="integer" max="32767" units="dev"/>
+        </inkml:traceFormat>
+        <inkml:channelProperties>
+          <inkml:channelProperty channel="X" name="resolution" value="1000" units="1/cm"/>
+          <inkml:channelProperty channel="Y" name="resolution" value="1000" units="1/cm"/>
+          <inkml:channelProperty channel="F" name="resolution" value="0" units="1/dev"/>
+        </inkml:channelProperties>
+      </inkml:inkSource>
+      <inkml:timestamp xml:id="ts0" timeString="2026-03-18T17:02:59.021"/>
+    </inkml:context>
+    <inkml:brush xml:id="br0">
+      <inkml:brushProperty name="width" value="0.05292" units="cm"/>
+      <inkml:brushProperty name="height" value="0.05292" units="cm"/>
+      <inkml:brushProperty name="color" value="#FF0000"/>
+    </inkml:brush>
+  </inkml:definitions>
+  <inkml:trace contextRef="#ctx0" brushRef="#br0">17820 9882 24575,'26'0'0,"-5"0"0,2 0 0,1 0 0,1 0 0,0 0 0,1 0 0,1 0 0,7 0 0,1 0 0,-9 0 0,0 0 0,0 0 0,4 0 0,0 0 0,2 0 0,1 0 0,2 0 0,2 0 0,-4 0 0,3 0 0,-5 0 0,3 0 0,2 0 0,-2 0 0,2 0 0,1 0 0,-1 0-820,-2 0 1,0 1 0,0-1 0,0-1 730,-3-1 0,1 0 0,0-1 0,-1 0 0,-1 1 89,1 2 0,-1 1 0,-1-1 0,3-4 0,-1-2 0,1-4 0,1-1 0,1-1 0,0 1 0,-2 3 0,0 2 0,-1 2 0,0 1 0,0-1 0,2-3-437,0-2 1,1-2 0,1-1-1,1-2 1,0 2 0,-2 0-1,0 3 437,3 1 0,-1 2 0,-1 2 0,0-2 0,1-1 0,-6-2 0,1-2 0,-1 0 0,0-1 0,2 2 0,2 1 0,-3 3 0,3 1 0,1 2 0,1-1 0,0 2 0,-1-1 0,-1-1 0,-2 0 0,6-2 0,-2-1 0,-1 0 0,1 0 0,1 2 0,-4 2 0,1 0 0,2 1 0,-1 1 0,-1 0 0,-2 0 0,-4 0 356,10 1 1,-6 0 0,0 0-357,-1 0 0,0 0 0,-3 0 0,-3 0 0,-2 0 0,9 0 1559,-2 0-1559,5 0 0,5 0 0,-15 0 0,-1 0 0,3 0 819,2 0 0,1 0 0,2 0 0,-1 0-729,0 0 0,1 0 1,-2 0-1,-1 0-90,-1 1 0,-1-1 0,1-1 170,7-4 0,1-2 1,-2 2-171,4 3 0,-4-1 0,-5-6 0,0 1 0,0 6 0,-1 4 0,-7-2 0,-4 0 0,-1 0 0,2 0 0,-18 17 0,12-12 0,3 12 0,-1-5 0,6-10 0,1-1 0,-2 11 0,7-11 0,-2-2 0,-7 1 0,0 0 0,-17 0 0,0 0 0</inkml:trace>
+  <inkml:trace contextRef="#ctx0" brushRef="#br0" timeOffset="2320">19143 11139 24575,'29'0'0,"0"0"0,-1 0 0,2 0 0,2 0 0,-3 0 0,2 0 0,1 0 0,1 0 0,-2 0-820,4 0 1,-1 0 0,0 0 0,3 0 611,-2 0 0,3 0 0,0 0 0,0 0 0,-4 0 208,-2 0 0,-2 0 0,-1 0 0,1 0 255,2 0 1,0 0 0,1 0-1,1 0-255,-3 0 0,2 0 0,0 0 0,0 0 0,-2 0 0,1 0 0,-1 0 0,-1 0 0,1 0 192,2 0 1,1 0 0,0 0 0,-1 0-193,-3 0 0,1 0 0,-1 0 0,-2 0 0,-2 0 0,-2 0 0,2 0 0,2 0 0,1 0 0,2 0 0,0 0 0,3 0 0,2 0 0,-1 0 0,0 0-385,-5 0 1,-2 0 0,2 0 0,1 0 384,1 0 0,2 0 0,1 0 0,1 0 0,-1 0 0,1 0 0,1 0 0,-1 0 0,0 0 0,-2 0 0,-1 0 0,-2 0 0,0 0 0,2 0 0,0 0 0,3 0 0,-1 0 0,1 0 0,-1 0 0,-4 0 0,0 0 0,0 0 0,0 0 0,-1 0 0,7 0 0,0 0 0,-1 0 0,3 0 0,-9 0 0,0 0 0,1 0 0,1 0 0,0 0 0,1 0 0,0 0 0,2 0 0,0 0 0,1 0 0,-1 0 0,-1 0 0,-1 0 0,4 0 0,-2 0 0,-1 0 0,1 0 0,3 0 0,-6 0 0,0 0 0,3 0 0,-1 0 0,1 0 0,0 0 0,0 0 0,-2 0 0,1 0 0,-1 0 0,1 0 0,-1 0 0,-1 0 0,0 0 0,0 0 0,3 0 0,0 0 0,-1 0 0,0 0 0,-1 0 0,1 0 0,-1 0 0,-1 0 0,1 0 0,-1 0 0,0 0 0,0 0 0,3 0 0,1 0 0,-1 0 0,-2 0 0,-3 0 0,0 0 0,-2 0 0,1 0 687,9 0 1,2 0 0,-7 0-688,-11 0 0,-4 0 245,3 0-245,-10 0 0,-11-12 0,0 9 0,0-8 0,0 11 0</inkml:trace>
+  <inkml:trace contextRef="#ctx0" brushRef="#br0" timeOffset="41679">16999 11483 24575,'0'0'0</inkml:trace>
 </inkml:ink>
 </file>
 
@@ -1078,6 +1548,38 @@
   <inkml:trace contextRef="#ctx0" brushRef="#br0" timeOffset="107583">2712 10200 24575,'22'0'0,"0"0"0,1 0 0,3 0 0,-2 0 0,3 0 0,-1 0-433,1 0 1,0 0 0,0 0 432,4 0 0,0 0 0,0 0 0,-4 0 0,0 0 0,0 0 211,9 0 1,0 0-212,-3 0 0,-2 0 0,0 0 0,-1 0 107,-6 0 1,0 0-108,7 0 0,0 0 0,-6 0 0,-1 0 0,-1 0 0,2 0 329,6 0 1,0 0-330,-7 0 0,0 0 0,1 0 0,3 0 0,-3 0 0,1 0 0,0 0 0,11 0 0,-1 0 0,-5 0 0,-6-9 0,0 0 0,3 5 0,-8-14 0,10 18 0,-26 0 0,26 0 0,-16 0 0,19 0 0,-14 0 0,1 0 0,0 0 0,2 0 0,6 0 0,1 0 0,8 0 0,-6 0 0,-1 0 0,1 0 0,-9 0 0,0 0 0,11 0 0,-17 0 0,1 0 0,-5 0 0,21 0 0,-3 0 0,-4 0 0,-2 0 0,4 0 0,5 0 0,-1 0 0,-16 0 0,2 0 0</inkml:trace>
   <inkml:trace contextRef="#ctx0" brushRef="#br0" timeOffset="110784">8599 10067 24575,'22'0'0,"0"0"0,-1 0 0,1 0 0,9 0 0,2 0 0,3 0 0,0 0 0,-1 0 0,-1 0 0,-3 0 0,-1 0 0,-4 0 0,-2 0 0,4 0 0,-8 0 0,10 0 0,-14 0 0,16 0 0,0 0 0,-4 0 0,-7 0 0,2 0 0,-20 0 0,27 0 0,-26 0 0,26 0 0,-27 0 0,26 0 0,-25 0 0,14 18 0,-18-14 0,12 14 0,-9-18 0,15 0 0,5 0 0,-4 0 0,5 0 0,2 0 0,-6 0 0,0 0 0,1 0 0,-1 0 0,8 0 0,1 0 0,-26 0 0,9 0 0,-12 0 0,0 0 0,12 0 0,8 0 0,8 12 0,-8-11 0,-2 1 0,-2 10 0,14-12 0,-27 0 0,9 0 0,-12 0 0</inkml:trace>
   <inkml:trace contextRef="#ctx0" brushRef="#br0" timeOffset="113750">10517 10067 24575,'15'0'0,"8"0"0,1 0 0,2 0 0,-3 0 0,1 0 0,12 0 0,-1 0 0,-8 0 0,-3 0 0,-3 0 0,0 0 0,-2 0 0,1 0 0,6 0 0,-2 0 0,-5 0 0,4 0 0,-4 0 0,-17 0 0,28 0 0,-26 0 0,26 0 0,-27 0 0,8 18 0,-11-14 0,0 14 0</inkml:trace>
+</inkml:ink>
+</file>
+
+<file path=ppt/ink/ink20.xml><?xml version="1.0" encoding="utf-8"?>
+<inkml:ink xmlns:inkml="http://www.w3.org/2003/InkML">
+  <inkml:definitions>
+    <inkml:context xml:id="ctx0">
+      <inkml:inkSource xml:id="inkSrc0">
+        <inkml:traceFormat>
+          <inkml:channel name="X" type="integer" min="-2.14748E9" max="2.14748E9" units="cm"/>
+          <inkml:channel name="Y" type="integer" min="-2.14748E9" max="2.14748E9" units="cm"/>
+          <inkml:channel name="F" type="integer" max="32767" units="dev"/>
+        </inkml:traceFormat>
+        <inkml:channelProperties>
+          <inkml:channelProperty channel="X" name="resolution" value="1000" units="1/cm"/>
+          <inkml:channelProperty channel="Y" name="resolution" value="1000" units="1/cm"/>
+          <inkml:channelProperty channel="F" name="resolution" value="0" units="1/dev"/>
+        </inkml:channelProperties>
+      </inkml:inkSource>
+      <inkml:timestamp xml:id="ts0" timeString="2026-03-18T17:03:59.405"/>
+    </inkml:context>
+    <inkml:brush xml:id="br0">
+      <inkml:brushProperty name="width" value="0.05292" units="cm"/>
+      <inkml:brushProperty name="height" value="0.05292" units="cm"/>
+      <inkml:brushProperty name="color" value="#FF0000"/>
+    </inkml:brush>
+  </inkml:definitions>
+  <inkml:trace contextRef="#ctx0" brushRef="#br0">17754 5093 24575,'-23'0'0,"35"0"0,18 0 0,6 0 0,0 0 0,2 0 0,-3 0 0,2 0 0,-2 0 0,-7 0 0,-1 0 0,-1 0 0,1 0 0,0 0 0,0 0 0,2 0 0,1 0 0,1 0 0,5 0 0,2 0 0,-2 0 0,-8 0 0,-2 0 0,2 0 0,7 0 0,1 0 0,-1 0 0,-5 0 0,0 0 0,0 0 0,2 0 0,0 0 0,1 0 0,0 0 0,2 0 0,-2 0 0,-2 1 0,-1-1 0,-1-1 0,1-5 0,0 0 0,3 5 0,-1 0 0,-8-6 0,0 2 0,0 5 0,-2 0 0,-2-12 0,4 9 0,8-9 0,-9 11 0,3 2 0,5-1 0,4 0 0,-2 0 0,2 0 0,-2 0 0,5 0 0,-1 0 0,-3 0 0,1 0 0,-2 0 0,1 0 0,-2 0 0,-7 0 0,-2 0 0,10 0 0,-22-17 0,7 12 0,-14-12 0,26 17 0,-9-6 0,2 0 0,2 4 0,1 1 0,-1-2 0,1-1 0,1-1 0,3-1 0,1 0 0,-2 1 0,7 2 0,0 1 0,0-7 0,0 0 0,1 8 0,-1 2 0,-9-1 0,-2 0 0,4 0 0,2 0 0,3 0 0,2 0 0,-3 0 0,-3 0 0,-1 0 0,1 0 0,4 0 0,-3 0 0,8 0 0,-3 0 0,-10 0 0,0 0 0,-1 0 0,2 0 0,-3 0 0,1 0 0,-1 0 0,12 0 0,3 0 0,-13 0 0,1 0 0,1 0 0,-1 0 0,1 0 0,0 0 0,2 0 0,0 0 0,0 0 0,0 0 0,1 0 0,-2 0 0,7 0 0,0 0 0,-7 0 0,1 0 0,0 0 0,6 0 0,0 0 0,0 0 0,-3 0 0,0 0 0,1 0 0,-6 0 0,1 0 0,-1 0 0,0 0 0,2 0 0,-1 0 0,2 0 0,-3 0 0,3 0 0,0 0 0,-2 0 0,1 0 0,0 0 0,1 0 0,-2 0 0,1 0 0,1 0 0,1 0 0,3 0 0,2 0 0,-1 0 0,-2 0 0,0 0 0,-2 0 0,2 0-389,-4 0 0,2 0 1,1 0-1,0 0 1,-2 0 388,0 0 0,-1 0 0,-1 0 0,0 0 0,1 0 0,1-1 0,-1 1 0,0 1-278,4 4 1,0 2-1,-1-1 278,2-1 0,0 0 0,-4 1 0,-5 4 0,0 1 0,4-1 0,3 1 0,-5-3 0,7-3 0,-9 0 0,3 3 0,-4-4 0,6-4 928,-9-1 0,0 2-928,10 11 920,-4-9-920,-8 9 0,10-12 0,-2 0 0,-9 0 0,3 0 0,6 0 0,1 0 0,-4 0 0,-1 0 0,11 0 0,-12 1 0,-5-2 0,-13-11 0,12 9 0,-17-9 0,0-5 0,-17 12-820,0-24 1,-3 26 0,8-9 0</inkml:trace>
+  <inkml:trace contextRef="#ctx0" brushRef="#br0" timeOffset="4833">2011 8784 24575,'23'0'0,"-1"0"0,4 0 0,2 0 0,1 0 0,-3 0 0,0 0 0,1 0-832,8 0 1,3 0-1,-1 0 832,0 0 0,-1 0 0,2 0-685,-5 0 1,1 0 0,1 0-1,1 0 685,-2 0 0,1 0 0,1 0 0,1 0 0,0 0-391,-4 0 0,-1 0 0,2 0 1,-1 0-1,1 0 0,1 0 391,0 0 0,1 0 0,0 0 0,1 0 0,-1 0 0,1 0 0,-1 0 0,0 0 0,0 1 0,-1-1 0,1 0 0,-1 0 0,1 0 0,0-1 0,1 0 0,0-2 0,1 1 0,-1-1 0,1 0 0,-1 0 0,-1 1 0,0-1 0,-1 1 0,-1 0 0,1 0 0,0-1 0,-1 1 0,0-1 0,3 0 0,0 0 0,-1 0 0,1 0 0,1-1 0,0 0 0,-3-1 0,1 0 0,1-1 0,0 0 0,0 0 0,0 1 0,-1 0 0,-1 2 0,-2 0 0,-1 2 0,-1 0 0,0 1 0,0 0 0,2-1 0,1-1 0,0 0 0,3-1 0,2-1 0,0 0 0,0 0 0,0 0 0,-2 1 0,-2 0 0,-2 1-356,4 1 0,-2 1 0,-3 0 1,1 1-1,0-1 356,0 0 0,0 0 0,1 0 0,0 0 0,-2 0 0,-2 0 3,3 0 0,-2 0 0,-2 0 0,0 0-3,4 0 0,-1 0 0,0 0 628,0 0 0,1 0 0,0 0-628,-3 0 0,1 0 0,0 0 0,-3 0 0,7 0 0,0 0 593,-6 0 1,3 1-1,0-1 1,-1-1-594,-2-3 0,0 0 0,1 0 0,0 3 0,2 1 0,2 0 0,1-2 0,-5-1 0,2-2 0,0-1 0,2 0 0,-1 1 0,0 1 0,-2 2 0,1 1 0,0 1 0,0 0 0,-1 0 0,0-2 0,4-1 0,0-1 0,0 0 0,-2 0 0,-2 2 0,11 1 0,-3 1 0,-8 1 2462,-3-1-2462,-10 0 0,-18 0 0,0 0 0</inkml:trace>
+  <inkml:trace contextRef="#ctx0" brushRef="#br0" timeOffset="12467">10358 8943 8191,'15'0'0,"-3"0"3276,6 0-2383,7 0 1,7 0-894,-4 0 0,2 0 0,2 0 233,-2 0 0,3 0 0,1 0 0,1 0-233,-4 0 0,2 0 0,0 0 0,0 0 0,0 0 28,0 0 0,1 0 0,0 0 0,-1 0 1,2 0-29,-4 0 0,-1 0 0,1 0 0,1 0 0,1 0 0,1 0 0,-1 0 0,1 0 0,2 0 0,0 0 0,1 0 0,0 0 0,-1 0 0,0 0 0,-1 0 0,0 0 0,0 0 0,0 0 0,0 0 0,1 0 0,-1 0 0,0 0 0,1 0 0,1 0 0,0 0 0,-1 0 0,1 0 0,-1 0 0,0 0 0,0 0 357,2 0 0,1 0 1,-1 0-1,0 0 1,-1 0-1,-2 0 0,-1 0-357,0 0 0,-3 0 0,-1 0 0,1 0 0,0 0 0,4 0 0,0 0 0,0 0 0,1 0 0,-2 0-337,-3 0 0,-1 0 0,1 0 0,-1 0 1,1 0 336,2 0 0,0 1 0,1-1 0,0 0 0,2-1 0,-4-1 0,1 0 0,1-1 0,0 0 0,1 0 0,-2 0 0,-1 1 0,4 1 0,-1 1 0,0 0 0,0-1 0,0-1 252,-2-2 1,1-1-1,1-1 1,-1 0-1,-2 1 1,-3 1-253,7 3 0,-3 1 0,-4-1 1113,4-6 0,-5 2-1113,4 5 1490,-12 0 0,1 0-1490,3 0 0,1 0 0,8 0 0,3 0 0,0 0 0,0 0 1355,-8 0 0,-3 0-1355,3 0 0,-11 0 0,-17 0 0,0 0 0,0 0 0</inkml:trace>
+  <inkml:trace contextRef="#ctx0" brushRef="#br0" timeOffset="26866">17661 8877 24575,'26'0'0,"7"0"0,-11 0 0,1 0 0,1 0 0,1 0 0,7 0 0,0 0 0,-7 0 0,-1 0 0,5 0 0,-1 0 0,-7 0 0,-1 0 0,6 0 0,0 0 0,0 0 0,1 0 0,-2 0 0,-2 0 0,11 0 0,-4 0 0,-28 0 0,10 0 0,18 0 0,-8 0 0,4 0 0,-1 0 0,1 0 0,4 0 0,0 0 0,3 0 0,1 0 0,1 0 0,-4 0 0,7 0 0,-4 0 0,4 0-371,-3 0 0,2 1 1,2 0-1,-2-1 1,-4-2 370,2-3 0,-4-2 0,0 1 0,6 4 0,1 2 0,-3-2-88,-6-3 1,-3-2-1,0 1 88,12-1 0,-4 2 0,2 2 0,-13-3 0,-5 1 0,-14 5 0,-4 0 1827,-16 0-1827,-16 0 0,5 0 0,-2 0 0,-5 0 0,-1 0-211,5-1 0,-2 1 0,0 1 211,-1 2 0,0 2 0,0-2 0,-2-1 0,-1-2 0,3 1 0,-5 5 0,4 0 0,3-5 0,4-2 0,10 1 0,17 0 0,0 0 0,0 0 0</inkml:trace>
+  <inkml:trace contextRef="#ctx0" brushRef="#br0" timeOffset="28220">20360 8969 24575,'31'0'0,"1"0"0,-7 0 0,2 0 0,2 0 0,3 0 0,3 0 0,2 0 0,1 0-656,-2 0 1,1 0-1,0 0 1,2 0 0,-1 0 108,-4 0 1,1 0 0,0 0 0,0 0 0,1 0 0,-1 0 501,2 0 0,1 0 0,0 0 0,0 0 0,-1 0 0,-1 0 45,1 1 0,-1-1 0,0 0 0,-1 0 0,1-1-79,-3 0 1,0 0 0,0-1-1,0 0 1,-2 0 0,-1-1 78,4-2 0,-3 0 0,0-1 0,1 1 202,4 1 0,1 0 0,-2 1 1,-3-2-203,1-5 0,-3 2 0,1 8 0,-1 0 0,-1-5 0,0-2 0,4 6 0,3 0 810,-6-3 0,1-1 0,0 2-810,1 2 0,-1 1 0,-1 1 0,6-1 0,-3 0 447,-2 0 0,-5 0 0,-5 0 0,-9 0 0</inkml:trace>
 </inkml:ink>
 </file>
 
@@ -1289,7 +1791,7 @@
           <inkml:channelProperty channel="F" name="resolution" value="0" units="1/dev"/>
         </inkml:channelProperties>
       </inkml:inkSource>
-      <inkml:timestamp xml:id="ts0" timeString="2026-03-16T17:02:42.722"/>
+      <inkml:timestamp xml:id="ts0" timeString="2026-03-18T16:37:32.836"/>
     </inkml:context>
     <inkml:brush xml:id="br0">
       <inkml:brushProperty name="width" value="0.05292" units="cm"/>
@@ -1297,18 +1799,7 @@
       <inkml:brushProperty name="color" value="#FF0000"/>
     </inkml:brush>
   </inkml:definitions>
-  <inkml:trace contextRef="#ctx0" brushRef="#br0">3559 4498 24575,'0'22'0,"0"7"0,0-14 0,-18 17 0,14-4 0,-14-7 0,18 2 0,0-20 0,-12 27 0,9-26 0,-8 14 0,11-6 0,0-9 0,-12 26 0,9-25 0,-9 26 0,12-27 0,0 20 0,-18-20 0,14 9 0,-14 6 0,18-14 0,0 25 0,0-26 0,0 21 0,0-21 0,0 8 0,0-11 0,0 0 0,0 18 0,0-13 0,0 24 0,0-26 0,0 26 0,0-24 0,0 24 0,0-26 0,0 9 0,0 0 0,0-10 0,0 28 0,0-26 0,0 14 0,0-18 0,0 0 0</inkml:trace>
-  <inkml:trace contextRef="#ctx0" brushRef="#br0" timeOffset="14199">6615 5702 24575,'14'0'0,"10"0"0,-4 0 0,2 0 0,2 0 0,13 0 0,-7 0 0,1 0 0,-1 0 0,1 0 0,-5 0 0,1 0 0,1 0 0,-1 0 0,0 1 0,-1-2 0,11-8 0,-2 0 0,-2 7 0,-1 0 0,-1-7 0,-2 0 0,-4 8 0,-1 2 0,8-1 0,-2 0 0,0 0 0,-5 0 0,0 0 0,-1 0 0,-2 0 0,15 0 0,-6 0 0,-1 0 0,1 0 0,-5 0 0,-2 0 0,-7 0 0,12 0 0,-26 0 0,20 0 0,-2 0 0,7 0 0,4 0 0,1 0 0,-6 0 0,-7 0 0,-1 0 0,-3 0 0,13 0 0,-14 0 0,0 0 0,14 0 0,-25 0 0,26 0 0,-15 0 0,17 0 0,-4 0 0,-3 0 0,0 0 0,-6 0 0,3 0 0,-3 0 0,-16 0 0,26 0 0,-12 18 0,3-14 0,4 14 0,-21-18 0,26 0 0,-13 0 0,8 0 0,2 0 0,5 0 0,-5 0 0,-2 0 0,-8 0 0,14 0 0,-10 0 0,-4 0 0,2 12 0,-6-10 0,2 10 0,19-12 0,-5 0 0,4 0 0,-10 0 0,0 0 0,15 0 0,-3 0 0,-5 0 0,-26 0 0,-3 0 0,-3 0 0,-9 0 0</inkml:trace>
-  <inkml:trace contextRef="#ctx0" brushRef="#br0" timeOffset="18751">9194 6231 24575,'22'0'0,"0"0"0,9 0 0,-1 0 0,2 0 0,-7 0 0,-2 0 0,1 0 0,1 0 0,6 0 0,0 0 0,-7 0 0,0 0 0,5 0 0,2 0 0,-3 0 0,1 0 0,-3 0 0,-2 0 0,-1 0 0,8 0 0,0 0 0,1 0 0,-16 0 0,2 0 0,-18 0 0</inkml:trace>
-  <inkml:trace contextRef="#ctx0" brushRef="#br0" timeOffset="20684">10636 6866 24575,'23'0'0,"0"0"0,-3 0 0,1 0 0,4 0 0,1 0 0,1 0 0,-1 0 0,5 0 0,-1 0 0,-6 0 0,0 0 0,8 0 0,-2 0 0,1 0 0,-1 0 0,1 0 0,-6 0 0,-1 0 0,0 0 0,0 0 0,7 0 0,0 0 0,-7 0 0,1 0 0,-1 0 0,3 0 0,0 0 0,7 0 0,1 0 0,-10 0 0,1 0 0,1 0-163,-1 0 1,-1 0 0,2 0 162,-1 0 0,1 0 0,0 0 0,0 0 0,1 0 0,-2 0 0,11 0 0,-2 0 0,-2 0 0,-1 0 0,-1 0 0,-2 0 0,-5 0 0,1 0 0,6 0 0,-1 0 0,1 0 0,0 0 0,0 0 487,6 0-487,-14 0 0,-1 0 0,-1 0 0,-9 0 0,-12 0 0</inkml:trace>
-  <inkml:trace contextRef="#ctx0" brushRef="#br0" timeOffset="69218">2514 10702 24575,'22'0'0,"1"0"0,11 0 0,3 0 0,-13 0 0,1 0 0,2 0-790,3 0 0,3 0 0,0 0 0,-1 0 790,6 0 0,-2 0 0,2 0 0,-7 0 0,0 0 0,1 0 0,-1 0 0,4 0 0,-1 0 0,1 0-86,2 0 1,0 0 0,-1 0 85,-3 0 0,-2 0 0,2 0 0,-2 0 0,2 0 0,0 0 0,-2 0 0,2 0 0,-2 0 0,2 0 0,-3 1 0,2 0 0,-1-1 0,-2-2 0,0-3 0,-2-2 0,1 2 0,6 3 0,1 2 0,-3-3 173,3-5 1,-1-1-174,-4 4 0,1 1 0,-2 1 0,6 2 0,-1-1 0,-8-2 0,1 0 0,-2 0 0,6 4 0,-2 0 0,4 1 0,-1-2 0,-10-5 0,-1 0 761,4 5 0,0 0-761,3-11 515,-4 11 1,2 2-516,4-1 0,0 0 0,2 0 0,-2 0 0,0 0 0,4 1 0,2-2 0,-7-4 0,2-2 0,-2 1 0,6 4 0,-1 0 0,-8-4 0,0-1 0,0 2 0,0 4 0,0 1 0,0 1 0,8-1 0,1 0-118,-6 0 1,1 0-1,1 0 118,-1 0 0,1 1 0,0-2-319,-3-1 1,0-2 0,1 1-1,0 0 319,0 2 0,1 1 0,1-1 0,-1 0-426,2-1 0,1-1 0,0 0 0,0 0 426,1-1 0,1 1 0,0 0 0,-1 1 0,-1 1 0,-1 0 0,0 1 0,0-1 0,4-1 0,1-1 0,-1 0 0,-2-1 0,3-2 0,-1 0 0,0 1-278,1 3 0,0 1 0,-1-1 278,-4-3 0,-2-2 0,1 2 0,0 3 0,0 3 0,-1 0 0,-3-1 0,0 0 0,0 0 0,3 0 0,0 0 0,0 0 0,-3-1 0,0 2 0,0-1 97,-1 0 1,1 0 0,0 0-98,3 0 0,0 0 0,0 0 0,-3 0 0,0 0 0,0 0 0,0-4 0,0-1 0,0 2 0,3 1 0,0 2 0,0-1 0,4-5 0,1 0 0,-9 5 0,0 2 0,0-1 559,4 0 0,0 0-559,2 0 0,0 0 0,-1 0 0,-1 0 0,2 0 0,2 0 0,-8 0 0,1 0 0,-2 0 0,1 0 0,-1 0 882,7 0 0,-2 0-882,-2 0 1001,4 0-1001,1 0 505,-6 0-505,-7 0 0,-1 0 0,-3 0 0,4 0 0,1 0 0,3 0 0,-6-8 0,3-2 0,4 8 0,0 0 0,-1-7 0,1 0 0,-1 8 0,4 1 0,-2 1 0,5-1 0,1 0-288,-2 0 0,3 0 0,-2 0 288,-5 0 0,-1 0 0,0 0 0,4 0 0,-1 0 0,2 0 0,4 0 0,0 0 0,-1 0 0,-5 0 0,-1 0 0,2 0 0,1 0 0,1 0 0,1 0 0,-3 0 0,-1 0 0,-3 0 0,2 0 0,5 0 0,0 0 0,-2 0 0,-5 0 0,-2 0 0,1 0 0,-2 0 0,-2 0 0,-8 0 0</inkml:trace>
-  <inkml:trace contextRef="#ctx0" brushRef="#br0" timeOffset="72434">2990 11483 24575,'32'0'0,"-4"0"0,1 0 0,0 0 0,0 0 0,7 0 0,0 0 0,-3 0 0,-2 0 0,0 0 0,-1 0 0,-6 0 0,0 0 0,7 0 0,0 0 0,-6 0 0,-1 0 0,0 0 0,0 0 0,1 0 0,0 0 0,-5 0 0,0 0 0,0 0 0,1 0 0,13 0 0,1 0 0,-7-1 0,1 2-164,0 4 0,2 2 0,-1-1 164,4-4 0,1 0 0,-5 4 0,1 1 0,-2-2 0,-3-5 0,-1 0 0,4-1 0,-2 2 0,5 10 0,-4-8 0,-3 3 0,0 0 0,6-6 246,-6 0 0,0 0-246,3 0 0,4 0 0,1 0 0,-5 0 0,-4 0 0,2 0 0,-2 0 0,0 0 0,5 0 0,2 0 0,-4 0 0,2 0 0,-2 0 0,2 0 0,0 0 0,-1 0 0,0 0 0,-1 0 0,-2 0 0,-2 0 0,11 0 0,-16 0 0,-18-12 0,0 9 0,0-8 0</inkml:trace>
-  <inkml:trace contextRef="#ctx0" brushRef="#br0" timeOffset="81300">7739 10001 24575,'34'0'0,"-9"0"0,0 0 0,6 0 0,-6 0 0,0 0 0,3 0 0,-3 8 0,0 2 0,5 6 0,-8 3 0,1 0 0,-1-5 0,0 0 0,-3 2 0,-2 1 0,0 0 0,0-2 0,13 1 0,-27 13 0,20-26 0,-20 9 0,26-12 0,-12 18 0,15-2 0,-17 5 0,14-10 0,-25-11 0,14 0 0</inkml:trace>
-  <inkml:trace contextRef="#ctx0" brushRef="#br0" timeOffset="82966">8374 10041 24575,'-22'12'0,"4"8"0,18-4 0,-11 2 0,8-18 0,-9 12 0,0 20 0,-3-17 0,-2 1 0,2 14 0,-1 2 0,-10-8 0,2 0 0,15 0 0,2 1 0,-9-1 0,2-4 0,11-5 0,-8-4 0</inkml:trace>
-  <inkml:trace contextRef="#ctx0" brushRef="#br0" timeOffset="121151">15888 4471 24575,'34'0'0,"-10"0"0,2 0 0,4 0 0,0 0 0,4 0 0,1 0 0,-8 0 0,-1 0 0,-1 0 0,0 0 0,-1 0 0,-2 6 0,0 0 0,10-3 0,-4 9 0,-9-11 0,0-2 0,9 1 0,5 0 0,-11-1 0,0 2 0,9 17 0,-7-16 0,2 0 0,-3 7 0,-1 0 0,15-9 0,-15-1 0,0 2 0,10 10 0,-4-8 0,5 9 0,-19-12 0,-2 0 0,-12 0 0,18 0 0,-14 0 0,25 0 0,-8 0 0,7 0 0,-7 0 0,-10-12 0,1 9 0,-9-8 0,9 11 0</inkml:trace>
-  <inkml:trace contextRef="#ctx0" brushRef="#br0" timeOffset="126916">17939 5847 24575,'22'0'0,"-2"0"0,1 0 0,14 0 0,-6 0 0,3 0 0,-7 0 0,1 0 0,0 0 0,9 0 0,-1 0 0,3 0 0,-1 0 0,-4 0 0,0 0 0,-1 0 0,-2 0 0,-4 0 0,-1 0 0,8 0 0,-2 0 0,1 0 0,-6 0 0,0 0 0,2 0 0,-7 0 0,-1 0 0,9 0 0,-4-5 0,2-1 0,4 3 0,-4-4 0,-2 2 0,4 5 0,5 0 0,-1 0 0,-4 0 0,4 0 0,1 0 0,-5 0 0,-4 0 0,2 0 0,4 0 0,1 0 0,0 0 0,0 0 0,-6 0 0,0 0 0,3 0 0,-9 0 0,0 0 0,9 0 0,4 0 0,1 0 0,-5 0 0,-8 0 0,4 0 0,-4 0 0,-3 0 0,12 0 0,-8 0 0,6 0 0,6 0 0,-1 0 0,-4 0 0,-9 0 0,0 0 0,9 0 0,-7 0 0,2 0 0,-2 0 0,-5 0 0,2 0 0,-18 0 0,11 0 0,-8 0 0,21 0 0,-21 0 0,26 0 0,-24 0 0,24 0 0,-26 0 0,26 12 0,-24-9 0,12 8 0,-5-11 0,-9 0 0,9 0 0,0 0 0,-9 0 0,26 0 0,-25 0 0,26 0 0,-27 0 0,20 0 0,-20 0 0,27 0 0,-14 18 0,2-16 0,2 0 0,8 16 0,-8-18 0,4 0 0,-3 0 0,-5 0 0,13 0 0,-26 0 0,9 0 0,-12 0 0,12 0 0,-9 0 0,8 0 0,7 0 0,-14 0 0,14 0 0,-6 0 0,8 0 0,-1 0 0,2 0 0,5 0 0,1 0 0,-3 0 0,0 0 0,5 0 0,0 0 0,-8 0 0,-1 0 0,8 0 0,1 0 0,-14 0 0,0 0 0,14 0 0,-25 0 0,26 0 0,-10 0 0,8 0 0,-7 0 0,2 0 0,-20 0 0,27 0 0,-26 0 0,14 0 0,-18 0 0,12 0 0,-9 0 0,20 0 0,-20 0 0,26 0 0,-12 0 0,7 0 0,2 0 0,4 0 0,-4 0 0,-2 0 0,4 0 0,5 0 0,-1 0 0,-16 0 0,14 0 0,-28 0 0,28 0 0,-26 0 0,14 0 0,-18 0 0,12 0 0,-9 0 0,20 0 0,-20 0 0,26 0 0,-24 0 0,13 0 0,-18 0 0,0 0 0,0 0 0</inkml:trace>
-  <inkml:trace contextRef="#ctx0" brushRef="#br0" timeOffset="133366">19103 6456 24575,'-32'0'0,"4"0"0,7 0 0,-2 0 0,20 0 0,-9 0 0,-6 0 0,14 0 0,-26 0 0,-2 0 0,9 0 0,-2 0 0,-5 0 0,-1 0 0,4 0 0,1 0 0,6 0 0,1 0 0,-1 0 0,1 0 0,3 0 0,-13 0 0,26 0 0,-9 0 0,0 0 0,-8 0 0,-8 0 0,-4 0 0,-1 0 0,5 0 0,8 0 0,-10 0 0,26 0 0,-14 0 0,7 0 0,-4 0 0,-17 0 0,12 0 0,0 0 0,0 0 0,-1 0 0,-8 0 0,0 0 0,-7 0 0,13 0 0,2 0 0,-12 0 0,5 0 0,8 0 0,-4 0 0,4 0 0,-8 0 0,9 0 0,-1 0 0,-8 0 0,-4 0 0,17 0 0,4 0 0,11 0 0,-18 0 0,14 0 0,-26 0 0,27 0 0,-15 0 0,-5 0 0,4 0 0,-5 0 0,-2 0 0,-2 0 0,-4 0 0,-1 0 0,6 0 0,6 0 0,-8 0 0,12 0 0,-15 0 0,17 0 0,-14 0 0,25 0 0,-14 0 0,6 0 0,9 0 0,-9 0 0,1 0 0,-10 0 0,-7 0 0,9-1 0,0 2 0,-9 11 0,-4-9 0,-1 8 0,17-11 0,-1 0 0,17 0 0,-12 0 0,9 0 0,-21 0 0,21 0 0,-8 0 0,11 0 0</inkml:trace>
-  <inkml:trace contextRef="#ctx0" brushRef="#br0" timeOffset="141250">18256 7580 24575,'33'0'0,"-5"0"0,1 0 0,3 0 0,-1 0 0,1 0-609,-2 0 1,1 0 0,1 0 608,1 0 0,-1 0 0,2 0 0,0 0 0,1 0 0,1 0-334,-4 1 0,2-1 0,-1 0 0,-1-1 334,6-2 0,-2-2 0,2 2 0,-3 1 0,1 2 0,0 0 0,-3-1 0,-6-3 0,-2-1 0,2 2 91,10 2 1,2 1 0,-3 1-92,-6-1 0,-2 0 0,8 0 0,-1 0 0,-8 0 0,-3 0 420,-3 0 0,0 0-420,7 0 0,1 0 1517,8 0-1517,-7 0 0,1 0 0,-1 0 0,1 0 0,2 0 0,3 0 0,-7 0 0,2 0 0,-2 0 0,6 0 0,0 0 0,1 0 0,0 0 0,-4 0 0,0 0 0,-1 0 0,-2 0 264,-4 0 1,-1 0-265,2 0 0,-2 0 0,4 0 0,-8 0 0,-8 0 0,0 0 0,9 0 0,6 0 0,6 0 0,-1 0 0,-4 0 0,-3 0 0,0 0 0,6 0 0,-1 0 0,2 0 0,4 0 0,-13 6 0,0 0 0,9-3 0,-17 8 0,14-11 0,-12 18 0,6-15 0,4-2 0,-3 8 0,0 0 0,6-2 0,0-2 0,-3-4 0,-1 1 0,0 3 0,0 1 0,-5 1 0,-1-2 0,0-3 0,0-1 0,-1 5 0,0 0 0,9-6 0,-3 0 0,0 0 0,6 0 0,-1 0 0,1 0 0,-6 0 0,-1 0 0,0-1 0,0 2 0,-1 7 0,-2 2 0,12-6 0,-17 14 0,2-18 0,-7 0 0,-8 0 0,9 0 0,-12 0 0,12 0 0,8 0 0,2 1 0,2-2 0,0-8 0,0 0 0,8 7 0,1 0 0,-3-13 0,0 0 0,4 13 0,-1 1 0,-15-5 0,0 0 0,6 6 0,-7 0 0,-14 0 0,9 0 0,-12 0 0</inkml:trace>
+  <inkml:trace contextRef="#ctx0" brushRef="#br0">3241 12462 24575,'22'0'0,"0"0"0,15 0 0,-3 0 0,-5 0 0,-14 0 0,4 0 0,6 0 0,3 0 0,3 0 0,0 0 0,-6 0 0,0 0 0,1 0 0,3 0 0,3 0 0,-1 0 0,-4 0 0,0 0 0,-2 0 0,-3 0 0,0 0 0,7 0 0,-7 0 0,2 0 0,3 0 0,3 0 0,2 0 0,3 0 0,-1 0 0,-5 0 0,-1 0 0,-1 0 0,0 0 0,1 0 0,-2 0 0,10 1 0,-3-2 0,-12-5 0,-1 0 0,6 5 0,0-1 0,-5-4 0,-1 0 0,-1 6 0,2 0 0,5 0 0,-2 0 0,-5 0 0,10 0 0,-29 0 0,0 0 0,12 0 0,20 0 0,-1 0 0,1 0 0,-2 0 0,-26 0 0,26 0 0,-27 0 0,8 0 0</inkml:trace>
 </inkml:ink>
 </file>
 
@@ -2282,7 +2773,13 @@
   <p:cSld>
     <p:spTree>
       <p:nvGrpSpPr>
-        <p:cNvPr id="1" name=""/>
+        <p:cNvPr id="1" name="">
+          <a:extLst>
+            <a:ext uri="{FF2B5EF4-FFF2-40B4-BE49-F238E27FC236}">
+              <a16:creationId xmlns:a16="http://schemas.microsoft.com/office/drawing/2014/main" id="{F51DE363-DFD2-7EE9-1431-DC3765A5835E}"/>
+            </a:ext>
+          </a:extLst>
+        </p:cNvPr>
         <p:cNvGrpSpPr/>
         <p:nvPr/>
       </p:nvGrpSpPr>
@@ -2296,7 +2793,13 @@
       </p:grpSpPr>
       <p:sp>
         <p:nvSpPr>
-          <p:cNvPr id="2" name="Slide Image Placeholder 1"/>
+          <p:cNvPr id="2" name="Slide Image Placeholder 1">
+            <a:extLst>
+              <a:ext uri="{FF2B5EF4-FFF2-40B4-BE49-F238E27FC236}">
+                <a16:creationId xmlns:a16="http://schemas.microsoft.com/office/drawing/2014/main" id="{C4662FC6-79EF-DB77-D727-7D4FC196C3BF}"/>
+              </a:ext>
+            </a:extLst>
+          </p:cNvPr>
           <p:cNvSpPr>
             <a:spLocks noGrp="1" noRot="1" noChangeAspect="1"/>
           </p:cNvSpPr>
@@ -2308,7 +2811,13 @@
       </p:sp>
       <p:sp>
         <p:nvSpPr>
-          <p:cNvPr id="3" name="Notes Placeholder 2"/>
+          <p:cNvPr id="3" name="Notes Placeholder 2">
+            <a:extLst>
+              <a:ext uri="{FF2B5EF4-FFF2-40B4-BE49-F238E27FC236}">
+                <a16:creationId xmlns:a16="http://schemas.microsoft.com/office/drawing/2014/main" id="{CEB3A7BE-06A3-A9EC-33BD-95F1E3B89B17}"/>
+              </a:ext>
+            </a:extLst>
+          </p:cNvPr>
           <p:cNvSpPr>
             <a:spLocks noGrp="1"/>
           </p:cNvSpPr>
@@ -2327,7 +2836,13 @@
       </p:sp>
       <p:sp>
         <p:nvSpPr>
-          <p:cNvPr id="4" name="Slide Number Placeholder 3"/>
+          <p:cNvPr id="4" name="Slide Number Placeholder 3">
+            <a:extLst>
+              <a:ext uri="{FF2B5EF4-FFF2-40B4-BE49-F238E27FC236}">
+                <a16:creationId xmlns:a16="http://schemas.microsoft.com/office/drawing/2014/main" id="{B9B0F97B-1230-4E73-6D53-5D89BAD6B8CE}"/>
+              </a:ext>
+            </a:extLst>
+          </p:cNvPr>
           <p:cNvSpPr>
             <a:spLocks noGrp="1"/>
           </p:cNvSpPr>
@@ -2351,7 +2866,7 @@
     </p:spTree>
     <p:extLst>
       <p:ext uri="{BB962C8B-B14F-4D97-AF65-F5344CB8AC3E}">
-        <p14:creationId xmlns:p14="http://schemas.microsoft.com/office/powerpoint/2010/main" val="1024086991"/>
+        <p14:creationId xmlns:p14="http://schemas.microsoft.com/office/powerpoint/2010/main" val="2680713354"/>
       </p:ext>
     </p:extLst>
   </p:cSld>
@@ -2534,6 +3049,222 @@
   <p:cSld>
     <p:spTree>
       <p:nvGrpSpPr>
+        <p:cNvPr id="1" name="">
+          <a:extLst>
+            <a:ext uri="{FF2B5EF4-FFF2-40B4-BE49-F238E27FC236}">
+              <a16:creationId xmlns:a16="http://schemas.microsoft.com/office/drawing/2014/main" id="{0061F126-9194-BC45-69B0-C6D6736AC091}"/>
+            </a:ext>
+          </a:extLst>
+        </p:cNvPr>
+        <p:cNvGrpSpPr/>
+        <p:nvPr/>
+      </p:nvGrpSpPr>
+      <p:grpSpPr>
+        <a:xfrm>
+          <a:off x="0" y="0"/>
+          <a:ext cx="0" cy="0"/>
+          <a:chOff x="0" y="0"/>
+          <a:chExt cx="0" cy="0"/>
+        </a:xfrm>
+      </p:grpSpPr>
+      <p:sp>
+        <p:nvSpPr>
+          <p:cNvPr id="2" name="Slide Image Placeholder 1">
+            <a:extLst>
+              <a:ext uri="{FF2B5EF4-FFF2-40B4-BE49-F238E27FC236}">
+                <a16:creationId xmlns:a16="http://schemas.microsoft.com/office/drawing/2014/main" id="{700E0071-C6CD-982B-1AF2-313A2A0288AC}"/>
+              </a:ext>
+            </a:extLst>
+          </p:cNvPr>
+          <p:cNvSpPr>
+            <a:spLocks noGrp="1" noRot="1" noChangeAspect="1"/>
+          </p:cNvSpPr>
+          <p:nvPr>
+            <p:ph type="sldImg"/>
+          </p:nvPr>
+        </p:nvSpPr>
+        <p:spPr/>
+      </p:sp>
+      <p:sp>
+        <p:nvSpPr>
+          <p:cNvPr id="3" name="Notes Placeholder 2">
+            <a:extLst>
+              <a:ext uri="{FF2B5EF4-FFF2-40B4-BE49-F238E27FC236}">
+                <a16:creationId xmlns:a16="http://schemas.microsoft.com/office/drawing/2014/main" id="{E1F7118D-FD21-C63C-DEE0-662E20D372D7}"/>
+              </a:ext>
+            </a:extLst>
+          </p:cNvPr>
+          <p:cNvSpPr>
+            <a:spLocks noGrp="1"/>
+          </p:cNvSpPr>
+          <p:nvPr>
+            <p:ph type="body" idx="1"/>
+          </p:nvPr>
+        </p:nvSpPr>
+        <p:spPr/>
+        <p:txBody>
+          <a:bodyPr/>
+          <a:lstStyle/>
+          <a:p>
+            <a:endParaRPr lang="en-US" dirty="0"/>
+          </a:p>
+        </p:txBody>
+      </p:sp>
+      <p:sp>
+        <p:nvSpPr>
+          <p:cNvPr id="4" name="Slide Number Placeholder 3">
+            <a:extLst>
+              <a:ext uri="{FF2B5EF4-FFF2-40B4-BE49-F238E27FC236}">
+                <a16:creationId xmlns:a16="http://schemas.microsoft.com/office/drawing/2014/main" id="{D3FB3958-C1FE-235C-507D-E511F7BB8D3A}"/>
+              </a:ext>
+            </a:extLst>
+          </p:cNvPr>
+          <p:cNvSpPr>
+            <a:spLocks noGrp="1"/>
+          </p:cNvSpPr>
+          <p:nvPr>
+            <p:ph type="sldNum" sz="quarter" idx="10"/>
+          </p:nvPr>
+        </p:nvSpPr>
+        <p:spPr/>
+        <p:txBody>
+          <a:bodyPr/>
+          <a:lstStyle/>
+          <a:p>
+            <a:fld id="{F7021451-1387-4CA6-816F-3879F97B5CBC}" type="slidenum">
+              <a:rPr lang="en-US"/>
+              <a:t>21</a:t>
+            </a:fld>
+            <a:endParaRPr lang="en-US"/>
+          </a:p>
+        </p:txBody>
+      </p:sp>
+    </p:spTree>
+    <p:extLst>
+      <p:ext uri="{BB962C8B-B14F-4D97-AF65-F5344CB8AC3E}">
+        <p14:creationId xmlns:p14="http://schemas.microsoft.com/office/powerpoint/2010/main" val="2865735561"/>
+      </p:ext>
+    </p:extLst>
+  </p:cSld>
+  <p:clrMapOvr>
+    <a:masterClrMapping/>
+  </p:clrMapOvr>
+</p:notes>
+</file>
+
+<file path=ppt/notesSlides/notesSlide22.xml><?xml version="1.0" encoding="utf-8"?>
+<p:notes xmlns:a="http://schemas.openxmlformats.org/drawingml/2006/main" xmlns:r="http://schemas.openxmlformats.org/officeDocument/2006/relationships" xmlns:p="http://schemas.openxmlformats.org/presentationml/2006/main">
+  <p:cSld>
+    <p:spTree>
+      <p:nvGrpSpPr>
+        <p:cNvPr id="1" name="">
+          <a:extLst>
+            <a:ext uri="{FF2B5EF4-FFF2-40B4-BE49-F238E27FC236}">
+              <a16:creationId xmlns:a16="http://schemas.microsoft.com/office/drawing/2014/main" id="{56FEB6F8-32CC-3DE7-05B0-8C15A1D2414D}"/>
+            </a:ext>
+          </a:extLst>
+        </p:cNvPr>
+        <p:cNvGrpSpPr/>
+        <p:nvPr/>
+      </p:nvGrpSpPr>
+      <p:grpSpPr>
+        <a:xfrm>
+          <a:off x="0" y="0"/>
+          <a:ext cx="0" cy="0"/>
+          <a:chOff x="0" y="0"/>
+          <a:chExt cx="0" cy="0"/>
+        </a:xfrm>
+      </p:grpSpPr>
+      <p:sp>
+        <p:nvSpPr>
+          <p:cNvPr id="2" name="Slide Image Placeholder 1">
+            <a:extLst>
+              <a:ext uri="{FF2B5EF4-FFF2-40B4-BE49-F238E27FC236}">
+                <a16:creationId xmlns:a16="http://schemas.microsoft.com/office/drawing/2014/main" id="{B531013B-F4DD-E791-E71C-F6289BCD39A1}"/>
+              </a:ext>
+            </a:extLst>
+          </p:cNvPr>
+          <p:cNvSpPr>
+            <a:spLocks noGrp="1" noRot="1" noChangeAspect="1"/>
+          </p:cNvSpPr>
+          <p:nvPr>
+            <p:ph type="sldImg"/>
+          </p:nvPr>
+        </p:nvSpPr>
+        <p:spPr/>
+      </p:sp>
+      <p:sp>
+        <p:nvSpPr>
+          <p:cNvPr id="3" name="Notes Placeholder 2">
+            <a:extLst>
+              <a:ext uri="{FF2B5EF4-FFF2-40B4-BE49-F238E27FC236}">
+                <a16:creationId xmlns:a16="http://schemas.microsoft.com/office/drawing/2014/main" id="{6DF808FF-5F3D-3137-246C-2EA89EDBC1BF}"/>
+              </a:ext>
+            </a:extLst>
+          </p:cNvPr>
+          <p:cNvSpPr>
+            <a:spLocks noGrp="1"/>
+          </p:cNvSpPr>
+          <p:nvPr>
+            <p:ph type="body" idx="1"/>
+          </p:nvPr>
+        </p:nvSpPr>
+        <p:spPr/>
+        <p:txBody>
+          <a:bodyPr/>
+          <a:lstStyle/>
+          <a:p>
+            <a:endParaRPr lang="en-US" dirty="0"/>
+          </a:p>
+        </p:txBody>
+      </p:sp>
+      <p:sp>
+        <p:nvSpPr>
+          <p:cNvPr id="4" name="Slide Number Placeholder 3">
+            <a:extLst>
+              <a:ext uri="{FF2B5EF4-FFF2-40B4-BE49-F238E27FC236}">
+                <a16:creationId xmlns:a16="http://schemas.microsoft.com/office/drawing/2014/main" id="{F4B2E8C9-57ED-2446-6111-2B9E310C51FF}"/>
+              </a:ext>
+            </a:extLst>
+          </p:cNvPr>
+          <p:cNvSpPr>
+            <a:spLocks noGrp="1"/>
+          </p:cNvSpPr>
+          <p:nvPr>
+            <p:ph type="sldNum" sz="quarter" idx="10"/>
+          </p:nvPr>
+        </p:nvSpPr>
+        <p:spPr/>
+        <p:txBody>
+          <a:bodyPr/>
+          <a:lstStyle/>
+          <a:p>
+            <a:fld id="{F7021451-1387-4CA6-816F-3879F97B5CBC}" type="slidenum">
+              <a:rPr lang="en-US"/>
+              <a:t>22</a:t>
+            </a:fld>
+            <a:endParaRPr lang="en-US"/>
+          </a:p>
+        </p:txBody>
+      </p:sp>
+    </p:spTree>
+    <p:extLst>
+      <p:ext uri="{BB962C8B-B14F-4D97-AF65-F5344CB8AC3E}">
+        <p14:creationId xmlns:p14="http://schemas.microsoft.com/office/powerpoint/2010/main" val="2535308661"/>
+      </p:ext>
+    </p:extLst>
+  </p:cSld>
+  <p:clrMapOvr>
+    <a:masterClrMapping/>
+  </p:clrMapOvr>
+</p:notes>
+</file>
+
+<file path=ppt/notesSlides/notesSlide23.xml><?xml version="1.0" encoding="utf-8"?>
+<p:notes xmlns:a="http://schemas.openxmlformats.org/drawingml/2006/main" xmlns:r="http://schemas.openxmlformats.org/officeDocument/2006/relationships" xmlns:p="http://schemas.openxmlformats.org/presentationml/2006/main">
+  <p:cSld>
+    <p:spTree>
+      <p:nvGrpSpPr>
         <p:cNvPr id="1" name=""/>
         <p:cNvGrpSpPr/>
         <p:nvPr/>
@@ -2594,7 +3325,91 @@
           <a:p>
             <a:fld id="{F7021451-1387-4CA6-816F-3879F97B5CBC}" type="slidenum">
               <a:rPr lang="en-US"/>
-              <a:t>21</a:t>
+              <a:t>23</a:t>
+            </a:fld>
+            <a:endParaRPr lang="en-US"/>
+          </a:p>
+        </p:txBody>
+      </p:sp>
+    </p:spTree>
+    <p:extLst>
+      <p:ext uri="{BB962C8B-B14F-4D97-AF65-F5344CB8AC3E}">
+        <p14:creationId xmlns:p14="http://schemas.microsoft.com/office/powerpoint/2010/main" val="1024086991"/>
+      </p:ext>
+    </p:extLst>
+  </p:cSld>
+  <p:clrMapOvr>
+    <a:masterClrMapping/>
+  </p:clrMapOvr>
+</p:notes>
+</file>
+
+<file path=ppt/notesSlides/notesSlide24.xml><?xml version="1.0" encoding="utf-8"?>
+<p:notes xmlns:a="http://schemas.openxmlformats.org/drawingml/2006/main" xmlns:r="http://schemas.openxmlformats.org/officeDocument/2006/relationships" xmlns:p="http://schemas.openxmlformats.org/presentationml/2006/main">
+  <p:cSld>
+    <p:spTree>
+      <p:nvGrpSpPr>
+        <p:cNvPr id="1" name=""/>
+        <p:cNvGrpSpPr/>
+        <p:nvPr/>
+      </p:nvGrpSpPr>
+      <p:grpSpPr>
+        <a:xfrm>
+          <a:off x="0" y="0"/>
+          <a:ext cx="0" cy="0"/>
+          <a:chOff x="0" y="0"/>
+          <a:chExt cx="0" cy="0"/>
+        </a:xfrm>
+      </p:grpSpPr>
+      <p:sp>
+        <p:nvSpPr>
+          <p:cNvPr id="2" name="Slide Image Placeholder 1"/>
+          <p:cNvSpPr>
+            <a:spLocks noGrp="1" noRot="1" noChangeAspect="1"/>
+          </p:cNvSpPr>
+          <p:nvPr>
+            <p:ph type="sldImg"/>
+          </p:nvPr>
+        </p:nvSpPr>
+        <p:spPr/>
+      </p:sp>
+      <p:sp>
+        <p:nvSpPr>
+          <p:cNvPr id="3" name="Notes Placeholder 2"/>
+          <p:cNvSpPr>
+            <a:spLocks noGrp="1"/>
+          </p:cNvSpPr>
+          <p:nvPr>
+            <p:ph type="body" idx="1"/>
+          </p:nvPr>
+        </p:nvSpPr>
+        <p:spPr/>
+        <p:txBody>
+          <a:bodyPr/>
+          <a:lstStyle/>
+          <a:p>
+            <a:endParaRPr lang="en-US" dirty="0"/>
+          </a:p>
+        </p:txBody>
+      </p:sp>
+      <p:sp>
+        <p:nvSpPr>
+          <p:cNvPr id="4" name="Slide Number Placeholder 3"/>
+          <p:cNvSpPr>
+            <a:spLocks noGrp="1"/>
+          </p:cNvSpPr>
+          <p:nvPr>
+            <p:ph type="sldNum" sz="quarter" idx="10"/>
+          </p:nvPr>
+        </p:nvSpPr>
+        <p:spPr/>
+        <p:txBody>
+          <a:bodyPr/>
+          <a:lstStyle/>
+          <a:p>
+            <a:fld id="{F7021451-1387-4CA6-816F-3879F97B5CBC}" type="slidenum">
+              <a:rPr lang="en-US"/>
+              <a:t>24</a:t>
             </a:fld>
             <a:endParaRPr lang="en-US"/>
           </a:p>
@@ -4772,8 +5587,8 @@
           </a:p>
         </p:txBody>
       </p:sp>
-      <mc:AlternateContent xmlns:mc="http://schemas.openxmlformats.org/markup-compatibility/2006">
-        <mc:Choice xmlns:p14="http://schemas.microsoft.com/office/powerpoint/2010/main" Requires="p14">
+      <mc:AlternateContent xmlns:mc="http://schemas.openxmlformats.org/markup-compatibility/2006" xmlns:p14="http://schemas.microsoft.com/office/powerpoint/2010/main">
+        <mc:Choice Requires="p14">
           <p:contentPart p14:bwMode="auto" r:id="rId3">
             <p14:nvContentPartPr>
               <p14:cNvPr id="20" name="Ink 19">
@@ -4792,7 +5607,7 @@
             </p14:xfrm>
           </p:contentPart>
         </mc:Choice>
-        <mc:Fallback>
+        <mc:Fallback xmlns="">
           <p:pic>
             <p:nvPicPr>
               <p:cNvPr id="20" name="Ink 19">
@@ -5316,8 +6131,8 @@
           </a:p>
         </p:txBody>
       </p:sp>
-      <mc:AlternateContent xmlns:mc="http://schemas.openxmlformats.org/markup-compatibility/2006">
-        <mc:Choice xmlns:p14="http://schemas.microsoft.com/office/powerpoint/2010/main" Requires="p14">
+      <mc:AlternateContent xmlns:mc="http://schemas.openxmlformats.org/markup-compatibility/2006" xmlns:p14="http://schemas.microsoft.com/office/powerpoint/2010/main">
+        <mc:Choice Requires="p14">
           <p:contentPart p14:bwMode="auto" r:id="rId3">
             <p14:nvContentPartPr>
               <p14:cNvPr id="11" name="Ink 10">
@@ -5336,7 +6151,7 @@
             </p14:xfrm>
           </p:contentPart>
         </mc:Choice>
-        <mc:Fallback>
+        <mc:Fallback xmlns="">
           <p:pic>
             <p:nvPicPr>
               <p:cNvPr id="11" name="Ink 10">
@@ -5359,6 +6174,57 @@
               <a:xfrm>
                 <a:off x="1000440" y="1461600"/>
                 <a:ext cx="2057400" cy="3205800"/>
+              </a:xfrm>
+              <a:prstGeom prst="rect">
+                <a:avLst/>
+              </a:prstGeom>
+            </p:spPr>
+          </p:pic>
+        </mc:Fallback>
+      </mc:AlternateContent>
+      <mc:AlternateContent xmlns:mc="http://schemas.openxmlformats.org/markup-compatibility/2006">
+        <mc:Choice xmlns:p14="http://schemas.microsoft.com/office/powerpoint/2010/main" Requires="p14">
+          <p:contentPart p14:bwMode="auto" r:id="rId5">
+            <p14:nvContentPartPr>
+              <p14:cNvPr id="12" name="Ink 11">
+                <a:extLst>
+                  <a:ext uri="{FF2B5EF4-FFF2-40B4-BE49-F238E27FC236}">
+                    <a16:creationId xmlns:a16="http://schemas.microsoft.com/office/drawing/2014/main" id="{36DFCCDD-9E8D-3426-57E5-25475990E15A}"/>
+                  </a:ext>
+                </a:extLst>
+              </p14:cNvPr>
+              <p14:cNvContentPartPr/>
+              <p14:nvPr/>
+            </p14:nvContentPartPr>
+            <p14:xfrm>
+              <a:off x="1166760" y="4476600"/>
+              <a:ext cx="543240" cy="10440"/>
+            </p14:xfrm>
+          </p:contentPart>
+        </mc:Choice>
+        <mc:Fallback>
+          <p:pic>
+            <p:nvPicPr>
+              <p:cNvPr id="12" name="Ink 11">
+                <a:extLst>
+                  <a:ext uri="{FF2B5EF4-FFF2-40B4-BE49-F238E27FC236}">
+                    <a16:creationId xmlns:a16="http://schemas.microsoft.com/office/drawing/2014/main" id="{36DFCCDD-9E8D-3426-57E5-25475990E15A}"/>
+                  </a:ext>
+                </a:extLst>
+              </p:cNvPr>
+              <p:cNvPicPr/>
+              <p:nvPr/>
+            </p:nvPicPr>
+            <p:blipFill>
+              <a:blip r:embed="rId6"/>
+              <a:stretch>
+                <a:fillRect/>
+              </a:stretch>
+            </p:blipFill>
+            <p:spPr>
+              <a:xfrm>
+                <a:off x="1157400" y="4467240"/>
+                <a:ext cx="561960" cy="29160"/>
               </a:xfrm>
               <a:prstGeom prst="rect">
                 <a:avLst/>
@@ -6203,8 +7069,8 @@
           </a:p>
         </p:txBody>
       </p:sp>
-      <mc:AlternateContent xmlns:mc="http://schemas.openxmlformats.org/markup-compatibility/2006">
-        <mc:Choice xmlns:p14="http://schemas.microsoft.com/office/powerpoint/2010/main" Requires="p14">
+      <mc:AlternateContent xmlns:mc="http://schemas.openxmlformats.org/markup-compatibility/2006" xmlns:p14="http://schemas.microsoft.com/office/powerpoint/2010/main">
+        <mc:Choice Requires="p14">
           <p:contentPart p14:bwMode="auto" r:id="rId3">
             <p14:nvContentPartPr>
               <p14:cNvPr id="18" name="Ink 17">
@@ -6223,7 +7089,7 @@
             </p14:xfrm>
           </p:contentPart>
         </mc:Choice>
-        <mc:Fallback>
+        <mc:Fallback xmlns="">
           <p:pic>
             <p:nvPicPr>
               <p:cNvPr id="18" name="Ink 17">
@@ -6246,6 +7112,57 @@
               <a:xfrm>
                 <a:off x="895680" y="1600200"/>
                 <a:ext cx="7034040" cy="2567160"/>
+              </a:xfrm>
+              <a:prstGeom prst="rect">
+                <a:avLst/>
+              </a:prstGeom>
+            </p:spPr>
+          </p:pic>
+        </mc:Fallback>
+      </mc:AlternateContent>
+      <mc:AlternateContent xmlns:mc="http://schemas.openxmlformats.org/markup-compatibility/2006">
+        <mc:Choice xmlns:p14="http://schemas.microsoft.com/office/powerpoint/2010/main" Requires="p14">
+          <p:contentPart p14:bwMode="auto" r:id="rId5">
+            <p14:nvContentPartPr>
+              <p14:cNvPr id="19" name="Ink 18">
+                <a:extLst>
+                  <a:ext uri="{FF2B5EF4-FFF2-40B4-BE49-F238E27FC236}">
+                    <a16:creationId xmlns:a16="http://schemas.microsoft.com/office/drawing/2014/main" id="{F36B5213-4988-3A14-5177-1C1DCC96DE62}"/>
+                  </a:ext>
+                </a:extLst>
+              </p14:cNvPr>
+              <p14:cNvContentPartPr/>
+              <p14:nvPr/>
+            </p14:nvContentPartPr>
+            <p14:xfrm>
+              <a:off x="419040" y="4067280"/>
+              <a:ext cx="1371960" cy="81360"/>
+            </p14:xfrm>
+          </p:contentPart>
+        </mc:Choice>
+        <mc:Fallback>
+          <p:pic>
+            <p:nvPicPr>
+              <p:cNvPr id="19" name="Ink 18">
+                <a:extLst>
+                  <a:ext uri="{FF2B5EF4-FFF2-40B4-BE49-F238E27FC236}">
+                    <a16:creationId xmlns:a16="http://schemas.microsoft.com/office/drawing/2014/main" id="{F36B5213-4988-3A14-5177-1C1DCC96DE62}"/>
+                  </a:ext>
+                </a:extLst>
+              </p:cNvPr>
+              <p:cNvPicPr/>
+              <p:nvPr/>
+            </p:nvPicPr>
+            <p:blipFill>
+              <a:blip r:embed="rId6"/>
+              <a:stretch>
+                <a:fillRect/>
+              </a:stretch>
+            </p:blipFill>
+            <p:spPr>
+              <a:xfrm>
+                <a:off x="409680" y="4057920"/>
+                <a:ext cx="1390680" cy="100080"/>
               </a:xfrm>
               <a:prstGeom prst="rect">
                 <a:avLst/>
@@ -6962,8 +7879,8 @@
           </a:p>
         </p:txBody>
       </p:sp>
-      <mc:AlternateContent xmlns:mc="http://schemas.openxmlformats.org/markup-compatibility/2006">
-        <mc:Choice xmlns:p14="http://schemas.microsoft.com/office/powerpoint/2010/main" Requires="p14">
+      <mc:AlternateContent xmlns:mc="http://schemas.openxmlformats.org/markup-compatibility/2006" xmlns:p14="http://schemas.microsoft.com/office/powerpoint/2010/main">
+        <mc:Choice Requires="p14">
           <p:contentPart p14:bwMode="auto" r:id="rId3">
             <p14:nvContentPartPr>
               <p14:cNvPr id="17" name="Ink 16">
@@ -6982,7 +7899,7 @@
             </p14:xfrm>
           </p:contentPart>
         </mc:Choice>
-        <mc:Fallback>
+        <mc:Fallback xmlns="">
           <p:pic>
             <p:nvPicPr>
               <p:cNvPr id="17" name="Ink 16">
@@ -7005,6 +7922,57 @@
               <a:xfrm>
                 <a:off x="319320" y="966960"/>
                 <a:ext cx="6738840" cy="3462840"/>
+              </a:xfrm>
+              <a:prstGeom prst="rect">
+                <a:avLst/>
+              </a:prstGeom>
+            </p:spPr>
+          </p:pic>
+        </mc:Fallback>
+      </mc:AlternateContent>
+      <mc:AlternateContent xmlns:mc="http://schemas.openxmlformats.org/markup-compatibility/2006">
+        <mc:Choice xmlns:p14="http://schemas.microsoft.com/office/powerpoint/2010/main" Requires="p14">
+          <p:contentPart p14:bwMode="auto" r:id="rId5">
+            <p14:nvContentPartPr>
+              <p14:cNvPr id="18" name="Ink 17">
+                <a:extLst>
+                  <a:ext uri="{FF2B5EF4-FFF2-40B4-BE49-F238E27FC236}">
+                    <a16:creationId xmlns:a16="http://schemas.microsoft.com/office/drawing/2014/main" id="{961775C1-9E93-5339-9A96-21B61FF4DB12}"/>
+                  </a:ext>
+                </a:extLst>
+              </p14:cNvPr>
+              <p14:cNvContentPartPr/>
+              <p14:nvPr/>
+            </p14:nvContentPartPr>
+            <p14:xfrm>
+              <a:off x="419040" y="1133640"/>
+              <a:ext cx="5094720" cy="3124440"/>
+            </p14:xfrm>
+          </p:contentPart>
+        </mc:Choice>
+        <mc:Fallback>
+          <p:pic>
+            <p:nvPicPr>
+              <p:cNvPr id="18" name="Ink 17">
+                <a:extLst>
+                  <a:ext uri="{FF2B5EF4-FFF2-40B4-BE49-F238E27FC236}">
+                    <a16:creationId xmlns:a16="http://schemas.microsoft.com/office/drawing/2014/main" id="{961775C1-9E93-5339-9A96-21B61FF4DB12}"/>
+                  </a:ext>
+                </a:extLst>
+              </p:cNvPr>
+              <p:cNvPicPr/>
+              <p:nvPr/>
+            </p:nvPicPr>
+            <p:blipFill>
+              <a:blip r:embed="rId6"/>
+              <a:stretch>
+                <a:fillRect/>
+              </a:stretch>
+            </p:blipFill>
+            <p:spPr>
+              <a:xfrm>
+                <a:off x="409680" y="1124280"/>
+                <a:ext cx="5113440" cy="3143160"/>
               </a:xfrm>
               <a:prstGeom prst="rect">
                 <a:avLst/>
@@ -8231,6 +9199,57 @@
           </a:p>
         </p:txBody>
       </p:sp>
+      <mc:AlternateContent xmlns:mc="http://schemas.openxmlformats.org/markup-compatibility/2006">
+        <mc:Choice xmlns:p14="http://schemas.microsoft.com/office/powerpoint/2010/main" Requires="p14">
+          <p:contentPart p14:bwMode="auto" r:id="rId3">
+            <p14:nvContentPartPr>
+              <p14:cNvPr id="21" name="Ink 20">
+                <a:extLst>
+                  <a:ext uri="{FF2B5EF4-FFF2-40B4-BE49-F238E27FC236}">
+                    <a16:creationId xmlns:a16="http://schemas.microsoft.com/office/drawing/2014/main" id="{0790BBD7-B8CE-07A3-1EEE-4CE0F5F1AD9E}"/>
+                  </a:ext>
+                </a:extLst>
+              </p14:cNvPr>
+              <p14:cNvContentPartPr/>
+              <p14:nvPr/>
+            </p14:nvContentPartPr>
+            <p14:xfrm>
+              <a:off x="466560" y="1576080"/>
+              <a:ext cx="5472720" cy="3025080"/>
+            </p14:xfrm>
+          </p:contentPart>
+        </mc:Choice>
+        <mc:Fallback>
+          <p:pic>
+            <p:nvPicPr>
+              <p:cNvPr id="21" name="Ink 20">
+                <a:extLst>
+                  <a:ext uri="{FF2B5EF4-FFF2-40B4-BE49-F238E27FC236}">
+                    <a16:creationId xmlns:a16="http://schemas.microsoft.com/office/drawing/2014/main" id="{0790BBD7-B8CE-07A3-1EEE-4CE0F5F1AD9E}"/>
+                  </a:ext>
+                </a:extLst>
+              </p:cNvPr>
+              <p:cNvPicPr/>
+              <p:nvPr/>
+            </p:nvPicPr>
+            <p:blipFill>
+              <a:blip r:embed="rId4"/>
+              <a:stretch>
+                <a:fillRect/>
+              </a:stretch>
+            </p:blipFill>
+            <p:spPr>
+              <a:xfrm>
+                <a:off x="457200" y="1566720"/>
+                <a:ext cx="5491440" cy="3043800"/>
+              </a:xfrm>
+              <a:prstGeom prst="rect">
+                <a:avLst/>
+              </a:prstGeom>
+            </p:spPr>
+          </p:pic>
+        </mc:Fallback>
+      </mc:AlternateContent>
     </p:spTree>
   </p:cSld>
   <p:clrMapOvr>
@@ -9406,6 +10425,57 @@
           </a:fontRef>
         </p:style>
       </p:cxnSp>
+      <mc:AlternateContent xmlns:mc="http://schemas.openxmlformats.org/markup-compatibility/2006">
+        <mc:Choice xmlns:p14="http://schemas.microsoft.com/office/powerpoint/2010/main" Requires="p14">
+          <p:contentPart p14:bwMode="auto" r:id="rId3">
+            <p14:nvContentPartPr>
+              <p14:cNvPr id="12" name="Ink 11">
+                <a:extLst>
+                  <a:ext uri="{FF2B5EF4-FFF2-40B4-BE49-F238E27FC236}">
+                    <a16:creationId xmlns:a16="http://schemas.microsoft.com/office/drawing/2014/main" id="{06EA1499-FDD5-117C-4DD0-8046AE05BF9B}"/>
+                  </a:ext>
+                </a:extLst>
+              </p14:cNvPr>
+              <p14:cNvContentPartPr/>
+              <p14:nvPr/>
+            </p14:nvContentPartPr>
+            <p14:xfrm>
+              <a:off x="452520" y="1595520"/>
+              <a:ext cx="5848560" cy="1141560"/>
+            </p14:xfrm>
+          </p:contentPart>
+        </mc:Choice>
+        <mc:Fallback>
+          <p:pic>
+            <p:nvPicPr>
+              <p:cNvPr id="12" name="Ink 11">
+                <a:extLst>
+                  <a:ext uri="{FF2B5EF4-FFF2-40B4-BE49-F238E27FC236}">
+                    <a16:creationId xmlns:a16="http://schemas.microsoft.com/office/drawing/2014/main" id="{06EA1499-FDD5-117C-4DD0-8046AE05BF9B}"/>
+                  </a:ext>
+                </a:extLst>
+              </p:cNvPr>
+              <p:cNvPicPr/>
+              <p:nvPr/>
+            </p:nvPicPr>
+            <p:blipFill>
+              <a:blip r:embed="rId4"/>
+              <a:stretch>
+                <a:fillRect/>
+              </a:stretch>
+            </p:blipFill>
+            <p:spPr>
+              <a:xfrm>
+                <a:off x="443160" y="1586160"/>
+                <a:ext cx="5867280" cy="1160280"/>
+              </a:xfrm>
+              <a:prstGeom prst="rect">
+                <a:avLst/>
+              </a:prstGeom>
+            </p:spPr>
+          </p:pic>
+        </mc:Fallback>
+      </mc:AlternateContent>
     </p:spTree>
   </p:cSld>
   <p:clrMapOvr>
@@ -10288,114 +11358,6 @@
             </a:pPr>
             <a:endParaRPr lang="en-US" sz="1200" dirty="0"/>
           </a:p>
-          <a:p>
-            <a:pPr marL="0" indent="0">
-              <a:buNone/>
-            </a:pPr>
-            <a:r>
-              <a:rPr lang="en-US" sz="1200" dirty="0">
-                <a:solidFill>
-                  <a:srgbClr val="A9CCE3"/>
-                </a:solidFill>
-                <a:latin typeface="Consolas" pitchFamily="34" charset="0"/>
-                <a:ea typeface="Consolas" pitchFamily="34" charset="-122"/>
-                <a:cs typeface="Consolas" pitchFamily="34" charset="-120"/>
-              </a:rPr>
-              <a:t># Short version (method chaining)</a:t>
-            </a:r>
-            <a:endParaRPr lang="en-US" sz="1200" dirty="0"/>
-          </a:p>
-          <a:p>
-            <a:pPr marL="0" indent="0">
-              <a:buNone/>
-            </a:pPr>
-            <a:r>
-              <a:rPr lang="en-US" sz="1200" dirty="0">
-                <a:solidFill>
-                  <a:srgbClr val="A9CCE3"/>
-                </a:solidFill>
-                <a:latin typeface="Consolas" pitchFamily="34" charset="0"/>
-                <a:ea typeface="Consolas" pitchFamily="34" charset="-122"/>
-                <a:cs typeface="Consolas" pitchFamily="34" charset="-120"/>
-              </a:rPr>
-              <a:t>lines = open("joke.txt").read().split("\n")</a:t>
-            </a:r>
-            <a:endParaRPr lang="en-US" sz="1200" dirty="0"/>
-          </a:p>
-          <a:p>
-            <a:pPr marL="0" indent="0">
-              <a:buNone/>
-            </a:pPr>
-            <a:endParaRPr lang="en-US" sz="1200" dirty="0"/>
-          </a:p>
-          <a:p>
-            <a:pPr marL="0" indent="0">
-              <a:buNone/>
-            </a:pPr>
-            <a:r>
-              <a:rPr lang="en-US" sz="1200" dirty="0">
-                <a:solidFill>
-                  <a:srgbClr val="A9CCE3"/>
-                </a:solidFill>
-                <a:latin typeface="Consolas" pitchFamily="34" charset="0"/>
-                <a:ea typeface="Consolas" pitchFamily="34" charset="-122"/>
-                <a:cs typeface="Consolas" pitchFamily="34" charset="-120"/>
-              </a:rPr>
-              <a:t>print(lines)</a:t>
-            </a:r>
-            <a:endParaRPr lang="en-US" sz="1200" dirty="0"/>
-          </a:p>
-          <a:p>
-            <a:pPr marL="0" indent="0">
-              <a:buNone/>
-            </a:pPr>
-            <a:r>
-              <a:rPr lang="en-US" sz="1200" dirty="0">
-                <a:solidFill>
-                  <a:srgbClr val="A9CCE3"/>
-                </a:solidFill>
-                <a:latin typeface="Consolas" pitchFamily="34" charset="0"/>
-                <a:ea typeface="Consolas" pitchFamily="34" charset="-122"/>
-                <a:cs typeface="Consolas" pitchFamily="34" charset="-120"/>
-              </a:rPr>
-              <a:t># ["Who's there?", "A broken pencil.",</a:t>
-            </a:r>
-            <a:endParaRPr lang="en-US" sz="1200" dirty="0"/>
-          </a:p>
-          <a:p>
-            <a:pPr marL="0" indent="0">
-              <a:buNone/>
-            </a:pPr>
-            <a:r>
-              <a:rPr lang="en-US" sz="1200" dirty="0">
-                <a:solidFill>
-                  <a:srgbClr val="A9CCE3"/>
-                </a:solidFill>
-                <a:latin typeface="Consolas" pitchFamily="34" charset="0"/>
-                <a:ea typeface="Consolas" pitchFamily="34" charset="-122"/>
-                <a:cs typeface="Consolas" pitchFamily="34" charset="-120"/>
-              </a:rPr>
-              <a:t>#  "A broken pencil who?",</a:t>
-            </a:r>
-            <a:endParaRPr lang="en-US" sz="1200" dirty="0"/>
-          </a:p>
-          <a:p>
-            <a:pPr marL="0" indent="0">
-              <a:buNone/>
-            </a:pPr>
-            <a:r>
-              <a:rPr lang="en-US" sz="1200" dirty="0">
-                <a:solidFill>
-                  <a:srgbClr val="A9CCE3"/>
-                </a:solidFill>
-                <a:latin typeface="Consolas" pitchFamily="34" charset="0"/>
-                <a:ea typeface="Consolas" pitchFamily="34" charset="-122"/>
-                <a:cs typeface="Consolas" pitchFamily="34" charset="-120"/>
-              </a:rPr>
-              <a:t>#  "Never mind. It's pointless."]</a:t>
-            </a:r>
-            <a:endParaRPr lang="en-US" sz="1200" dirty="0"/>
-          </a:p>
         </p:txBody>
       </p:sp>
       <p:sp>
@@ -10486,6 +11448,57 @@
           </a:p>
         </p:txBody>
       </p:sp>
+      <mc:AlternateContent xmlns:mc="http://schemas.openxmlformats.org/markup-compatibility/2006">
+        <mc:Choice xmlns:p14="http://schemas.microsoft.com/office/powerpoint/2010/main" Requires="p14">
+          <p:contentPart p14:bwMode="auto" r:id="rId3">
+            <p14:nvContentPartPr>
+              <p14:cNvPr id="14" name="Ink 13">
+                <a:extLst>
+                  <a:ext uri="{FF2B5EF4-FFF2-40B4-BE49-F238E27FC236}">
+                    <a16:creationId xmlns:a16="http://schemas.microsoft.com/office/drawing/2014/main" id="{A3D62174-7328-BB48-1F49-BA4C9068F9A4}"/>
+                  </a:ext>
+                </a:extLst>
+              </p14:cNvPr>
+              <p14:cNvContentPartPr/>
+              <p14:nvPr/>
+            </p14:nvContentPartPr>
+            <p14:xfrm>
+              <a:off x="2528640" y="1528920"/>
+              <a:ext cx="4701240" cy="748080"/>
+            </p14:xfrm>
+          </p:contentPart>
+        </mc:Choice>
+        <mc:Fallback>
+          <p:pic>
+            <p:nvPicPr>
+              <p:cNvPr id="14" name="Ink 13">
+                <a:extLst>
+                  <a:ext uri="{FF2B5EF4-FFF2-40B4-BE49-F238E27FC236}">
+                    <a16:creationId xmlns:a16="http://schemas.microsoft.com/office/drawing/2014/main" id="{A3D62174-7328-BB48-1F49-BA4C9068F9A4}"/>
+                  </a:ext>
+                </a:extLst>
+              </p:cNvPr>
+              <p:cNvPicPr/>
+              <p:nvPr/>
+            </p:nvPicPr>
+            <p:blipFill>
+              <a:blip r:embed="rId4"/>
+              <a:stretch>
+                <a:fillRect/>
+              </a:stretch>
+            </p:blipFill>
+            <p:spPr>
+              <a:xfrm>
+                <a:off x="2519280" y="1519560"/>
+                <a:ext cx="4719960" cy="766800"/>
+              </a:xfrm>
+              <a:prstGeom prst="rect">
+                <a:avLst/>
+              </a:prstGeom>
+            </p:spPr>
+          </p:pic>
+        </mc:Fallback>
+      </mc:AlternateContent>
     </p:spTree>
   </p:cSld>
   <p:clrMapOvr>
@@ -10496,7 +11509,7 @@
 
 <file path=ppt/slides/slide19.xml><?xml version="1.0" encoding="utf-8"?>
 <p:sld xmlns:a="http://schemas.openxmlformats.org/drawingml/2006/main" xmlns:r="http://schemas.openxmlformats.org/officeDocument/2006/relationships" xmlns:p="http://schemas.openxmlformats.org/presentationml/2006/main">
-  <p:cSld name="Slide 19">
+  <p:cSld>
     <p:bg>
       <p:bgPr>
         <a:solidFill>
@@ -10507,7 +11520,13 @@
     </p:bg>
     <p:spTree>
       <p:nvGrpSpPr>
-        <p:cNvPr id="1" name=""/>
+        <p:cNvPr id="1" name="">
+          <a:extLst>
+            <a:ext uri="{FF2B5EF4-FFF2-40B4-BE49-F238E27FC236}">
+              <a16:creationId xmlns:a16="http://schemas.microsoft.com/office/drawing/2014/main" id="{ECF5EC97-2E97-BBFE-1148-2DDD68AE5C58}"/>
+            </a:ext>
+          </a:extLst>
+        </p:cNvPr>
         <p:cNvGrpSpPr/>
         <p:nvPr/>
       </p:nvGrpSpPr>
@@ -10521,7 +11540,13 @@
       </p:grpSpPr>
       <p:sp>
         <p:nvSpPr>
-          <p:cNvPr id="2" name="Shape 0"/>
+          <p:cNvPr id="2" name="Shape 0">
+            <a:extLst>
+              <a:ext uri="{FF2B5EF4-FFF2-40B4-BE49-F238E27FC236}">
+                <a16:creationId xmlns:a16="http://schemas.microsoft.com/office/drawing/2014/main" id="{89D511E8-C8F8-1690-7D75-3AA078BEBB46}"/>
+              </a:ext>
+            </a:extLst>
+          </p:cNvPr>
           <p:cNvSpPr/>
           <p:nvPr/>
         </p:nvSpPr>
@@ -10553,7 +11578,13 @@
       </p:sp>
       <p:sp>
         <p:nvSpPr>
-          <p:cNvPr id="3" name="Shape 1"/>
+          <p:cNvPr id="3" name="Shape 1">
+            <a:extLst>
+              <a:ext uri="{FF2B5EF4-FFF2-40B4-BE49-F238E27FC236}">
+                <a16:creationId xmlns:a16="http://schemas.microsoft.com/office/drawing/2014/main" id="{C70F38A9-28C7-1BDC-938E-EEA3CD780237}"/>
+              </a:ext>
+            </a:extLst>
+          </p:cNvPr>
           <p:cNvSpPr/>
           <p:nvPr/>
         </p:nvSpPr>
@@ -10585,7 +11616,13 @@
       </p:sp>
       <p:sp>
         <p:nvSpPr>
-          <p:cNvPr id="4" name="Text 2"/>
+          <p:cNvPr id="4" name="Text 2">
+            <a:extLst>
+              <a:ext uri="{FF2B5EF4-FFF2-40B4-BE49-F238E27FC236}">
+                <a16:creationId xmlns:a16="http://schemas.microsoft.com/office/drawing/2014/main" id="{59FB7F71-E899-43AC-AF10-F745F0389000}"/>
+              </a:ext>
+            </a:extLst>
+          </p:cNvPr>
           <p:cNvSpPr/>
           <p:nvPr/>
         </p:nvSpPr>
@@ -10616,7 +11653,7 @@
                 <a:ea typeface="Calibri" pitchFamily="34" charset="-122"/>
                 <a:cs typeface="Calibri" pitchFamily="34" charset="-120"/>
               </a:rPr>
-              <a:t>Sorting Lists</a:t>
+              <a:t>Reading Files into Lists</a:t>
             </a:r>
             <a:endParaRPr lang="en-US" sz="2500" dirty="0"/>
           </a:p>
@@ -10624,7 +11661,13 @@
       </p:sp>
       <p:sp>
         <p:nvSpPr>
-          <p:cNvPr id="5" name="Text 3"/>
+          <p:cNvPr id="5" name="Text 3">
+            <a:extLst>
+              <a:ext uri="{FF2B5EF4-FFF2-40B4-BE49-F238E27FC236}">
+                <a16:creationId xmlns:a16="http://schemas.microsoft.com/office/drawing/2014/main" id="{608CAE47-6C28-410B-0341-8314AD836D45}"/>
+              </a:ext>
+            </a:extLst>
+          </p:cNvPr>
           <p:cNvSpPr/>
           <p:nvPr/>
         </p:nvSpPr>
@@ -10655,7 +11698,7 @@
                 <a:ea typeface="Calibri" pitchFamily="34" charset="-122"/>
                 <a:cs typeface="Calibri" pitchFamily="34" charset="-120"/>
               </a:rPr>
-              <a:t>L.sort()  rearranges the list into ascending order — in-place, no copy.</a:t>
+              <a:t>A common pattern: read a text file, then split it into a list of lines.</a:t>
             </a:r>
             <a:endParaRPr lang="en-US" sz="1500" dirty="0"/>
           </a:p>
@@ -10663,1256 +11706,20 @@
       </p:sp>
       <p:sp>
         <p:nvSpPr>
-          <p:cNvPr id="6" name="Text 4"/>
+          <p:cNvPr id="6" name="Shape 4">
+            <a:extLst>
+              <a:ext uri="{FF2B5EF4-FFF2-40B4-BE49-F238E27FC236}">
+                <a16:creationId xmlns:a16="http://schemas.microsoft.com/office/drawing/2014/main" id="{450372D9-DA4D-AE23-F42F-861E1DF3B126}"/>
+              </a:ext>
+            </a:extLst>
+          </p:cNvPr>
           <p:cNvSpPr/>
           <p:nvPr/>
         </p:nvSpPr>
         <p:spPr>
           <a:xfrm>
             <a:off x="320040" y="1234440"/>
-            <a:ext cx="2560320" cy="274320"/>
-          </a:xfrm>
-          <a:prstGeom prst="rect">
-            <a:avLst/>
-          </a:prstGeom>
-          <a:noFill/>
-          <a:ln/>
-        </p:spPr>
-        <p:txBody>
-          <a:bodyPr wrap="square" lIns="0" tIns="0" rIns="0" bIns="0" rtlCol="0" anchor="ctr"/>
-          <a:lstStyle/>
-          <a:p>
-            <a:pPr marL="0" indent="0">
-              <a:buNone/>
-            </a:pPr>
-            <a:r>
-              <a:rPr lang="en-US" sz="1200" b="1" dirty="0">
-                <a:solidFill>
-                  <a:srgbClr val="4A6080"/>
-                </a:solidFill>
-                <a:latin typeface="Calibri" pitchFamily="34" charset="0"/>
-                <a:ea typeface="Calibri" pitchFamily="34" charset="-122"/>
-                <a:cs typeface="Calibri" pitchFamily="34" charset="-120"/>
-              </a:rPr>
-              <a:t>Before  .sort():</a:t>
-            </a:r>
-            <a:endParaRPr lang="en-US" sz="1200" dirty="0"/>
-          </a:p>
-        </p:txBody>
-      </p:sp>
-      <p:sp>
-        <p:nvSpPr>
-          <p:cNvPr id="7" name="Text 5"/>
-          <p:cNvSpPr/>
-          <p:nvPr/>
-        </p:nvSpPr>
-        <p:spPr>
-          <a:xfrm>
-            <a:off x="0" y="1645920"/>
-            <a:ext cx="914400" cy="292608"/>
-          </a:xfrm>
-          <a:prstGeom prst="rect">
-            <a:avLst/>
-          </a:prstGeom>
-          <a:noFill/>
-          <a:ln/>
-        </p:spPr>
-        <p:txBody>
-          <a:bodyPr wrap="square" lIns="0" tIns="0" rIns="0" bIns="0" rtlCol="0" anchor="ctr"/>
-          <a:lstStyle/>
-          <a:p>
-            <a:pPr marL="0" indent="0" algn="r">
-              <a:buNone/>
-            </a:pPr>
-            <a:r>
-              <a:rPr lang="en-US" sz="1300" b="1" dirty="0">
-                <a:solidFill>
-                  <a:srgbClr val="1B2631"/>
-                </a:solidFill>
-                <a:latin typeface="Consolas" pitchFamily="34" charset="0"/>
-                <a:ea typeface="Consolas" pitchFamily="34" charset="-122"/>
-                <a:cs typeface="Consolas" pitchFamily="34" charset="-120"/>
-              </a:rPr>
-              <a:t>nums =</a:t>
-            </a:r>
-            <a:endParaRPr lang="en-US" sz="1300" dirty="0"/>
-          </a:p>
-        </p:txBody>
-      </p:sp>
-      <p:sp>
-        <p:nvSpPr>
-          <p:cNvPr id="8" name="Text 6"/>
-          <p:cNvSpPr/>
-          <p:nvPr/>
-        </p:nvSpPr>
-        <p:spPr>
-          <a:xfrm>
-            <a:off x="960120" y="1298448"/>
-            <a:ext cx="713232" cy="228600"/>
-          </a:xfrm>
-          <a:prstGeom prst="rect">
-            <a:avLst/>
-          </a:prstGeom>
-          <a:noFill/>
-          <a:ln/>
-        </p:spPr>
-        <p:txBody>
-          <a:bodyPr wrap="square" lIns="0" tIns="0" rIns="0" bIns="0" rtlCol="0" anchor="ctr"/>
-          <a:lstStyle/>
-          <a:p>
-            <a:pPr marL="0" indent="0" algn="ctr">
-              <a:buNone/>
-            </a:pPr>
-            <a:r>
-              <a:rPr lang="en-US" sz="1100" b="1" dirty="0">
-                <a:solidFill>
-                  <a:srgbClr val="2E86C1"/>
-                </a:solidFill>
-                <a:latin typeface="Calibri" pitchFamily="34" charset="0"/>
-                <a:ea typeface="Calibri" pitchFamily="34" charset="-122"/>
-                <a:cs typeface="Calibri" pitchFamily="34" charset="-120"/>
-              </a:rPr>
-              <a:t>0</a:t>
-            </a:r>
-            <a:endParaRPr lang="en-US" sz="1100" dirty="0"/>
-          </a:p>
-        </p:txBody>
-      </p:sp>
-      <p:sp>
-        <p:nvSpPr>
-          <p:cNvPr id="9" name="Shape 7"/>
-          <p:cNvSpPr/>
-          <p:nvPr/>
-        </p:nvSpPr>
-        <p:spPr>
-          <a:xfrm>
-            <a:off x="960120" y="1554480"/>
-            <a:ext cx="713232" cy="475488"/>
-          </a:xfrm>
-          <a:prstGeom prst="rect">
-            <a:avLst/>
-          </a:prstGeom>
-          <a:solidFill>
-            <a:srgbClr val="D6EAF8"/>
-          </a:solidFill>
-          <a:ln w="19050">
-            <a:solidFill>
-              <a:srgbClr val="2E86C1"/>
-            </a:solidFill>
-            <a:prstDash val="solid"/>
-          </a:ln>
-        </p:spPr>
-        <p:txBody>
-          <a:bodyPr/>
-          <a:lstStyle/>
-          <a:p>
-            <a:endParaRPr lang="en-US"/>
-          </a:p>
-        </p:txBody>
-      </p:sp>
-      <p:sp>
-        <p:nvSpPr>
-          <p:cNvPr id="10" name="Text 8"/>
-          <p:cNvSpPr/>
-          <p:nvPr/>
-        </p:nvSpPr>
-        <p:spPr>
-          <a:xfrm>
-            <a:off x="960120" y="1554480"/>
-            <a:ext cx="713232" cy="475488"/>
-          </a:xfrm>
-          <a:prstGeom prst="rect">
-            <a:avLst/>
-          </a:prstGeom>
-          <a:noFill/>
-          <a:ln/>
-        </p:spPr>
-        <p:txBody>
-          <a:bodyPr wrap="square" lIns="0" tIns="0" rIns="0" bIns="0" rtlCol="0" anchor="ctr"/>
-          <a:lstStyle/>
-          <a:p>
-            <a:pPr marL="0" indent="0" algn="ctr">
-              <a:buNone/>
-            </a:pPr>
-            <a:r>
-              <a:rPr lang="en-US" sz="1500" b="1" dirty="0">
-                <a:solidFill>
-                  <a:srgbClr val="1E2A3A"/>
-                </a:solidFill>
-                <a:latin typeface="Consolas" pitchFamily="34" charset="0"/>
-                <a:ea typeface="Consolas" pitchFamily="34" charset="-122"/>
-                <a:cs typeface="Consolas" pitchFamily="34" charset="-120"/>
-              </a:rPr>
-              <a:t>4</a:t>
-            </a:r>
-            <a:endParaRPr lang="en-US" sz="1500" dirty="0"/>
-          </a:p>
-        </p:txBody>
-      </p:sp>
-      <p:sp>
-        <p:nvSpPr>
-          <p:cNvPr id="11" name="Text 9"/>
-          <p:cNvSpPr/>
-          <p:nvPr/>
-        </p:nvSpPr>
-        <p:spPr>
-          <a:xfrm>
-            <a:off x="1673352" y="1298448"/>
-            <a:ext cx="713232" cy="228600"/>
-          </a:xfrm>
-          <a:prstGeom prst="rect">
-            <a:avLst/>
-          </a:prstGeom>
-          <a:noFill/>
-          <a:ln/>
-        </p:spPr>
-        <p:txBody>
-          <a:bodyPr wrap="square" lIns="0" tIns="0" rIns="0" bIns="0" rtlCol="0" anchor="ctr"/>
-          <a:lstStyle/>
-          <a:p>
-            <a:pPr marL="0" indent="0" algn="ctr">
-              <a:buNone/>
-            </a:pPr>
-            <a:r>
-              <a:rPr lang="en-US" sz="1100" b="1" dirty="0">
-                <a:solidFill>
-                  <a:srgbClr val="2E86C1"/>
-                </a:solidFill>
-                <a:latin typeface="Calibri" pitchFamily="34" charset="0"/>
-                <a:ea typeface="Calibri" pitchFamily="34" charset="-122"/>
-                <a:cs typeface="Calibri" pitchFamily="34" charset="-120"/>
-              </a:rPr>
-              <a:t>1</a:t>
-            </a:r>
-            <a:endParaRPr lang="en-US" sz="1100" dirty="0"/>
-          </a:p>
-        </p:txBody>
-      </p:sp>
-      <p:sp>
-        <p:nvSpPr>
-          <p:cNvPr id="12" name="Shape 10"/>
-          <p:cNvSpPr/>
-          <p:nvPr/>
-        </p:nvSpPr>
-        <p:spPr>
-          <a:xfrm>
-            <a:off x="1673352" y="1554480"/>
-            <a:ext cx="713232" cy="475488"/>
-          </a:xfrm>
-          <a:prstGeom prst="rect">
-            <a:avLst/>
-          </a:prstGeom>
-          <a:solidFill>
-            <a:srgbClr val="D6EAF8"/>
-          </a:solidFill>
-          <a:ln w="19050">
-            <a:solidFill>
-              <a:srgbClr val="2E86C1"/>
-            </a:solidFill>
-            <a:prstDash val="solid"/>
-          </a:ln>
-        </p:spPr>
-        <p:txBody>
-          <a:bodyPr/>
-          <a:lstStyle/>
-          <a:p>
-            <a:endParaRPr lang="en-US"/>
-          </a:p>
-        </p:txBody>
-      </p:sp>
-      <p:sp>
-        <p:nvSpPr>
-          <p:cNvPr id="13" name="Text 11"/>
-          <p:cNvSpPr/>
-          <p:nvPr/>
-        </p:nvSpPr>
-        <p:spPr>
-          <a:xfrm>
-            <a:off x="1673352" y="1554480"/>
-            <a:ext cx="713232" cy="475488"/>
-          </a:xfrm>
-          <a:prstGeom prst="rect">
-            <a:avLst/>
-          </a:prstGeom>
-          <a:noFill/>
-          <a:ln/>
-        </p:spPr>
-        <p:txBody>
-          <a:bodyPr wrap="square" lIns="0" tIns="0" rIns="0" bIns="0" rtlCol="0" anchor="ctr"/>
-          <a:lstStyle/>
-          <a:p>
-            <a:pPr marL="0" indent="0" algn="ctr">
-              <a:buNone/>
-            </a:pPr>
-            <a:r>
-              <a:rPr lang="en-US" sz="1500" b="1" dirty="0">
-                <a:solidFill>
-                  <a:srgbClr val="1E2A3A"/>
-                </a:solidFill>
-                <a:latin typeface="Consolas" pitchFamily="34" charset="0"/>
-                <a:ea typeface="Consolas" pitchFamily="34" charset="-122"/>
-                <a:cs typeface="Consolas" pitchFamily="34" charset="-120"/>
-              </a:rPr>
-              <a:t>1</a:t>
-            </a:r>
-            <a:endParaRPr lang="en-US" sz="1500" dirty="0"/>
-          </a:p>
-        </p:txBody>
-      </p:sp>
-      <p:sp>
-        <p:nvSpPr>
-          <p:cNvPr id="14" name="Text 12"/>
-          <p:cNvSpPr/>
-          <p:nvPr/>
-        </p:nvSpPr>
-        <p:spPr>
-          <a:xfrm>
-            <a:off x="2386584" y="1298448"/>
-            <a:ext cx="713232" cy="228600"/>
-          </a:xfrm>
-          <a:prstGeom prst="rect">
-            <a:avLst/>
-          </a:prstGeom>
-          <a:noFill/>
-          <a:ln/>
-        </p:spPr>
-        <p:txBody>
-          <a:bodyPr wrap="square" lIns="0" tIns="0" rIns="0" bIns="0" rtlCol="0" anchor="ctr"/>
-          <a:lstStyle/>
-          <a:p>
-            <a:pPr marL="0" indent="0" algn="ctr">
-              <a:buNone/>
-            </a:pPr>
-            <a:r>
-              <a:rPr lang="en-US" sz="1100" b="1" dirty="0">
-                <a:solidFill>
-                  <a:srgbClr val="2E86C1"/>
-                </a:solidFill>
-                <a:latin typeface="Calibri" pitchFamily="34" charset="0"/>
-                <a:ea typeface="Calibri" pitchFamily="34" charset="-122"/>
-                <a:cs typeface="Calibri" pitchFamily="34" charset="-120"/>
-              </a:rPr>
-              <a:t>2</a:t>
-            </a:r>
-            <a:endParaRPr lang="en-US" sz="1100" dirty="0"/>
-          </a:p>
-        </p:txBody>
-      </p:sp>
-      <p:sp>
-        <p:nvSpPr>
-          <p:cNvPr id="15" name="Shape 13"/>
-          <p:cNvSpPr/>
-          <p:nvPr/>
-        </p:nvSpPr>
-        <p:spPr>
-          <a:xfrm>
-            <a:off x="2386584" y="1554480"/>
-            <a:ext cx="713232" cy="475488"/>
-          </a:xfrm>
-          <a:prstGeom prst="rect">
-            <a:avLst/>
-          </a:prstGeom>
-          <a:solidFill>
-            <a:srgbClr val="D6EAF8"/>
-          </a:solidFill>
-          <a:ln w="19050">
-            <a:solidFill>
-              <a:srgbClr val="2E86C1"/>
-            </a:solidFill>
-            <a:prstDash val="solid"/>
-          </a:ln>
-        </p:spPr>
-        <p:txBody>
-          <a:bodyPr/>
-          <a:lstStyle/>
-          <a:p>
-            <a:endParaRPr lang="en-US"/>
-          </a:p>
-        </p:txBody>
-      </p:sp>
-      <p:sp>
-        <p:nvSpPr>
-          <p:cNvPr id="16" name="Text 14"/>
-          <p:cNvSpPr/>
-          <p:nvPr/>
-        </p:nvSpPr>
-        <p:spPr>
-          <a:xfrm>
-            <a:off x="2386584" y="1554480"/>
-            <a:ext cx="713232" cy="475488"/>
-          </a:xfrm>
-          <a:prstGeom prst="rect">
-            <a:avLst/>
-          </a:prstGeom>
-          <a:noFill/>
-          <a:ln/>
-        </p:spPr>
-        <p:txBody>
-          <a:bodyPr wrap="square" lIns="0" tIns="0" rIns="0" bIns="0" rtlCol="0" anchor="ctr"/>
-          <a:lstStyle/>
-          <a:p>
-            <a:pPr marL="0" indent="0" algn="ctr">
-              <a:buNone/>
-            </a:pPr>
-            <a:r>
-              <a:rPr lang="en-US" sz="1500" b="1" dirty="0">
-                <a:solidFill>
-                  <a:srgbClr val="1E2A3A"/>
-                </a:solidFill>
-                <a:latin typeface="Consolas" pitchFamily="34" charset="0"/>
-                <a:ea typeface="Consolas" pitchFamily="34" charset="-122"/>
-                <a:cs typeface="Consolas" pitchFamily="34" charset="-120"/>
-              </a:rPr>
-              <a:t>6</a:t>
-            </a:r>
-            <a:endParaRPr lang="en-US" sz="1500" dirty="0"/>
-          </a:p>
-        </p:txBody>
-      </p:sp>
-      <p:sp>
-        <p:nvSpPr>
-          <p:cNvPr id="17" name="Text 15"/>
-          <p:cNvSpPr/>
-          <p:nvPr/>
-        </p:nvSpPr>
-        <p:spPr>
-          <a:xfrm>
-            <a:off x="3099816" y="1298448"/>
-            <a:ext cx="713232" cy="228600"/>
-          </a:xfrm>
-          <a:prstGeom prst="rect">
-            <a:avLst/>
-          </a:prstGeom>
-          <a:noFill/>
-          <a:ln/>
-        </p:spPr>
-        <p:txBody>
-          <a:bodyPr wrap="square" lIns="0" tIns="0" rIns="0" bIns="0" rtlCol="0" anchor="ctr"/>
-          <a:lstStyle/>
-          <a:p>
-            <a:pPr marL="0" indent="0" algn="ctr">
-              <a:buNone/>
-            </a:pPr>
-            <a:r>
-              <a:rPr lang="en-US" sz="1100" b="1" dirty="0">
-                <a:solidFill>
-                  <a:srgbClr val="2E86C1"/>
-                </a:solidFill>
-                <a:latin typeface="Calibri" pitchFamily="34" charset="0"/>
-                <a:ea typeface="Calibri" pitchFamily="34" charset="-122"/>
-                <a:cs typeface="Calibri" pitchFamily="34" charset="-120"/>
-              </a:rPr>
-              <a:t>3</a:t>
-            </a:r>
-            <a:endParaRPr lang="en-US" sz="1100" dirty="0"/>
-          </a:p>
-        </p:txBody>
-      </p:sp>
-      <p:sp>
-        <p:nvSpPr>
-          <p:cNvPr id="18" name="Shape 16"/>
-          <p:cNvSpPr/>
-          <p:nvPr/>
-        </p:nvSpPr>
-        <p:spPr>
-          <a:xfrm>
-            <a:off x="3099816" y="1554480"/>
-            <a:ext cx="713232" cy="475488"/>
-          </a:xfrm>
-          <a:prstGeom prst="rect">
-            <a:avLst/>
-          </a:prstGeom>
-          <a:solidFill>
-            <a:srgbClr val="D6EAF8"/>
-          </a:solidFill>
-          <a:ln w="19050">
-            <a:solidFill>
-              <a:srgbClr val="2E86C1"/>
-            </a:solidFill>
-            <a:prstDash val="solid"/>
-          </a:ln>
-        </p:spPr>
-        <p:txBody>
-          <a:bodyPr/>
-          <a:lstStyle/>
-          <a:p>
-            <a:endParaRPr lang="en-US"/>
-          </a:p>
-        </p:txBody>
-      </p:sp>
-      <p:sp>
-        <p:nvSpPr>
-          <p:cNvPr id="19" name="Text 17"/>
-          <p:cNvSpPr/>
-          <p:nvPr/>
-        </p:nvSpPr>
-        <p:spPr>
-          <a:xfrm>
-            <a:off x="3099816" y="1554480"/>
-            <a:ext cx="713232" cy="475488"/>
-          </a:xfrm>
-          <a:prstGeom prst="rect">
-            <a:avLst/>
-          </a:prstGeom>
-          <a:noFill/>
-          <a:ln/>
-        </p:spPr>
-        <p:txBody>
-          <a:bodyPr wrap="square" lIns="0" tIns="0" rIns="0" bIns="0" rtlCol="0" anchor="ctr"/>
-          <a:lstStyle/>
-          <a:p>
-            <a:pPr marL="0" indent="0" algn="ctr">
-              <a:buNone/>
-            </a:pPr>
-            <a:r>
-              <a:rPr lang="en-US" sz="1500" b="1" dirty="0">
-                <a:solidFill>
-                  <a:srgbClr val="1E2A3A"/>
-                </a:solidFill>
-                <a:latin typeface="Consolas" pitchFamily="34" charset="0"/>
-                <a:ea typeface="Consolas" pitchFamily="34" charset="-122"/>
-                <a:cs typeface="Consolas" pitchFamily="34" charset="-120"/>
-              </a:rPr>
-              <a:t>1</a:t>
-            </a:r>
-            <a:endParaRPr lang="en-US" sz="1500" dirty="0"/>
-          </a:p>
-        </p:txBody>
-      </p:sp>
-      <p:sp>
-        <p:nvSpPr>
-          <p:cNvPr id="20" name="Text 18"/>
-          <p:cNvSpPr/>
-          <p:nvPr/>
-        </p:nvSpPr>
-        <p:spPr>
-          <a:xfrm>
-            <a:off x="3813048" y="1298448"/>
-            <a:ext cx="713232" cy="228600"/>
-          </a:xfrm>
-          <a:prstGeom prst="rect">
-            <a:avLst/>
-          </a:prstGeom>
-          <a:noFill/>
-          <a:ln/>
-        </p:spPr>
-        <p:txBody>
-          <a:bodyPr wrap="square" lIns="0" tIns="0" rIns="0" bIns="0" rtlCol="0" anchor="ctr"/>
-          <a:lstStyle/>
-          <a:p>
-            <a:pPr marL="0" indent="0" algn="ctr">
-              <a:buNone/>
-            </a:pPr>
-            <a:r>
-              <a:rPr lang="en-US" sz="1100" b="1" dirty="0">
-                <a:solidFill>
-                  <a:srgbClr val="2E86C1"/>
-                </a:solidFill>
-                <a:latin typeface="Calibri" pitchFamily="34" charset="0"/>
-                <a:ea typeface="Calibri" pitchFamily="34" charset="-122"/>
-                <a:cs typeface="Calibri" pitchFamily="34" charset="-120"/>
-              </a:rPr>
-              <a:t>4</a:t>
-            </a:r>
-            <a:endParaRPr lang="en-US" sz="1100" dirty="0"/>
-          </a:p>
-        </p:txBody>
-      </p:sp>
-      <p:sp>
-        <p:nvSpPr>
-          <p:cNvPr id="21" name="Shape 19"/>
-          <p:cNvSpPr/>
-          <p:nvPr/>
-        </p:nvSpPr>
-        <p:spPr>
-          <a:xfrm>
-            <a:off x="3813048" y="1554480"/>
-            <a:ext cx="713232" cy="475488"/>
-          </a:xfrm>
-          <a:prstGeom prst="rect">
-            <a:avLst/>
-          </a:prstGeom>
-          <a:solidFill>
-            <a:srgbClr val="D6EAF8"/>
-          </a:solidFill>
-          <a:ln w="19050">
-            <a:solidFill>
-              <a:srgbClr val="2E86C1"/>
-            </a:solidFill>
-            <a:prstDash val="solid"/>
-          </a:ln>
-        </p:spPr>
-        <p:txBody>
-          <a:bodyPr/>
-          <a:lstStyle/>
-          <a:p>
-            <a:endParaRPr lang="en-US"/>
-          </a:p>
-        </p:txBody>
-      </p:sp>
-      <p:sp>
-        <p:nvSpPr>
-          <p:cNvPr id="22" name="Text 20"/>
-          <p:cNvSpPr/>
-          <p:nvPr/>
-        </p:nvSpPr>
-        <p:spPr>
-          <a:xfrm>
-            <a:off x="3813048" y="1554480"/>
-            <a:ext cx="713232" cy="475488"/>
-          </a:xfrm>
-          <a:prstGeom prst="rect">
-            <a:avLst/>
-          </a:prstGeom>
-          <a:noFill/>
-          <a:ln/>
-        </p:spPr>
-        <p:txBody>
-          <a:bodyPr wrap="square" lIns="0" tIns="0" rIns="0" bIns="0" rtlCol="0" anchor="ctr"/>
-          <a:lstStyle/>
-          <a:p>
-            <a:pPr marL="0" indent="0" algn="ctr">
-              <a:buNone/>
-            </a:pPr>
-            <a:r>
-              <a:rPr lang="en-US" sz="1500" b="1" dirty="0">
-                <a:solidFill>
-                  <a:srgbClr val="1E2A3A"/>
-                </a:solidFill>
-                <a:latin typeface="Consolas" pitchFamily="34" charset="0"/>
-                <a:ea typeface="Consolas" pitchFamily="34" charset="-122"/>
-                <a:cs typeface="Consolas" pitchFamily="34" charset="-120"/>
-              </a:rPr>
-              <a:t>3</a:t>
-            </a:r>
-            <a:endParaRPr lang="en-US" sz="1500" dirty="0"/>
-          </a:p>
-        </p:txBody>
-      </p:sp>
-      <p:sp>
-        <p:nvSpPr>
-          <p:cNvPr id="23" name="Text 21"/>
-          <p:cNvSpPr/>
-          <p:nvPr/>
-        </p:nvSpPr>
-        <p:spPr>
-          <a:xfrm>
-            <a:off x="4526280" y="1298448"/>
-            <a:ext cx="713232" cy="228600"/>
-          </a:xfrm>
-          <a:prstGeom prst="rect">
-            <a:avLst/>
-          </a:prstGeom>
-          <a:noFill/>
-          <a:ln/>
-        </p:spPr>
-        <p:txBody>
-          <a:bodyPr wrap="square" lIns="0" tIns="0" rIns="0" bIns="0" rtlCol="0" anchor="ctr"/>
-          <a:lstStyle/>
-          <a:p>
-            <a:pPr marL="0" indent="0" algn="ctr">
-              <a:buNone/>
-            </a:pPr>
-            <a:r>
-              <a:rPr lang="en-US" sz="1100" b="1" dirty="0">
-                <a:solidFill>
-                  <a:srgbClr val="2E86C1"/>
-                </a:solidFill>
-                <a:latin typeface="Calibri" pitchFamily="34" charset="0"/>
-                <a:ea typeface="Calibri" pitchFamily="34" charset="-122"/>
-                <a:cs typeface="Calibri" pitchFamily="34" charset="-120"/>
-              </a:rPr>
-              <a:t>5</a:t>
-            </a:r>
-            <a:endParaRPr lang="en-US" sz="1100" dirty="0"/>
-          </a:p>
-        </p:txBody>
-      </p:sp>
-      <p:sp>
-        <p:nvSpPr>
-          <p:cNvPr id="24" name="Shape 22"/>
-          <p:cNvSpPr/>
-          <p:nvPr/>
-        </p:nvSpPr>
-        <p:spPr>
-          <a:xfrm>
-            <a:off x="4526280" y="1554480"/>
-            <a:ext cx="713232" cy="475488"/>
-          </a:xfrm>
-          <a:prstGeom prst="rect">
-            <a:avLst/>
-          </a:prstGeom>
-          <a:solidFill>
-            <a:srgbClr val="D6EAF8"/>
-          </a:solidFill>
-          <a:ln w="19050">
-            <a:solidFill>
-              <a:srgbClr val="2E86C1"/>
-            </a:solidFill>
-            <a:prstDash val="solid"/>
-          </a:ln>
-        </p:spPr>
-        <p:txBody>
-          <a:bodyPr/>
-          <a:lstStyle/>
-          <a:p>
-            <a:endParaRPr lang="en-US"/>
-          </a:p>
-        </p:txBody>
-      </p:sp>
-      <p:sp>
-        <p:nvSpPr>
-          <p:cNvPr id="25" name="Text 23"/>
-          <p:cNvSpPr/>
-          <p:nvPr/>
-        </p:nvSpPr>
-        <p:spPr>
-          <a:xfrm>
-            <a:off x="4526280" y="1554480"/>
-            <a:ext cx="713232" cy="475488"/>
-          </a:xfrm>
-          <a:prstGeom prst="rect">
-            <a:avLst/>
-          </a:prstGeom>
-          <a:noFill/>
-          <a:ln/>
-        </p:spPr>
-        <p:txBody>
-          <a:bodyPr wrap="square" lIns="0" tIns="0" rIns="0" bIns="0" rtlCol="0" anchor="ctr"/>
-          <a:lstStyle/>
-          <a:p>
-            <a:pPr marL="0" indent="0" algn="ctr">
-              <a:buNone/>
-            </a:pPr>
-            <a:r>
-              <a:rPr lang="en-US" sz="1500" b="1" dirty="0">
-                <a:solidFill>
-                  <a:srgbClr val="1E2A3A"/>
-                </a:solidFill>
-                <a:latin typeface="Consolas" pitchFamily="34" charset="0"/>
-                <a:ea typeface="Consolas" pitchFamily="34" charset="-122"/>
-                <a:cs typeface="Consolas" pitchFamily="34" charset="-120"/>
-              </a:rPr>
-              <a:t>2</a:t>
-            </a:r>
-            <a:endParaRPr lang="en-US" sz="1500" dirty="0"/>
-          </a:p>
-        </p:txBody>
-      </p:sp>
-      <p:sp>
-        <p:nvSpPr>
-          <p:cNvPr id="27" name="Text 25"/>
-          <p:cNvSpPr/>
-          <p:nvPr/>
-        </p:nvSpPr>
-        <p:spPr>
-          <a:xfrm>
-            <a:off x="1504188" y="2496312"/>
-            <a:ext cx="1828800" cy="256032"/>
-          </a:xfrm>
-          <a:prstGeom prst="rect">
-            <a:avLst/>
-          </a:prstGeom>
-          <a:noFill/>
-          <a:ln/>
-        </p:spPr>
-        <p:txBody>
-          <a:bodyPr wrap="square" lIns="0" tIns="0" rIns="0" bIns="0" rtlCol="0" anchor="ctr"/>
-          <a:lstStyle/>
-          <a:p>
-            <a:pPr marL="0" indent="0" algn="ctr">
-              <a:buNone/>
-            </a:pPr>
-            <a:r>
-              <a:rPr lang="en-US" sz="1150" b="1" dirty="0">
-                <a:solidFill>
-                  <a:srgbClr val="1ABC9C"/>
-                </a:solidFill>
-                <a:latin typeface="Consolas" pitchFamily="34" charset="0"/>
-                <a:ea typeface="Consolas" pitchFamily="34" charset="-122"/>
-                <a:cs typeface="Consolas" pitchFamily="34" charset="-120"/>
-              </a:rPr>
-              <a:t>nums.sort()</a:t>
-            </a:r>
-            <a:endParaRPr lang="en-US" sz="1150" dirty="0"/>
-          </a:p>
-        </p:txBody>
-      </p:sp>
-      <p:sp>
-        <p:nvSpPr>
-          <p:cNvPr id="29" name="Text 27"/>
-          <p:cNvSpPr/>
-          <p:nvPr/>
-        </p:nvSpPr>
-        <p:spPr>
-          <a:xfrm>
-            <a:off x="320040" y="3127248"/>
-            <a:ext cx="2560320" cy="274320"/>
-          </a:xfrm>
-          <a:prstGeom prst="rect">
-            <a:avLst/>
-          </a:prstGeom>
-          <a:noFill/>
-          <a:ln/>
-        </p:spPr>
-        <p:txBody>
-          <a:bodyPr wrap="square" lIns="0" tIns="0" rIns="0" bIns="0" rtlCol="0" anchor="ctr"/>
-          <a:lstStyle/>
-          <a:p>
-            <a:pPr marL="0" indent="0">
-              <a:buNone/>
-            </a:pPr>
-            <a:r>
-              <a:rPr lang="en-US" sz="1200" b="1" dirty="0">
-                <a:solidFill>
-                  <a:srgbClr val="4A6080"/>
-                </a:solidFill>
-                <a:latin typeface="Calibri" pitchFamily="34" charset="0"/>
-                <a:ea typeface="Calibri" pitchFamily="34" charset="-122"/>
-                <a:cs typeface="Calibri" pitchFamily="34" charset="-120"/>
-              </a:rPr>
-              <a:t>After  .sort():</a:t>
-            </a:r>
-            <a:endParaRPr lang="en-US" sz="1200" dirty="0"/>
-          </a:p>
-        </p:txBody>
-      </p:sp>
-      <p:sp>
-        <p:nvSpPr>
-          <p:cNvPr id="30" name="Shape 28"/>
-          <p:cNvSpPr/>
-          <p:nvPr/>
-        </p:nvSpPr>
-        <p:spPr>
-          <a:xfrm>
-            <a:off x="960120" y="3447288"/>
-            <a:ext cx="713232" cy="475488"/>
-          </a:xfrm>
-          <a:prstGeom prst="rect">
-            <a:avLst/>
-          </a:prstGeom>
-          <a:solidFill>
-            <a:srgbClr val="C8E6C9"/>
-          </a:solidFill>
-          <a:ln w="19050">
-            <a:solidFill>
-              <a:srgbClr val="1E8449"/>
-            </a:solidFill>
-            <a:prstDash val="solid"/>
-          </a:ln>
-        </p:spPr>
-        <p:txBody>
-          <a:bodyPr/>
-          <a:lstStyle/>
-          <a:p>
-            <a:endParaRPr lang="en-US"/>
-          </a:p>
-        </p:txBody>
-      </p:sp>
-      <p:sp>
-        <p:nvSpPr>
-          <p:cNvPr id="31" name="Text 29"/>
-          <p:cNvSpPr/>
-          <p:nvPr/>
-        </p:nvSpPr>
-        <p:spPr>
-          <a:xfrm>
-            <a:off x="960120" y="3447288"/>
-            <a:ext cx="713232" cy="475488"/>
-          </a:xfrm>
-          <a:prstGeom prst="rect">
-            <a:avLst/>
-          </a:prstGeom>
-          <a:noFill/>
-          <a:ln/>
-        </p:spPr>
-        <p:txBody>
-          <a:bodyPr wrap="square" lIns="0" tIns="0" rIns="0" bIns="0" rtlCol="0" anchor="ctr"/>
-          <a:lstStyle/>
-          <a:p>
-            <a:pPr marL="0" indent="0" algn="ctr">
-              <a:buNone/>
-            </a:pPr>
-            <a:r>
-              <a:rPr lang="en-US" sz="1500" b="1" dirty="0">
-                <a:solidFill>
-                  <a:srgbClr val="1E2A3A"/>
-                </a:solidFill>
-                <a:latin typeface="Consolas" pitchFamily="34" charset="0"/>
-                <a:ea typeface="Consolas" pitchFamily="34" charset="-122"/>
-                <a:cs typeface="Consolas" pitchFamily="34" charset="-120"/>
-              </a:rPr>
-              <a:t>1</a:t>
-            </a:r>
-            <a:endParaRPr lang="en-US" sz="1500" dirty="0"/>
-          </a:p>
-        </p:txBody>
-      </p:sp>
-      <p:sp>
-        <p:nvSpPr>
-          <p:cNvPr id="32" name="Shape 30"/>
-          <p:cNvSpPr/>
-          <p:nvPr/>
-        </p:nvSpPr>
-        <p:spPr>
-          <a:xfrm>
-            <a:off x="1673352" y="3447288"/>
-            <a:ext cx="713232" cy="475488"/>
-          </a:xfrm>
-          <a:prstGeom prst="rect">
-            <a:avLst/>
-          </a:prstGeom>
-          <a:solidFill>
-            <a:srgbClr val="C8E6C9"/>
-          </a:solidFill>
-          <a:ln w="19050">
-            <a:solidFill>
-              <a:srgbClr val="1E8449"/>
-            </a:solidFill>
-            <a:prstDash val="solid"/>
-          </a:ln>
-        </p:spPr>
-        <p:txBody>
-          <a:bodyPr/>
-          <a:lstStyle/>
-          <a:p>
-            <a:endParaRPr lang="en-US"/>
-          </a:p>
-        </p:txBody>
-      </p:sp>
-      <p:sp>
-        <p:nvSpPr>
-          <p:cNvPr id="33" name="Text 31"/>
-          <p:cNvSpPr/>
-          <p:nvPr/>
-        </p:nvSpPr>
-        <p:spPr>
-          <a:xfrm>
-            <a:off x="1673352" y="3447288"/>
-            <a:ext cx="713232" cy="475488"/>
-          </a:xfrm>
-          <a:prstGeom prst="rect">
-            <a:avLst/>
-          </a:prstGeom>
-          <a:noFill/>
-          <a:ln/>
-        </p:spPr>
-        <p:txBody>
-          <a:bodyPr wrap="square" lIns="0" tIns="0" rIns="0" bIns="0" rtlCol="0" anchor="ctr"/>
-          <a:lstStyle/>
-          <a:p>
-            <a:pPr marL="0" indent="0" algn="ctr">
-              <a:buNone/>
-            </a:pPr>
-            <a:r>
-              <a:rPr lang="en-US" sz="1500" b="1" dirty="0">
-                <a:solidFill>
-                  <a:srgbClr val="1E2A3A"/>
-                </a:solidFill>
-                <a:latin typeface="Consolas" pitchFamily="34" charset="0"/>
-                <a:ea typeface="Consolas" pitchFamily="34" charset="-122"/>
-                <a:cs typeface="Consolas" pitchFamily="34" charset="-120"/>
-              </a:rPr>
-              <a:t>1</a:t>
-            </a:r>
-            <a:endParaRPr lang="en-US" sz="1500" dirty="0"/>
-          </a:p>
-        </p:txBody>
-      </p:sp>
-      <p:sp>
-        <p:nvSpPr>
-          <p:cNvPr id="34" name="Shape 32"/>
-          <p:cNvSpPr/>
-          <p:nvPr/>
-        </p:nvSpPr>
-        <p:spPr>
-          <a:xfrm>
-            <a:off x="2386584" y="3447288"/>
-            <a:ext cx="713232" cy="475488"/>
-          </a:xfrm>
-          <a:prstGeom prst="rect">
-            <a:avLst/>
-          </a:prstGeom>
-          <a:solidFill>
-            <a:srgbClr val="C8E6C9"/>
-          </a:solidFill>
-          <a:ln w="19050">
-            <a:solidFill>
-              <a:srgbClr val="1E8449"/>
-            </a:solidFill>
-            <a:prstDash val="solid"/>
-          </a:ln>
-        </p:spPr>
-        <p:txBody>
-          <a:bodyPr/>
-          <a:lstStyle/>
-          <a:p>
-            <a:endParaRPr lang="en-US"/>
-          </a:p>
-        </p:txBody>
-      </p:sp>
-      <p:sp>
-        <p:nvSpPr>
-          <p:cNvPr id="35" name="Text 33"/>
-          <p:cNvSpPr/>
-          <p:nvPr/>
-        </p:nvSpPr>
-        <p:spPr>
-          <a:xfrm>
-            <a:off x="2386584" y="3447288"/>
-            <a:ext cx="713232" cy="475488"/>
-          </a:xfrm>
-          <a:prstGeom prst="rect">
-            <a:avLst/>
-          </a:prstGeom>
-          <a:noFill/>
-          <a:ln/>
-        </p:spPr>
-        <p:txBody>
-          <a:bodyPr wrap="square" lIns="0" tIns="0" rIns="0" bIns="0" rtlCol="0" anchor="ctr"/>
-          <a:lstStyle/>
-          <a:p>
-            <a:pPr marL="0" indent="0" algn="ctr">
-              <a:buNone/>
-            </a:pPr>
-            <a:r>
-              <a:rPr lang="en-US" sz="1500" b="1" dirty="0">
-                <a:solidFill>
-                  <a:srgbClr val="1E2A3A"/>
-                </a:solidFill>
-                <a:latin typeface="Consolas" pitchFamily="34" charset="0"/>
-                <a:ea typeface="Consolas" pitchFamily="34" charset="-122"/>
-                <a:cs typeface="Consolas" pitchFamily="34" charset="-120"/>
-              </a:rPr>
-              <a:t>2</a:t>
-            </a:r>
-            <a:endParaRPr lang="en-US" sz="1500" dirty="0"/>
-          </a:p>
-        </p:txBody>
-      </p:sp>
-      <p:sp>
-        <p:nvSpPr>
-          <p:cNvPr id="36" name="Shape 34"/>
-          <p:cNvSpPr/>
-          <p:nvPr/>
-        </p:nvSpPr>
-        <p:spPr>
-          <a:xfrm>
-            <a:off x="3099816" y="3447288"/>
-            <a:ext cx="713232" cy="475488"/>
-          </a:xfrm>
-          <a:prstGeom prst="rect">
-            <a:avLst/>
-          </a:prstGeom>
-          <a:solidFill>
-            <a:srgbClr val="C8E6C9"/>
-          </a:solidFill>
-          <a:ln w="19050">
-            <a:solidFill>
-              <a:srgbClr val="1E8449"/>
-            </a:solidFill>
-            <a:prstDash val="solid"/>
-          </a:ln>
-        </p:spPr>
-        <p:txBody>
-          <a:bodyPr/>
-          <a:lstStyle/>
-          <a:p>
-            <a:endParaRPr lang="en-US"/>
-          </a:p>
-        </p:txBody>
-      </p:sp>
-      <p:sp>
-        <p:nvSpPr>
-          <p:cNvPr id="37" name="Text 35"/>
-          <p:cNvSpPr/>
-          <p:nvPr/>
-        </p:nvSpPr>
-        <p:spPr>
-          <a:xfrm>
-            <a:off x="3099816" y="3447288"/>
-            <a:ext cx="713232" cy="475488"/>
-          </a:xfrm>
-          <a:prstGeom prst="rect">
-            <a:avLst/>
-          </a:prstGeom>
-          <a:noFill/>
-          <a:ln/>
-        </p:spPr>
-        <p:txBody>
-          <a:bodyPr wrap="square" lIns="0" tIns="0" rIns="0" bIns="0" rtlCol="0" anchor="ctr"/>
-          <a:lstStyle/>
-          <a:p>
-            <a:pPr marL="0" indent="0" algn="ctr">
-              <a:buNone/>
-            </a:pPr>
-            <a:r>
-              <a:rPr lang="en-US" sz="1500" b="1" dirty="0">
-                <a:solidFill>
-                  <a:srgbClr val="1E2A3A"/>
-                </a:solidFill>
-                <a:latin typeface="Consolas" pitchFamily="34" charset="0"/>
-                <a:ea typeface="Consolas" pitchFamily="34" charset="-122"/>
-                <a:cs typeface="Consolas" pitchFamily="34" charset="-120"/>
-              </a:rPr>
-              <a:t>3</a:t>
-            </a:r>
-            <a:endParaRPr lang="en-US" sz="1500" dirty="0"/>
-          </a:p>
-        </p:txBody>
-      </p:sp>
-      <p:sp>
-        <p:nvSpPr>
-          <p:cNvPr id="38" name="Shape 36"/>
-          <p:cNvSpPr/>
-          <p:nvPr/>
-        </p:nvSpPr>
-        <p:spPr>
-          <a:xfrm>
-            <a:off x="3813048" y="3447288"/>
-            <a:ext cx="713232" cy="475488"/>
-          </a:xfrm>
-          <a:prstGeom prst="rect">
-            <a:avLst/>
-          </a:prstGeom>
-          <a:solidFill>
-            <a:srgbClr val="C8E6C9"/>
-          </a:solidFill>
-          <a:ln w="19050">
-            <a:solidFill>
-              <a:srgbClr val="1E8449"/>
-            </a:solidFill>
-            <a:prstDash val="solid"/>
-          </a:ln>
-        </p:spPr>
-        <p:txBody>
-          <a:bodyPr/>
-          <a:lstStyle/>
-          <a:p>
-            <a:endParaRPr lang="en-US"/>
-          </a:p>
-        </p:txBody>
-      </p:sp>
-      <p:sp>
-        <p:nvSpPr>
-          <p:cNvPr id="39" name="Text 37"/>
-          <p:cNvSpPr/>
-          <p:nvPr/>
-        </p:nvSpPr>
-        <p:spPr>
-          <a:xfrm>
-            <a:off x="3813048" y="3447288"/>
-            <a:ext cx="713232" cy="475488"/>
-          </a:xfrm>
-          <a:prstGeom prst="rect">
-            <a:avLst/>
-          </a:prstGeom>
-          <a:noFill/>
-          <a:ln/>
-        </p:spPr>
-        <p:txBody>
-          <a:bodyPr wrap="square" lIns="0" tIns="0" rIns="0" bIns="0" rtlCol="0" anchor="ctr"/>
-          <a:lstStyle/>
-          <a:p>
-            <a:pPr marL="0" indent="0" algn="ctr">
-              <a:buNone/>
-            </a:pPr>
-            <a:r>
-              <a:rPr lang="en-US" sz="1500" b="1" dirty="0">
-                <a:solidFill>
-                  <a:srgbClr val="1E2A3A"/>
-                </a:solidFill>
-                <a:latin typeface="Consolas" pitchFamily="34" charset="0"/>
-                <a:ea typeface="Consolas" pitchFamily="34" charset="-122"/>
-                <a:cs typeface="Consolas" pitchFamily="34" charset="-120"/>
-              </a:rPr>
-              <a:t>4</a:t>
-            </a:r>
-            <a:endParaRPr lang="en-US" sz="1500" dirty="0"/>
-          </a:p>
-        </p:txBody>
-      </p:sp>
-      <p:sp>
-        <p:nvSpPr>
-          <p:cNvPr id="40" name="Shape 38"/>
-          <p:cNvSpPr/>
-          <p:nvPr/>
-        </p:nvSpPr>
-        <p:spPr>
-          <a:xfrm>
-            <a:off x="4526280" y="3447288"/>
-            <a:ext cx="713232" cy="475488"/>
-          </a:xfrm>
-          <a:prstGeom prst="rect">
-            <a:avLst/>
-          </a:prstGeom>
-          <a:solidFill>
-            <a:srgbClr val="C8E6C9"/>
-          </a:solidFill>
-          <a:ln w="19050">
-            <a:solidFill>
-              <a:srgbClr val="1E8449"/>
-            </a:solidFill>
-            <a:prstDash val="solid"/>
-          </a:ln>
-        </p:spPr>
-        <p:txBody>
-          <a:bodyPr/>
-          <a:lstStyle/>
-          <a:p>
-            <a:endParaRPr lang="en-US"/>
-          </a:p>
-        </p:txBody>
-      </p:sp>
-      <p:sp>
-        <p:nvSpPr>
-          <p:cNvPr id="41" name="Text 39"/>
-          <p:cNvSpPr/>
-          <p:nvPr/>
-        </p:nvSpPr>
-        <p:spPr>
-          <a:xfrm>
-            <a:off x="4526280" y="3447288"/>
-            <a:ext cx="713232" cy="475488"/>
-          </a:xfrm>
-          <a:prstGeom prst="rect">
-            <a:avLst/>
-          </a:prstGeom>
-          <a:noFill/>
-          <a:ln/>
-        </p:spPr>
-        <p:txBody>
-          <a:bodyPr wrap="square" lIns="0" tIns="0" rIns="0" bIns="0" rtlCol="0" anchor="ctr"/>
-          <a:lstStyle/>
-          <a:p>
-            <a:pPr marL="0" indent="0" algn="ctr">
-              <a:buNone/>
-            </a:pPr>
-            <a:r>
-              <a:rPr lang="en-US" sz="1500" b="1" dirty="0">
-                <a:solidFill>
-                  <a:srgbClr val="1E2A3A"/>
-                </a:solidFill>
-                <a:latin typeface="Consolas" pitchFamily="34" charset="0"/>
-                <a:ea typeface="Consolas" pitchFamily="34" charset="-122"/>
-                <a:cs typeface="Consolas" pitchFamily="34" charset="-120"/>
-              </a:rPr>
-              <a:t>6</a:t>
-            </a:r>
-            <a:endParaRPr lang="en-US" sz="1500" dirty="0"/>
-          </a:p>
-        </p:txBody>
-      </p:sp>
-      <p:sp>
-        <p:nvSpPr>
-          <p:cNvPr id="42" name="Shape 40"/>
-          <p:cNvSpPr/>
-          <p:nvPr/>
-        </p:nvSpPr>
-        <p:spPr>
-          <a:xfrm>
-            <a:off x="5394960" y="1220724"/>
-            <a:ext cx="3611880" cy="3273552"/>
+            <a:ext cx="3246120" cy="2148840"/>
           </a:xfrm>
           <a:prstGeom prst="rect">
             <a:avLst/>
@@ -11937,14 +11744,20 @@
       </p:sp>
       <p:sp>
         <p:nvSpPr>
-          <p:cNvPr id="43" name="Text 41"/>
-          <p:cNvSpPr/>
-          <p:nvPr/>
-        </p:nvSpPr>
-        <p:spPr>
-          <a:xfrm>
-            <a:off x="5513832" y="1312164"/>
-            <a:ext cx="3374136" cy="3090672"/>
+          <p:cNvPr id="7" name="Text 5">
+            <a:extLst>
+              <a:ext uri="{FF2B5EF4-FFF2-40B4-BE49-F238E27FC236}">
+                <a16:creationId xmlns:a16="http://schemas.microsoft.com/office/drawing/2014/main" id="{60D1DDAE-7DD6-605B-8B97-DAE204688F32}"/>
+              </a:ext>
+            </a:extLst>
+          </p:cNvPr>
+          <p:cNvSpPr/>
+          <p:nvPr/>
+        </p:nvSpPr>
+        <p:spPr>
+          <a:xfrm>
+            <a:off x="438912" y="1307592"/>
+            <a:ext cx="3017520" cy="256032"/>
           </a:xfrm>
           <a:prstGeom prst="rect">
             <a:avLst/>
@@ -11953,6 +11766,51 @@
           <a:ln/>
         </p:spPr>
         <p:txBody>
+          <a:bodyPr wrap="square" lIns="0" tIns="0" rIns="0" bIns="0" rtlCol="0" anchor="ctr"/>
+          <a:lstStyle/>
+          <a:p>
+            <a:pPr marL="0" indent="0">
+              <a:buNone/>
+            </a:pPr>
+            <a:r>
+              <a:rPr lang="en-US" sz="1050" b="1" dirty="0">
+                <a:solidFill>
+                  <a:srgbClr val="85C1E9"/>
+                </a:solidFill>
+                <a:latin typeface="Calibri" pitchFamily="34" charset="0"/>
+                <a:ea typeface="Calibri" pitchFamily="34" charset="-122"/>
+                <a:cs typeface="Calibri" pitchFamily="34" charset="-120"/>
+              </a:rPr>
+              <a:t>joke.txt</a:t>
+            </a:r>
+            <a:endParaRPr lang="en-US" sz="1050" dirty="0"/>
+          </a:p>
+        </p:txBody>
+      </p:sp>
+      <p:sp>
+        <p:nvSpPr>
+          <p:cNvPr id="8" name="Text 6">
+            <a:extLst>
+              <a:ext uri="{FF2B5EF4-FFF2-40B4-BE49-F238E27FC236}">
+                <a16:creationId xmlns:a16="http://schemas.microsoft.com/office/drawing/2014/main" id="{94CCB4A3-4D25-5720-4DD0-1DA78C4E0046}"/>
+              </a:ext>
+            </a:extLst>
+          </p:cNvPr>
+          <p:cNvSpPr/>
+          <p:nvPr/>
+        </p:nvSpPr>
+        <p:spPr>
+          <a:xfrm>
+            <a:off x="457200" y="1609344"/>
+            <a:ext cx="3017520" cy="1691640"/>
+          </a:xfrm>
+          <a:prstGeom prst="rect">
+            <a:avLst/>
+          </a:prstGeom>
+          <a:noFill/>
+          <a:ln/>
+        </p:spPr>
+        <p:txBody>
           <a:bodyPr wrap="square" lIns="0" tIns="0" rIns="0" bIns="0" rtlCol="0" anchor="t"/>
           <a:lstStyle/>
           <a:p>
@@ -11960,7 +11818,7 @@
               <a:buNone/>
             </a:pPr>
             <a:r>
-              <a:rPr lang="en-US" sz="1200" dirty="0">
+              <a:rPr lang="en-US" sz="1000" dirty="0">
                 <a:solidFill>
                   <a:srgbClr val="A9CCE3"/>
                 </a:solidFill>
@@ -11968,16 +11826,16 @@
                 <a:ea typeface="Consolas" pitchFamily="34" charset="-122"/>
                 <a:cs typeface="Consolas" pitchFamily="34" charset="-120"/>
               </a:rPr>
-              <a:t># Sort numbers ascending</a:t>
-            </a:r>
-            <a:endParaRPr lang="en-US" sz="1200" dirty="0"/>
-          </a:p>
-          <a:p>
-            <a:pPr marL="0" indent="0">
-              <a:buNone/>
-            </a:pPr>
-            <a:r>
-              <a:rPr lang="en-US" sz="1200" dirty="0">
+              <a:t>Who's there?\n</a:t>
+            </a:r>
+            <a:endParaRPr lang="en-US" sz="1000" dirty="0"/>
+          </a:p>
+          <a:p>
+            <a:pPr marL="0" indent="0">
+              <a:buNone/>
+            </a:pPr>
+            <a:r>
+              <a:rPr lang="en-US" sz="1000" dirty="0">
                 <a:solidFill>
                   <a:srgbClr val="A9CCE3"/>
                 </a:solidFill>
@@ -11985,16 +11843,16 @@
                 <a:ea typeface="Consolas" pitchFamily="34" charset="-122"/>
                 <a:cs typeface="Consolas" pitchFamily="34" charset="-120"/>
               </a:rPr>
-              <a:t>nums = [4, 1, 6, 1, 3, 2]</a:t>
-            </a:r>
-            <a:endParaRPr lang="en-US" sz="1200" dirty="0"/>
-          </a:p>
-          <a:p>
-            <a:pPr marL="0" indent="0">
-              <a:buNone/>
-            </a:pPr>
-            <a:r>
-              <a:rPr lang="en-US" sz="1200" dirty="0">
+              <a:t>A broken pencil.\n</a:t>
+            </a:r>
+            <a:endParaRPr lang="en-US" sz="1000" dirty="0"/>
+          </a:p>
+          <a:p>
+            <a:pPr marL="0" indent="0">
+              <a:buNone/>
+            </a:pPr>
+            <a:r>
+              <a:rPr lang="en-US" sz="1000" dirty="0">
                 <a:solidFill>
                   <a:srgbClr val="A9CCE3"/>
                 </a:solidFill>
@@ -12002,16 +11860,16 @@
                 <a:ea typeface="Consolas" pitchFamily="34" charset="-122"/>
                 <a:cs typeface="Consolas" pitchFamily="34" charset="-120"/>
               </a:rPr>
-              <a:t>nums.sort()</a:t>
-            </a:r>
-            <a:endParaRPr lang="en-US" sz="1200" dirty="0"/>
-          </a:p>
-          <a:p>
-            <a:pPr marL="0" indent="0">
-              <a:buNone/>
-            </a:pPr>
-            <a:r>
-              <a:rPr lang="en-US" sz="1200" dirty="0">
+              <a:t>A broken pencil who?\n</a:t>
+            </a:r>
+            <a:endParaRPr lang="en-US" sz="1000" dirty="0"/>
+          </a:p>
+          <a:p>
+            <a:pPr marL="0" indent="0">
+              <a:buNone/>
+            </a:pPr>
+            <a:r>
+              <a:rPr lang="en-US" sz="1000" dirty="0">
                 <a:solidFill>
                   <a:srgbClr val="A9CCE3"/>
                 </a:solidFill>
@@ -12019,16 +11877,112 @@
                 <a:ea typeface="Consolas" pitchFamily="34" charset="-122"/>
                 <a:cs typeface="Consolas" pitchFamily="34" charset="-120"/>
               </a:rPr>
-              <a:t>print(nums)  # [1, 1, 2, 3, 4, 6]</a:t>
-            </a:r>
-            <a:endParaRPr lang="en-US" sz="1200" dirty="0"/>
-          </a:p>
-          <a:p>
-            <a:pPr marL="0" indent="0">
-              <a:buNone/>
-            </a:pPr>
-            <a:endParaRPr lang="en-US" sz="1200" dirty="0"/>
-          </a:p>
+              <a:t>Never mind. It's pointless.</a:t>
+            </a:r>
+            <a:endParaRPr lang="en-US" sz="1000" dirty="0"/>
+          </a:p>
+        </p:txBody>
+      </p:sp>
+      <p:sp>
+        <p:nvSpPr>
+          <p:cNvPr id="9" name="Shape 7">
+            <a:extLst>
+              <a:ext uri="{FF2B5EF4-FFF2-40B4-BE49-F238E27FC236}">
+                <a16:creationId xmlns:a16="http://schemas.microsoft.com/office/drawing/2014/main" id="{EE374AE7-5E32-AEF1-AC16-39F8D33CEFED}"/>
+              </a:ext>
+            </a:extLst>
+          </p:cNvPr>
+          <p:cNvSpPr/>
+          <p:nvPr/>
+        </p:nvSpPr>
+        <p:spPr>
+          <a:xfrm>
+            <a:off x="3593592" y="2304288"/>
+            <a:ext cx="475488" cy="0"/>
+          </a:xfrm>
+          <a:prstGeom prst="line">
+            <a:avLst/>
+          </a:prstGeom>
+          <a:noFill/>
+          <a:ln w="25400">
+            <a:solidFill>
+              <a:srgbClr val="2E86C1"/>
+            </a:solidFill>
+            <a:prstDash val="solid"/>
+          </a:ln>
+        </p:spPr>
+        <p:txBody>
+          <a:bodyPr/>
+          <a:lstStyle/>
+          <a:p>
+            <a:endParaRPr lang="en-US"/>
+          </a:p>
+        </p:txBody>
+      </p:sp>
+      <p:sp>
+        <p:nvSpPr>
+          <p:cNvPr id="10" name="Shape 8">
+            <a:extLst>
+              <a:ext uri="{FF2B5EF4-FFF2-40B4-BE49-F238E27FC236}">
+                <a16:creationId xmlns:a16="http://schemas.microsoft.com/office/drawing/2014/main" id="{C5AB4A7F-6A9B-7940-DFB2-8B3D2E12BCFD}"/>
+              </a:ext>
+            </a:extLst>
+          </p:cNvPr>
+          <p:cNvSpPr/>
+          <p:nvPr/>
+        </p:nvSpPr>
+        <p:spPr>
+          <a:xfrm>
+            <a:off x="4187952" y="1234440"/>
+            <a:ext cx="4636008" cy="2880360"/>
+          </a:xfrm>
+          <a:prstGeom prst="rect">
+            <a:avLst/>
+          </a:prstGeom>
+          <a:solidFill>
+            <a:srgbClr val="1C2833"/>
+          </a:solidFill>
+          <a:ln w="12700">
+            <a:solidFill>
+              <a:srgbClr val="2C4055"/>
+            </a:solidFill>
+            <a:prstDash val="solid"/>
+          </a:ln>
+        </p:spPr>
+        <p:txBody>
+          <a:bodyPr/>
+          <a:lstStyle/>
+          <a:p>
+            <a:endParaRPr lang="en-US"/>
+          </a:p>
+        </p:txBody>
+      </p:sp>
+      <p:sp>
+        <p:nvSpPr>
+          <p:cNvPr id="11" name="Text 9">
+            <a:extLst>
+              <a:ext uri="{FF2B5EF4-FFF2-40B4-BE49-F238E27FC236}">
+                <a16:creationId xmlns:a16="http://schemas.microsoft.com/office/drawing/2014/main" id="{25D1B8AF-3AC0-FB29-650C-073354F77C83}"/>
+              </a:ext>
+            </a:extLst>
+          </p:cNvPr>
+          <p:cNvSpPr/>
+          <p:nvPr/>
+        </p:nvSpPr>
+        <p:spPr>
+          <a:xfrm>
+            <a:off x="4306824" y="1325880"/>
+            <a:ext cx="4398264" cy="2697480"/>
+          </a:xfrm>
+          <a:prstGeom prst="rect">
+            <a:avLst/>
+          </a:prstGeom>
+          <a:noFill/>
+          <a:ln/>
+        </p:spPr>
+        <p:txBody>
+          <a:bodyPr wrap="square" lIns="0" tIns="0" rIns="0" bIns="0" rtlCol="0" anchor="t"/>
+          <a:lstStyle/>
           <a:p>
             <a:pPr marL="0" indent="0">
               <a:buNone/>
@@ -12042,7 +11996,7 @@
                 <a:ea typeface="Consolas" pitchFamily="34" charset="-122"/>
                 <a:cs typeface="Consolas" pitchFamily="34" charset="-120"/>
               </a:rPr>
-              <a:t># Sort descending</a:t>
+              <a:t># Long version</a:t>
             </a:r>
             <a:endParaRPr lang="en-US" sz="1200" dirty="0"/>
           </a:p>
@@ -12059,7 +12013,7 @@
                 <a:ea typeface="Consolas" pitchFamily="34" charset="-122"/>
                 <a:cs typeface="Consolas" pitchFamily="34" charset="-120"/>
               </a:rPr>
-              <a:t>nums.sort()</a:t>
+              <a:t>file_obj   = open("joke.txt")</a:t>
             </a:r>
             <a:endParaRPr lang="en-US" sz="1200" dirty="0"/>
           </a:p>
@@ -12076,7 +12030,7 @@
                 <a:ea typeface="Consolas" pitchFamily="34" charset="-122"/>
                 <a:cs typeface="Consolas" pitchFamily="34" charset="-120"/>
               </a:rPr>
-              <a:t>nums.reverse()</a:t>
+              <a:t>big_string = file_obj.read()</a:t>
             </a:r>
             <a:endParaRPr lang="en-US" sz="1200" dirty="0"/>
           </a:p>
@@ -12093,7 +12047,7 @@
                 <a:ea typeface="Consolas" pitchFamily="34" charset="-122"/>
                 <a:cs typeface="Consolas" pitchFamily="34" charset="-120"/>
               </a:rPr>
-              <a:t>print(nums)  # [6, 4, 3, 2, 1, 1]</a:t>
+              <a:t>lines      = big_string.split("\n")</a:t>
             </a:r>
             <a:endParaRPr lang="en-US" sz="1200" dirty="0"/>
           </a:p>
@@ -12116,7 +12070,7 @@
                 <a:ea typeface="Consolas" pitchFamily="34" charset="-122"/>
                 <a:cs typeface="Consolas" pitchFamily="34" charset="-120"/>
               </a:rPr>
-              <a:t># Sort strings alphabetically</a:t>
+              <a:t># Short version (method chaining)</a:t>
             </a:r>
             <a:endParaRPr lang="en-US" sz="1200" dirty="0"/>
           </a:p>
@@ -12133,8 +12087,14 @@
                 <a:ea typeface="Consolas" pitchFamily="34" charset="-122"/>
                 <a:cs typeface="Consolas" pitchFamily="34" charset="-120"/>
               </a:rPr>
-              <a:t>pets = ["dog", "zebra", "cat"]</a:t>
-            </a:r>
+              <a:t>lines = open("joke.txt").read().split("\n")</a:t>
+            </a:r>
+            <a:endParaRPr lang="en-US" sz="1200" dirty="0"/>
+          </a:p>
+          <a:p>
+            <a:pPr marL="0" indent="0">
+              <a:buNone/>
+            </a:pPr>
             <a:endParaRPr lang="en-US" sz="1200" dirty="0"/>
           </a:p>
           <a:p>
@@ -12150,7 +12110,7 @@
                 <a:ea typeface="Consolas" pitchFamily="34" charset="-122"/>
                 <a:cs typeface="Consolas" pitchFamily="34" charset="-120"/>
               </a:rPr>
-              <a:t>pets.sort()</a:t>
+              <a:t>print(lines)</a:t>
             </a:r>
             <a:endParaRPr lang="en-US" sz="1200" dirty="0"/>
           </a:p>
@@ -12167,18 +12127,52 @@
                 <a:ea typeface="Consolas" pitchFamily="34" charset="-122"/>
                 <a:cs typeface="Consolas" pitchFamily="34" charset="-120"/>
               </a:rPr>
-              <a:t>print(pets)  # ["cat", "dog", "zebra"]</a:t>
+              <a:t># ["Who's there?", "A broken pencil.",</a:t>
             </a:r>
             <a:endParaRPr lang="en-US" sz="1200" dirty="0"/>
           </a:p>
-        </p:txBody>
-      </p:sp>
-      <p:sp>
-        <p:nvSpPr>
-          <p:cNvPr id="44" name="Down Arrow 43">
+          <a:p>
+            <a:pPr marL="0" indent="0">
+              <a:buNone/>
+            </a:pPr>
+            <a:r>
+              <a:rPr lang="en-US" sz="1200" dirty="0">
+                <a:solidFill>
+                  <a:srgbClr val="A9CCE3"/>
+                </a:solidFill>
+                <a:latin typeface="Consolas" pitchFamily="34" charset="0"/>
+                <a:ea typeface="Consolas" pitchFamily="34" charset="-122"/>
+                <a:cs typeface="Consolas" pitchFamily="34" charset="-120"/>
+              </a:rPr>
+              <a:t>#  "A broken pencil who?",</a:t>
+            </a:r>
+            <a:endParaRPr lang="en-US" sz="1200" dirty="0"/>
+          </a:p>
+          <a:p>
+            <a:pPr marL="0" indent="0">
+              <a:buNone/>
+            </a:pPr>
+            <a:r>
+              <a:rPr lang="en-US" sz="1200" dirty="0">
+                <a:solidFill>
+                  <a:srgbClr val="A9CCE3"/>
+                </a:solidFill>
+                <a:latin typeface="Consolas" pitchFamily="34" charset="0"/>
+                <a:ea typeface="Consolas" pitchFamily="34" charset="-122"/>
+                <a:cs typeface="Consolas" pitchFamily="34" charset="-120"/>
+              </a:rPr>
+              <a:t>#  "Never mind. It's pointless."]</a:t>
+            </a:r>
+            <a:endParaRPr lang="en-US" sz="1200" dirty="0"/>
+          </a:p>
+        </p:txBody>
+      </p:sp>
+      <p:sp>
+        <p:nvSpPr>
+          <p:cNvPr id="12" name="Shape 10">
             <a:extLst>
               <a:ext uri="{FF2B5EF4-FFF2-40B4-BE49-F238E27FC236}">
-                <a16:creationId xmlns:a16="http://schemas.microsoft.com/office/drawing/2014/main" id="{C3CCAE24-A567-F892-5721-CD6FA1EF6F85}"/>
+                <a16:creationId xmlns:a16="http://schemas.microsoft.com/office/drawing/2014/main" id="{44692CB1-B95C-1D13-D678-DDC979BD1E9D}"/>
               </a:ext>
             </a:extLst>
           </p:cNvPr>
@@ -12187,48 +12181,149 @@
         </p:nvSpPr>
         <p:spPr>
           <a:xfrm>
-            <a:off x="2881140" y="2174971"/>
-            <a:ext cx="133592" cy="1099882"/>
-          </a:xfrm>
-          <a:prstGeom prst="downArrow">
+            <a:off x="320040" y="3520440"/>
+            <a:ext cx="3246120" cy="1298448"/>
+          </a:xfrm>
+          <a:prstGeom prst="rect">
             <a:avLst/>
           </a:prstGeom>
           <a:solidFill>
-            <a:schemeClr val="accent5">
-              <a:lumMod val="40000"/>
-              <a:lumOff val="60000"/>
-            </a:schemeClr>
+            <a:srgbClr val="DBE9F4"/>
           </a:solidFill>
-          <a:ln>
-            <a:noFill/>
+          <a:ln w="12700">
+            <a:solidFill>
+              <a:srgbClr val="2E86C1"/>
+            </a:solidFill>
+            <a:prstDash val="solid"/>
           </a:ln>
         </p:spPr>
-        <p:style>
-          <a:lnRef idx="2">
-            <a:schemeClr val="accent1">
-              <a:shade val="15000"/>
-            </a:schemeClr>
-          </a:lnRef>
-          <a:fillRef idx="1">
-            <a:schemeClr val="accent1"/>
-          </a:fillRef>
-          <a:effectRef idx="0">
-            <a:schemeClr val="accent1"/>
-          </a:effectRef>
-          <a:fontRef idx="minor">
-            <a:schemeClr val="lt1"/>
-          </a:fontRef>
-        </p:style>
-        <p:txBody>
-          <a:bodyPr rtlCol="0" anchor="ctr"/>
-          <a:lstStyle/>
-          <a:p>
-            <a:pPr algn="ctr"/>
-            <a:endParaRPr lang="en-US" dirty="0"/>
-          </a:p>
-        </p:txBody>
-      </p:sp>
+        <p:txBody>
+          <a:bodyPr/>
+          <a:lstStyle/>
+          <a:p>
+            <a:endParaRPr lang="en-US"/>
+          </a:p>
+        </p:txBody>
+      </p:sp>
+      <p:sp>
+        <p:nvSpPr>
+          <p:cNvPr id="13" name="Text 11">
+            <a:extLst>
+              <a:ext uri="{FF2B5EF4-FFF2-40B4-BE49-F238E27FC236}">
+                <a16:creationId xmlns:a16="http://schemas.microsoft.com/office/drawing/2014/main" id="{EEB93C57-B9E4-778F-2D5A-EAC91A07D318}"/>
+              </a:ext>
+            </a:extLst>
+          </p:cNvPr>
+          <p:cNvSpPr/>
+          <p:nvPr/>
+        </p:nvSpPr>
+        <p:spPr>
+          <a:xfrm>
+            <a:off x="438912" y="3584448"/>
+            <a:ext cx="2999232" cy="1170432"/>
+          </a:xfrm>
+          <a:prstGeom prst="rect">
+            <a:avLst/>
+          </a:prstGeom>
+          <a:noFill/>
+          <a:ln/>
+        </p:spPr>
+        <p:txBody>
+          <a:bodyPr wrap="square" lIns="0" tIns="0" rIns="0" bIns="0" rtlCol="0" anchor="ctr"/>
+          <a:lstStyle/>
+          <a:p>
+            <a:pPr marL="0" indent="0">
+              <a:buNone/>
+            </a:pPr>
+            <a:r>
+              <a:rPr lang="en-US" sz="1250" dirty="0">
+                <a:solidFill>
+                  <a:srgbClr val="1B2631"/>
+                </a:solidFill>
+                <a:latin typeface="Calibri" pitchFamily="34" charset="0"/>
+                <a:ea typeface="Calibri" pitchFamily="34" charset="-122"/>
+                <a:cs typeface="Calibri" pitchFamily="34" charset="-120"/>
+              </a:rPr>
+              <a:t>In text files, each line ends with  \n  (newline).</a:t>
+            </a:r>
+            <a:endParaRPr lang="en-US" sz="1250" dirty="0"/>
+          </a:p>
+          <a:p>
+            <a:pPr marL="0" indent="0">
+              <a:buNone/>
+            </a:pPr>
+            <a:r>
+              <a:rPr lang="en-US" sz="1250" dirty="0">
+                <a:solidFill>
+                  <a:srgbClr val="1B2631"/>
+                </a:solidFill>
+                <a:latin typeface="Calibri" pitchFamily="34" charset="0"/>
+                <a:ea typeface="Calibri" pitchFamily="34" charset="-122"/>
+                <a:cs typeface="Calibri" pitchFamily="34" charset="-120"/>
+              </a:rPr>
+              <a:t>split("\n")  breaks the string at each newline character.</a:t>
+            </a:r>
+            <a:endParaRPr lang="en-US" sz="1250" dirty="0"/>
+          </a:p>
+        </p:txBody>
+      </p:sp>
+      <mc:AlternateContent xmlns:mc="http://schemas.openxmlformats.org/markup-compatibility/2006">
+        <mc:Choice xmlns:p14="http://schemas.microsoft.com/office/powerpoint/2010/main" Requires="p14">
+          <p:contentPart p14:bwMode="auto" r:id="rId3">
+            <p14:nvContentPartPr>
+              <p14:cNvPr id="14" name="Ink 13">
+                <a:extLst>
+                  <a:ext uri="{FF2B5EF4-FFF2-40B4-BE49-F238E27FC236}">
+                    <a16:creationId xmlns:a16="http://schemas.microsoft.com/office/drawing/2014/main" id="{464EE540-5604-CDFB-F16E-CCBC64640B76}"/>
+                  </a:ext>
+                </a:extLst>
+              </p14:cNvPr>
+              <p14:cNvContentPartPr/>
+              <p14:nvPr/>
+            </p14:nvContentPartPr>
+            <p14:xfrm>
+              <a:off x="4329000" y="2523960"/>
+              <a:ext cx="4296240" cy="205560"/>
+            </p14:xfrm>
+          </p:contentPart>
+        </mc:Choice>
+        <mc:Fallback>
+          <p:pic>
+            <p:nvPicPr>
+              <p:cNvPr id="14" name="Ink 13">
+                <a:extLst>
+                  <a:ext uri="{FF2B5EF4-FFF2-40B4-BE49-F238E27FC236}">
+                    <a16:creationId xmlns:a16="http://schemas.microsoft.com/office/drawing/2014/main" id="{464EE540-5604-CDFB-F16E-CCBC64640B76}"/>
+                  </a:ext>
+                </a:extLst>
+              </p:cNvPr>
+              <p:cNvPicPr/>
+              <p:nvPr/>
+            </p:nvPicPr>
+            <p:blipFill>
+              <a:blip r:embed="rId4"/>
+              <a:stretch>
+                <a:fillRect/>
+              </a:stretch>
+            </p:blipFill>
+            <p:spPr>
+              <a:xfrm>
+                <a:off x="4319640" y="2514600"/>
+                <a:ext cx="4314960" cy="224280"/>
+              </a:xfrm>
+              <a:prstGeom prst="rect">
+                <a:avLst/>
+              </a:prstGeom>
+            </p:spPr>
+          </p:pic>
+        </mc:Fallback>
+      </mc:AlternateContent>
     </p:spTree>
+    <p:extLst>
+      <p:ext uri="{BB962C8B-B14F-4D97-AF65-F5344CB8AC3E}">
+        <p14:creationId xmlns:p14="http://schemas.microsoft.com/office/powerpoint/2010/main" val="2288439714"/>
+      </p:ext>
+    </p:extLst>
   </p:cSld>
   <p:clrMapOvr>
     <a:masterClrMapping/>
@@ -13167,8 +13262,8 @@
           </a:p>
         </p:txBody>
       </p:sp>
-      <mc:AlternateContent xmlns:mc="http://schemas.openxmlformats.org/markup-compatibility/2006">
-        <mc:Choice xmlns:p14="http://schemas.microsoft.com/office/powerpoint/2010/main" Requires="p14">
+      <mc:AlternateContent xmlns:mc="http://schemas.openxmlformats.org/markup-compatibility/2006" xmlns:p14="http://schemas.microsoft.com/office/powerpoint/2010/main">
+        <mc:Choice Requires="p14">
           <p:contentPart p14:bwMode="auto" r:id="rId3">
             <p14:nvContentPartPr>
               <p14:cNvPr id="26" name="Ink 25">
@@ -13187,7 +13282,7 @@
             </p14:xfrm>
           </p:contentPart>
         </mc:Choice>
-        <mc:Fallback>
+        <mc:Fallback xmlns="">
           <p:pic>
             <p:nvPicPr>
               <p:cNvPr id="26" name="Ink 25">
@@ -13228,6 +13323,5629 @@
 
 <file path=ppt/slides/slide20.xml><?xml version="1.0" encoding="utf-8"?>
 <p:sld xmlns:a="http://schemas.openxmlformats.org/drawingml/2006/main" xmlns:r="http://schemas.openxmlformats.org/officeDocument/2006/relationships" xmlns:p="http://schemas.openxmlformats.org/presentationml/2006/main">
+  <p:cSld name="Slide 19">
+    <p:bg>
+      <p:bgPr>
+        <a:solidFill>
+          <a:srgbClr val="F4F8FB"/>
+        </a:solidFill>
+        <a:effectLst/>
+      </p:bgPr>
+    </p:bg>
+    <p:spTree>
+      <p:nvGrpSpPr>
+        <p:cNvPr id="1" name=""/>
+        <p:cNvGrpSpPr/>
+        <p:nvPr/>
+      </p:nvGrpSpPr>
+      <p:grpSpPr>
+        <a:xfrm>
+          <a:off x="0" y="0"/>
+          <a:ext cx="0" cy="0"/>
+          <a:chOff x="0" y="0"/>
+          <a:chExt cx="0" cy="0"/>
+        </a:xfrm>
+      </p:grpSpPr>
+      <p:sp>
+        <p:nvSpPr>
+          <p:cNvPr id="2" name="Shape 0"/>
+          <p:cNvSpPr/>
+          <p:nvPr/>
+        </p:nvSpPr>
+        <p:spPr>
+          <a:xfrm>
+            <a:off x="0" y="0"/>
+            <a:ext cx="9144000" cy="658368"/>
+          </a:xfrm>
+          <a:prstGeom prst="rect">
+            <a:avLst/>
+          </a:prstGeom>
+          <a:solidFill>
+            <a:srgbClr val="1E2A3A"/>
+          </a:solidFill>
+          <a:ln w="12700">
+            <a:solidFill>
+              <a:srgbClr val="1E2A3A"/>
+            </a:solidFill>
+            <a:prstDash val="solid"/>
+          </a:ln>
+        </p:spPr>
+        <p:txBody>
+          <a:bodyPr/>
+          <a:lstStyle/>
+          <a:p>
+            <a:endParaRPr lang="en-US"/>
+          </a:p>
+        </p:txBody>
+      </p:sp>
+      <p:sp>
+        <p:nvSpPr>
+          <p:cNvPr id="3" name="Shape 1"/>
+          <p:cNvSpPr/>
+          <p:nvPr/>
+        </p:nvSpPr>
+        <p:spPr>
+          <a:xfrm>
+            <a:off x="0" y="0"/>
+            <a:ext cx="182880" cy="658368"/>
+          </a:xfrm>
+          <a:prstGeom prst="rect">
+            <a:avLst/>
+          </a:prstGeom>
+          <a:solidFill>
+            <a:srgbClr val="1ABC9C"/>
+          </a:solidFill>
+          <a:ln w="12700">
+            <a:solidFill>
+              <a:srgbClr val="1ABC9C"/>
+            </a:solidFill>
+            <a:prstDash val="solid"/>
+          </a:ln>
+        </p:spPr>
+        <p:txBody>
+          <a:bodyPr/>
+          <a:lstStyle/>
+          <a:p>
+            <a:endParaRPr lang="en-US"/>
+          </a:p>
+        </p:txBody>
+      </p:sp>
+      <p:sp>
+        <p:nvSpPr>
+          <p:cNvPr id="4" name="Text 2"/>
+          <p:cNvSpPr/>
+          <p:nvPr/>
+        </p:nvSpPr>
+        <p:spPr>
+          <a:xfrm>
+            <a:off x="320040" y="0"/>
+            <a:ext cx="8686800" cy="658368"/>
+          </a:xfrm>
+          <a:prstGeom prst="rect">
+            <a:avLst/>
+          </a:prstGeom>
+          <a:noFill/>
+          <a:ln/>
+        </p:spPr>
+        <p:txBody>
+          <a:bodyPr wrap="square" lIns="0" tIns="0" rIns="0" bIns="0" rtlCol="0" anchor="ctr"/>
+          <a:lstStyle/>
+          <a:p>
+            <a:pPr marL="0" indent="0">
+              <a:buNone/>
+            </a:pPr>
+            <a:r>
+              <a:rPr lang="en-US" sz="2500" b="1" dirty="0">
+                <a:solidFill>
+                  <a:srgbClr val="FFFFFF"/>
+                </a:solidFill>
+                <a:latin typeface="Calibri" pitchFamily="34" charset="0"/>
+                <a:ea typeface="Calibri" pitchFamily="34" charset="-122"/>
+                <a:cs typeface="Calibri" pitchFamily="34" charset="-120"/>
+              </a:rPr>
+              <a:t>Sorting Lists</a:t>
+            </a:r>
+            <a:endParaRPr lang="en-US" sz="2500" dirty="0"/>
+          </a:p>
+        </p:txBody>
+      </p:sp>
+      <p:sp>
+        <p:nvSpPr>
+          <p:cNvPr id="5" name="Text 3"/>
+          <p:cNvSpPr/>
+          <p:nvPr/>
+        </p:nvSpPr>
+        <p:spPr>
+          <a:xfrm>
+            <a:off x="320040" y="768096"/>
+            <a:ext cx="8503920" cy="365760"/>
+          </a:xfrm>
+          <a:prstGeom prst="rect">
+            <a:avLst/>
+          </a:prstGeom>
+          <a:noFill/>
+          <a:ln/>
+        </p:spPr>
+        <p:txBody>
+          <a:bodyPr wrap="square" lIns="0" tIns="0" rIns="0" bIns="0" rtlCol="0" anchor="ctr"/>
+          <a:lstStyle/>
+          <a:p>
+            <a:pPr marL="0" indent="0">
+              <a:buNone/>
+            </a:pPr>
+            <a:r>
+              <a:rPr lang="en-US" sz="1500" dirty="0">
+                <a:solidFill>
+                  <a:srgbClr val="1B2631"/>
+                </a:solidFill>
+                <a:latin typeface="Calibri" pitchFamily="34" charset="0"/>
+                <a:ea typeface="Calibri" pitchFamily="34" charset="-122"/>
+                <a:cs typeface="Calibri" pitchFamily="34" charset="-120"/>
+              </a:rPr>
+              <a:t>L.sort()  rearranges the list into ascending order — in-place, no copy.</a:t>
+            </a:r>
+            <a:endParaRPr lang="en-US" sz="1500" dirty="0"/>
+          </a:p>
+        </p:txBody>
+      </p:sp>
+      <p:sp>
+        <p:nvSpPr>
+          <p:cNvPr id="6" name="Text 4"/>
+          <p:cNvSpPr/>
+          <p:nvPr/>
+        </p:nvSpPr>
+        <p:spPr>
+          <a:xfrm>
+            <a:off x="320040" y="1234440"/>
+            <a:ext cx="2560320" cy="274320"/>
+          </a:xfrm>
+          <a:prstGeom prst="rect">
+            <a:avLst/>
+          </a:prstGeom>
+          <a:noFill/>
+          <a:ln/>
+        </p:spPr>
+        <p:txBody>
+          <a:bodyPr wrap="square" lIns="0" tIns="0" rIns="0" bIns="0" rtlCol="0" anchor="ctr"/>
+          <a:lstStyle/>
+          <a:p>
+            <a:pPr marL="0" indent="0">
+              <a:buNone/>
+            </a:pPr>
+            <a:r>
+              <a:rPr lang="en-US" sz="1200" b="1" dirty="0">
+                <a:solidFill>
+                  <a:srgbClr val="4A6080"/>
+                </a:solidFill>
+                <a:latin typeface="Calibri" pitchFamily="34" charset="0"/>
+                <a:ea typeface="Calibri" pitchFamily="34" charset="-122"/>
+                <a:cs typeface="Calibri" pitchFamily="34" charset="-120"/>
+              </a:rPr>
+              <a:t>Before  .sort():</a:t>
+            </a:r>
+            <a:endParaRPr lang="en-US" sz="1200" dirty="0"/>
+          </a:p>
+        </p:txBody>
+      </p:sp>
+      <p:sp>
+        <p:nvSpPr>
+          <p:cNvPr id="7" name="Text 5"/>
+          <p:cNvSpPr/>
+          <p:nvPr/>
+        </p:nvSpPr>
+        <p:spPr>
+          <a:xfrm>
+            <a:off x="0" y="1645920"/>
+            <a:ext cx="914400" cy="292608"/>
+          </a:xfrm>
+          <a:prstGeom prst="rect">
+            <a:avLst/>
+          </a:prstGeom>
+          <a:noFill/>
+          <a:ln/>
+        </p:spPr>
+        <p:txBody>
+          <a:bodyPr wrap="square" lIns="0" tIns="0" rIns="0" bIns="0" rtlCol="0" anchor="ctr"/>
+          <a:lstStyle/>
+          <a:p>
+            <a:pPr marL="0" indent="0" algn="r">
+              <a:buNone/>
+            </a:pPr>
+            <a:r>
+              <a:rPr lang="en-US" sz="1300" b="1" dirty="0">
+                <a:solidFill>
+                  <a:srgbClr val="1B2631"/>
+                </a:solidFill>
+                <a:latin typeface="Consolas" pitchFamily="34" charset="0"/>
+                <a:ea typeface="Consolas" pitchFamily="34" charset="-122"/>
+                <a:cs typeface="Consolas" pitchFamily="34" charset="-120"/>
+              </a:rPr>
+              <a:t>nums =</a:t>
+            </a:r>
+            <a:endParaRPr lang="en-US" sz="1300" dirty="0"/>
+          </a:p>
+        </p:txBody>
+      </p:sp>
+      <p:sp>
+        <p:nvSpPr>
+          <p:cNvPr id="8" name="Text 6"/>
+          <p:cNvSpPr/>
+          <p:nvPr/>
+        </p:nvSpPr>
+        <p:spPr>
+          <a:xfrm>
+            <a:off x="960120" y="1298448"/>
+            <a:ext cx="713232" cy="228600"/>
+          </a:xfrm>
+          <a:prstGeom prst="rect">
+            <a:avLst/>
+          </a:prstGeom>
+          <a:noFill/>
+          <a:ln/>
+        </p:spPr>
+        <p:txBody>
+          <a:bodyPr wrap="square" lIns="0" tIns="0" rIns="0" bIns="0" rtlCol="0" anchor="ctr"/>
+          <a:lstStyle/>
+          <a:p>
+            <a:pPr marL="0" indent="0" algn="ctr">
+              <a:buNone/>
+            </a:pPr>
+            <a:r>
+              <a:rPr lang="en-US" sz="1100" b="1" dirty="0">
+                <a:solidFill>
+                  <a:srgbClr val="2E86C1"/>
+                </a:solidFill>
+                <a:latin typeface="Calibri" pitchFamily="34" charset="0"/>
+                <a:ea typeface="Calibri" pitchFamily="34" charset="-122"/>
+                <a:cs typeface="Calibri" pitchFamily="34" charset="-120"/>
+              </a:rPr>
+              <a:t>0</a:t>
+            </a:r>
+            <a:endParaRPr lang="en-US" sz="1100" dirty="0"/>
+          </a:p>
+        </p:txBody>
+      </p:sp>
+      <p:sp>
+        <p:nvSpPr>
+          <p:cNvPr id="9" name="Shape 7"/>
+          <p:cNvSpPr/>
+          <p:nvPr/>
+        </p:nvSpPr>
+        <p:spPr>
+          <a:xfrm>
+            <a:off x="960120" y="1554480"/>
+            <a:ext cx="713232" cy="475488"/>
+          </a:xfrm>
+          <a:prstGeom prst="rect">
+            <a:avLst/>
+          </a:prstGeom>
+          <a:solidFill>
+            <a:srgbClr val="D6EAF8"/>
+          </a:solidFill>
+          <a:ln w="19050">
+            <a:solidFill>
+              <a:srgbClr val="2E86C1"/>
+            </a:solidFill>
+            <a:prstDash val="solid"/>
+          </a:ln>
+        </p:spPr>
+        <p:txBody>
+          <a:bodyPr/>
+          <a:lstStyle/>
+          <a:p>
+            <a:endParaRPr lang="en-US"/>
+          </a:p>
+        </p:txBody>
+      </p:sp>
+      <p:sp>
+        <p:nvSpPr>
+          <p:cNvPr id="10" name="Text 8"/>
+          <p:cNvSpPr/>
+          <p:nvPr/>
+        </p:nvSpPr>
+        <p:spPr>
+          <a:xfrm>
+            <a:off x="960120" y="1554480"/>
+            <a:ext cx="713232" cy="475488"/>
+          </a:xfrm>
+          <a:prstGeom prst="rect">
+            <a:avLst/>
+          </a:prstGeom>
+          <a:noFill/>
+          <a:ln/>
+        </p:spPr>
+        <p:txBody>
+          <a:bodyPr wrap="square" lIns="0" tIns="0" rIns="0" bIns="0" rtlCol="0" anchor="ctr"/>
+          <a:lstStyle/>
+          <a:p>
+            <a:pPr marL="0" indent="0" algn="ctr">
+              <a:buNone/>
+            </a:pPr>
+            <a:r>
+              <a:rPr lang="en-US" sz="1500" b="1" dirty="0">
+                <a:solidFill>
+                  <a:srgbClr val="1E2A3A"/>
+                </a:solidFill>
+                <a:latin typeface="Consolas" pitchFamily="34" charset="0"/>
+                <a:ea typeface="Consolas" pitchFamily="34" charset="-122"/>
+                <a:cs typeface="Consolas" pitchFamily="34" charset="-120"/>
+              </a:rPr>
+              <a:t>4</a:t>
+            </a:r>
+            <a:endParaRPr lang="en-US" sz="1500" dirty="0"/>
+          </a:p>
+        </p:txBody>
+      </p:sp>
+      <p:sp>
+        <p:nvSpPr>
+          <p:cNvPr id="11" name="Text 9"/>
+          <p:cNvSpPr/>
+          <p:nvPr/>
+        </p:nvSpPr>
+        <p:spPr>
+          <a:xfrm>
+            <a:off x="1673352" y="1298448"/>
+            <a:ext cx="713232" cy="228600"/>
+          </a:xfrm>
+          <a:prstGeom prst="rect">
+            <a:avLst/>
+          </a:prstGeom>
+          <a:noFill/>
+          <a:ln/>
+        </p:spPr>
+        <p:txBody>
+          <a:bodyPr wrap="square" lIns="0" tIns="0" rIns="0" bIns="0" rtlCol="0" anchor="ctr"/>
+          <a:lstStyle/>
+          <a:p>
+            <a:pPr marL="0" indent="0" algn="ctr">
+              <a:buNone/>
+            </a:pPr>
+            <a:r>
+              <a:rPr lang="en-US" sz="1100" b="1" dirty="0">
+                <a:solidFill>
+                  <a:srgbClr val="2E86C1"/>
+                </a:solidFill>
+                <a:latin typeface="Calibri" pitchFamily="34" charset="0"/>
+                <a:ea typeface="Calibri" pitchFamily="34" charset="-122"/>
+                <a:cs typeface="Calibri" pitchFamily="34" charset="-120"/>
+              </a:rPr>
+              <a:t>1</a:t>
+            </a:r>
+            <a:endParaRPr lang="en-US" sz="1100" dirty="0"/>
+          </a:p>
+        </p:txBody>
+      </p:sp>
+      <p:sp>
+        <p:nvSpPr>
+          <p:cNvPr id="12" name="Shape 10"/>
+          <p:cNvSpPr/>
+          <p:nvPr/>
+        </p:nvSpPr>
+        <p:spPr>
+          <a:xfrm>
+            <a:off x="1673352" y="1554480"/>
+            <a:ext cx="713232" cy="475488"/>
+          </a:xfrm>
+          <a:prstGeom prst="rect">
+            <a:avLst/>
+          </a:prstGeom>
+          <a:solidFill>
+            <a:srgbClr val="D6EAF8"/>
+          </a:solidFill>
+          <a:ln w="19050">
+            <a:solidFill>
+              <a:srgbClr val="2E86C1"/>
+            </a:solidFill>
+            <a:prstDash val="solid"/>
+          </a:ln>
+        </p:spPr>
+        <p:txBody>
+          <a:bodyPr/>
+          <a:lstStyle/>
+          <a:p>
+            <a:endParaRPr lang="en-US"/>
+          </a:p>
+        </p:txBody>
+      </p:sp>
+      <p:sp>
+        <p:nvSpPr>
+          <p:cNvPr id="13" name="Text 11"/>
+          <p:cNvSpPr/>
+          <p:nvPr/>
+        </p:nvSpPr>
+        <p:spPr>
+          <a:xfrm>
+            <a:off x="1673352" y="1554480"/>
+            <a:ext cx="713232" cy="475488"/>
+          </a:xfrm>
+          <a:prstGeom prst="rect">
+            <a:avLst/>
+          </a:prstGeom>
+          <a:noFill/>
+          <a:ln/>
+        </p:spPr>
+        <p:txBody>
+          <a:bodyPr wrap="square" lIns="0" tIns="0" rIns="0" bIns="0" rtlCol="0" anchor="ctr"/>
+          <a:lstStyle/>
+          <a:p>
+            <a:pPr marL="0" indent="0" algn="ctr">
+              <a:buNone/>
+            </a:pPr>
+            <a:r>
+              <a:rPr lang="en-US" sz="1500" b="1" dirty="0">
+                <a:solidFill>
+                  <a:srgbClr val="1E2A3A"/>
+                </a:solidFill>
+                <a:latin typeface="Consolas" pitchFamily="34" charset="0"/>
+                <a:ea typeface="Consolas" pitchFamily="34" charset="-122"/>
+                <a:cs typeface="Consolas" pitchFamily="34" charset="-120"/>
+              </a:rPr>
+              <a:t>1</a:t>
+            </a:r>
+            <a:endParaRPr lang="en-US" sz="1500" dirty="0"/>
+          </a:p>
+        </p:txBody>
+      </p:sp>
+      <p:sp>
+        <p:nvSpPr>
+          <p:cNvPr id="14" name="Text 12"/>
+          <p:cNvSpPr/>
+          <p:nvPr/>
+        </p:nvSpPr>
+        <p:spPr>
+          <a:xfrm>
+            <a:off x="2386584" y="1298448"/>
+            <a:ext cx="713232" cy="228600"/>
+          </a:xfrm>
+          <a:prstGeom prst="rect">
+            <a:avLst/>
+          </a:prstGeom>
+          <a:noFill/>
+          <a:ln/>
+        </p:spPr>
+        <p:txBody>
+          <a:bodyPr wrap="square" lIns="0" tIns="0" rIns="0" bIns="0" rtlCol="0" anchor="ctr"/>
+          <a:lstStyle/>
+          <a:p>
+            <a:pPr marL="0" indent="0" algn="ctr">
+              <a:buNone/>
+            </a:pPr>
+            <a:r>
+              <a:rPr lang="en-US" sz="1100" b="1" dirty="0">
+                <a:solidFill>
+                  <a:srgbClr val="2E86C1"/>
+                </a:solidFill>
+                <a:latin typeface="Calibri" pitchFamily="34" charset="0"/>
+                <a:ea typeface="Calibri" pitchFamily="34" charset="-122"/>
+                <a:cs typeface="Calibri" pitchFamily="34" charset="-120"/>
+              </a:rPr>
+              <a:t>2</a:t>
+            </a:r>
+            <a:endParaRPr lang="en-US" sz="1100" dirty="0"/>
+          </a:p>
+        </p:txBody>
+      </p:sp>
+      <p:sp>
+        <p:nvSpPr>
+          <p:cNvPr id="15" name="Shape 13"/>
+          <p:cNvSpPr/>
+          <p:nvPr/>
+        </p:nvSpPr>
+        <p:spPr>
+          <a:xfrm>
+            <a:off x="2386584" y="1554480"/>
+            <a:ext cx="713232" cy="475488"/>
+          </a:xfrm>
+          <a:prstGeom prst="rect">
+            <a:avLst/>
+          </a:prstGeom>
+          <a:solidFill>
+            <a:srgbClr val="D6EAF8"/>
+          </a:solidFill>
+          <a:ln w="19050">
+            <a:solidFill>
+              <a:srgbClr val="2E86C1"/>
+            </a:solidFill>
+            <a:prstDash val="solid"/>
+          </a:ln>
+        </p:spPr>
+        <p:txBody>
+          <a:bodyPr/>
+          <a:lstStyle/>
+          <a:p>
+            <a:endParaRPr lang="en-US"/>
+          </a:p>
+        </p:txBody>
+      </p:sp>
+      <p:sp>
+        <p:nvSpPr>
+          <p:cNvPr id="16" name="Text 14"/>
+          <p:cNvSpPr/>
+          <p:nvPr/>
+        </p:nvSpPr>
+        <p:spPr>
+          <a:xfrm>
+            <a:off x="2386584" y="1554480"/>
+            <a:ext cx="713232" cy="475488"/>
+          </a:xfrm>
+          <a:prstGeom prst="rect">
+            <a:avLst/>
+          </a:prstGeom>
+          <a:noFill/>
+          <a:ln/>
+        </p:spPr>
+        <p:txBody>
+          <a:bodyPr wrap="square" lIns="0" tIns="0" rIns="0" bIns="0" rtlCol="0" anchor="ctr"/>
+          <a:lstStyle/>
+          <a:p>
+            <a:pPr marL="0" indent="0" algn="ctr">
+              <a:buNone/>
+            </a:pPr>
+            <a:r>
+              <a:rPr lang="en-US" sz="1500" b="1" dirty="0">
+                <a:solidFill>
+                  <a:srgbClr val="1E2A3A"/>
+                </a:solidFill>
+                <a:latin typeface="Consolas" pitchFamily="34" charset="0"/>
+                <a:ea typeface="Consolas" pitchFamily="34" charset="-122"/>
+                <a:cs typeface="Consolas" pitchFamily="34" charset="-120"/>
+              </a:rPr>
+              <a:t>6</a:t>
+            </a:r>
+            <a:endParaRPr lang="en-US" sz="1500" dirty="0"/>
+          </a:p>
+        </p:txBody>
+      </p:sp>
+      <p:sp>
+        <p:nvSpPr>
+          <p:cNvPr id="17" name="Text 15"/>
+          <p:cNvSpPr/>
+          <p:nvPr/>
+        </p:nvSpPr>
+        <p:spPr>
+          <a:xfrm>
+            <a:off x="3099816" y="1298448"/>
+            <a:ext cx="713232" cy="228600"/>
+          </a:xfrm>
+          <a:prstGeom prst="rect">
+            <a:avLst/>
+          </a:prstGeom>
+          <a:noFill/>
+          <a:ln/>
+        </p:spPr>
+        <p:txBody>
+          <a:bodyPr wrap="square" lIns="0" tIns="0" rIns="0" bIns="0" rtlCol="0" anchor="ctr"/>
+          <a:lstStyle/>
+          <a:p>
+            <a:pPr marL="0" indent="0" algn="ctr">
+              <a:buNone/>
+            </a:pPr>
+            <a:r>
+              <a:rPr lang="en-US" sz="1100" b="1" dirty="0">
+                <a:solidFill>
+                  <a:srgbClr val="2E86C1"/>
+                </a:solidFill>
+                <a:latin typeface="Calibri" pitchFamily="34" charset="0"/>
+                <a:ea typeface="Calibri" pitchFamily="34" charset="-122"/>
+                <a:cs typeface="Calibri" pitchFamily="34" charset="-120"/>
+              </a:rPr>
+              <a:t>3</a:t>
+            </a:r>
+            <a:endParaRPr lang="en-US" sz="1100" dirty="0"/>
+          </a:p>
+        </p:txBody>
+      </p:sp>
+      <p:sp>
+        <p:nvSpPr>
+          <p:cNvPr id="18" name="Shape 16"/>
+          <p:cNvSpPr/>
+          <p:nvPr/>
+        </p:nvSpPr>
+        <p:spPr>
+          <a:xfrm>
+            <a:off x="3099816" y="1554480"/>
+            <a:ext cx="713232" cy="475488"/>
+          </a:xfrm>
+          <a:prstGeom prst="rect">
+            <a:avLst/>
+          </a:prstGeom>
+          <a:solidFill>
+            <a:srgbClr val="D6EAF8"/>
+          </a:solidFill>
+          <a:ln w="19050">
+            <a:solidFill>
+              <a:srgbClr val="2E86C1"/>
+            </a:solidFill>
+            <a:prstDash val="solid"/>
+          </a:ln>
+        </p:spPr>
+        <p:txBody>
+          <a:bodyPr/>
+          <a:lstStyle/>
+          <a:p>
+            <a:endParaRPr lang="en-US"/>
+          </a:p>
+        </p:txBody>
+      </p:sp>
+      <p:sp>
+        <p:nvSpPr>
+          <p:cNvPr id="19" name="Text 17"/>
+          <p:cNvSpPr/>
+          <p:nvPr/>
+        </p:nvSpPr>
+        <p:spPr>
+          <a:xfrm>
+            <a:off x="3099816" y="1554480"/>
+            <a:ext cx="713232" cy="475488"/>
+          </a:xfrm>
+          <a:prstGeom prst="rect">
+            <a:avLst/>
+          </a:prstGeom>
+          <a:noFill/>
+          <a:ln/>
+        </p:spPr>
+        <p:txBody>
+          <a:bodyPr wrap="square" lIns="0" tIns="0" rIns="0" bIns="0" rtlCol="0" anchor="ctr"/>
+          <a:lstStyle/>
+          <a:p>
+            <a:pPr marL="0" indent="0" algn="ctr">
+              <a:buNone/>
+            </a:pPr>
+            <a:r>
+              <a:rPr lang="en-US" sz="1500" b="1" dirty="0">
+                <a:solidFill>
+                  <a:srgbClr val="1E2A3A"/>
+                </a:solidFill>
+                <a:latin typeface="Consolas" pitchFamily="34" charset="0"/>
+                <a:ea typeface="Consolas" pitchFamily="34" charset="-122"/>
+                <a:cs typeface="Consolas" pitchFamily="34" charset="-120"/>
+              </a:rPr>
+              <a:t>1</a:t>
+            </a:r>
+            <a:endParaRPr lang="en-US" sz="1500" dirty="0"/>
+          </a:p>
+        </p:txBody>
+      </p:sp>
+      <p:sp>
+        <p:nvSpPr>
+          <p:cNvPr id="20" name="Text 18"/>
+          <p:cNvSpPr/>
+          <p:nvPr/>
+        </p:nvSpPr>
+        <p:spPr>
+          <a:xfrm>
+            <a:off x="3813048" y="1298448"/>
+            <a:ext cx="713232" cy="228600"/>
+          </a:xfrm>
+          <a:prstGeom prst="rect">
+            <a:avLst/>
+          </a:prstGeom>
+          <a:noFill/>
+          <a:ln/>
+        </p:spPr>
+        <p:txBody>
+          <a:bodyPr wrap="square" lIns="0" tIns="0" rIns="0" bIns="0" rtlCol="0" anchor="ctr"/>
+          <a:lstStyle/>
+          <a:p>
+            <a:pPr marL="0" indent="0" algn="ctr">
+              <a:buNone/>
+            </a:pPr>
+            <a:r>
+              <a:rPr lang="en-US" sz="1100" b="1" dirty="0">
+                <a:solidFill>
+                  <a:srgbClr val="2E86C1"/>
+                </a:solidFill>
+                <a:latin typeface="Calibri" pitchFamily="34" charset="0"/>
+                <a:ea typeface="Calibri" pitchFamily="34" charset="-122"/>
+                <a:cs typeface="Calibri" pitchFamily="34" charset="-120"/>
+              </a:rPr>
+              <a:t>4</a:t>
+            </a:r>
+            <a:endParaRPr lang="en-US" sz="1100" dirty="0"/>
+          </a:p>
+        </p:txBody>
+      </p:sp>
+      <p:sp>
+        <p:nvSpPr>
+          <p:cNvPr id="21" name="Shape 19"/>
+          <p:cNvSpPr/>
+          <p:nvPr/>
+        </p:nvSpPr>
+        <p:spPr>
+          <a:xfrm>
+            <a:off x="3813048" y="1554480"/>
+            <a:ext cx="713232" cy="475488"/>
+          </a:xfrm>
+          <a:prstGeom prst="rect">
+            <a:avLst/>
+          </a:prstGeom>
+          <a:solidFill>
+            <a:srgbClr val="D6EAF8"/>
+          </a:solidFill>
+          <a:ln w="19050">
+            <a:solidFill>
+              <a:srgbClr val="2E86C1"/>
+            </a:solidFill>
+            <a:prstDash val="solid"/>
+          </a:ln>
+        </p:spPr>
+        <p:txBody>
+          <a:bodyPr/>
+          <a:lstStyle/>
+          <a:p>
+            <a:endParaRPr lang="en-US"/>
+          </a:p>
+        </p:txBody>
+      </p:sp>
+      <p:sp>
+        <p:nvSpPr>
+          <p:cNvPr id="22" name="Text 20"/>
+          <p:cNvSpPr/>
+          <p:nvPr/>
+        </p:nvSpPr>
+        <p:spPr>
+          <a:xfrm>
+            <a:off x="3813048" y="1554480"/>
+            <a:ext cx="713232" cy="475488"/>
+          </a:xfrm>
+          <a:prstGeom prst="rect">
+            <a:avLst/>
+          </a:prstGeom>
+          <a:noFill/>
+          <a:ln/>
+        </p:spPr>
+        <p:txBody>
+          <a:bodyPr wrap="square" lIns="0" tIns="0" rIns="0" bIns="0" rtlCol="0" anchor="ctr"/>
+          <a:lstStyle/>
+          <a:p>
+            <a:pPr marL="0" indent="0" algn="ctr">
+              <a:buNone/>
+            </a:pPr>
+            <a:r>
+              <a:rPr lang="en-US" sz="1500" b="1" dirty="0">
+                <a:solidFill>
+                  <a:srgbClr val="1E2A3A"/>
+                </a:solidFill>
+                <a:latin typeface="Consolas" pitchFamily="34" charset="0"/>
+                <a:ea typeface="Consolas" pitchFamily="34" charset="-122"/>
+                <a:cs typeface="Consolas" pitchFamily="34" charset="-120"/>
+              </a:rPr>
+              <a:t>3</a:t>
+            </a:r>
+            <a:endParaRPr lang="en-US" sz="1500" dirty="0"/>
+          </a:p>
+        </p:txBody>
+      </p:sp>
+      <p:sp>
+        <p:nvSpPr>
+          <p:cNvPr id="23" name="Text 21"/>
+          <p:cNvSpPr/>
+          <p:nvPr/>
+        </p:nvSpPr>
+        <p:spPr>
+          <a:xfrm>
+            <a:off x="4526280" y="1298448"/>
+            <a:ext cx="713232" cy="228600"/>
+          </a:xfrm>
+          <a:prstGeom prst="rect">
+            <a:avLst/>
+          </a:prstGeom>
+          <a:noFill/>
+          <a:ln/>
+        </p:spPr>
+        <p:txBody>
+          <a:bodyPr wrap="square" lIns="0" tIns="0" rIns="0" bIns="0" rtlCol="0" anchor="ctr"/>
+          <a:lstStyle/>
+          <a:p>
+            <a:pPr marL="0" indent="0" algn="ctr">
+              <a:buNone/>
+            </a:pPr>
+            <a:r>
+              <a:rPr lang="en-US" sz="1100" b="1" dirty="0">
+                <a:solidFill>
+                  <a:srgbClr val="2E86C1"/>
+                </a:solidFill>
+                <a:latin typeface="Calibri" pitchFamily="34" charset="0"/>
+                <a:ea typeface="Calibri" pitchFamily="34" charset="-122"/>
+                <a:cs typeface="Calibri" pitchFamily="34" charset="-120"/>
+              </a:rPr>
+              <a:t>5</a:t>
+            </a:r>
+            <a:endParaRPr lang="en-US" sz="1100" dirty="0"/>
+          </a:p>
+        </p:txBody>
+      </p:sp>
+      <p:sp>
+        <p:nvSpPr>
+          <p:cNvPr id="24" name="Shape 22"/>
+          <p:cNvSpPr/>
+          <p:nvPr/>
+        </p:nvSpPr>
+        <p:spPr>
+          <a:xfrm>
+            <a:off x="4526280" y="1554480"/>
+            <a:ext cx="713232" cy="475488"/>
+          </a:xfrm>
+          <a:prstGeom prst="rect">
+            <a:avLst/>
+          </a:prstGeom>
+          <a:solidFill>
+            <a:srgbClr val="D6EAF8"/>
+          </a:solidFill>
+          <a:ln w="19050">
+            <a:solidFill>
+              <a:srgbClr val="2E86C1"/>
+            </a:solidFill>
+            <a:prstDash val="solid"/>
+          </a:ln>
+        </p:spPr>
+        <p:txBody>
+          <a:bodyPr/>
+          <a:lstStyle/>
+          <a:p>
+            <a:endParaRPr lang="en-US"/>
+          </a:p>
+        </p:txBody>
+      </p:sp>
+      <p:sp>
+        <p:nvSpPr>
+          <p:cNvPr id="25" name="Text 23"/>
+          <p:cNvSpPr/>
+          <p:nvPr/>
+        </p:nvSpPr>
+        <p:spPr>
+          <a:xfrm>
+            <a:off x="4526280" y="1554480"/>
+            <a:ext cx="713232" cy="475488"/>
+          </a:xfrm>
+          <a:prstGeom prst="rect">
+            <a:avLst/>
+          </a:prstGeom>
+          <a:noFill/>
+          <a:ln/>
+        </p:spPr>
+        <p:txBody>
+          <a:bodyPr wrap="square" lIns="0" tIns="0" rIns="0" bIns="0" rtlCol="0" anchor="ctr"/>
+          <a:lstStyle/>
+          <a:p>
+            <a:pPr marL="0" indent="0" algn="ctr">
+              <a:buNone/>
+            </a:pPr>
+            <a:r>
+              <a:rPr lang="en-US" sz="1500" b="1" dirty="0">
+                <a:solidFill>
+                  <a:srgbClr val="1E2A3A"/>
+                </a:solidFill>
+                <a:latin typeface="Consolas" pitchFamily="34" charset="0"/>
+                <a:ea typeface="Consolas" pitchFamily="34" charset="-122"/>
+                <a:cs typeface="Consolas" pitchFamily="34" charset="-120"/>
+              </a:rPr>
+              <a:t>2</a:t>
+            </a:r>
+            <a:endParaRPr lang="en-US" sz="1500" dirty="0"/>
+          </a:p>
+        </p:txBody>
+      </p:sp>
+      <p:sp>
+        <p:nvSpPr>
+          <p:cNvPr id="27" name="Text 25"/>
+          <p:cNvSpPr/>
+          <p:nvPr/>
+        </p:nvSpPr>
+        <p:spPr>
+          <a:xfrm>
+            <a:off x="1504188" y="2496312"/>
+            <a:ext cx="1828800" cy="256032"/>
+          </a:xfrm>
+          <a:prstGeom prst="rect">
+            <a:avLst/>
+          </a:prstGeom>
+          <a:noFill/>
+          <a:ln/>
+        </p:spPr>
+        <p:txBody>
+          <a:bodyPr wrap="square" lIns="0" tIns="0" rIns="0" bIns="0" rtlCol="0" anchor="ctr"/>
+          <a:lstStyle/>
+          <a:p>
+            <a:pPr marL="0" indent="0" algn="ctr">
+              <a:buNone/>
+            </a:pPr>
+            <a:r>
+              <a:rPr lang="en-US" sz="1150" b="1" dirty="0">
+                <a:solidFill>
+                  <a:srgbClr val="1ABC9C"/>
+                </a:solidFill>
+                <a:latin typeface="Consolas" pitchFamily="34" charset="0"/>
+                <a:ea typeface="Consolas" pitchFamily="34" charset="-122"/>
+                <a:cs typeface="Consolas" pitchFamily="34" charset="-120"/>
+              </a:rPr>
+              <a:t>nums.sort()</a:t>
+            </a:r>
+            <a:endParaRPr lang="en-US" sz="1150" dirty="0"/>
+          </a:p>
+        </p:txBody>
+      </p:sp>
+      <p:sp>
+        <p:nvSpPr>
+          <p:cNvPr id="29" name="Text 27"/>
+          <p:cNvSpPr/>
+          <p:nvPr/>
+        </p:nvSpPr>
+        <p:spPr>
+          <a:xfrm>
+            <a:off x="320040" y="3127248"/>
+            <a:ext cx="2560320" cy="274320"/>
+          </a:xfrm>
+          <a:prstGeom prst="rect">
+            <a:avLst/>
+          </a:prstGeom>
+          <a:noFill/>
+          <a:ln/>
+        </p:spPr>
+        <p:txBody>
+          <a:bodyPr wrap="square" lIns="0" tIns="0" rIns="0" bIns="0" rtlCol="0" anchor="ctr"/>
+          <a:lstStyle/>
+          <a:p>
+            <a:pPr marL="0" indent="0">
+              <a:buNone/>
+            </a:pPr>
+            <a:r>
+              <a:rPr lang="en-US" sz="1200" b="1" dirty="0">
+                <a:solidFill>
+                  <a:srgbClr val="4A6080"/>
+                </a:solidFill>
+                <a:latin typeface="Calibri" pitchFamily="34" charset="0"/>
+                <a:ea typeface="Calibri" pitchFamily="34" charset="-122"/>
+                <a:cs typeface="Calibri" pitchFamily="34" charset="-120"/>
+              </a:rPr>
+              <a:t>After  .sort():</a:t>
+            </a:r>
+            <a:endParaRPr lang="en-US" sz="1200" dirty="0"/>
+          </a:p>
+        </p:txBody>
+      </p:sp>
+      <p:sp>
+        <p:nvSpPr>
+          <p:cNvPr id="30" name="Shape 28"/>
+          <p:cNvSpPr/>
+          <p:nvPr/>
+        </p:nvSpPr>
+        <p:spPr>
+          <a:xfrm>
+            <a:off x="960120" y="3447288"/>
+            <a:ext cx="713232" cy="475488"/>
+          </a:xfrm>
+          <a:prstGeom prst="rect">
+            <a:avLst/>
+          </a:prstGeom>
+          <a:solidFill>
+            <a:srgbClr val="C8E6C9"/>
+          </a:solidFill>
+          <a:ln w="19050">
+            <a:solidFill>
+              <a:srgbClr val="1E8449"/>
+            </a:solidFill>
+            <a:prstDash val="solid"/>
+          </a:ln>
+        </p:spPr>
+        <p:txBody>
+          <a:bodyPr/>
+          <a:lstStyle/>
+          <a:p>
+            <a:endParaRPr lang="en-US"/>
+          </a:p>
+        </p:txBody>
+      </p:sp>
+      <p:sp>
+        <p:nvSpPr>
+          <p:cNvPr id="31" name="Text 29"/>
+          <p:cNvSpPr/>
+          <p:nvPr/>
+        </p:nvSpPr>
+        <p:spPr>
+          <a:xfrm>
+            <a:off x="960120" y="3447288"/>
+            <a:ext cx="713232" cy="475488"/>
+          </a:xfrm>
+          <a:prstGeom prst="rect">
+            <a:avLst/>
+          </a:prstGeom>
+          <a:noFill/>
+          <a:ln/>
+        </p:spPr>
+        <p:txBody>
+          <a:bodyPr wrap="square" lIns="0" tIns="0" rIns="0" bIns="0" rtlCol="0" anchor="ctr"/>
+          <a:lstStyle/>
+          <a:p>
+            <a:pPr marL="0" indent="0" algn="ctr">
+              <a:buNone/>
+            </a:pPr>
+            <a:r>
+              <a:rPr lang="en-US" sz="1500" b="1" dirty="0">
+                <a:solidFill>
+                  <a:srgbClr val="1E2A3A"/>
+                </a:solidFill>
+                <a:latin typeface="Consolas" pitchFamily="34" charset="0"/>
+                <a:ea typeface="Consolas" pitchFamily="34" charset="-122"/>
+                <a:cs typeface="Consolas" pitchFamily="34" charset="-120"/>
+              </a:rPr>
+              <a:t>1</a:t>
+            </a:r>
+            <a:endParaRPr lang="en-US" sz="1500" dirty="0"/>
+          </a:p>
+        </p:txBody>
+      </p:sp>
+      <p:sp>
+        <p:nvSpPr>
+          <p:cNvPr id="32" name="Shape 30"/>
+          <p:cNvSpPr/>
+          <p:nvPr/>
+        </p:nvSpPr>
+        <p:spPr>
+          <a:xfrm>
+            <a:off x="1673352" y="3447288"/>
+            <a:ext cx="713232" cy="475488"/>
+          </a:xfrm>
+          <a:prstGeom prst="rect">
+            <a:avLst/>
+          </a:prstGeom>
+          <a:solidFill>
+            <a:srgbClr val="C8E6C9"/>
+          </a:solidFill>
+          <a:ln w="19050">
+            <a:solidFill>
+              <a:srgbClr val="1E8449"/>
+            </a:solidFill>
+            <a:prstDash val="solid"/>
+          </a:ln>
+        </p:spPr>
+        <p:txBody>
+          <a:bodyPr/>
+          <a:lstStyle/>
+          <a:p>
+            <a:endParaRPr lang="en-US"/>
+          </a:p>
+        </p:txBody>
+      </p:sp>
+      <p:sp>
+        <p:nvSpPr>
+          <p:cNvPr id="33" name="Text 31"/>
+          <p:cNvSpPr/>
+          <p:nvPr/>
+        </p:nvSpPr>
+        <p:spPr>
+          <a:xfrm>
+            <a:off x="1673352" y="3447288"/>
+            <a:ext cx="713232" cy="475488"/>
+          </a:xfrm>
+          <a:prstGeom prst="rect">
+            <a:avLst/>
+          </a:prstGeom>
+          <a:noFill/>
+          <a:ln/>
+        </p:spPr>
+        <p:txBody>
+          <a:bodyPr wrap="square" lIns="0" tIns="0" rIns="0" bIns="0" rtlCol="0" anchor="ctr"/>
+          <a:lstStyle/>
+          <a:p>
+            <a:pPr marL="0" indent="0" algn="ctr">
+              <a:buNone/>
+            </a:pPr>
+            <a:r>
+              <a:rPr lang="en-US" sz="1500" b="1" dirty="0">
+                <a:solidFill>
+                  <a:srgbClr val="1E2A3A"/>
+                </a:solidFill>
+                <a:latin typeface="Consolas" pitchFamily="34" charset="0"/>
+                <a:ea typeface="Consolas" pitchFamily="34" charset="-122"/>
+                <a:cs typeface="Consolas" pitchFamily="34" charset="-120"/>
+              </a:rPr>
+              <a:t>1</a:t>
+            </a:r>
+            <a:endParaRPr lang="en-US" sz="1500" dirty="0"/>
+          </a:p>
+        </p:txBody>
+      </p:sp>
+      <p:sp>
+        <p:nvSpPr>
+          <p:cNvPr id="34" name="Shape 32"/>
+          <p:cNvSpPr/>
+          <p:nvPr/>
+        </p:nvSpPr>
+        <p:spPr>
+          <a:xfrm>
+            <a:off x="2386584" y="3447288"/>
+            <a:ext cx="713232" cy="475488"/>
+          </a:xfrm>
+          <a:prstGeom prst="rect">
+            <a:avLst/>
+          </a:prstGeom>
+          <a:solidFill>
+            <a:srgbClr val="C8E6C9"/>
+          </a:solidFill>
+          <a:ln w="19050">
+            <a:solidFill>
+              <a:srgbClr val="1E8449"/>
+            </a:solidFill>
+            <a:prstDash val="solid"/>
+          </a:ln>
+        </p:spPr>
+        <p:txBody>
+          <a:bodyPr/>
+          <a:lstStyle/>
+          <a:p>
+            <a:endParaRPr lang="en-US"/>
+          </a:p>
+        </p:txBody>
+      </p:sp>
+      <p:sp>
+        <p:nvSpPr>
+          <p:cNvPr id="35" name="Text 33"/>
+          <p:cNvSpPr/>
+          <p:nvPr/>
+        </p:nvSpPr>
+        <p:spPr>
+          <a:xfrm>
+            <a:off x="2386584" y="3447288"/>
+            <a:ext cx="713232" cy="475488"/>
+          </a:xfrm>
+          <a:prstGeom prst="rect">
+            <a:avLst/>
+          </a:prstGeom>
+          <a:noFill/>
+          <a:ln/>
+        </p:spPr>
+        <p:txBody>
+          <a:bodyPr wrap="square" lIns="0" tIns="0" rIns="0" bIns="0" rtlCol="0" anchor="ctr"/>
+          <a:lstStyle/>
+          <a:p>
+            <a:pPr marL="0" indent="0" algn="ctr">
+              <a:buNone/>
+            </a:pPr>
+            <a:r>
+              <a:rPr lang="en-US" sz="1500" b="1" dirty="0">
+                <a:solidFill>
+                  <a:srgbClr val="1E2A3A"/>
+                </a:solidFill>
+                <a:latin typeface="Consolas" pitchFamily="34" charset="0"/>
+                <a:ea typeface="Consolas" pitchFamily="34" charset="-122"/>
+                <a:cs typeface="Consolas" pitchFamily="34" charset="-120"/>
+              </a:rPr>
+              <a:t>2</a:t>
+            </a:r>
+            <a:endParaRPr lang="en-US" sz="1500" dirty="0"/>
+          </a:p>
+        </p:txBody>
+      </p:sp>
+      <p:sp>
+        <p:nvSpPr>
+          <p:cNvPr id="36" name="Shape 34"/>
+          <p:cNvSpPr/>
+          <p:nvPr/>
+        </p:nvSpPr>
+        <p:spPr>
+          <a:xfrm>
+            <a:off x="3099816" y="3447288"/>
+            <a:ext cx="713232" cy="475488"/>
+          </a:xfrm>
+          <a:prstGeom prst="rect">
+            <a:avLst/>
+          </a:prstGeom>
+          <a:solidFill>
+            <a:srgbClr val="C8E6C9"/>
+          </a:solidFill>
+          <a:ln w="19050">
+            <a:solidFill>
+              <a:srgbClr val="1E8449"/>
+            </a:solidFill>
+            <a:prstDash val="solid"/>
+          </a:ln>
+        </p:spPr>
+        <p:txBody>
+          <a:bodyPr/>
+          <a:lstStyle/>
+          <a:p>
+            <a:endParaRPr lang="en-US"/>
+          </a:p>
+        </p:txBody>
+      </p:sp>
+      <p:sp>
+        <p:nvSpPr>
+          <p:cNvPr id="37" name="Text 35"/>
+          <p:cNvSpPr/>
+          <p:nvPr/>
+        </p:nvSpPr>
+        <p:spPr>
+          <a:xfrm>
+            <a:off x="3099816" y="3447288"/>
+            <a:ext cx="713232" cy="475488"/>
+          </a:xfrm>
+          <a:prstGeom prst="rect">
+            <a:avLst/>
+          </a:prstGeom>
+          <a:noFill/>
+          <a:ln/>
+        </p:spPr>
+        <p:txBody>
+          <a:bodyPr wrap="square" lIns="0" tIns="0" rIns="0" bIns="0" rtlCol="0" anchor="ctr"/>
+          <a:lstStyle/>
+          <a:p>
+            <a:pPr marL="0" indent="0" algn="ctr">
+              <a:buNone/>
+            </a:pPr>
+            <a:r>
+              <a:rPr lang="en-US" sz="1500" b="1" dirty="0">
+                <a:solidFill>
+                  <a:srgbClr val="1E2A3A"/>
+                </a:solidFill>
+                <a:latin typeface="Consolas" pitchFamily="34" charset="0"/>
+                <a:ea typeface="Consolas" pitchFamily="34" charset="-122"/>
+                <a:cs typeface="Consolas" pitchFamily="34" charset="-120"/>
+              </a:rPr>
+              <a:t>3</a:t>
+            </a:r>
+            <a:endParaRPr lang="en-US" sz="1500" dirty="0"/>
+          </a:p>
+        </p:txBody>
+      </p:sp>
+      <p:sp>
+        <p:nvSpPr>
+          <p:cNvPr id="38" name="Shape 36"/>
+          <p:cNvSpPr/>
+          <p:nvPr/>
+        </p:nvSpPr>
+        <p:spPr>
+          <a:xfrm>
+            <a:off x="3813048" y="3447288"/>
+            <a:ext cx="713232" cy="475488"/>
+          </a:xfrm>
+          <a:prstGeom prst="rect">
+            <a:avLst/>
+          </a:prstGeom>
+          <a:solidFill>
+            <a:srgbClr val="C8E6C9"/>
+          </a:solidFill>
+          <a:ln w="19050">
+            <a:solidFill>
+              <a:srgbClr val="1E8449"/>
+            </a:solidFill>
+            <a:prstDash val="solid"/>
+          </a:ln>
+        </p:spPr>
+        <p:txBody>
+          <a:bodyPr/>
+          <a:lstStyle/>
+          <a:p>
+            <a:endParaRPr lang="en-US"/>
+          </a:p>
+        </p:txBody>
+      </p:sp>
+      <p:sp>
+        <p:nvSpPr>
+          <p:cNvPr id="39" name="Text 37"/>
+          <p:cNvSpPr/>
+          <p:nvPr/>
+        </p:nvSpPr>
+        <p:spPr>
+          <a:xfrm>
+            <a:off x="3813048" y="3447288"/>
+            <a:ext cx="713232" cy="475488"/>
+          </a:xfrm>
+          <a:prstGeom prst="rect">
+            <a:avLst/>
+          </a:prstGeom>
+          <a:noFill/>
+          <a:ln/>
+        </p:spPr>
+        <p:txBody>
+          <a:bodyPr wrap="square" lIns="0" tIns="0" rIns="0" bIns="0" rtlCol="0" anchor="ctr"/>
+          <a:lstStyle/>
+          <a:p>
+            <a:pPr marL="0" indent="0" algn="ctr">
+              <a:buNone/>
+            </a:pPr>
+            <a:r>
+              <a:rPr lang="en-US" sz="1500" b="1" dirty="0">
+                <a:solidFill>
+                  <a:srgbClr val="1E2A3A"/>
+                </a:solidFill>
+                <a:latin typeface="Consolas" pitchFamily="34" charset="0"/>
+                <a:ea typeface="Consolas" pitchFamily="34" charset="-122"/>
+                <a:cs typeface="Consolas" pitchFamily="34" charset="-120"/>
+              </a:rPr>
+              <a:t>4</a:t>
+            </a:r>
+            <a:endParaRPr lang="en-US" sz="1500" dirty="0"/>
+          </a:p>
+        </p:txBody>
+      </p:sp>
+      <p:sp>
+        <p:nvSpPr>
+          <p:cNvPr id="40" name="Shape 38"/>
+          <p:cNvSpPr/>
+          <p:nvPr/>
+        </p:nvSpPr>
+        <p:spPr>
+          <a:xfrm>
+            <a:off x="4526280" y="3447288"/>
+            <a:ext cx="713232" cy="475488"/>
+          </a:xfrm>
+          <a:prstGeom prst="rect">
+            <a:avLst/>
+          </a:prstGeom>
+          <a:solidFill>
+            <a:srgbClr val="C8E6C9"/>
+          </a:solidFill>
+          <a:ln w="19050">
+            <a:solidFill>
+              <a:srgbClr val="1E8449"/>
+            </a:solidFill>
+            <a:prstDash val="solid"/>
+          </a:ln>
+        </p:spPr>
+        <p:txBody>
+          <a:bodyPr/>
+          <a:lstStyle/>
+          <a:p>
+            <a:endParaRPr lang="en-US"/>
+          </a:p>
+        </p:txBody>
+      </p:sp>
+      <p:sp>
+        <p:nvSpPr>
+          <p:cNvPr id="41" name="Text 39"/>
+          <p:cNvSpPr/>
+          <p:nvPr/>
+        </p:nvSpPr>
+        <p:spPr>
+          <a:xfrm>
+            <a:off x="4526280" y="3447288"/>
+            <a:ext cx="713232" cy="475488"/>
+          </a:xfrm>
+          <a:prstGeom prst="rect">
+            <a:avLst/>
+          </a:prstGeom>
+          <a:noFill/>
+          <a:ln/>
+        </p:spPr>
+        <p:txBody>
+          <a:bodyPr wrap="square" lIns="0" tIns="0" rIns="0" bIns="0" rtlCol="0" anchor="ctr"/>
+          <a:lstStyle/>
+          <a:p>
+            <a:pPr marL="0" indent="0" algn="ctr">
+              <a:buNone/>
+            </a:pPr>
+            <a:r>
+              <a:rPr lang="en-US" sz="1500" b="1" dirty="0">
+                <a:solidFill>
+                  <a:srgbClr val="1E2A3A"/>
+                </a:solidFill>
+                <a:latin typeface="Consolas" pitchFamily="34" charset="0"/>
+                <a:ea typeface="Consolas" pitchFamily="34" charset="-122"/>
+                <a:cs typeface="Consolas" pitchFamily="34" charset="-120"/>
+              </a:rPr>
+              <a:t>6</a:t>
+            </a:r>
+            <a:endParaRPr lang="en-US" sz="1500" dirty="0"/>
+          </a:p>
+        </p:txBody>
+      </p:sp>
+      <p:sp>
+        <p:nvSpPr>
+          <p:cNvPr id="42" name="Shape 40"/>
+          <p:cNvSpPr/>
+          <p:nvPr/>
+        </p:nvSpPr>
+        <p:spPr>
+          <a:xfrm>
+            <a:off x="5394960" y="1220724"/>
+            <a:ext cx="3611880" cy="3273552"/>
+          </a:xfrm>
+          <a:prstGeom prst="rect">
+            <a:avLst/>
+          </a:prstGeom>
+          <a:solidFill>
+            <a:srgbClr val="1C2833"/>
+          </a:solidFill>
+          <a:ln w="12700">
+            <a:solidFill>
+              <a:srgbClr val="2C4055"/>
+            </a:solidFill>
+            <a:prstDash val="solid"/>
+          </a:ln>
+        </p:spPr>
+        <p:txBody>
+          <a:bodyPr/>
+          <a:lstStyle/>
+          <a:p>
+            <a:endParaRPr lang="en-US"/>
+          </a:p>
+        </p:txBody>
+      </p:sp>
+      <p:sp>
+        <p:nvSpPr>
+          <p:cNvPr id="43" name="Text 41"/>
+          <p:cNvSpPr/>
+          <p:nvPr/>
+        </p:nvSpPr>
+        <p:spPr>
+          <a:xfrm>
+            <a:off x="5513832" y="1312164"/>
+            <a:ext cx="3374136" cy="3090672"/>
+          </a:xfrm>
+          <a:prstGeom prst="rect">
+            <a:avLst/>
+          </a:prstGeom>
+          <a:noFill/>
+          <a:ln/>
+        </p:spPr>
+        <p:txBody>
+          <a:bodyPr wrap="square" lIns="0" tIns="0" rIns="0" bIns="0" rtlCol="0" anchor="t"/>
+          <a:lstStyle/>
+          <a:p>
+            <a:pPr marL="0" indent="0">
+              <a:buNone/>
+            </a:pPr>
+            <a:r>
+              <a:rPr lang="en-US" sz="1200" dirty="0">
+                <a:solidFill>
+                  <a:srgbClr val="A9CCE3"/>
+                </a:solidFill>
+                <a:latin typeface="Consolas" pitchFamily="34" charset="0"/>
+                <a:ea typeface="Consolas" pitchFamily="34" charset="-122"/>
+                <a:cs typeface="Consolas" pitchFamily="34" charset="-120"/>
+              </a:rPr>
+              <a:t># Sort numbers ascending</a:t>
+            </a:r>
+            <a:endParaRPr lang="en-US" sz="1200" dirty="0"/>
+          </a:p>
+          <a:p>
+            <a:pPr marL="0" indent="0">
+              <a:buNone/>
+            </a:pPr>
+            <a:r>
+              <a:rPr lang="en-US" sz="1200" dirty="0">
+                <a:solidFill>
+                  <a:srgbClr val="A9CCE3"/>
+                </a:solidFill>
+                <a:latin typeface="Consolas" pitchFamily="34" charset="0"/>
+                <a:ea typeface="Consolas" pitchFamily="34" charset="-122"/>
+                <a:cs typeface="Consolas" pitchFamily="34" charset="-120"/>
+              </a:rPr>
+              <a:t>nums = [4, 1, 6, 1, 3, 2]</a:t>
+            </a:r>
+            <a:endParaRPr lang="en-US" sz="1200" dirty="0"/>
+          </a:p>
+          <a:p>
+            <a:pPr marL="0" indent="0">
+              <a:buNone/>
+            </a:pPr>
+            <a:r>
+              <a:rPr lang="en-US" sz="1200" dirty="0">
+                <a:solidFill>
+                  <a:srgbClr val="A9CCE3"/>
+                </a:solidFill>
+                <a:latin typeface="Consolas" pitchFamily="34" charset="0"/>
+                <a:ea typeface="Consolas" pitchFamily="34" charset="-122"/>
+                <a:cs typeface="Consolas" pitchFamily="34" charset="-120"/>
+              </a:rPr>
+              <a:t>nums.sort()</a:t>
+            </a:r>
+            <a:endParaRPr lang="en-US" sz="1200" dirty="0"/>
+          </a:p>
+          <a:p>
+            <a:pPr marL="0" indent="0">
+              <a:buNone/>
+            </a:pPr>
+            <a:r>
+              <a:rPr lang="en-US" sz="1200" dirty="0">
+                <a:solidFill>
+                  <a:srgbClr val="A9CCE3"/>
+                </a:solidFill>
+                <a:latin typeface="Consolas" pitchFamily="34" charset="0"/>
+                <a:ea typeface="Consolas" pitchFamily="34" charset="-122"/>
+                <a:cs typeface="Consolas" pitchFamily="34" charset="-120"/>
+              </a:rPr>
+              <a:t>print(nums)  # [1, 1, 2, 3, 4, 6]</a:t>
+            </a:r>
+            <a:endParaRPr lang="en-US" sz="1200" dirty="0"/>
+          </a:p>
+        </p:txBody>
+      </p:sp>
+      <p:sp>
+        <p:nvSpPr>
+          <p:cNvPr id="44" name="Down Arrow 43">
+            <a:extLst>
+              <a:ext uri="{FF2B5EF4-FFF2-40B4-BE49-F238E27FC236}">
+                <a16:creationId xmlns:a16="http://schemas.microsoft.com/office/drawing/2014/main" id="{C3CCAE24-A567-F892-5721-CD6FA1EF6F85}"/>
+              </a:ext>
+            </a:extLst>
+          </p:cNvPr>
+          <p:cNvSpPr/>
+          <p:nvPr/>
+        </p:nvSpPr>
+        <p:spPr>
+          <a:xfrm>
+            <a:off x="2881140" y="2174971"/>
+            <a:ext cx="133592" cy="1099882"/>
+          </a:xfrm>
+          <a:prstGeom prst="downArrow">
+            <a:avLst/>
+          </a:prstGeom>
+          <a:solidFill>
+            <a:schemeClr val="accent5">
+              <a:lumMod val="40000"/>
+              <a:lumOff val="60000"/>
+            </a:schemeClr>
+          </a:solidFill>
+          <a:ln>
+            <a:noFill/>
+          </a:ln>
+        </p:spPr>
+        <p:style>
+          <a:lnRef idx="2">
+            <a:schemeClr val="accent1">
+              <a:shade val="15000"/>
+            </a:schemeClr>
+          </a:lnRef>
+          <a:fillRef idx="1">
+            <a:schemeClr val="accent1"/>
+          </a:fillRef>
+          <a:effectRef idx="0">
+            <a:schemeClr val="accent1"/>
+          </a:effectRef>
+          <a:fontRef idx="minor">
+            <a:schemeClr val="lt1"/>
+          </a:fontRef>
+        </p:style>
+        <p:txBody>
+          <a:bodyPr rtlCol="0" anchor="ctr"/>
+          <a:lstStyle/>
+          <a:p>
+            <a:pPr algn="ctr"/>
+            <a:endParaRPr lang="en-US" dirty="0"/>
+          </a:p>
+        </p:txBody>
+      </p:sp>
+      <mc:AlternateContent xmlns:mc="http://schemas.openxmlformats.org/markup-compatibility/2006">
+        <mc:Choice xmlns:p14="http://schemas.microsoft.com/office/powerpoint/2010/main" Requires="p14">
+          <p:contentPart p14:bwMode="auto" r:id="rId3">
+            <p14:nvContentPartPr>
+              <p14:cNvPr id="26" name="Ink 25">
+                <a:extLst>
+                  <a:ext uri="{FF2B5EF4-FFF2-40B4-BE49-F238E27FC236}">
+                    <a16:creationId xmlns:a16="http://schemas.microsoft.com/office/drawing/2014/main" id="{8EDCE6FF-1EC2-CDD1-F089-5515B7D8FAE5}"/>
+                  </a:ext>
+                </a:extLst>
+              </p14:cNvPr>
+              <p14:cNvContentPartPr/>
+              <p14:nvPr/>
+            </p14:nvContentPartPr>
+            <p14:xfrm>
+              <a:off x="5448240" y="1685880"/>
+              <a:ext cx="1024200" cy="196200"/>
+            </p14:xfrm>
+          </p:contentPart>
+        </mc:Choice>
+        <mc:Fallback>
+          <p:pic>
+            <p:nvPicPr>
+              <p:cNvPr id="26" name="Ink 25">
+                <a:extLst>
+                  <a:ext uri="{FF2B5EF4-FFF2-40B4-BE49-F238E27FC236}">
+                    <a16:creationId xmlns:a16="http://schemas.microsoft.com/office/drawing/2014/main" id="{8EDCE6FF-1EC2-CDD1-F089-5515B7D8FAE5}"/>
+                  </a:ext>
+                </a:extLst>
+              </p:cNvPr>
+              <p:cNvPicPr/>
+              <p:nvPr/>
+            </p:nvPicPr>
+            <p:blipFill>
+              <a:blip r:embed="rId4"/>
+              <a:stretch>
+                <a:fillRect/>
+              </a:stretch>
+            </p:blipFill>
+            <p:spPr>
+              <a:xfrm>
+                <a:off x="5438880" y="1676520"/>
+                <a:ext cx="1042920" cy="214920"/>
+              </a:xfrm>
+              <a:prstGeom prst="rect">
+                <a:avLst/>
+              </a:prstGeom>
+            </p:spPr>
+          </p:pic>
+        </mc:Fallback>
+      </mc:AlternateContent>
+    </p:spTree>
+  </p:cSld>
+  <p:clrMapOvr>
+    <a:masterClrMapping/>
+  </p:clrMapOvr>
+</p:sld>
+</file>
+
+<file path=ppt/slides/slide21.xml><?xml version="1.0" encoding="utf-8"?>
+<p:sld xmlns:a="http://schemas.openxmlformats.org/drawingml/2006/main" xmlns:r="http://schemas.openxmlformats.org/officeDocument/2006/relationships" xmlns:p="http://schemas.openxmlformats.org/presentationml/2006/main">
+  <p:cSld>
+    <p:bg>
+      <p:bgPr>
+        <a:solidFill>
+          <a:srgbClr val="F4F8FB"/>
+        </a:solidFill>
+        <a:effectLst/>
+      </p:bgPr>
+    </p:bg>
+    <p:spTree>
+      <p:nvGrpSpPr>
+        <p:cNvPr id="1" name="">
+          <a:extLst>
+            <a:ext uri="{FF2B5EF4-FFF2-40B4-BE49-F238E27FC236}">
+              <a16:creationId xmlns:a16="http://schemas.microsoft.com/office/drawing/2014/main" id="{0DCC9A0A-C04D-D869-7B6A-54D560051920}"/>
+            </a:ext>
+          </a:extLst>
+        </p:cNvPr>
+        <p:cNvGrpSpPr/>
+        <p:nvPr/>
+      </p:nvGrpSpPr>
+      <p:grpSpPr>
+        <a:xfrm>
+          <a:off x="0" y="0"/>
+          <a:ext cx="0" cy="0"/>
+          <a:chOff x="0" y="0"/>
+          <a:chExt cx="0" cy="0"/>
+        </a:xfrm>
+      </p:grpSpPr>
+      <p:sp>
+        <p:nvSpPr>
+          <p:cNvPr id="2" name="Shape 0">
+            <a:extLst>
+              <a:ext uri="{FF2B5EF4-FFF2-40B4-BE49-F238E27FC236}">
+                <a16:creationId xmlns:a16="http://schemas.microsoft.com/office/drawing/2014/main" id="{718EDFAC-A50A-A598-CDD4-0FB8549EB364}"/>
+              </a:ext>
+            </a:extLst>
+          </p:cNvPr>
+          <p:cNvSpPr/>
+          <p:nvPr/>
+        </p:nvSpPr>
+        <p:spPr>
+          <a:xfrm>
+            <a:off x="0" y="0"/>
+            <a:ext cx="9144000" cy="658368"/>
+          </a:xfrm>
+          <a:prstGeom prst="rect">
+            <a:avLst/>
+          </a:prstGeom>
+          <a:solidFill>
+            <a:srgbClr val="1E2A3A"/>
+          </a:solidFill>
+          <a:ln w="12700">
+            <a:solidFill>
+              <a:srgbClr val="1E2A3A"/>
+            </a:solidFill>
+            <a:prstDash val="solid"/>
+          </a:ln>
+        </p:spPr>
+        <p:txBody>
+          <a:bodyPr/>
+          <a:lstStyle/>
+          <a:p>
+            <a:endParaRPr lang="en-US"/>
+          </a:p>
+        </p:txBody>
+      </p:sp>
+      <p:sp>
+        <p:nvSpPr>
+          <p:cNvPr id="3" name="Shape 1">
+            <a:extLst>
+              <a:ext uri="{FF2B5EF4-FFF2-40B4-BE49-F238E27FC236}">
+                <a16:creationId xmlns:a16="http://schemas.microsoft.com/office/drawing/2014/main" id="{59D6C35C-9B39-219B-0514-F24EA5D7EEBB}"/>
+              </a:ext>
+            </a:extLst>
+          </p:cNvPr>
+          <p:cNvSpPr/>
+          <p:nvPr/>
+        </p:nvSpPr>
+        <p:spPr>
+          <a:xfrm>
+            <a:off x="0" y="0"/>
+            <a:ext cx="182880" cy="658368"/>
+          </a:xfrm>
+          <a:prstGeom prst="rect">
+            <a:avLst/>
+          </a:prstGeom>
+          <a:solidFill>
+            <a:srgbClr val="1ABC9C"/>
+          </a:solidFill>
+          <a:ln w="12700">
+            <a:solidFill>
+              <a:srgbClr val="1ABC9C"/>
+            </a:solidFill>
+            <a:prstDash val="solid"/>
+          </a:ln>
+        </p:spPr>
+        <p:txBody>
+          <a:bodyPr/>
+          <a:lstStyle/>
+          <a:p>
+            <a:endParaRPr lang="en-US"/>
+          </a:p>
+        </p:txBody>
+      </p:sp>
+      <p:sp>
+        <p:nvSpPr>
+          <p:cNvPr id="4" name="Text 2">
+            <a:extLst>
+              <a:ext uri="{FF2B5EF4-FFF2-40B4-BE49-F238E27FC236}">
+                <a16:creationId xmlns:a16="http://schemas.microsoft.com/office/drawing/2014/main" id="{D92BC241-4DA0-240E-F91A-261B702F5462}"/>
+              </a:ext>
+            </a:extLst>
+          </p:cNvPr>
+          <p:cNvSpPr/>
+          <p:nvPr/>
+        </p:nvSpPr>
+        <p:spPr>
+          <a:xfrm>
+            <a:off x="320040" y="0"/>
+            <a:ext cx="8686800" cy="658368"/>
+          </a:xfrm>
+          <a:prstGeom prst="rect">
+            <a:avLst/>
+          </a:prstGeom>
+          <a:noFill/>
+          <a:ln/>
+        </p:spPr>
+        <p:txBody>
+          <a:bodyPr wrap="square" lIns="0" tIns="0" rIns="0" bIns="0" rtlCol="0" anchor="ctr"/>
+          <a:lstStyle/>
+          <a:p>
+            <a:pPr marL="0" indent="0">
+              <a:buNone/>
+            </a:pPr>
+            <a:r>
+              <a:rPr lang="en-US" sz="2500" b="1" dirty="0">
+                <a:solidFill>
+                  <a:srgbClr val="FFFFFF"/>
+                </a:solidFill>
+                <a:latin typeface="Calibri" pitchFamily="34" charset="0"/>
+                <a:ea typeface="Calibri" pitchFamily="34" charset="-122"/>
+                <a:cs typeface="Calibri" pitchFamily="34" charset="-120"/>
+              </a:rPr>
+              <a:t>Sorting Lists</a:t>
+            </a:r>
+            <a:endParaRPr lang="en-US" sz="2500" dirty="0"/>
+          </a:p>
+        </p:txBody>
+      </p:sp>
+      <p:sp>
+        <p:nvSpPr>
+          <p:cNvPr id="5" name="Text 3">
+            <a:extLst>
+              <a:ext uri="{FF2B5EF4-FFF2-40B4-BE49-F238E27FC236}">
+                <a16:creationId xmlns:a16="http://schemas.microsoft.com/office/drawing/2014/main" id="{301A21CD-888B-B087-F123-BF897B571036}"/>
+              </a:ext>
+            </a:extLst>
+          </p:cNvPr>
+          <p:cNvSpPr/>
+          <p:nvPr/>
+        </p:nvSpPr>
+        <p:spPr>
+          <a:xfrm>
+            <a:off x="320040" y="768096"/>
+            <a:ext cx="8503920" cy="365760"/>
+          </a:xfrm>
+          <a:prstGeom prst="rect">
+            <a:avLst/>
+          </a:prstGeom>
+          <a:noFill/>
+          <a:ln/>
+        </p:spPr>
+        <p:txBody>
+          <a:bodyPr wrap="square" lIns="0" tIns="0" rIns="0" bIns="0" rtlCol="0" anchor="ctr"/>
+          <a:lstStyle/>
+          <a:p>
+            <a:pPr marL="0" indent="0">
+              <a:buNone/>
+            </a:pPr>
+            <a:r>
+              <a:rPr lang="en-US" sz="1500" dirty="0">
+                <a:solidFill>
+                  <a:srgbClr val="1B2631"/>
+                </a:solidFill>
+                <a:latin typeface="Calibri" pitchFamily="34" charset="0"/>
+                <a:ea typeface="Calibri" pitchFamily="34" charset="-122"/>
+                <a:cs typeface="Calibri" pitchFamily="34" charset="-120"/>
+              </a:rPr>
+              <a:t>L.sort()  rearranges the list into ascending order — in-place, no copy.</a:t>
+            </a:r>
+            <a:endParaRPr lang="en-US" sz="1500" dirty="0"/>
+          </a:p>
+        </p:txBody>
+      </p:sp>
+      <p:sp>
+        <p:nvSpPr>
+          <p:cNvPr id="6" name="Text 4">
+            <a:extLst>
+              <a:ext uri="{FF2B5EF4-FFF2-40B4-BE49-F238E27FC236}">
+                <a16:creationId xmlns:a16="http://schemas.microsoft.com/office/drawing/2014/main" id="{75E85BD4-2C92-3636-0F4A-D9BE85B6D4E4}"/>
+              </a:ext>
+            </a:extLst>
+          </p:cNvPr>
+          <p:cNvSpPr/>
+          <p:nvPr/>
+        </p:nvSpPr>
+        <p:spPr>
+          <a:xfrm>
+            <a:off x="320040" y="1234440"/>
+            <a:ext cx="2560320" cy="274320"/>
+          </a:xfrm>
+          <a:prstGeom prst="rect">
+            <a:avLst/>
+          </a:prstGeom>
+          <a:noFill/>
+          <a:ln/>
+        </p:spPr>
+        <p:txBody>
+          <a:bodyPr wrap="square" lIns="0" tIns="0" rIns="0" bIns="0" rtlCol="0" anchor="ctr"/>
+          <a:lstStyle/>
+          <a:p>
+            <a:pPr marL="0" indent="0">
+              <a:buNone/>
+            </a:pPr>
+            <a:r>
+              <a:rPr lang="en-US" sz="1200" b="1" dirty="0">
+                <a:solidFill>
+                  <a:srgbClr val="4A6080"/>
+                </a:solidFill>
+                <a:latin typeface="Calibri" pitchFamily="34" charset="0"/>
+                <a:ea typeface="Calibri" pitchFamily="34" charset="-122"/>
+                <a:cs typeface="Calibri" pitchFamily="34" charset="-120"/>
+              </a:rPr>
+              <a:t>Before  .sort():</a:t>
+            </a:r>
+            <a:endParaRPr lang="en-US" sz="1200" dirty="0"/>
+          </a:p>
+        </p:txBody>
+      </p:sp>
+      <p:sp>
+        <p:nvSpPr>
+          <p:cNvPr id="7" name="Text 5">
+            <a:extLst>
+              <a:ext uri="{FF2B5EF4-FFF2-40B4-BE49-F238E27FC236}">
+                <a16:creationId xmlns:a16="http://schemas.microsoft.com/office/drawing/2014/main" id="{1611E70D-CD5E-8869-ECD4-69AB58D865AD}"/>
+              </a:ext>
+            </a:extLst>
+          </p:cNvPr>
+          <p:cNvSpPr/>
+          <p:nvPr/>
+        </p:nvSpPr>
+        <p:spPr>
+          <a:xfrm>
+            <a:off x="0" y="1645920"/>
+            <a:ext cx="914400" cy="292608"/>
+          </a:xfrm>
+          <a:prstGeom prst="rect">
+            <a:avLst/>
+          </a:prstGeom>
+          <a:noFill/>
+          <a:ln/>
+        </p:spPr>
+        <p:txBody>
+          <a:bodyPr wrap="square" lIns="0" tIns="0" rIns="0" bIns="0" rtlCol="0" anchor="ctr"/>
+          <a:lstStyle/>
+          <a:p>
+            <a:pPr marL="0" indent="0" algn="r">
+              <a:buNone/>
+            </a:pPr>
+            <a:r>
+              <a:rPr lang="en-US" sz="1300" b="1" dirty="0">
+                <a:solidFill>
+                  <a:srgbClr val="1B2631"/>
+                </a:solidFill>
+                <a:latin typeface="Consolas" pitchFamily="34" charset="0"/>
+                <a:ea typeface="Consolas" pitchFamily="34" charset="-122"/>
+                <a:cs typeface="Consolas" pitchFamily="34" charset="-120"/>
+              </a:rPr>
+              <a:t>nums =</a:t>
+            </a:r>
+            <a:endParaRPr lang="en-US" sz="1300" dirty="0"/>
+          </a:p>
+        </p:txBody>
+      </p:sp>
+      <p:sp>
+        <p:nvSpPr>
+          <p:cNvPr id="8" name="Text 6">
+            <a:extLst>
+              <a:ext uri="{FF2B5EF4-FFF2-40B4-BE49-F238E27FC236}">
+                <a16:creationId xmlns:a16="http://schemas.microsoft.com/office/drawing/2014/main" id="{E3B1D43F-C234-29F9-0B38-2D12409FD792}"/>
+              </a:ext>
+            </a:extLst>
+          </p:cNvPr>
+          <p:cNvSpPr/>
+          <p:nvPr/>
+        </p:nvSpPr>
+        <p:spPr>
+          <a:xfrm>
+            <a:off x="960120" y="1298448"/>
+            <a:ext cx="713232" cy="228600"/>
+          </a:xfrm>
+          <a:prstGeom prst="rect">
+            <a:avLst/>
+          </a:prstGeom>
+          <a:noFill/>
+          <a:ln/>
+        </p:spPr>
+        <p:txBody>
+          <a:bodyPr wrap="square" lIns="0" tIns="0" rIns="0" bIns="0" rtlCol="0" anchor="ctr"/>
+          <a:lstStyle/>
+          <a:p>
+            <a:pPr marL="0" indent="0" algn="ctr">
+              <a:buNone/>
+            </a:pPr>
+            <a:r>
+              <a:rPr lang="en-US" sz="1100" b="1" dirty="0">
+                <a:solidFill>
+                  <a:srgbClr val="2E86C1"/>
+                </a:solidFill>
+                <a:latin typeface="Calibri" pitchFamily="34" charset="0"/>
+                <a:ea typeface="Calibri" pitchFamily="34" charset="-122"/>
+                <a:cs typeface="Calibri" pitchFamily="34" charset="-120"/>
+              </a:rPr>
+              <a:t>0</a:t>
+            </a:r>
+            <a:endParaRPr lang="en-US" sz="1100" dirty="0"/>
+          </a:p>
+        </p:txBody>
+      </p:sp>
+      <p:sp>
+        <p:nvSpPr>
+          <p:cNvPr id="9" name="Shape 7">
+            <a:extLst>
+              <a:ext uri="{FF2B5EF4-FFF2-40B4-BE49-F238E27FC236}">
+                <a16:creationId xmlns:a16="http://schemas.microsoft.com/office/drawing/2014/main" id="{6830F626-39A1-BC08-1780-158F52A74E4D}"/>
+              </a:ext>
+            </a:extLst>
+          </p:cNvPr>
+          <p:cNvSpPr/>
+          <p:nvPr/>
+        </p:nvSpPr>
+        <p:spPr>
+          <a:xfrm>
+            <a:off x="960120" y="1554480"/>
+            <a:ext cx="713232" cy="475488"/>
+          </a:xfrm>
+          <a:prstGeom prst="rect">
+            <a:avLst/>
+          </a:prstGeom>
+          <a:solidFill>
+            <a:srgbClr val="D6EAF8"/>
+          </a:solidFill>
+          <a:ln w="19050">
+            <a:solidFill>
+              <a:srgbClr val="2E86C1"/>
+            </a:solidFill>
+            <a:prstDash val="solid"/>
+          </a:ln>
+        </p:spPr>
+        <p:txBody>
+          <a:bodyPr/>
+          <a:lstStyle/>
+          <a:p>
+            <a:endParaRPr lang="en-US"/>
+          </a:p>
+        </p:txBody>
+      </p:sp>
+      <p:sp>
+        <p:nvSpPr>
+          <p:cNvPr id="10" name="Text 8">
+            <a:extLst>
+              <a:ext uri="{FF2B5EF4-FFF2-40B4-BE49-F238E27FC236}">
+                <a16:creationId xmlns:a16="http://schemas.microsoft.com/office/drawing/2014/main" id="{5FFD5187-BBDD-7039-2E42-A0D7254EE8F8}"/>
+              </a:ext>
+            </a:extLst>
+          </p:cNvPr>
+          <p:cNvSpPr/>
+          <p:nvPr/>
+        </p:nvSpPr>
+        <p:spPr>
+          <a:xfrm>
+            <a:off x="960120" y="1554480"/>
+            <a:ext cx="713232" cy="475488"/>
+          </a:xfrm>
+          <a:prstGeom prst="rect">
+            <a:avLst/>
+          </a:prstGeom>
+          <a:noFill/>
+          <a:ln/>
+        </p:spPr>
+        <p:txBody>
+          <a:bodyPr wrap="square" lIns="0" tIns="0" rIns="0" bIns="0" rtlCol="0" anchor="ctr"/>
+          <a:lstStyle/>
+          <a:p>
+            <a:pPr marL="0" indent="0" algn="ctr">
+              <a:buNone/>
+            </a:pPr>
+            <a:r>
+              <a:rPr lang="en-US" sz="1500" b="1" dirty="0">
+                <a:solidFill>
+                  <a:srgbClr val="1E2A3A"/>
+                </a:solidFill>
+                <a:latin typeface="Consolas" pitchFamily="34" charset="0"/>
+                <a:ea typeface="Consolas" pitchFamily="34" charset="-122"/>
+                <a:cs typeface="Consolas" pitchFamily="34" charset="-120"/>
+              </a:rPr>
+              <a:t>4</a:t>
+            </a:r>
+            <a:endParaRPr lang="en-US" sz="1500" dirty="0"/>
+          </a:p>
+        </p:txBody>
+      </p:sp>
+      <p:sp>
+        <p:nvSpPr>
+          <p:cNvPr id="11" name="Text 9">
+            <a:extLst>
+              <a:ext uri="{FF2B5EF4-FFF2-40B4-BE49-F238E27FC236}">
+                <a16:creationId xmlns:a16="http://schemas.microsoft.com/office/drawing/2014/main" id="{D696CBDB-3851-0807-6266-3650C3A72267}"/>
+              </a:ext>
+            </a:extLst>
+          </p:cNvPr>
+          <p:cNvSpPr/>
+          <p:nvPr/>
+        </p:nvSpPr>
+        <p:spPr>
+          <a:xfrm>
+            <a:off x="1673352" y="1298448"/>
+            <a:ext cx="713232" cy="228600"/>
+          </a:xfrm>
+          <a:prstGeom prst="rect">
+            <a:avLst/>
+          </a:prstGeom>
+          <a:noFill/>
+          <a:ln/>
+        </p:spPr>
+        <p:txBody>
+          <a:bodyPr wrap="square" lIns="0" tIns="0" rIns="0" bIns="0" rtlCol="0" anchor="ctr"/>
+          <a:lstStyle/>
+          <a:p>
+            <a:pPr marL="0" indent="0" algn="ctr">
+              <a:buNone/>
+            </a:pPr>
+            <a:r>
+              <a:rPr lang="en-US" sz="1100" b="1" dirty="0">
+                <a:solidFill>
+                  <a:srgbClr val="2E86C1"/>
+                </a:solidFill>
+                <a:latin typeface="Calibri" pitchFamily="34" charset="0"/>
+                <a:ea typeface="Calibri" pitchFamily="34" charset="-122"/>
+                <a:cs typeface="Calibri" pitchFamily="34" charset="-120"/>
+              </a:rPr>
+              <a:t>1</a:t>
+            </a:r>
+            <a:endParaRPr lang="en-US" sz="1100" dirty="0"/>
+          </a:p>
+        </p:txBody>
+      </p:sp>
+      <p:sp>
+        <p:nvSpPr>
+          <p:cNvPr id="12" name="Shape 10">
+            <a:extLst>
+              <a:ext uri="{FF2B5EF4-FFF2-40B4-BE49-F238E27FC236}">
+                <a16:creationId xmlns:a16="http://schemas.microsoft.com/office/drawing/2014/main" id="{FE7AB291-FFB2-F270-D974-9BC86F1C3487}"/>
+              </a:ext>
+            </a:extLst>
+          </p:cNvPr>
+          <p:cNvSpPr/>
+          <p:nvPr/>
+        </p:nvSpPr>
+        <p:spPr>
+          <a:xfrm>
+            <a:off x="1673352" y="1554480"/>
+            <a:ext cx="713232" cy="475488"/>
+          </a:xfrm>
+          <a:prstGeom prst="rect">
+            <a:avLst/>
+          </a:prstGeom>
+          <a:solidFill>
+            <a:srgbClr val="D6EAF8"/>
+          </a:solidFill>
+          <a:ln w="19050">
+            <a:solidFill>
+              <a:srgbClr val="2E86C1"/>
+            </a:solidFill>
+            <a:prstDash val="solid"/>
+          </a:ln>
+        </p:spPr>
+        <p:txBody>
+          <a:bodyPr/>
+          <a:lstStyle/>
+          <a:p>
+            <a:endParaRPr lang="en-US"/>
+          </a:p>
+        </p:txBody>
+      </p:sp>
+      <p:sp>
+        <p:nvSpPr>
+          <p:cNvPr id="13" name="Text 11">
+            <a:extLst>
+              <a:ext uri="{FF2B5EF4-FFF2-40B4-BE49-F238E27FC236}">
+                <a16:creationId xmlns:a16="http://schemas.microsoft.com/office/drawing/2014/main" id="{B5F03A0A-ED7B-F0FB-3AAD-9998FEDBBBC3}"/>
+              </a:ext>
+            </a:extLst>
+          </p:cNvPr>
+          <p:cNvSpPr/>
+          <p:nvPr/>
+        </p:nvSpPr>
+        <p:spPr>
+          <a:xfrm>
+            <a:off x="1673352" y="1554480"/>
+            <a:ext cx="713232" cy="475488"/>
+          </a:xfrm>
+          <a:prstGeom prst="rect">
+            <a:avLst/>
+          </a:prstGeom>
+          <a:noFill/>
+          <a:ln/>
+        </p:spPr>
+        <p:txBody>
+          <a:bodyPr wrap="square" lIns="0" tIns="0" rIns="0" bIns="0" rtlCol="0" anchor="ctr"/>
+          <a:lstStyle/>
+          <a:p>
+            <a:pPr marL="0" indent="0" algn="ctr">
+              <a:buNone/>
+            </a:pPr>
+            <a:r>
+              <a:rPr lang="en-US" sz="1500" b="1" dirty="0">
+                <a:solidFill>
+                  <a:srgbClr val="1E2A3A"/>
+                </a:solidFill>
+                <a:latin typeface="Consolas" pitchFamily="34" charset="0"/>
+                <a:ea typeface="Consolas" pitchFamily="34" charset="-122"/>
+                <a:cs typeface="Consolas" pitchFamily="34" charset="-120"/>
+              </a:rPr>
+              <a:t>1</a:t>
+            </a:r>
+            <a:endParaRPr lang="en-US" sz="1500" dirty="0"/>
+          </a:p>
+        </p:txBody>
+      </p:sp>
+      <p:sp>
+        <p:nvSpPr>
+          <p:cNvPr id="14" name="Text 12">
+            <a:extLst>
+              <a:ext uri="{FF2B5EF4-FFF2-40B4-BE49-F238E27FC236}">
+                <a16:creationId xmlns:a16="http://schemas.microsoft.com/office/drawing/2014/main" id="{5634B18D-E57B-B783-B5B5-514F661734F1}"/>
+              </a:ext>
+            </a:extLst>
+          </p:cNvPr>
+          <p:cNvSpPr/>
+          <p:nvPr/>
+        </p:nvSpPr>
+        <p:spPr>
+          <a:xfrm>
+            <a:off x="2386584" y="1298448"/>
+            <a:ext cx="713232" cy="228600"/>
+          </a:xfrm>
+          <a:prstGeom prst="rect">
+            <a:avLst/>
+          </a:prstGeom>
+          <a:noFill/>
+          <a:ln/>
+        </p:spPr>
+        <p:txBody>
+          <a:bodyPr wrap="square" lIns="0" tIns="0" rIns="0" bIns="0" rtlCol="0" anchor="ctr"/>
+          <a:lstStyle/>
+          <a:p>
+            <a:pPr marL="0" indent="0" algn="ctr">
+              <a:buNone/>
+            </a:pPr>
+            <a:r>
+              <a:rPr lang="en-US" sz="1100" b="1" dirty="0">
+                <a:solidFill>
+                  <a:srgbClr val="2E86C1"/>
+                </a:solidFill>
+                <a:latin typeface="Calibri" pitchFamily="34" charset="0"/>
+                <a:ea typeface="Calibri" pitchFamily="34" charset="-122"/>
+                <a:cs typeface="Calibri" pitchFamily="34" charset="-120"/>
+              </a:rPr>
+              <a:t>2</a:t>
+            </a:r>
+            <a:endParaRPr lang="en-US" sz="1100" dirty="0"/>
+          </a:p>
+        </p:txBody>
+      </p:sp>
+      <p:sp>
+        <p:nvSpPr>
+          <p:cNvPr id="15" name="Shape 13">
+            <a:extLst>
+              <a:ext uri="{FF2B5EF4-FFF2-40B4-BE49-F238E27FC236}">
+                <a16:creationId xmlns:a16="http://schemas.microsoft.com/office/drawing/2014/main" id="{7FBFBC30-DF71-6724-CA86-CC5B7F773B63}"/>
+              </a:ext>
+            </a:extLst>
+          </p:cNvPr>
+          <p:cNvSpPr/>
+          <p:nvPr/>
+        </p:nvSpPr>
+        <p:spPr>
+          <a:xfrm>
+            <a:off x="2386584" y="1554480"/>
+            <a:ext cx="713232" cy="475488"/>
+          </a:xfrm>
+          <a:prstGeom prst="rect">
+            <a:avLst/>
+          </a:prstGeom>
+          <a:solidFill>
+            <a:srgbClr val="D6EAF8"/>
+          </a:solidFill>
+          <a:ln w="19050">
+            <a:solidFill>
+              <a:srgbClr val="2E86C1"/>
+            </a:solidFill>
+            <a:prstDash val="solid"/>
+          </a:ln>
+        </p:spPr>
+        <p:txBody>
+          <a:bodyPr/>
+          <a:lstStyle/>
+          <a:p>
+            <a:endParaRPr lang="en-US"/>
+          </a:p>
+        </p:txBody>
+      </p:sp>
+      <p:sp>
+        <p:nvSpPr>
+          <p:cNvPr id="16" name="Text 14">
+            <a:extLst>
+              <a:ext uri="{FF2B5EF4-FFF2-40B4-BE49-F238E27FC236}">
+                <a16:creationId xmlns:a16="http://schemas.microsoft.com/office/drawing/2014/main" id="{D00F2D99-2786-4281-19E6-4AC3492E34AB}"/>
+              </a:ext>
+            </a:extLst>
+          </p:cNvPr>
+          <p:cNvSpPr/>
+          <p:nvPr/>
+        </p:nvSpPr>
+        <p:spPr>
+          <a:xfrm>
+            <a:off x="2386584" y="1554480"/>
+            <a:ext cx="713232" cy="475488"/>
+          </a:xfrm>
+          <a:prstGeom prst="rect">
+            <a:avLst/>
+          </a:prstGeom>
+          <a:noFill/>
+          <a:ln/>
+        </p:spPr>
+        <p:txBody>
+          <a:bodyPr wrap="square" lIns="0" tIns="0" rIns="0" bIns="0" rtlCol="0" anchor="ctr"/>
+          <a:lstStyle/>
+          <a:p>
+            <a:pPr marL="0" indent="0" algn="ctr">
+              <a:buNone/>
+            </a:pPr>
+            <a:r>
+              <a:rPr lang="en-US" sz="1500" b="1" dirty="0">
+                <a:solidFill>
+                  <a:srgbClr val="1E2A3A"/>
+                </a:solidFill>
+                <a:latin typeface="Consolas" pitchFamily="34" charset="0"/>
+                <a:ea typeface="Consolas" pitchFamily="34" charset="-122"/>
+                <a:cs typeface="Consolas" pitchFamily="34" charset="-120"/>
+              </a:rPr>
+              <a:t>6</a:t>
+            </a:r>
+            <a:endParaRPr lang="en-US" sz="1500" dirty="0"/>
+          </a:p>
+        </p:txBody>
+      </p:sp>
+      <p:sp>
+        <p:nvSpPr>
+          <p:cNvPr id="17" name="Text 15">
+            <a:extLst>
+              <a:ext uri="{FF2B5EF4-FFF2-40B4-BE49-F238E27FC236}">
+                <a16:creationId xmlns:a16="http://schemas.microsoft.com/office/drawing/2014/main" id="{E8A2CAF5-487B-BAF4-8F3C-28C219C16853}"/>
+              </a:ext>
+            </a:extLst>
+          </p:cNvPr>
+          <p:cNvSpPr/>
+          <p:nvPr/>
+        </p:nvSpPr>
+        <p:spPr>
+          <a:xfrm>
+            <a:off x="3099816" y="1298448"/>
+            <a:ext cx="713232" cy="228600"/>
+          </a:xfrm>
+          <a:prstGeom prst="rect">
+            <a:avLst/>
+          </a:prstGeom>
+          <a:noFill/>
+          <a:ln/>
+        </p:spPr>
+        <p:txBody>
+          <a:bodyPr wrap="square" lIns="0" tIns="0" rIns="0" bIns="0" rtlCol="0" anchor="ctr"/>
+          <a:lstStyle/>
+          <a:p>
+            <a:pPr marL="0" indent="0" algn="ctr">
+              <a:buNone/>
+            </a:pPr>
+            <a:r>
+              <a:rPr lang="en-US" sz="1100" b="1" dirty="0">
+                <a:solidFill>
+                  <a:srgbClr val="2E86C1"/>
+                </a:solidFill>
+                <a:latin typeface="Calibri" pitchFamily="34" charset="0"/>
+                <a:ea typeface="Calibri" pitchFamily="34" charset="-122"/>
+                <a:cs typeface="Calibri" pitchFamily="34" charset="-120"/>
+              </a:rPr>
+              <a:t>3</a:t>
+            </a:r>
+            <a:endParaRPr lang="en-US" sz="1100" dirty="0"/>
+          </a:p>
+        </p:txBody>
+      </p:sp>
+      <p:sp>
+        <p:nvSpPr>
+          <p:cNvPr id="18" name="Shape 16">
+            <a:extLst>
+              <a:ext uri="{FF2B5EF4-FFF2-40B4-BE49-F238E27FC236}">
+                <a16:creationId xmlns:a16="http://schemas.microsoft.com/office/drawing/2014/main" id="{CDB018B4-9284-B13C-8FEC-F469F597ADC2}"/>
+              </a:ext>
+            </a:extLst>
+          </p:cNvPr>
+          <p:cNvSpPr/>
+          <p:nvPr/>
+        </p:nvSpPr>
+        <p:spPr>
+          <a:xfrm>
+            <a:off x="3099816" y="1554480"/>
+            <a:ext cx="713232" cy="475488"/>
+          </a:xfrm>
+          <a:prstGeom prst="rect">
+            <a:avLst/>
+          </a:prstGeom>
+          <a:solidFill>
+            <a:srgbClr val="D6EAF8"/>
+          </a:solidFill>
+          <a:ln w="19050">
+            <a:solidFill>
+              <a:srgbClr val="2E86C1"/>
+            </a:solidFill>
+            <a:prstDash val="solid"/>
+          </a:ln>
+        </p:spPr>
+        <p:txBody>
+          <a:bodyPr/>
+          <a:lstStyle/>
+          <a:p>
+            <a:endParaRPr lang="en-US"/>
+          </a:p>
+        </p:txBody>
+      </p:sp>
+      <p:sp>
+        <p:nvSpPr>
+          <p:cNvPr id="19" name="Text 17">
+            <a:extLst>
+              <a:ext uri="{FF2B5EF4-FFF2-40B4-BE49-F238E27FC236}">
+                <a16:creationId xmlns:a16="http://schemas.microsoft.com/office/drawing/2014/main" id="{B6CA10F5-0741-0AE4-0A42-4FE11F710DF2}"/>
+              </a:ext>
+            </a:extLst>
+          </p:cNvPr>
+          <p:cNvSpPr/>
+          <p:nvPr/>
+        </p:nvSpPr>
+        <p:spPr>
+          <a:xfrm>
+            <a:off x="3099816" y="1554480"/>
+            <a:ext cx="713232" cy="475488"/>
+          </a:xfrm>
+          <a:prstGeom prst="rect">
+            <a:avLst/>
+          </a:prstGeom>
+          <a:noFill/>
+          <a:ln/>
+        </p:spPr>
+        <p:txBody>
+          <a:bodyPr wrap="square" lIns="0" tIns="0" rIns="0" bIns="0" rtlCol="0" anchor="ctr"/>
+          <a:lstStyle/>
+          <a:p>
+            <a:pPr marL="0" indent="0" algn="ctr">
+              <a:buNone/>
+            </a:pPr>
+            <a:r>
+              <a:rPr lang="en-US" sz="1500" b="1" dirty="0">
+                <a:solidFill>
+                  <a:srgbClr val="1E2A3A"/>
+                </a:solidFill>
+                <a:latin typeface="Consolas" pitchFamily="34" charset="0"/>
+                <a:ea typeface="Consolas" pitchFamily="34" charset="-122"/>
+                <a:cs typeface="Consolas" pitchFamily="34" charset="-120"/>
+              </a:rPr>
+              <a:t>1</a:t>
+            </a:r>
+            <a:endParaRPr lang="en-US" sz="1500" dirty="0"/>
+          </a:p>
+        </p:txBody>
+      </p:sp>
+      <p:sp>
+        <p:nvSpPr>
+          <p:cNvPr id="20" name="Text 18">
+            <a:extLst>
+              <a:ext uri="{FF2B5EF4-FFF2-40B4-BE49-F238E27FC236}">
+                <a16:creationId xmlns:a16="http://schemas.microsoft.com/office/drawing/2014/main" id="{7328A9CC-493D-EB1C-0607-FBF8AFBF29F8}"/>
+              </a:ext>
+            </a:extLst>
+          </p:cNvPr>
+          <p:cNvSpPr/>
+          <p:nvPr/>
+        </p:nvSpPr>
+        <p:spPr>
+          <a:xfrm>
+            <a:off x="3813048" y="1298448"/>
+            <a:ext cx="713232" cy="228600"/>
+          </a:xfrm>
+          <a:prstGeom prst="rect">
+            <a:avLst/>
+          </a:prstGeom>
+          <a:noFill/>
+          <a:ln/>
+        </p:spPr>
+        <p:txBody>
+          <a:bodyPr wrap="square" lIns="0" tIns="0" rIns="0" bIns="0" rtlCol="0" anchor="ctr"/>
+          <a:lstStyle/>
+          <a:p>
+            <a:pPr marL="0" indent="0" algn="ctr">
+              <a:buNone/>
+            </a:pPr>
+            <a:r>
+              <a:rPr lang="en-US" sz="1100" b="1" dirty="0">
+                <a:solidFill>
+                  <a:srgbClr val="2E86C1"/>
+                </a:solidFill>
+                <a:latin typeface="Calibri" pitchFamily="34" charset="0"/>
+                <a:ea typeface="Calibri" pitchFamily="34" charset="-122"/>
+                <a:cs typeface="Calibri" pitchFamily="34" charset="-120"/>
+              </a:rPr>
+              <a:t>4</a:t>
+            </a:r>
+            <a:endParaRPr lang="en-US" sz="1100" dirty="0"/>
+          </a:p>
+        </p:txBody>
+      </p:sp>
+      <p:sp>
+        <p:nvSpPr>
+          <p:cNvPr id="21" name="Shape 19">
+            <a:extLst>
+              <a:ext uri="{FF2B5EF4-FFF2-40B4-BE49-F238E27FC236}">
+                <a16:creationId xmlns:a16="http://schemas.microsoft.com/office/drawing/2014/main" id="{9E71A899-CCB3-1DE2-07E2-C7702D80AFE5}"/>
+              </a:ext>
+            </a:extLst>
+          </p:cNvPr>
+          <p:cNvSpPr/>
+          <p:nvPr/>
+        </p:nvSpPr>
+        <p:spPr>
+          <a:xfrm>
+            <a:off x="3813048" y="1554480"/>
+            <a:ext cx="713232" cy="475488"/>
+          </a:xfrm>
+          <a:prstGeom prst="rect">
+            <a:avLst/>
+          </a:prstGeom>
+          <a:solidFill>
+            <a:srgbClr val="D6EAF8"/>
+          </a:solidFill>
+          <a:ln w="19050">
+            <a:solidFill>
+              <a:srgbClr val="2E86C1"/>
+            </a:solidFill>
+            <a:prstDash val="solid"/>
+          </a:ln>
+        </p:spPr>
+        <p:txBody>
+          <a:bodyPr/>
+          <a:lstStyle/>
+          <a:p>
+            <a:endParaRPr lang="en-US"/>
+          </a:p>
+        </p:txBody>
+      </p:sp>
+      <p:sp>
+        <p:nvSpPr>
+          <p:cNvPr id="22" name="Text 20">
+            <a:extLst>
+              <a:ext uri="{FF2B5EF4-FFF2-40B4-BE49-F238E27FC236}">
+                <a16:creationId xmlns:a16="http://schemas.microsoft.com/office/drawing/2014/main" id="{0FBF0099-D03C-9EF0-CA6E-407BC50AAE6D}"/>
+              </a:ext>
+            </a:extLst>
+          </p:cNvPr>
+          <p:cNvSpPr/>
+          <p:nvPr/>
+        </p:nvSpPr>
+        <p:spPr>
+          <a:xfrm>
+            <a:off x="3813048" y="1554480"/>
+            <a:ext cx="713232" cy="475488"/>
+          </a:xfrm>
+          <a:prstGeom prst="rect">
+            <a:avLst/>
+          </a:prstGeom>
+          <a:noFill/>
+          <a:ln/>
+        </p:spPr>
+        <p:txBody>
+          <a:bodyPr wrap="square" lIns="0" tIns="0" rIns="0" bIns="0" rtlCol="0" anchor="ctr"/>
+          <a:lstStyle/>
+          <a:p>
+            <a:pPr marL="0" indent="0" algn="ctr">
+              <a:buNone/>
+            </a:pPr>
+            <a:r>
+              <a:rPr lang="en-US" sz="1500" b="1" dirty="0">
+                <a:solidFill>
+                  <a:srgbClr val="1E2A3A"/>
+                </a:solidFill>
+                <a:latin typeface="Consolas" pitchFamily="34" charset="0"/>
+                <a:ea typeface="Consolas" pitchFamily="34" charset="-122"/>
+                <a:cs typeface="Consolas" pitchFamily="34" charset="-120"/>
+              </a:rPr>
+              <a:t>3</a:t>
+            </a:r>
+            <a:endParaRPr lang="en-US" sz="1500" dirty="0"/>
+          </a:p>
+        </p:txBody>
+      </p:sp>
+      <p:sp>
+        <p:nvSpPr>
+          <p:cNvPr id="23" name="Text 21">
+            <a:extLst>
+              <a:ext uri="{FF2B5EF4-FFF2-40B4-BE49-F238E27FC236}">
+                <a16:creationId xmlns:a16="http://schemas.microsoft.com/office/drawing/2014/main" id="{E81DC4CA-E045-B643-1E33-1276150A81A3}"/>
+              </a:ext>
+            </a:extLst>
+          </p:cNvPr>
+          <p:cNvSpPr/>
+          <p:nvPr/>
+        </p:nvSpPr>
+        <p:spPr>
+          <a:xfrm>
+            <a:off x="4526280" y="1298448"/>
+            <a:ext cx="713232" cy="228600"/>
+          </a:xfrm>
+          <a:prstGeom prst="rect">
+            <a:avLst/>
+          </a:prstGeom>
+          <a:noFill/>
+          <a:ln/>
+        </p:spPr>
+        <p:txBody>
+          <a:bodyPr wrap="square" lIns="0" tIns="0" rIns="0" bIns="0" rtlCol="0" anchor="ctr"/>
+          <a:lstStyle/>
+          <a:p>
+            <a:pPr marL="0" indent="0" algn="ctr">
+              <a:buNone/>
+            </a:pPr>
+            <a:r>
+              <a:rPr lang="en-US" sz="1100" b="1" dirty="0">
+                <a:solidFill>
+                  <a:srgbClr val="2E86C1"/>
+                </a:solidFill>
+                <a:latin typeface="Calibri" pitchFamily="34" charset="0"/>
+                <a:ea typeface="Calibri" pitchFamily="34" charset="-122"/>
+                <a:cs typeface="Calibri" pitchFamily="34" charset="-120"/>
+              </a:rPr>
+              <a:t>5</a:t>
+            </a:r>
+            <a:endParaRPr lang="en-US" sz="1100" dirty="0"/>
+          </a:p>
+        </p:txBody>
+      </p:sp>
+      <p:sp>
+        <p:nvSpPr>
+          <p:cNvPr id="24" name="Shape 22">
+            <a:extLst>
+              <a:ext uri="{FF2B5EF4-FFF2-40B4-BE49-F238E27FC236}">
+                <a16:creationId xmlns:a16="http://schemas.microsoft.com/office/drawing/2014/main" id="{8B25A1DA-A845-DBA0-02F5-E3BDE0D11425}"/>
+              </a:ext>
+            </a:extLst>
+          </p:cNvPr>
+          <p:cNvSpPr/>
+          <p:nvPr/>
+        </p:nvSpPr>
+        <p:spPr>
+          <a:xfrm>
+            <a:off x="4526280" y="1554480"/>
+            <a:ext cx="713232" cy="475488"/>
+          </a:xfrm>
+          <a:prstGeom prst="rect">
+            <a:avLst/>
+          </a:prstGeom>
+          <a:solidFill>
+            <a:srgbClr val="D6EAF8"/>
+          </a:solidFill>
+          <a:ln w="19050">
+            <a:solidFill>
+              <a:srgbClr val="2E86C1"/>
+            </a:solidFill>
+            <a:prstDash val="solid"/>
+          </a:ln>
+        </p:spPr>
+        <p:txBody>
+          <a:bodyPr/>
+          <a:lstStyle/>
+          <a:p>
+            <a:endParaRPr lang="en-US"/>
+          </a:p>
+        </p:txBody>
+      </p:sp>
+      <p:sp>
+        <p:nvSpPr>
+          <p:cNvPr id="25" name="Text 23">
+            <a:extLst>
+              <a:ext uri="{FF2B5EF4-FFF2-40B4-BE49-F238E27FC236}">
+                <a16:creationId xmlns:a16="http://schemas.microsoft.com/office/drawing/2014/main" id="{E0082D5B-42F4-6DDD-E234-DD8630F4659F}"/>
+              </a:ext>
+            </a:extLst>
+          </p:cNvPr>
+          <p:cNvSpPr/>
+          <p:nvPr/>
+        </p:nvSpPr>
+        <p:spPr>
+          <a:xfrm>
+            <a:off x="4526280" y="1554480"/>
+            <a:ext cx="713232" cy="475488"/>
+          </a:xfrm>
+          <a:prstGeom prst="rect">
+            <a:avLst/>
+          </a:prstGeom>
+          <a:noFill/>
+          <a:ln/>
+        </p:spPr>
+        <p:txBody>
+          <a:bodyPr wrap="square" lIns="0" tIns="0" rIns="0" bIns="0" rtlCol="0" anchor="ctr"/>
+          <a:lstStyle/>
+          <a:p>
+            <a:pPr marL="0" indent="0" algn="ctr">
+              <a:buNone/>
+            </a:pPr>
+            <a:r>
+              <a:rPr lang="en-US" sz="1500" b="1" dirty="0">
+                <a:solidFill>
+                  <a:srgbClr val="1E2A3A"/>
+                </a:solidFill>
+                <a:latin typeface="Consolas" pitchFamily="34" charset="0"/>
+                <a:ea typeface="Consolas" pitchFamily="34" charset="-122"/>
+                <a:cs typeface="Consolas" pitchFamily="34" charset="-120"/>
+              </a:rPr>
+              <a:t>2</a:t>
+            </a:r>
+            <a:endParaRPr lang="en-US" sz="1500" dirty="0"/>
+          </a:p>
+        </p:txBody>
+      </p:sp>
+      <p:sp>
+        <p:nvSpPr>
+          <p:cNvPr id="27" name="Text 25">
+            <a:extLst>
+              <a:ext uri="{FF2B5EF4-FFF2-40B4-BE49-F238E27FC236}">
+                <a16:creationId xmlns:a16="http://schemas.microsoft.com/office/drawing/2014/main" id="{57147872-9B98-4BD6-AEAD-CC97F4F7FCCA}"/>
+              </a:ext>
+            </a:extLst>
+          </p:cNvPr>
+          <p:cNvSpPr/>
+          <p:nvPr/>
+        </p:nvSpPr>
+        <p:spPr>
+          <a:xfrm>
+            <a:off x="1504188" y="2496312"/>
+            <a:ext cx="1828800" cy="256032"/>
+          </a:xfrm>
+          <a:prstGeom prst="rect">
+            <a:avLst/>
+          </a:prstGeom>
+          <a:noFill/>
+          <a:ln/>
+        </p:spPr>
+        <p:txBody>
+          <a:bodyPr wrap="square" lIns="0" tIns="0" rIns="0" bIns="0" rtlCol="0" anchor="ctr"/>
+          <a:lstStyle/>
+          <a:p>
+            <a:pPr marL="0" indent="0" algn="ctr">
+              <a:buNone/>
+            </a:pPr>
+            <a:r>
+              <a:rPr lang="en-US" sz="1150" b="1" dirty="0">
+                <a:solidFill>
+                  <a:srgbClr val="1ABC9C"/>
+                </a:solidFill>
+                <a:latin typeface="Consolas" pitchFamily="34" charset="0"/>
+                <a:ea typeface="Consolas" pitchFamily="34" charset="-122"/>
+                <a:cs typeface="Consolas" pitchFamily="34" charset="-120"/>
+              </a:rPr>
+              <a:t>nums.sort()</a:t>
+            </a:r>
+            <a:endParaRPr lang="en-US" sz="1150" dirty="0"/>
+          </a:p>
+        </p:txBody>
+      </p:sp>
+      <p:sp>
+        <p:nvSpPr>
+          <p:cNvPr id="29" name="Text 27">
+            <a:extLst>
+              <a:ext uri="{FF2B5EF4-FFF2-40B4-BE49-F238E27FC236}">
+                <a16:creationId xmlns:a16="http://schemas.microsoft.com/office/drawing/2014/main" id="{C47377EF-B1F5-A7CC-C4D7-830B8C6AE1F8}"/>
+              </a:ext>
+            </a:extLst>
+          </p:cNvPr>
+          <p:cNvSpPr/>
+          <p:nvPr/>
+        </p:nvSpPr>
+        <p:spPr>
+          <a:xfrm>
+            <a:off x="320040" y="3127248"/>
+            <a:ext cx="2560320" cy="274320"/>
+          </a:xfrm>
+          <a:prstGeom prst="rect">
+            <a:avLst/>
+          </a:prstGeom>
+          <a:noFill/>
+          <a:ln/>
+        </p:spPr>
+        <p:txBody>
+          <a:bodyPr wrap="square" lIns="0" tIns="0" rIns="0" bIns="0" rtlCol="0" anchor="ctr"/>
+          <a:lstStyle/>
+          <a:p>
+            <a:pPr marL="0" indent="0">
+              <a:buNone/>
+            </a:pPr>
+            <a:r>
+              <a:rPr lang="en-US" sz="1200" b="1" dirty="0">
+                <a:solidFill>
+                  <a:srgbClr val="4A6080"/>
+                </a:solidFill>
+                <a:latin typeface="Calibri" pitchFamily="34" charset="0"/>
+                <a:ea typeface="Calibri" pitchFamily="34" charset="-122"/>
+                <a:cs typeface="Calibri" pitchFamily="34" charset="-120"/>
+              </a:rPr>
+              <a:t>After  .sort():</a:t>
+            </a:r>
+            <a:endParaRPr lang="en-US" sz="1200" dirty="0"/>
+          </a:p>
+        </p:txBody>
+      </p:sp>
+      <p:sp>
+        <p:nvSpPr>
+          <p:cNvPr id="30" name="Shape 28">
+            <a:extLst>
+              <a:ext uri="{FF2B5EF4-FFF2-40B4-BE49-F238E27FC236}">
+                <a16:creationId xmlns:a16="http://schemas.microsoft.com/office/drawing/2014/main" id="{95495CB8-6E13-52C2-E8A5-0780854F1617}"/>
+              </a:ext>
+            </a:extLst>
+          </p:cNvPr>
+          <p:cNvSpPr/>
+          <p:nvPr/>
+        </p:nvSpPr>
+        <p:spPr>
+          <a:xfrm>
+            <a:off x="960120" y="3447288"/>
+            <a:ext cx="713232" cy="475488"/>
+          </a:xfrm>
+          <a:prstGeom prst="rect">
+            <a:avLst/>
+          </a:prstGeom>
+          <a:solidFill>
+            <a:srgbClr val="C8E6C9"/>
+          </a:solidFill>
+          <a:ln w="19050">
+            <a:solidFill>
+              <a:srgbClr val="1E8449"/>
+            </a:solidFill>
+            <a:prstDash val="solid"/>
+          </a:ln>
+        </p:spPr>
+        <p:txBody>
+          <a:bodyPr/>
+          <a:lstStyle/>
+          <a:p>
+            <a:endParaRPr lang="en-US"/>
+          </a:p>
+        </p:txBody>
+      </p:sp>
+      <p:sp>
+        <p:nvSpPr>
+          <p:cNvPr id="31" name="Text 29">
+            <a:extLst>
+              <a:ext uri="{FF2B5EF4-FFF2-40B4-BE49-F238E27FC236}">
+                <a16:creationId xmlns:a16="http://schemas.microsoft.com/office/drawing/2014/main" id="{96BF236F-0C6A-B08C-A9D1-5B308AFB6739}"/>
+              </a:ext>
+            </a:extLst>
+          </p:cNvPr>
+          <p:cNvSpPr/>
+          <p:nvPr/>
+        </p:nvSpPr>
+        <p:spPr>
+          <a:xfrm>
+            <a:off x="960120" y="3447288"/>
+            <a:ext cx="713232" cy="475488"/>
+          </a:xfrm>
+          <a:prstGeom prst="rect">
+            <a:avLst/>
+          </a:prstGeom>
+          <a:noFill/>
+          <a:ln/>
+        </p:spPr>
+        <p:txBody>
+          <a:bodyPr wrap="square" lIns="0" tIns="0" rIns="0" bIns="0" rtlCol="0" anchor="ctr"/>
+          <a:lstStyle/>
+          <a:p>
+            <a:pPr marL="0" indent="0" algn="ctr">
+              <a:buNone/>
+            </a:pPr>
+            <a:r>
+              <a:rPr lang="en-US" sz="1500" b="1" dirty="0">
+                <a:solidFill>
+                  <a:srgbClr val="1E2A3A"/>
+                </a:solidFill>
+                <a:latin typeface="Consolas" pitchFamily="34" charset="0"/>
+                <a:ea typeface="Consolas" pitchFamily="34" charset="-122"/>
+                <a:cs typeface="Consolas" pitchFamily="34" charset="-120"/>
+              </a:rPr>
+              <a:t>1</a:t>
+            </a:r>
+            <a:endParaRPr lang="en-US" sz="1500" dirty="0"/>
+          </a:p>
+        </p:txBody>
+      </p:sp>
+      <p:sp>
+        <p:nvSpPr>
+          <p:cNvPr id="32" name="Shape 30">
+            <a:extLst>
+              <a:ext uri="{FF2B5EF4-FFF2-40B4-BE49-F238E27FC236}">
+                <a16:creationId xmlns:a16="http://schemas.microsoft.com/office/drawing/2014/main" id="{7229336E-6262-168B-BC5A-BBB5F3380BBA}"/>
+              </a:ext>
+            </a:extLst>
+          </p:cNvPr>
+          <p:cNvSpPr/>
+          <p:nvPr/>
+        </p:nvSpPr>
+        <p:spPr>
+          <a:xfrm>
+            <a:off x="1673352" y="3447288"/>
+            <a:ext cx="713232" cy="475488"/>
+          </a:xfrm>
+          <a:prstGeom prst="rect">
+            <a:avLst/>
+          </a:prstGeom>
+          <a:solidFill>
+            <a:srgbClr val="C8E6C9"/>
+          </a:solidFill>
+          <a:ln w="19050">
+            <a:solidFill>
+              <a:srgbClr val="1E8449"/>
+            </a:solidFill>
+            <a:prstDash val="solid"/>
+          </a:ln>
+        </p:spPr>
+        <p:txBody>
+          <a:bodyPr/>
+          <a:lstStyle/>
+          <a:p>
+            <a:endParaRPr lang="en-US"/>
+          </a:p>
+        </p:txBody>
+      </p:sp>
+      <p:sp>
+        <p:nvSpPr>
+          <p:cNvPr id="33" name="Text 31">
+            <a:extLst>
+              <a:ext uri="{FF2B5EF4-FFF2-40B4-BE49-F238E27FC236}">
+                <a16:creationId xmlns:a16="http://schemas.microsoft.com/office/drawing/2014/main" id="{8C094D09-4410-49D8-7FE7-A7BC5F56BF73}"/>
+              </a:ext>
+            </a:extLst>
+          </p:cNvPr>
+          <p:cNvSpPr/>
+          <p:nvPr/>
+        </p:nvSpPr>
+        <p:spPr>
+          <a:xfrm>
+            <a:off x="1673352" y="3447288"/>
+            <a:ext cx="713232" cy="475488"/>
+          </a:xfrm>
+          <a:prstGeom prst="rect">
+            <a:avLst/>
+          </a:prstGeom>
+          <a:noFill/>
+          <a:ln/>
+        </p:spPr>
+        <p:txBody>
+          <a:bodyPr wrap="square" lIns="0" tIns="0" rIns="0" bIns="0" rtlCol="0" anchor="ctr"/>
+          <a:lstStyle/>
+          <a:p>
+            <a:pPr marL="0" indent="0" algn="ctr">
+              <a:buNone/>
+            </a:pPr>
+            <a:r>
+              <a:rPr lang="en-US" sz="1500" b="1" dirty="0">
+                <a:solidFill>
+                  <a:srgbClr val="1E2A3A"/>
+                </a:solidFill>
+                <a:latin typeface="Consolas" pitchFamily="34" charset="0"/>
+                <a:ea typeface="Consolas" pitchFamily="34" charset="-122"/>
+                <a:cs typeface="Consolas" pitchFamily="34" charset="-120"/>
+              </a:rPr>
+              <a:t>1</a:t>
+            </a:r>
+            <a:endParaRPr lang="en-US" sz="1500" dirty="0"/>
+          </a:p>
+        </p:txBody>
+      </p:sp>
+      <p:sp>
+        <p:nvSpPr>
+          <p:cNvPr id="34" name="Shape 32">
+            <a:extLst>
+              <a:ext uri="{FF2B5EF4-FFF2-40B4-BE49-F238E27FC236}">
+                <a16:creationId xmlns:a16="http://schemas.microsoft.com/office/drawing/2014/main" id="{1BA1890B-44BB-FA48-A64C-D66793879022}"/>
+              </a:ext>
+            </a:extLst>
+          </p:cNvPr>
+          <p:cNvSpPr/>
+          <p:nvPr/>
+        </p:nvSpPr>
+        <p:spPr>
+          <a:xfrm>
+            <a:off x="2386584" y="3447288"/>
+            <a:ext cx="713232" cy="475488"/>
+          </a:xfrm>
+          <a:prstGeom prst="rect">
+            <a:avLst/>
+          </a:prstGeom>
+          <a:solidFill>
+            <a:srgbClr val="C8E6C9"/>
+          </a:solidFill>
+          <a:ln w="19050">
+            <a:solidFill>
+              <a:srgbClr val="1E8449"/>
+            </a:solidFill>
+            <a:prstDash val="solid"/>
+          </a:ln>
+        </p:spPr>
+        <p:txBody>
+          <a:bodyPr/>
+          <a:lstStyle/>
+          <a:p>
+            <a:endParaRPr lang="en-US"/>
+          </a:p>
+        </p:txBody>
+      </p:sp>
+      <p:sp>
+        <p:nvSpPr>
+          <p:cNvPr id="35" name="Text 33">
+            <a:extLst>
+              <a:ext uri="{FF2B5EF4-FFF2-40B4-BE49-F238E27FC236}">
+                <a16:creationId xmlns:a16="http://schemas.microsoft.com/office/drawing/2014/main" id="{EDD60CDB-0A9A-7CC6-A118-38EA76F52737}"/>
+              </a:ext>
+            </a:extLst>
+          </p:cNvPr>
+          <p:cNvSpPr/>
+          <p:nvPr/>
+        </p:nvSpPr>
+        <p:spPr>
+          <a:xfrm>
+            <a:off x="2386584" y="3447288"/>
+            <a:ext cx="713232" cy="475488"/>
+          </a:xfrm>
+          <a:prstGeom prst="rect">
+            <a:avLst/>
+          </a:prstGeom>
+          <a:noFill/>
+          <a:ln/>
+        </p:spPr>
+        <p:txBody>
+          <a:bodyPr wrap="square" lIns="0" tIns="0" rIns="0" bIns="0" rtlCol="0" anchor="ctr"/>
+          <a:lstStyle/>
+          <a:p>
+            <a:pPr marL="0" indent="0" algn="ctr">
+              <a:buNone/>
+            </a:pPr>
+            <a:r>
+              <a:rPr lang="en-US" sz="1500" b="1" dirty="0">
+                <a:solidFill>
+                  <a:srgbClr val="1E2A3A"/>
+                </a:solidFill>
+                <a:latin typeface="Consolas" pitchFamily="34" charset="0"/>
+                <a:ea typeface="Consolas" pitchFamily="34" charset="-122"/>
+                <a:cs typeface="Consolas" pitchFamily="34" charset="-120"/>
+              </a:rPr>
+              <a:t>2</a:t>
+            </a:r>
+            <a:endParaRPr lang="en-US" sz="1500" dirty="0"/>
+          </a:p>
+        </p:txBody>
+      </p:sp>
+      <p:sp>
+        <p:nvSpPr>
+          <p:cNvPr id="36" name="Shape 34">
+            <a:extLst>
+              <a:ext uri="{FF2B5EF4-FFF2-40B4-BE49-F238E27FC236}">
+                <a16:creationId xmlns:a16="http://schemas.microsoft.com/office/drawing/2014/main" id="{A4CE6DDC-56D7-E020-FC82-FB1131C77120}"/>
+              </a:ext>
+            </a:extLst>
+          </p:cNvPr>
+          <p:cNvSpPr/>
+          <p:nvPr/>
+        </p:nvSpPr>
+        <p:spPr>
+          <a:xfrm>
+            <a:off x="3099816" y="3447288"/>
+            <a:ext cx="713232" cy="475488"/>
+          </a:xfrm>
+          <a:prstGeom prst="rect">
+            <a:avLst/>
+          </a:prstGeom>
+          <a:solidFill>
+            <a:srgbClr val="C8E6C9"/>
+          </a:solidFill>
+          <a:ln w="19050">
+            <a:solidFill>
+              <a:srgbClr val="1E8449"/>
+            </a:solidFill>
+            <a:prstDash val="solid"/>
+          </a:ln>
+        </p:spPr>
+        <p:txBody>
+          <a:bodyPr/>
+          <a:lstStyle/>
+          <a:p>
+            <a:endParaRPr lang="en-US"/>
+          </a:p>
+        </p:txBody>
+      </p:sp>
+      <p:sp>
+        <p:nvSpPr>
+          <p:cNvPr id="37" name="Text 35">
+            <a:extLst>
+              <a:ext uri="{FF2B5EF4-FFF2-40B4-BE49-F238E27FC236}">
+                <a16:creationId xmlns:a16="http://schemas.microsoft.com/office/drawing/2014/main" id="{D5FBB160-DFA4-B059-7F38-CB375B3CE6A2}"/>
+              </a:ext>
+            </a:extLst>
+          </p:cNvPr>
+          <p:cNvSpPr/>
+          <p:nvPr/>
+        </p:nvSpPr>
+        <p:spPr>
+          <a:xfrm>
+            <a:off x="3099816" y="3447288"/>
+            <a:ext cx="713232" cy="475488"/>
+          </a:xfrm>
+          <a:prstGeom prst="rect">
+            <a:avLst/>
+          </a:prstGeom>
+          <a:noFill/>
+          <a:ln/>
+        </p:spPr>
+        <p:txBody>
+          <a:bodyPr wrap="square" lIns="0" tIns="0" rIns="0" bIns="0" rtlCol="0" anchor="ctr"/>
+          <a:lstStyle/>
+          <a:p>
+            <a:pPr marL="0" indent="0" algn="ctr">
+              <a:buNone/>
+            </a:pPr>
+            <a:r>
+              <a:rPr lang="en-US" sz="1500" b="1" dirty="0">
+                <a:solidFill>
+                  <a:srgbClr val="1E2A3A"/>
+                </a:solidFill>
+                <a:latin typeface="Consolas" pitchFamily="34" charset="0"/>
+                <a:ea typeface="Consolas" pitchFamily="34" charset="-122"/>
+                <a:cs typeface="Consolas" pitchFamily="34" charset="-120"/>
+              </a:rPr>
+              <a:t>3</a:t>
+            </a:r>
+            <a:endParaRPr lang="en-US" sz="1500" dirty="0"/>
+          </a:p>
+        </p:txBody>
+      </p:sp>
+      <p:sp>
+        <p:nvSpPr>
+          <p:cNvPr id="38" name="Shape 36">
+            <a:extLst>
+              <a:ext uri="{FF2B5EF4-FFF2-40B4-BE49-F238E27FC236}">
+                <a16:creationId xmlns:a16="http://schemas.microsoft.com/office/drawing/2014/main" id="{C522BD75-1F3C-B182-464F-147D0F632908}"/>
+              </a:ext>
+            </a:extLst>
+          </p:cNvPr>
+          <p:cNvSpPr/>
+          <p:nvPr/>
+        </p:nvSpPr>
+        <p:spPr>
+          <a:xfrm>
+            <a:off x="3813048" y="3447288"/>
+            <a:ext cx="713232" cy="475488"/>
+          </a:xfrm>
+          <a:prstGeom prst="rect">
+            <a:avLst/>
+          </a:prstGeom>
+          <a:solidFill>
+            <a:srgbClr val="C8E6C9"/>
+          </a:solidFill>
+          <a:ln w="19050">
+            <a:solidFill>
+              <a:srgbClr val="1E8449"/>
+            </a:solidFill>
+            <a:prstDash val="solid"/>
+          </a:ln>
+        </p:spPr>
+        <p:txBody>
+          <a:bodyPr/>
+          <a:lstStyle/>
+          <a:p>
+            <a:endParaRPr lang="en-US"/>
+          </a:p>
+        </p:txBody>
+      </p:sp>
+      <p:sp>
+        <p:nvSpPr>
+          <p:cNvPr id="39" name="Text 37">
+            <a:extLst>
+              <a:ext uri="{FF2B5EF4-FFF2-40B4-BE49-F238E27FC236}">
+                <a16:creationId xmlns:a16="http://schemas.microsoft.com/office/drawing/2014/main" id="{E86EAE41-DB64-0D7C-B82F-8F59FF721B3E}"/>
+              </a:ext>
+            </a:extLst>
+          </p:cNvPr>
+          <p:cNvSpPr/>
+          <p:nvPr/>
+        </p:nvSpPr>
+        <p:spPr>
+          <a:xfrm>
+            <a:off x="3813048" y="3447288"/>
+            <a:ext cx="713232" cy="475488"/>
+          </a:xfrm>
+          <a:prstGeom prst="rect">
+            <a:avLst/>
+          </a:prstGeom>
+          <a:noFill/>
+          <a:ln/>
+        </p:spPr>
+        <p:txBody>
+          <a:bodyPr wrap="square" lIns="0" tIns="0" rIns="0" bIns="0" rtlCol="0" anchor="ctr"/>
+          <a:lstStyle/>
+          <a:p>
+            <a:pPr marL="0" indent="0" algn="ctr">
+              <a:buNone/>
+            </a:pPr>
+            <a:r>
+              <a:rPr lang="en-US" sz="1500" b="1" dirty="0">
+                <a:solidFill>
+                  <a:srgbClr val="1E2A3A"/>
+                </a:solidFill>
+                <a:latin typeface="Consolas" pitchFamily="34" charset="0"/>
+                <a:ea typeface="Consolas" pitchFamily="34" charset="-122"/>
+                <a:cs typeface="Consolas" pitchFamily="34" charset="-120"/>
+              </a:rPr>
+              <a:t>4</a:t>
+            </a:r>
+            <a:endParaRPr lang="en-US" sz="1500" dirty="0"/>
+          </a:p>
+        </p:txBody>
+      </p:sp>
+      <p:sp>
+        <p:nvSpPr>
+          <p:cNvPr id="40" name="Shape 38">
+            <a:extLst>
+              <a:ext uri="{FF2B5EF4-FFF2-40B4-BE49-F238E27FC236}">
+                <a16:creationId xmlns:a16="http://schemas.microsoft.com/office/drawing/2014/main" id="{247C35BA-A5A0-8A7C-7E23-FCCD899F2503}"/>
+              </a:ext>
+            </a:extLst>
+          </p:cNvPr>
+          <p:cNvSpPr/>
+          <p:nvPr/>
+        </p:nvSpPr>
+        <p:spPr>
+          <a:xfrm>
+            <a:off x="4526280" y="3447288"/>
+            <a:ext cx="713232" cy="475488"/>
+          </a:xfrm>
+          <a:prstGeom prst="rect">
+            <a:avLst/>
+          </a:prstGeom>
+          <a:solidFill>
+            <a:srgbClr val="C8E6C9"/>
+          </a:solidFill>
+          <a:ln w="19050">
+            <a:solidFill>
+              <a:srgbClr val="1E8449"/>
+            </a:solidFill>
+            <a:prstDash val="solid"/>
+          </a:ln>
+        </p:spPr>
+        <p:txBody>
+          <a:bodyPr/>
+          <a:lstStyle/>
+          <a:p>
+            <a:endParaRPr lang="en-US"/>
+          </a:p>
+        </p:txBody>
+      </p:sp>
+      <p:sp>
+        <p:nvSpPr>
+          <p:cNvPr id="41" name="Text 39">
+            <a:extLst>
+              <a:ext uri="{FF2B5EF4-FFF2-40B4-BE49-F238E27FC236}">
+                <a16:creationId xmlns:a16="http://schemas.microsoft.com/office/drawing/2014/main" id="{B5649133-6115-4521-1DD8-DE57F137442F}"/>
+              </a:ext>
+            </a:extLst>
+          </p:cNvPr>
+          <p:cNvSpPr/>
+          <p:nvPr/>
+        </p:nvSpPr>
+        <p:spPr>
+          <a:xfrm>
+            <a:off x="4526280" y="3447288"/>
+            <a:ext cx="713232" cy="475488"/>
+          </a:xfrm>
+          <a:prstGeom prst="rect">
+            <a:avLst/>
+          </a:prstGeom>
+          <a:noFill/>
+          <a:ln/>
+        </p:spPr>
+        <p:txBody>
+          <a:bodyPr wrap="square" lIns="0" tIns="0" rIns="0" bIns="0" rtlCol="0" anchor="ctr"/>
+          <a:lstStyle/>
+          <a:p>
+            <a:pPr marL="0" indent="0" algn="ctr">
+              <a:buNone/>
+            </a:pPr>
+            <a:r>
+              <a:rPr lang="en-US" sz="1500" b="1" dirty="0">
+                <a:solidFill>
+                  <a:srgbClr val="1E2A3A"/>
+                </a:solidFill>
+                <a:latin typeface="Consolas" pitchFamily="34" charset="0"/>
+                <a:ea typeface="Consolas" pitchFamily="34" charset="-122"/>
+                <a:cs typeface="Consolas" pitchFamily="34" charset="-120"/>
+              </a:rPr>
+              <a:t>6</a:t>
+            </a:r>
+            <a:endParaRPr lang="en-US" sz="1500" dirty="0"/>
+          </a:p>
+        </p:txBody>
+      </p:sp>
+      <p:sp>
+        <p:nvSpPr>
+          <p:cNvPr id="42" name="Shape 40">
+            <a:extLst>
+              <a:ext uri="{FF2B5EF4-FFF2-40B4-BE49-F238E27FC236}">
+                <a16:creationId xmlns:a16="http://schemas.microsoft.com/office/drawing/2014/main" id="{C2FCA523-0372-3619-2EF3-8E89166657DD}"/>
+              </a:ext>
+            </a:extLst>
+          </p:cNvPr>
+          <p:cNvSpPr/>
+          <p:nvPr/>
+        </p:nvSpPr>
+        <p:spPr>
+          <a:xfrm>
+            <a:off x="5394960" y="1220724"/>
+            <a:ext cx="3611880" cy="3273552"/>
+          </a:xfrm>
+          <a:prstGeom prst="rect">
+            <a:avLst/>
+          </a:prstGeom>
+          <a:solidFill>
+            <a:srgbClr val="1C2833"/>
+          </a:solidFill>
+          <a:ln w="12700">
+            <a:solidFill>
+              <a:srgbClr val="2C4055"/>
+            </a:solidFill>
+            <a:prstDash val="solid"/>
+          </a:ln>
+        </p:spPr>
+        <p:txBody>
+          <a:bodyPr/>
+          <a:lstStyle/>
+          <a:p>
+            <a:endParaRPr lang="en-US"/>
+          </a:p>
+        </p:txBody>
+      </p:sp>
+      <p:sp>
+        <p:nvSpPr>
+          <p:cNvPr id="43" name="Text 41">
+            <a:extLst>
+              <a:ext uri="{FF2B5EF4-FFF2-40B4-BE49-F238E27FC236}">
+                <a16:creationId xmlns:a16="http://schemas.microsoft.com/office/drawing/2014/main" id="{2BE5DF54-9B94-8A59-0D12-753A3ADFECC1}"/>
+              </a:ext>
+            </a:extLst>
+          </p:cNvPr>
+          <p:cNvSpPr/>
+          <p:nvPr/>
+        </p:nvSpPr>
+        <p:spPr>
+          <a:xfrm>
+            <a:off x="5513832" y="1312164"/>
+            <a:ext cx="3374136" cy="3090672"/>
+          </a:xfrm>
+          <a:prstGeom prst="rect">
+            <a:avLst/>
+          </a:prstGeom>
+          <a:noFill/>
+          <a:ln/>
+        </p:spPr>
+        <p:txBody>
+          <a:bodyPr wrap="square" lIns="0" tIns="0" rIns="0" bIns="0" rtlCol="0" anchor="t"/>
+          <a:lstStyle/>
+          <a:p>
+            <a:pPr marL="0" indent="0">
+              <a:buNone/>
+            </a:pPr>
+            <a:r>
+              <a:rPr lang="en-US" sz="1200" dirty="0">
+                <a:solidFill>
+                  <a:srgbClr val="A9CCE3"/>
+                </a:solidFill>
+                <a:latin typeface="Consolas" pitchFamily="34" charset="0"/>
+                <a:ea typeface="Consolas" pitchFamily="34" charset="-122"/>
+                <a:cs typeface="Consolas" pitchFamily="34" charset="-120"/>
+              </a:rPr>
+              <a:t># Sort numbers ascending</a:t>
+            </a:r>
+            <a:endParaRPr lang="en-US" sz="1200" dirty="0"/>
+          </a:p>
+          <a:p>
+            <a:pPr marL="0" indent="0">
+              <a:buNone/>
+            </a:pPr>
+            <a:r>
+              <a:rPr lang="en-US" sz="1200" dirty="0">
+                <a:solidFill>
+                  <a:srgbClr val="A9CCE3"/>
+                </a:solidFill>
+                <a:latin typeface="Consolas" pitchFamily="34" charset="0"/>
+                <a:ea typeface="Consolas" pitchFamily="34" charset="-122"/>
+                <a:cs typeface="Consolas" pitchFamily="34" charset="-120"/>
+              </a:rPr>
+              <a:t>nums = [4, 1, 6, 1, 3, 2]</a:t>
+            </a:r>
+            <a:endParaRPr lang="en-US" sz="1200" dirty="0"/>
+          </a:p>
+          <a:p>
+            <a:pPr marL="0" indent="0">
+              <a:buNone/>
+            </a:pPr>
+            <a:r>
+              <a:rPr lang="en-US" sz="1200" dirty="0">
+                <a:solidFill>
+                  <a:srgbClr val="A9CCE3"/>
+                </a:solidFill>
+                <a:latin typeface="Consolas" pitchFamily="34" charset="0"/>
+                <a:ea typeface="Consolas" pitchFamily="34" charset="-122"/>
+                <a:cs typeface="Consolas" pitchFamily="34" charset="-120"/>
+              </a:rPr>
+              <a:t>nums.sort()</a:t>
+            </a:r>
+            <a:endParaRPr lang="en-US" sz="1200" dirty="0"/>
+          </a:p>
+          <a:p>
+            <a:pPr marL="0" indent="0">
+              <a:buNone/>
+            </a:pPr>
+            <a:r>
+              <a:rPr lang="en-US" sz="1200" dirty="0">
+                <a:solidFill>
+                  <a:srgbClr val="A9CCE3"/>
+                </a:solidFill>
+                <a:latin typeface="Consolas" pitchFamily="34" charset="0"/>
+                <a:ea typeface="Consolas" pitchFamily="34" charset="-122"/>
+                <a:cs typeface="Consolas" pitchFamily="34" charset="-120"/>
+              </a:rPr>
+              <a:t>print(nums)  # [1, 1, 2, 3, 4, 6]</a:t>
+            </a:r>
+            <a:endParaRPr lang="en-US" sz="1200" dirty="0"/>
+          </a:p>
+          <a:p>
+            <a:pPr marL="0" indent="0">
+              <a:buNone/>
+            </a:pPr>
+            <a:endParaRPr lang="en-US" sz="1200" dirty="0"/>
+          </a:p>
+          <a:p>
+            <a:pPr marL="0" indent="0">
+              <a:buNone/>
+            </a:pPr>
+            <a:r>
+              <a:rPr lang="en-US" sz="1200" dirty="0">
+                <a:solidFill>
+                  <a:srgbClr val="A9CCE3"/>
+                </a:solidFill>
+                <a:latin typeface="Consolas" pitchFamily="34" charset="0"/>
+                <a:ea typeface="Consolas" pitchFamily="34" charset="-122"/>
+                <a:cs typeface="Consolas" pitchFamily="34" charset="-120"/>
+              </a:rPr>
+              <a:t># Sort descending</a:t>
+            </a:r>
+            <a:endParaRPr lang="en-US" sz="1200" dirty="0"/>
+          </a:p>
+          <a:p>
+            <a:pPr marL="0" indent="0">
+              <a:buNone/>
+            </a:pPr>
+            <a:r>
+              <a:rPr lang="en-US" sz="1200" dirty="0">
+                <a:solidFill>
+                  <a:srgbClr val="A9CCE3"/>
+                </a:solidFill>
+                <a:latin typeface="Consolas" pitchFamily="34" charset="0"/>
+                <a:ea typeface="Consolas" pitchFamily="34" charset="-122"/>
+                <a:cs typeface="Consolas" pitchFamily="34" charset="-120"/>
+              </a:rPr>
+              <a:t>nums.sort()</a:t>
+            </a:r>
+            <a:endParaRPr lang="en-US" sz="1200" dirty="0"/>
+          </a:p>
+          <a:p>
+            <a:pPr marL="0" indent="0">
+              <a:buNone/>
+            </a:pPr>
+            <a:r>
+              <a:rPr lang="en-US" sz="1200" dirty="0">
+                <a:solidFill>
+                  <a:srgbClr val="A9CCE3"/>
+                </a:solidFill>
+                <a:latin typeface="Consolas" pitchFamily="34" charset="0"/>
+                <a:ea typeface="Consolas" pitchFamily="34" charset="-122"/>
+                <a:cs typeface="Consolas" pitchFamily="34" charset="-120"/>
+              </a:rPr>
+              <a:t>nums.reverse()</a:t>
+            </a:r>
+            <a:endParaRPr lang="en-US" sz="1200" dirty="0"/>
+          </a:p>
+          <a:p>
+            <a:pPr marL="0" indent="0">
+              <a:buNone/>
+            </a:pPr>
+            <a:r>
+              <a:rPr lang="en-US" sz="1200" dirty="0">
+                <a:solidFill>
+                  <a:srgbClr val="A9CCE3"/>
+                </a:solidFill>
+                <a:latin typeface="Consolas" pitchFamily="34" charset="0"/>
+                <a:ea typeface="Consolas" pitchFamily="34" charset="-122"/>
+                <a:cs typeface="Consolas" pitchFamily="34" charset="-120"/>
+              </a:rPr>
+              <a:t>print(nums)  # [6, 4, 3, 2, 1, 1]</a:t>
+            </a:r>
+          </a:p>
+          <a:p>
+            <a:pPr marL="0" indent="0">
+              <a:buNone/>
+            </a:pPr>
+            <a:endParaRPr lang="en-US" sz="1200" dirty="0"/>
+          </a:p>
+        </p:txBody>
+      </p:sp>
+      <p:sp>
+        <p:nvSpPr>
+          <p:cNvPr id="44" name="Down Arrow 43">
+            <a:extLst>
+              <a:ext uri="{FF2B5EF4-FFF2-40B4-BE49-F238E27FC236}">
+                <a16:creationId xmlns:a16="http://schemas.microsoft.com/office/drawing/2014/main" id="{FE01ACA3-ECAB-D7A2-E826-E32F202DED3A}"/>
+              </a:ext>
+            </a:extLst>
+          </p:cNvPr>
+          <p:cNvSpPr/>
+          <p:nvPr/>
+        </p:nvSpPr>
+        <p:spPr>
+          <a:xfrm>
+            <a:off x="2881140" y="2174971"/>
+            <a:ext cx="133592" cy="1099882"/>
+          </a:xfrm>
+          <a:prstGeom prst="downArrow">
+            <a:avLst/>
+          </a:prstGeom>
+          <a:solidFill>
+            <a:schemeClr val="accent5">
+              <a:lumMod val="40000"/>
+              <a:lumOff val="60000"/>
+            </a:schemeClr>
+          </a:solidFill>
+          <a:ln>
+            <a:noFill/>
+          </a:ln>
+        </p:spPr>
+        <p:style>
+          <a:lnRef idx="2">
+            <a:schemeClr val="accent1">
+              <a:shade val="15000"/>
+            </a:schemeClr>
+          </a:lnRef>
+          <a:fillRef idx="1">
+            <a:schemeClr val="accent1"/>
+          </a:fillRef>
+          <a:effectRef idx="0">
+            <a:schemeClr val="accent1"/>
+          </a:effectRef>
+          <a:fontRef idx="minor">
+            <a:schemeClr val="lt1"/>
+          </a:fontRef>
+        </p:style>
+        <p:txBody>
+          <a:bodyPr rtlCol="0" anchor="ctr"/>
+          <a:lstStyle/>
+          <a:p>
+            <a:pPr algn="ctr"/>
+            <a:endParaRPr lang="en-US" dirty="0"/>
+          </a:p>
+        </p:txBody>
+      </p:sp>
+    </p:spTree>
+    <p:extLst>
+      <p:ext uri="{BB962C8B-B14F-4D97-AF65-F5344CB8AC3E}">
+        <p14:creationId xmlns:p14="http://schemas.microsoft.com/office/powerpoint/2010/main" val="2689411123"/>
+      </p:ext>
+    </p:extLst>
+  </p:cSld>
+  <p:clrMapOvr>
+    <a:masterClrMapping/>
+  </p:clrMapOvr>
+</p:sld>
+</file>
+
+<file path=ppt/slides/slide22.xml><?xml version="1.0" encoding="utf-8"?>
+<p:sld xmlns:a="http://schemas.openxmlformats.org/drawingml/2006/main" xmlns:r="http://schemas.openxmlformats.org/officeDocument/2006/relationships" xmlns:p="http://schemas.openxmlformats.org/presentationml/2006/main">
+  <p:cSld>
+    <p:bg>
+      <p:bgPr>
+        <a:solidFill>
+          <a:srgbClr val="F4F8FB"/>
+        </a:solidFill>
+        <a:effectLst/>
+      </p:bgPr>
+    </p:bg>
+    <p:spTree>
+      <p:nvGrpSpPr>
+        <p:cNvPr id="1" name="">
+          <a:extLst>
+            <a:ext uri="{FF2B5EF4-FFF2-40B4-BE49-F238E27FC236}">
+              <a16:creationId xmlns:a16="http://schemas.microsoft.com/office/drawing/2014/main" id="{C68D1401-B689-3BB0-9A7B-A1661A0B4A8F}"/>
+            </a:ext>
+          </a:extLst>
+        </p:cNvPr>
+        <p:cNvGrpSpPr/>
+        <p:nvPr/>
+      </p:nvGrpSpPr>
+      <p:grpSpPr>
+        <a:xfrm>
+          <a:off x="0" y="0"/>
+          <a:ext cx="0" cy="0"/>
+          <a:chOff x="0" y="0"/>
+          <a:chExt cx="0" cy="0"/>
+        </a:xfrm>
+      </p:grpSpPr>
+      <p:sp>
+        <p:nvSpPr>
+          <p:cNvPr id="2" name="Shape 0">
+            <a:extLst>
+              <a:ext uri="{FF2B5EF4-FFF2-40B4-BE49-F238E27FC236}">
+                <a16:creationId xmlns:a16="http://schemas.microsoft.com/office/drawing/2014/main" id="{43259579-165E-78EB-248C-7D05941705A2}"/>
+              </a:ext>
+            </a:extLst>
+          </p:cNvPr>
+          <p:cNvSpPr/>
+          <p:nvPr/>
+        </p:nvSpPr>
+        <p:spPr>
+          <a:xfrm>
+            <a:off x="0" y="0"/>
+            <a:ext cx="9144000" cy="658368"/>
+          </a:xfrm>
+          <a:prstGeom prst="rect">
+            <a:avLst/>
+          </a:prstGeom>
+          <a:solidFill>
+            <a:srgbClr val="1E2A3A"/>
+          </a:solidFill>
+          <a:ln w="12700">
+            <a:solidFill>
+              <a:srgbClr val="1E2A3A"/>
+            </a:solidFill>
+            <a:prstDash val="solid"/>
+          </a:ln>
+        </p:spPr>
+        <p:txBody>
+          <a:bodyPr/>
+          <a:lstStyle/>
+          <a:p>
+            <a:endParaRPr lang="en-US"/>
+          </a:p>
+        </p:txBody>
+      </p:sp>
+      <p:sp>
+        <p:nvSpPr>
+          <p:cNvPr id="3" name="Shape 1">
+            <a:extLst>
+              <a:ext uri="{FF2B5EF4-FFF2-40B4-BE49-F238E27FC236}">
+                <a16:creationId xmlns:a16="http://schemas.microsoft.com/office/drawing/2014/main" id="{1E5F75AF-9F16-182E-428C-8C519DAEE53D}"/>
+              </a:ext>
+            </a:extLst>
+          </p:cNvPr>
+          <p:cNvSpPr/>
+          <p:nvPr/>
+        </p:nvSpPr>
+        <p:spPr>
+          <a:xfrm>
+            <a:off x="0" y="0"/>
+            <a:ext cx="182880" cy="658368"/>
+          </a:xfrm>
+          <a:prstGeom prst="rect">
+            <a:avLst/>
+          </a:prstGeom>
+          <a:solidFill>
+            <a:srgbClr val="1ABC9C"/>
+          </a:solidFill>
+          <a:ln w="12700">
+            <a:solidFill>
+              <a:srgbClr val="1ABC9C"/>
+            </a:solidFill>
+            <a:prstDash val="solid"/>
+          </a:ln>
+        </p:spPr>
+        <p:txBody>
+          <a:bodyPr/>
+          <a:lstStyle/>
+          <a:p>
+            <a:endParaRPr lang="en-US"/>
+          </a:p>
+        </p:txBody>
+      </p:sp>
+      <p:sp>
+        <p:nvSpPr>
+          <p:cNvPr id="4" name="Text 2">
+            <a:extLst>
+              <a:ext uri="{FF2B5EF4-FFF2-40B4-BE49-F238E27FC236}">
+                <a16:creationId xmlns:a16="http://schemas.microsoft.com/office/drawing/2014/main" id="{5C12C244-AE14-4CB5-3066-3A531A8BDC45}"/>
+              </a:ext>
+            </a:extLst>
+          </p:cNvPr>
+          <p:cNvSpPr/>
+          <p:nvPr/>
+        </p:nvSpPr>
+        <p:spPr>
+          <a:xfrm>
+            <a:off x="320040" y="0"/>
+            <a:ext cx="8686800" cy="658368"/>
+          </a:xfrm>
+          <a:prstGeom prst="rect">
+            <a:avLst/>
+          </a:prstGeom>
+          <a:noFill/>
+          <a:ln/>
+        </p:spPr>
+        <p:txBody>
+          <a:bodyPr wrap="square" lIns="0" tIns="0" rIns="0" bIns="0" rtlCol="0" anchor="ctr"/>
+          <a:lstStyle/>
+          <a:p>
+            <a:pPr marL="0" indent="0">
+              <a:buNone/>
+            </a:pPr>
+            <a:r>
+              <a:rPr lang="en-US" sz="2500" b="1" dirty="0">
+                <a:solidFill>
+                  <a:srgbClr val="FFFFFF"/>
+                </a:solidFill>
+                <a:latin typeface="Calibri" pitchFamily="34" charset="0"/>
+                <a:ea typeface="Calibri" pitchFamily="34" charset="-122"/>
+                <a:cs typeface="Calibri" pitchFamily="34" charset="-120"/>
+              </a:rPr>
+              <a:t>Sorting Lists</a:t>
+            </a:r>
+            <a:endParaRPr lang="en-US" sz="2500" dirty="0"/>
+          </a:p>
+        </p:txBody>
+      </p:sp>
+      <p:sp>
+        <p:nvSpPr>
+          <p:cNvPr id="5" name="Text 3">
+            <a:extLst>
+              <a:ext uri="{FF2B5EF4-FFF2-40B4-BE49-F238E27FC236}">
+                <a16:creationId xmlns:a16="http://schemas.microsoft.com/office/drawing/2014/main" id="{D0E05697-B0FE-5CA2-7434-37E5A1F816F6}"/>
+              </a:ext>
+            </a:extLst>
+          </p:cNvPr>
+          <p:cNvSpPr/>
+          <p:nvPr/>
+        </p:nvSpPr>
+        <p:spPr>
+          <a:xfrm>
+            <a:off x="320040" y="768096"/>
+            <a:ext cx="8503920" cy="365760"/>
+          </a:xfrm>
+          <a:prstGeom prst="rect">
+            <a:avLst/>
+          </a:prstGeom>
+          <a:noFill/>
+          <a:ln/>
+        </p:spPr>
+        <p:txBody>
+          <a:bodyPr wrap="square" lIns="0" tIns="0" rIns="0" bIns="0" rtlCol="0" anchor="ctr"/>
+          <a:lstStyle/>
+          <a:p>
+            <a:pPr marL="0" indent="0">
+              <a:buNone/>
+            </a:pPr>
+            <a:r>
+              <a:rPr lang="en-US" sz="1500" dirty="0">
+                <a:solidFill>
+                  <a:srgbClr val="1B2631"/>
+                </a:solidFill>
+                <a:latin typeface="Calibri" pitchFamily="34" charset="0"/>
+                <a:ea typeface="Calibri" pitchFamily="34" charset="-122"/>
+                <a:cs typeface="Calibri" pitchFamily="34" charset="-120"/>
+              </a:rPr>
+              <a:t>L.sort()  rearranges the list into ascending order — in-place, no copy.</a:t>
+            </a:r>
+            <a:endParaRPr lang="en-US" sz="1500" dirty="0"/>
+          </a:p>
+        </p:txBody>
+      </p:sp>
+      <p:sp>
+        <p:nvSpPr>
+          <p:cNvPr id="6" name="Text 4">
+            <a:extLst>
+              <a:ext uri="{FF2B5EF4-FFF2-40B4-BE49-F238E27FC236}">
+                <a16:creationId xmlns:a16="http://schemas.microsoft.com/office/drawing/2014/main" id="{BE3104B1-848B-274A-67B1-B6068ABCBBB1}"/>
+              </a:ext>
+            </a:extLst>
+          </p:cNvPr>
+          <p:cNvSpPr/>
+          <p:nvPr/>
+        </p:nvSpPr>
+        <p:spPr>
+          <a:xfrm>
+            <a:off x="320040" y="1234440"/>
+            <a:ext cx="2560320" cy="274320"/>
+          </a:xfrm>
+          <a:prstGeom prst="rect">
+            <a:avLst/>
+          </a:prstGeom>
+          <a:noFill/>
+          <a:ln/>
+        </p:spPr>
+        <p:txBody>
+          <a:bodyPr wrap="square" lIns="0" tIns="0" rIns="0" bIns="0" rtlCol="0" anchor="ctr"/>
+          <a:lstStyle/>
+          <a:p>
+            <a:pPr marL="0" indent="0">
+              <a:buNone/>
+            </a:pPr>
+            <a:r>
+              <a:rPr lang="en-US" sz="1200" b="1" dirty="0">
+                <a:solidFill>
+                  <a:srgbClr val="4A6080"/>
+                </a:solidFill>
+                <a:latin typeface="Calibri" pitchFamily="34" charset="0"/>
+                <a:ea typeface="Calibri" pitchFamily="34" charset="-122"/>
+                <a:cs typeface="Calibri" pitchFamily="34" charset="-120"/>
+              </a:rPr>
+              <a:t>Before  .sort():</a:t>
+            </a:r>
+            <a:endParaRPr lang="en-US" sz="1200" dirty="0"/>
+          </a:p>
+        </p:txBody>
+      </p:sp>
+      <p:sp>
+        <p:nvSpPr>
+          <p:cNvPr id="7" name="Text 5">
+            <a:extLst>
+              <a:ext uri="{FF2B5EF4-FFF2-40B4-BE49-F238E27FC236}">
+                <a16:creationId xmlns:a16="http://schemas.microsoft.com/office/drawing/2014/main" id="{C7FBEFE7-78F4-FD20-49EC-D13EFC698AD3}"/>
+              </a:ext>
+            </a:extLst>
+          </p:cNvPr>
+          <p:cNvSpPr/>
+          <p:nvPr/>
+        </p:nvSpPr>
+        <p:spPr>
+          <a:xfrm>
+            <a:off x="0" y="1645920"/>
+            <a:ext cx="914400" cy="292608"/>
+          </a:xfrm>
+          <a:prstGeom prst="rect">
+            <a:avLst/>
+          </a:prstGeom>
+          <a:noFill/>
+          <a:ln/>
+        </p:spPr>
+        <p:txBody>
+          <a:bodyPr wrap="square" lIns="0" tIns="0" rIns="0" bIns="0" rtlCol="0" anchor="ctr"/>
+          <a:lstStyle/>
+          <a:p>
+            <a:pPr marL="0" indent="0" algn="r">
+              <a:buNone/>
+            </a:pPr>
+            <a:r>
+              <a:rPr lang="en-US" sz="1300" b="1" dirty="0">
+                <a:solidFill>
+                  <a:srgbClr val="1B2631"/>
+                </a:solidFill>
+                <a:latin typeface="Consolas" pitchFamily="34" charset="0"/>
+                <a:ea typeface="Consolas" pitchFamily="34" charset="-122"/>
+                <a:cs typeface="Consolas" pitchFamily="34" charset="-120"/>
+              </a:rPr>
+              <a:t>nums =</a:t>
+            </a:r>
+            <a:endParaRPr lang="en-US" sz="1300" dirty="0"/>
+          </a:p>
+        </p:txBody>
+      </p:sp>
+      <p:sp>
+        <p:nvSpPr>
+          <p:cNvPr id="8" name="Text 6">
+            <a:extLst>
+              <a:ext uri="{FF2B5EF4-FFF2-40B4-BE49-F238E27FC236}">
+                <a16:creationId xmlns:a16="http://schemas.microsoft.com/office/drawing/2014/main" id="{63E89775-CC18-96A0-67B4-76EED74FFB3D}"/>
+              </a:ext>
+            </a:extLst>
+          </p:cNvPr>
+          <p:cNvSpPr/>
+          <p:nvPr/>
+        </p:nvSpPr>
+        <p:spPr>
+          <a:xfrm>
+            <a:off x="960120" y="1298448"/>
+            <a:ext cx="713232" cy="228600"/>
+          </a:xfrm>
+          <a:prstGeom prst="rect">
+            <a:avLst/>
+          </a:prstGeom>
+          <a:noFill/>
+          <a:ln/>
+        </p:spPr>
+        <p:txBody>
+          <a:bodyPr wrap="square" lIns="0" tIns="0" rIns="0" bIns="0" rtlCol="0" anchor="ctr"/>
+          <a:lstStyle/>
+          <a:p>
+            <a:pPr marL="0" indent="0" algn="ctr">
+              <a:buNone/>
+            </a:pPr>
+            <a:r>
+              <a:rPr lang="en-US" sz="1100" b="1" dirty="0">
+                <a:solidFill>
+                  <a:srgbClr val="2E86C1"/>
+                </a:solidFill>
+                <a:latin typeface="Calibri" pitchFamily="34" charset="0"/>
+                <a:ea typeface="Calibri" pitchFamily="34" charset="-122"/>
+                <a:cs typeface="Calibri" pitchFamily="34" charset="-120"/>
+              </a:rPr>
+              <a:t>0</a:t>
+            </a:r>
+            <a:endParaRPr lang="en-US" sz="1100" dirty="0"/>
+          </a:p>
+        </p:txBody>
+      </p:sp>
+      <p:sp>
+        <p:nvSpPr>
+          <p:cNvPr id="9" name="Shape 7">
+            <a:extLst>
+              <a:ext uri="{FF2B5EF4-FFF2-40B4-BE49-F238E27FC236}">
+                <a16:creationId xmlns:a16="http://schemas.microsoft.com/office/drawing/2014/main" id="{13D4A0DA-6BA0-44C2-BF41-556F5E07B109}"/>
+              </a:ext>
+            </a:extLst>
+          </p:cNvPr>
+          <p:cNvSpPr/>
+          <p:nvPr/>
+        </p:nvSpPr>
+        <p:spPr>
+          <a:xfrm>
+            <a:off x="960120" y="1554480"/>
+            <a:ext cx="713232" cy="475488"/>
+          </a:xfrm>
+          <a:prstGeom prst="rect">
+            <a:avLst/>
+          </a:prstGeom>
+          <a:solidFill>
+            <a:srgbClr val="D6EAF8"/>
+          </a:solidFill>
+          <a:ln w="19050">
+            <a:solidFill>
+              <a:srgbClr val="2E86C1"/>
+            </a:solidFill>
+            <a:prstDash val="solid"/>
+          </a:ln>
+        </p:spPr>
+        <p:txBody>
+          <a:bodyPr/>
+          <a:lstStyle/>
+          <a:p>
+            <a:endParaRPr lang="en-US"/>
+          </a:p>
+        </p:txBody>
+      </p:sp>
+      <p:sp>
+        <p:nvSpPr>
+          <p:cNvPr id="10" name="Text 8">
+            <a:extLst>
+              <a:ext uri="{FF2B5EF4-FFF2-40B4-BE49-F238E27FC236}">
+                <a16:creationId xmlns:a16="http://schemas.microsoft.com/office/drawing/2014/main" id="{3FD2986B-4DC5-9485-C4E3-7B2A13F35FE3}"/>
+              </a:ext>
+            </a:extLst>
+          </p:cNvPr>
+          <p:cNvSpPr/>
+          <p:nvPr/>
+        </p:nvSpPr>
+        <p:spPr>
+          <a:xfrm>
+            <a:off x="960120" y="1554480"/>
+            <a:ext cx="713232" cy="475488"/>
+          </a:xfrm>
+          <a:prstGeom prst="rect">
+            <a:avLst/>
+          </a:prstGeom>
+          <a:noFill/>
+          <a:ln/>
+        </p:spPr>
+        <p:txBody>
+          <a:bodyPr wrap="square" lIns="0" tIns="0" rIns="0" bIns="0" rtlCol="0" anchor="ctr"/>
+          <a:lstStyle/>
+          <a:p>
+            <a:pPr marL="0" indent="0" algn="ctr">
+              <a:buNone/>
+            </a:pPr>
+            <a:r>
+              <a:rPr lang="en-US" sz="1500" b="1" dirty="0">
+                <a:solidFill>
+                  <a:srgbClr val="1E2A3A"/>
+                </a:solidFill>
+                <a:latin typeface="Consolas" pitchFamily="34" charset="0"/>
+                <a:ea typeface="Consolas" pitchFamily="34" charset="-122"/>
+                <a:cs typeface="Consolas" pitchFamily="34" charset="-120"/>
+              </a:rPr>
+              <a:t>4</a:t>
+            </a:r>
+            <a:endParaRPr lang="en-US" sz="1500" dirty="0"/>
+          </a:p>
+        </p:txBody>
+      </p:sp>
+      <p:sp>
+        <p:nvSpPr>
+          <p:cNvPr id="11" name="Text 9">
+            <a:extLst>
+              <a:ext uri="{FF2B5EF4-FFF2-40B4-BE49-F238E27FC236}">
+                <a16:creationId xmlns:a16="http://schemas.microsoft.com/office/drawing/2014/main" id="{33B72275-7B2F-02AA-A9CD-CE1E5D1C3EBB}"/>
+              </a:ext>
+            </a:extLst>
+          </p:cNvPr>
+          <p:cNvSpPr/>
+          <p:nvPr/>
+        </p:nvSpPr>
+        <p:spPr>
+          <a:xfrm>
+            <a:off x="1673352" y="1298448"/>
+            <a:ext cx="713232" cy="228600"/>
+          </a:xfrm>
+          <a:prstGeom prst="rect">
+            <a:avLst/>
+          </a:prstGeom>
+          <a:noFill/>
+          <a:ln/>
+        </p:spPr>
+        <p:txBody>
+          <a:bodyPr wrap="square" lIns="0" tIns="0" rIns="0" bIns="0" rtlCol="0" anchor="ctr"/>
+          <a:lstStyle/>
+          <a:p>
+            <a:pPr marL="0" indent="0" algn="ctr">
+              <a:buNone/>
+            </a:pPr>
+            <a:r>
+              <a:rPr lang="en-US" sz="1100" b="1" dirty="0">
+                <a:solidFill>
+                  <a:srgbClr val="2E86C1"/>
+                </a:solidFill>
+                <a:latin typeface="Calibri" pitchFamily="34" charset="0"/>
+                <a:ea typeface="Calibri" pitchFamily="34" charset="-122"/>
+                <a:cs typeface="Calibri" pitchFamily="34" charset="-120"/>
+              </a:rPr>
+              <a:t>1</a:t>
+            </a:r>
+            <a:endParaRPr lang="en-US" sz="1100" dirty="0"/>
+          </a:p>
+        </p:txBody>
+      </p:sp>
+      <p:sp>
+        <p:nvSpPr>
+          <p:cNvPr id="12" name="Shape 10">
+            <a:extLst>
+              <a:ext uri="{FF2B5EF4-FFF2-40B4-BE49-F238E27FC236}">
+                <a16:creationId xmlns:a16="http://schemas.microsoft.com/office/drawing/2014/main" id="{7E6E44A6-EC0D-68E5-E3DB-C000CEDF81CE}"/>
+              </a:ext>
+            </a:extLst>
+          </p:cNvPr>
+          <p:cNvSpPr/>
+          <p:nvPr/>
+        </p:nvSpPr>
+        <p:spPr>
+          <a:xfrm>
+            <a:off x="1673352" y="1554480"/>
+            <a:ext cx="713232" cy="475488"/>
+          </a:xfrm>
+          <a:prstGeom prst="rect">
+            <a:avLst/>
+          </a:prstGeom>
+          <a:solidFill>
+            <a:srgbClr val="D6EAF8"/>
+          </a:solidFill>
+          <a:ln w="19050">
+            <a:solidFill>
+              <a:srgbClr val="2E86C1"/>
+            </a:solidFill>
+            <a:prstDash val="solid"/>
+          </a:ln>
+        </p:spPr>
+        <p:txBody>
+          <a:bodyPr/>
+          <a:lstStyle/>
+          <a:p>
+            <a:endParaRPr lang="en-US"/>
+          </a:p>
+        </p:txBody>
+      </p:sp>
+      <p:sp>
+        <p:nvSpPr>
+          <p:cNvPr id="13" name="Text 11">
+            <a:extLst>
+              <a:ext uri="{FF2B5EF4-FFF2-40B4-BE49-F238E27FC236}">
+                <a16:creationId xmlns:a16="http://schemas.microsoft.com/office/drawing/2014/main" id="{3B171433-6E15-9F62-F072-2FA7AA97FEF2}"/>
+              </a:ext>
+            </a:extLst>
+          </p:cNvPr>
+          <p:cNvSpPr/>
+          <p:nvPr/>
+        </p:nvSpPr>
+        <p:spPr>
+          <a:xfrm>
+            <a:off x="1673352" y="1554480"/>
+            <a:ext cx="713232" cy="475488"/>
+          </a:xfrm>
+          <a:prstGeom prst="rect">
+            <a:avLst/>
+          </a:prstGeom>
+          <a:noFill/>
+          <a:ln/>
+        </p:spPr>
+        <p:txBody>
+          <a:bodyPr wrap="square" lIns="0" tIns="0" rIns="0" bIns="0" rtlCol="0" anchor="ctr"/>
+          <a:lstStyle/>
+          <a:p>
+            <a:pPr marL="0" indent="0" algn="ctr">
+              <a:buNone/>
+            </a:pPr>
+            <a:r>
+              <a:rPr lang="en-US" sz="1500" b="1" dirty="0">
+                <a:solidFill>
+                  <a:srgbClr val="1E2A3A"/>
+                </a:solidFill>
+                <a:latin typeface="Consolas" pitchFamily="34" charset="0"/>
+                <a:ea typeface="Consolas" pitchFamily="34" charset="-122"/>
+                <a:cs typeface="Consolas" pitchFamily="34" charset="-120"/>
+              </a:rPr>
+              <a:t>1</a:t>
+            </a:r>
+            <a:endParaRPr lang="en-US" sz="1500" dirty="0"/>
+          </a:p>
+        </p:txBody>
+      </p:sp>
+      <p:sp>
+        <p:nvSpPr>
+          <p:cNvPr id="14" name="Text 12">
+            <a:extLst>
+              <a:ext uri="{FF2B5EF4-FFF2-40B4-BE49-F238E27FC236}">
+                <a16:creationId xmlns:a16="http://schemas.microsoft.com/office/drawing/2014/main" id="{3EB11EA7-DD12-58D6-28E3-32647A8E8B2B}"/>
+              </a:ext>
+            </a:extLst>
+          </p:cNvPr>
+          <p:cNvSpPr/>
+          <p:nvPr/>
+        </p:nvSpPr>
+        <p:spPr>
+          <a:xfrm>
+            <a:off x="2386584" y="1298448"/>
+            <a:ext cx="713232" cy="228600"/>
+          </a:xfrm>
+          <a:prstGeom prst="rect">
+            <a:avLst/>
+          </a:prstGeom>
+          <a:noFill/>
+          <a:ln/>
+        </p:spPr>
+        <p:txBody>
+          <a:bodyPr wrap="square" lIns="0" tIns="0" rIns="0" bIns="0" rtlCol="0" anchor="ctr"/>
+          <a:lstStyle/>
+          <a:p>
+            <a:pPr marL="0" indent="0" algn="ctr">
+              <a:buNone/>
+            </a:pPr>
+            <a:r>
+              <a:rPr lang="en-US" sz="1100" b="1" dirty="0">
+                <a:solidFill>
+                  <a:srgbClr val="2E86C1"/>
+                </a:solidFill>
+                <a:latin typeface="Calibri" pitchFamily="34" charset="0"/>
+                <a:ea typeface="Calibri" pitchFamily="34" charset="-122"/>
+                <a:cs typeface="Calibri" pitchFamily="34" charset="-120"/>
+              </a:rPr>
+              <a:t>2</a:t>
+            </a:r>
+            <a:endParaRPr lang="en-US" sz="1100" dirty="0"/>
+          </a:p>
+        </p:txBody>
+      </p:sp>
+      <p:sp>
+        <p:nvSpPr>
+          <p:cNvPr id="15" name="Shape 13">
+            <a:extLst>
+              <a:ext uri="{FF2B5EF4-FFF2-40B4-BE49-F238E27FC236}">
+                <a16:creationId xmlns:a16="http://schemas.microsoft.com/office/drawing/2014/main" id="{B07C5F63-53E8-C0B5-64F2-5873C8109FC1}"/>
+              </a:ext>
+            </a:extLst>
+          </p:cNvPr>
+          <p:cNvSpPr/>
+          <p:nvPr/>
+        </p:nvSpPr>
+        <p:spPr>
+          <a:xfrm>
+            <a:off x="2386584" y="1554480"/>
+            <a:ext cx="713232" cy="475488"/>
+          </a:xfrm>
+          <a:prstGeom prst="rect">
+            <a:avLst/>
+          </a:prstGeom>
+          <a:solidFill>
+            <a:srgbClr val="D6EAF8"/>
+          </a:solidFill>
+          <a:ln w="19050">
+            <a:solidFill>
+              <a:srgbClr val="2E86C1"/>
+            </a:solidFill>
+            <a:prstDash val="solid"/>
+          </a:ln>
+        </p:spPr>
+        <p:txBody>
+          <a:bodyPr/>
+          <a:lstStyle/>
+          <a:p>
+            <a:endParaRPr lang="en-US"/>
+          </a:p>
+        </p:txBody>
+      </p:sp>
+      <p:sp>
+        <p:nvSpPr>
+          <p:cNvPr id="16" name="Text 14">
+            <a:extLst>
+              <a:ext uri="{FF2B5EF4-FFF2-40B4-BE49-F238E27FC236}">
+                <a16:creationId xmlns:a16="http://schemas.microsoft.com/office/drawing/2014/main" id="{08749621-0D1F-73B9-4C26-4B910B6E3E9A}"/>
+              </a:ext>
+            </a:extLst>
+          </p:cNvPr>
+          <p:cNvSpPr/>
+          <p:nvPr/>
+        </p:nvSpPr>
+        <p:spPr>
+          <a:xfrm>
+            <a:off x="2386584" y="1554480"/>
+            <a:ext cx="713232" cy="475488"/>
+          </a:xfrm>
+          <a:prstGeom prst="rect">
+            <a:avLst/>
+          </a:prstGeom>
+          <a:noFill/>
+          <a:ln/>
+        </p:spPr>
+        <p:txBody>
+          <a:bodyPr wrap="square" lIns="0" tIns="0" rIns="0" bIns="0" rtlCol="0" anchor="ctr"/>
+          <a:lstStyle/>
+          <a:p>
+            <a:pPr marL="0" indent="0" algn="ctr">
+              <a:buNone/>
+            </a:pPr>
+            <a:r>
+              <a:rPr lang="en-US" sz="1500" b="1" dirty="0">
+                <a:solidFill>
+                  <a:srgbClr val="1E2A3A"/>
+                </a:solidFill>
+                <a:latin typeface="Consolas" pitchFamily="34" charset="0"/>
+                <a:ea typeface="Consolas" pitchFamily="34" charset="-122"/>
+                <a:cs typeface="Consolas" pitchFamily="34" charset="-120"/>
+              </a:rPr>
+              <a:t>6</a:t>
+            </a:r>
+            <a:endParaRPr lang="en-US" sz="1500" dirty="0"/>
+          </a:p>
+        </p:txBody>
+      </p:sp>
+      <p:sp>
+        <p:nvSpPr>
+          <p:cNvPr id="17" name="Text 15">
+            <a:extLst>
+              <a:ext uri="{FF2B5EF4-FFF2-40B4-BE49-F238E27FC236}">
+                <a16:creationId xmlns:a16="http://schemas.microsoft.com/office/drawing/2014/main" id="{F1F237C5-5565-2C86-E364-17D5A11E2D97}"/>
+              </a:ext>
+            </a:extLst>
+          </p:cNvPr>
+          <p:cNvSpPr/>
+          <p:nvPr/>
+        </p:nvSpPr>
+        <p:spPr>
+          <a:xfrm>
+            <a:off x="3099816" y="1298448"/>
+            <a:ext cx="713232" cy="228600"/>
+          </a:xfrm>
+          <a:prstGeom prst="rect">
+            <a:avLst/>
+          </a:prstGeom>
+          <a:noFill/>
+          <a:ln/>
+        </p:spPr>
+        <p:txBody>
+          <a:bodyPr wrap="square" lIns="0" tIns="0" rIns="0" bIns="0" rtlCol="0" anchor="ctr"/>
+          <a:lstStyle/>
+          <a:p>
+            <a:pPr marL="0" indent="0" algn="ctr">
+              <a:buNone/>
+            </a:pPr>
+            <a:r>
+              <a:rPr lang="en-US" sz="1100" b="1" dirty="0">
+                <a:solidFill>
+                  <a:srgbClr val="2E86C1"/>
+                </a:solidFill>
+                <a:latin typeface="Calibri" pitchFamily="34" charset="0"/>
+                <a:ea typeface="Calibri" pitchFamily="34" charset="-122"/>
+                <a:cs typeface="Calibri" pitchFamily="34" charset="-120"/>
+              </a:rPr>
+              <a:t>3</a:t>
+            </a:r>
+            <a:endParaRPr lang="en-US" sz="1100" dirty="0"/>
+          </a:p>
+        </p:txBody>
+      </p:sp>
+      <p:sp>
+        <p:nvSpPr>
+          <p:cNvPr id="18" name="Shape 16">
+            <a:extLst>
+              <a:ext uri="{FF2B5EF4-FFF2-40B4-BE49-F238E27FC236}">
+                <a16:creationId xmlns:a16="http://schemas.microsoft.com/office/drawing/2014/main" id="{CDDB7046-BDAF-EC0C-6318-EF54F71D8F77}"/>
+              </a:ext>
+            </a:extLst>
+          </p:cNvPr>
+          <p:cNvSpPr/>
+          <p:nvPr/>
+        </p:nvSpPr>
+        <p:spPr>
+          <a:xfrm>
+            <a:off x="3099816" y="1554480"/>
+            <a:ext cx="713232" cy="475488"/>
+          </a:xfrm>
+          <a:prstGeom prst="rect">
+            <a:avLst/>
+          </a:prstGeom>
+          <a:solidFill>
+            <a:srgbClr val="D6EAF8"/>
+          </a:solidFill>
+          <a:ln w="19050">
+            <a:solidFill>
+              <a:srgbClr val="2E86C1"/>
+            </a:solidFill>
+            <a:prstDash val="solid"/>
+          </a:ln>
+        </p:spPr>
+        <p:txBody>
+          <a:bodyPr/>
+          <a:lstStyle/>
+          <a:p>
+            <a:endParaRPr lang="en-US"/>
+          </a:p>
+        </p:txBody>
+      </p:sp>
+      <p:sp>
+        <p:nvSpPr>
+          <p:cNvPr id="19" name="Text 17">
+            <a:extLst>
+              <a:ext uri="{FF2B5EF4-FFF2-40B4-BE49-F238E27FC236}">
+                <a16:creationId xmlns:a16="http://schemas.microsoft.com/office/drawing/2014/main" id="{A495B25D-527A-4C3F-FA3A-5AA5B805AB60}"/>
+              </a:ext>
+            </a:extLst>
+          </p:cNvPr>
+          <p:cNvSpPr/>
+          <p:nvPr/>
+        </p:nvSpPr>
+        <p:spPr>
+          <a:xfrm>
+            <a:off x="3099816" y="1554480"/>
+            <a:ext cx="713232" cy="475488"/>
+          </a:xfrm>
+          <a:prstGeom prst="rect">
+            <a:avLst/>
+          </a:prstGeom>
+          <a:noFill/>
+          <a:ln/>
+        </p:spPr>
+        <p:txBody>
+          <a:bodyPr wrap="square" lIns="0" tIns="0" rIns="0" bIns="0" rtlCol="0" anchor="ctr"/>
+          <a:lstStyle/>
+          <a:p>
+            <a:pPr marL="0" indent="0" algn="ctr">
+              <a:buNone/>
+            </a:pPr>
+            <a:r>
+              <a:rPr lang="en-US" sz="1500" b="1" dirty="0">
+                <a:solidFill>
+                  <a:srgbClr val="1E2A3A"/>
+                </a:solidFill>
+                <a:latin typeface="Consolas" pitchFamily="34" charset="0"/>
+                <a:ea typeface="Consolas" pitchFamily="34" charset="-122"/>
+                <a:cs typeface="Consolas" pitchFamily="34" charset="-120"/>
+              </a:rPr>
+              <a:t>1</a:t>
+            </a:r>
+            <a:endParaRPr lang="en-US" sz="1500" dirty="0"/>
+          </a:p>
+        </p:txBody>
+      </p:sp>
+      <p:sp>
+        <p:nvSpPr>
+          <p:cNvPr id="20" name="Text 18">
+            <a:extLst>
+              <a:ext uri="{FF2B5EF4-FFF2-40B4-BE49-F238E27FC236}">
+                <a16:creationId xmlns:a16="http://schemas.microsoft.com/office/drawing/2014/main" id="{DDB50CFD-0319-D4B4-9F4B-365F82C3BE8F}"/>
+              </a:ext>
+            </a:extLst>
+          </p:cNvPr>
+          <p:cNvSpPr/>
+          <p:nvPr/>
+        </p:nvSpPr>
+        <p:spPr>
+          <a:xfrm>
+            <a:off x="3813048" y="1298448"/>
+            <a:ext cx="713232" cy="228600"/>
+          </a:xfrm>
+          <a:prstGeom prst="rect">
+            <a:avLst/>
+          </a:prstGeom>
+          <a:noFill/>
+          <a:ln/>
+        </p:spPr>
+        <p:txBody>
+          <a:bodyPr wrap="square" lIns="0" tIns="0" rIns="0" bIns="0" rtlCol="0" anchor="ctr"/>
+          <a:lstStyle/>
+          <a:p>
+            <a:pPr marL="0" indent="0" algn="ctr">
+              <a:buNone/>
+            </a:pPr>
+            <a:r>
+              <a:rPr lang="en-US" sz="1100" b="1" dirty="0">
+                <a:solidFill>
+                  <a:srgbClr val="2E86C1"/>
+                </a:solidFill>
+                <a:latin typeface="Calibri" pitchFamily="34" charset="0"/>
+                <a:ea typeface="Calibri" pitchFamily="34" charset="-122"/>
+                <a:cs typeface="Calibri" pitchFamily="34" charset="-120"/>
+              </a:rPr>
+              <a:t>4</a:t>
+            </a:r>
+            <a:endParaRPr lang="en-US" sz="1100" dirty="0"/>
+          </a:p>
+        </p:txBody>
+      </p:sp>
+      <p:sp>
+        <p:nvSpPr>
+          <p:cNvPr id="21" name="Shape 19">
+            <a:extLst>
+              <a:ext uri="{FF2B5EF4-FFF2-40B4-BE49-F238E27FC236}">
+                <a16:creationId xmlns:a16="http://schemas.microsoft.com/office/drawing/2014/main" id="{40A4DC82-0E90-BA00-C01B-79B993DF3E27}"/>
+              </a:ext>
+            </a:extLst>
+          </p:cNvPr>
+          <p:cNvSpPr/>
+          <p:nvPr/>
+        </p:nvSpPr>
+        <p:spPr>
+          <a:xfrm>
+            <a:off x="3813048" y="1554480"/>
+            <a:ext cx="713232" cy="475488"/>
+          </a:xfrm>
+          <a:prstGeom prst="rect">
+            <a:avLst/>
+          </a:prstGeom>
+          <a:solidFill>
+            <a:srgbClr val="D6EAF8"/>
+          </a:solidFill>
+          <a:ln w="19050">
+            <a:solidFill>
+              <a:srgbClr val="2E86C1"/>
+            </a:solidFill>
+            <a:prstDash val="solid"/>
+          </a:ln>
+        </p:spPr>
+        <p:txBody>
+          <a:bodyPr/>
+          <a:lstStyle/>
+          <a:p>
+            <a:endParaRPr lang="en-US"/>
+          </a:p>
+        </p:txBody>
+      </p:sp>
+      <p:sp>
+        <p:nvSpPr>
+          <p:cNvPr id="22" name="Text 20">
+            <a:extLst>
+              <a:ext uri="{FF2B5EF4-FFF2-40B4-BE49-F238E27FC236}">
+                <a16:creationId xmlns:a16="http://schemas.microsoft.com/office/drawing/2014/main" id="{B83AFBFB-1DD0-6CD5-4E2F-8E7129BFD747}"/>
+              </a:ext>
+            </a:extLst>
+          </p:cNvPr>
+          <p:cNvSpPr/>
+          <p:nvPr/>
+        </p:nvSpPr>
+        <p:spPr>
+          <a:xfrm>
+            <a:off x="3813048" y="1554480"/>
+            <a:ext cx="713232" cy="475488"/>
+          </a:xfrm>
+          <a:prstGeom prst="rect">
+            <a:avLst/>
+          </a:prstGeom>
+          <a:noFill/>
+          <a:ln/>
+        </p:spPr>
+        <p:txBody>
+          <a:bodyPr wrap="square" lIns="0" tIns="0" rIns="0" bIns="0" rtlCol="0" anchor="ctr"/>
+          <a:lstStyle/>
+          <a:p>
+            <a:pPr marL="0" indent="0" algn="ctr">
+              <a:buNone/>
+            </a:pPr>
+            <a:r>
+              <a:rPr lang="en-US" sz="1500" b="1" dirty="0">
+                <a:solidFill>
+                  <a:srgbClr val="1E2A3A"/>
+                </a:solidFill>
+                <a:latin typeface="Consolas" pitchFamily="34" charset="0"/>
+                <a:ea typeface="Consolas" pitchFamily="34" charset="-122"/>
+                <a:cs typeface="Consolas" pitchFamily="34" charset="-120"/>
+              </a:rPr>
+              <a:t>3</a:t>
+            </a:r>
+            <a:endParaRPr lang="en-US" sz="1500" dirty="0"/>
+          </a:p>
+        </p:txBody>
+      </p:sp>
+      <p:sp>
+        <p:nvSpPr>
+          <p:cNvPr id="23" name="Text 21">
+            <a:extLst>
+              <a:ext uri="{FF2B5EF4-FFF2-40B4-BE49-F238E27FC236}">
+                <a16:creationId xmlns:a16="http://schemas.microsoft.com/office/drawing/2014/main" id="{C1C21D7C-1792-25B1-8B5A-0DEA3EB5DBE6}"/>
+              </a:ext>
+            </a:extLst>
+          </p:cNvPr>
+          <p:cNvSpPr/>
+          <p:nvPr/>
+        </p:nvSpPr>
+        <p:spPr>
+          <a:xfrm>
+            <a:off x="4526280" y="1298448"/>
+            <a:ext cx="713232" cy="228600"/>
+          </a:xfrm>
+          <a:prstGeom prst="rect">
+            <a:avLst/>
+          </a:prstGeom>
+          <a:noFill/>
+          <a:ln/>
+        </p:spPr>
+        <p:txBody>
+          <a:bodyPr wrap="square" lIns="0" tIns="0" rIns="0" bIns="0" rtlCol="0" anchor="ctr"/>
+          <a:lstStyle/>
+          <a:p>
+            <a:pPr marL="0" indent="0" algn="ctr">
+              <a:buNone/>
+            </a:pPr>
+            <a:r>
+              <a:rPr lang="en-US" sz="1100" b="1" dirty="0">
+                <a:solidFill>
+                  <a:srgbClr val="2E86C1"/>
+                </a:solidFill>
+                <a:latin typeface="Calibri" pitchFamily="34" charset="0"/>
+                <a:ea typeface="Calibri" pitchFamily="34" charset="-122"/>
+                <a:cs typeface="Calibri" pitchFamily="34" charset="-120"/>
+              </a:rPr>
+              <a:t>5</a:t>
+            </a:r>
+            <a:endParaRPr lang="en-US" sz="1100" dirty="0"/>
+          </a:p>
+        </p:txBody>
+      </p:sp>
+      <p:sp>
+        <p:nvSpPr>
+          <p:cNvPr id="24" name="Shape 22">
+            <a:extLst>
+              <a:ext uri="{FF2B5EF4-FFF2-40B4-BE49-F238E27FC236}">
+                <a16:creationId xmlns:a16="http://schemas.microsoft.com/office/drawing/2014/main" id="{DE323C26-F3A7-4D64-C617-272F744CBB51}"/>
+              </a:ext>
+            </a:extLst>
+          </p:cNvPr>
+          <p:cNvSpPr/>
+          <p:nvPr/>
+        </p:nvSpPr>
+        <p:spPr>
+          <a:xfrm>
+            <a:off x="4526280" y="1554480"/>
+            <a:ext cx="713232" cy="475488"/>
+          </a:xfrm>
+          <a:prstGeom prst="rect">
+            <a:avLst/>
+          </a:prstGeom>
+          <a:solidFill>
+            <a:srgbClr val="D6EAF8"/>
+          </a:solidFill>
+          <a:ln w="19050">
+            <a:solidFill>
+              <a:srgbClr val="2E86C1"/>
+            </a:solidFill>
+            <a:prstDash val="solid"/>
+          </a:ln>
+        </p:spPr>
+        <p:txBody>
+          <a:bodyPr/>
+          <a:lstStyle/>
+          <a:p>
+            <a:endParaRPr lang="en-US"/>
+          </a:p>
+        </p:txBody>
+      </p:sp>
+      <p:sp>
+        <p:nvSpPr>
+          <p:cNvPr id="25" name="Text 23">
+            <a:extLst>
+              <a:ext uri="{FF2B5EF4-FFF2-40B4-BE49-F238E27FC236}">
+                <a16:creationId xmlns:a16="http://schemas.microsoft.com/office/drawing/2014/main" id="{9A4677C5-59CE-421E-ED7B-56E51AF48082}"/>
+              </a:ext>
+            </a:extLst>
+          </p:cNvPr>
+          <p:cNvSpPr/>
+          <p:nvPr/>
+        </p:nvSpPr>
+        <p:spPr>
+          <a:xfrm>
+            <a:off x="4526280" y="1554480"/>
+            <a:ext cx="713232" cy="475488"/>
+          </a:xfrm>
+          <a:prstGeom prst="rect">
+            <a:avLst/>
+          </a:prstGeom>
+          <a:noFill/>
+          <a:ln/>
+        </p:spPr>
+        <p:txBody>
+          <a:bodyPr wrap="square" lIns="0" tIns="0" rIns="0" bIns="0" rtlCol="0" anchor="ctr"/>
+          <a:lstStyle/>
+          <a:p>
+            <a:pPr marL="0" indent="0" algn="ctr">
+              <a:buNone/>
+            </a:pPr>
+            <a:r>
+              <a:rPr lang="en-US" sz="1500" b="1" dirty="0">
+                <a:solidFill>
+                  <a:srgbClr val="1E2A3A"/>
+                </a:solidFill>
+                <a:latin typeface="Consolas" pitchFamily="34" charset="0"/>
+                <a:ea typeface="Consolas" pitchFamily="34" charset="-122"/>
+                <a:cs typeface="Consolas" pitchFamily="34" charset="-120"/>
+              </a:rPr>
+              <a:t>2</a:t>
+            </a:r>
+            <a:endParaRPr lang="en-US" sz="1500" dirty="0"/>
+          </a:p>
+        </p:txBody>
+      </p:sp>
+      <p:sp>
+        <p:nvSpPr>
+          <p:cNvPr id="27" name="Text 25">
+            <a:extLst>
+              <a:ext uri="{FF2B5EF4-FFF2-40B4-BE49-F238E27FC236}">
+                <a16:creationId xmlns:a16="http://schemas.microsoft.com/office/drawing/2014/main" id="{8DA5E0C2-7382-0B99-03BB-3696D3028CCC}"/>
+              </a:ext>
+            </a:extLst>
+          </p:cNvPr>
+          <p:cNvSpPr/>
+          <p:nvPr/>
+        </p:nvSpPr>
+        <p:spPr>
+          <a:xfrm>
+            <a:off x="1504188" y="2496312"/>
+            <a:ext cx="1828800" cy="256032"/>
+          </a:xfrm>
+          <a:prstGeom prst="rect">
+            <a:avLst/>
+          </a:prstGeom>
+          <a:noFill/>
+          <a:ln/>
+        </p:spPr>
+        <p:txBody>
+          <a:bodyPr wrap="square" lIns="0" tIns="0" rIns="0" bIns="0" rtlCol="0" anchor="ctr"/>
+          <a:lstStyle/>
+          <a:p>
+            <a:pPr marL="0" indent="0" algn="ctr">
+              <a:buNone/>
+            </a:pPr>
+            <a:r>
+              <a:rPr lang="en-US" sz="1150" b="1" dirty="0">
+                <a:solidFill>
+                  <a:srgbClr val="1ABC9C"/>
+                </a:solidFill>
+                <a:latin typeface="Consolas" pitchFamily="34" charset="0"/>
+                <a:ea typeface="Consolas" pitchFamily="34" charset="-122"/>
+                <a:cs typeface="Consolas" pitchFamily="34" charset="-120"/>
+              </a:rPr>
+              <a:t>nums.sort()</a:t>
+            </a:r>
+            <a:endParaRPr lang="en-US" sz="1150" dirty="0"/>
+          </a:p>
+        </p:txBody>
+      </p:sp>
+      <p:sp>
+        <p:nvSpPr>
+          <p:cNvPr id="29" name="Text 27">
+            <a:extLst>
+              <a:ext uri="{FF2B5EF4-FFF2-40B4-BE49-F238E27FC236}">
+                <a16:creationId xmlns:a16="http://schemas.microsoft.com/office/drawing/2014/main" id="{CA3C3A15-7AAC-9AA9-E0FA-677320F847EE}"/>
+              </a:ext>
+            </a:extLst>
+          </p:cNvPr>
+          <p:cNvSpPr/>
+          <p:nvPr/>
+        </p:nvSpPr>
+        <p:spPr>
+          <a:xfrm>
+            <a:off x="320040" y="3127248"/>
+            <a:ext cx="2560320" cy="274320"/>
+          </a:xfrm>
+          <a:prstGeom prst="rect">
+            <a:avLst/>
+          </a:prstGeom>
+          <a:noFill/>
+          <a:ln/>
+        </p:spPr>
+        <p:txBody>
+          <a:bodyPr wrap="square" lIns="0" tIns="0" rIns="0" bIns="0" rtlCol="0" anchor="ctr"/>
+          <a:lstStyle/>
+          <a:p>
+            <a:pPr marL="0" indent="0">
+              <a:buNone/>
+            </a:pPr>
+            <a:r>
+              <a:rPr lang="en-US" sz="1200" b="1" dirty="0">
+                <a:solidFill>
+                  <a:srgbClr val="4A6080"/>
+                </a:solidFill>
+                <a:latin typeface="Calibri" pitchFamily="34" charset="0"/>
+                <a:ea typeface="Calibri" pitchFamily="34" charset="-122"/>
+                <a:cs typeface="Calibri" pitchFamily="34" charset="-120"/>
+              </a:rPr>
+              <a:t>After  .sort():</a:t>
+            </a:r>
+            <a:endParaRPr lang="en-US" sz="1200" dirty="0"/>
+          </a:p>
+        </p:txBody>
+      </p:sp>
+      <p:sp>
+        <p:nvSpPr>
+          <p:cNvPr id="30" name="Shape 28">
+            <a:extLst>
+              <a:ext uri="{FF2B5EF4-FFF2-40B4-BE49-F238E27FC236}">
+                <a16:creationId xmlns:a16="http://schemas.microsoft.com/office/drawing/2014/main" id="{B6A8E613-494C-B0EE-0A15-385E83A4B1EA}"/>
+              </a:ext>
+            </a:extLst>
+          </p:cNvPr>
+          <p:cNvSpPr/>
+          <p:nvPr/>
+        </p:nvSpPr>
+        <p:spPr>
+          <a:xfrm>
+            <a:off x="960120" y="3447288"/>
+            <a:ext cx="713232" cy="475488"/>
+          </a:xfrm>
+          <a:prstGeom prst="rect">
+            <a:avLst/>
+          </a:prstGeom>
+          <a:solidFill>
+            <a:srgbClr val="C8E6C9"/>
+          </a:solidFill>
+          <a:ln w="19050">
+            <a:solidFill>
+              <a:srgbClr val="1E8449"/>
+            </a:solidFill>
+            <a:prstDash val="solid"/>
+          </a:ln>
+        </p:spPr>
+        <p:txBody>
+          <a:bodyPr/>
+          <a:lstStyle/>
+          <a:p>
+            <a:endParaRPr lang="en-US"/>
+          </a:p>
+        </p:txBody>
+      </p:sp>
+      <p:sp>
+        <p:nvSpPr>
+          <p:cNvPr id="31" name="Text 29">
+            <a:extLst>
+              <a:ext uri="{FF2B5EF4-FFF2-40B4-BE49-F238E27FC236}">
+                <a16:creationId xmlns:a16="http://schemas.microsoft.com/office/drawing/2014/main" id="{57C3218D-4131-5B94-4ACC-4B9722DDBB6B}"/>
+              </a:ext>
+            </a:extLst>
+          </p:cNvPr>
+          <p:cNvSpPr/>
+          <p:nvPr/>
+        </p:nvSpPr>
+        <p:spPr>
+          <a:xfrm>
+            <a:off x="960120" y="3447288"/>
+            <a:ext cx="713232" cy="475488"/>
+          </a:xfrm>
+          <a:prstGeom prst="rect">
+            <a:avLst/>
+          </a:prstGeom>
+          <a:noFill/>
+          <a:ln/>
+        </p:spPr>
+        <p:txBody>
+          <a:bodyPr wrap="square" lIns="0" tIns="0" rIns="0" bIns="0" rtlCol="0" anchor="ctr"/>
+          <a:lstStyle/>
+          <a:p>
+            <a:pPr marL="0" indent="0" algn="ctr">
+              <a:buNone/>
+            </a:pPr>
+            <a:r>
+              <a:rPr lang="en-US" sz="1500" b="1" dirty="0">
+                <a:solidFill>
+                  <a:srgbClr val="1E2A3A"/>
+                </a:solidFill>
+                <a:latin typeface="Consolas" pitchFamily="34" charset="0"/>
+                <a:ea typeface="Consolas" pitchFamily="34" charset="-122"/>
+                <a:cs typeface="Consolas" pitchFamily="34" charset="-120"/>
+              </a:rPr>
+              <a:t>1</a:t>
+            </a:r>
+            <a:endParaRPr lang="en-US" sz="1500" dirty="0"/>
+          </a:p>
+        </p:txBody>
+      </p:sp>
+      <p:sp>
+        <p:nvSpPr>
+          <p:cNvPr id="32" name="Shape 30">
+            <a:extLst>
+              <a:ext uri="{FF2B5EF4-FFF2-40B4-BE49-F238E27FC236}">
+                <a16:creationId xmlns:a16="http://schemas.microsoft.com/office/drawing/2014/main" id="{FD1B3716-4173-668C-13FF-36DD057C0118}"/>
+              </a:ext>
+            </a:extLst>
+          </p:cNvPr>
+          <p:cNvSpPr/>
+          <p:nvPr/>
+        </p:nvSpPr>
+        <p:spPr>
+          <a:xfrm>
+            <a:off x="1673352" y="3447288"/>
+            <a:ext cx="713232" cy="475488"/>
+          </a:xfrm>
+          <a:prstGeom prst="rect">
+            <a:avLst/>
+          </a:prstGeom>
+          <a:solidFill>
+            <a:srgbClr val="C8E6C9"/>
+          </a:solidFill>
+          <a:ln w="19050">
+            <a:solidFill>
+              <a:srgbClr val="1E8449"/>
+            </a:solidFill>
+            <a:prstDash val="solid"/>
+          </a:ln>
+        </p:spPr>
+        <p:txBody>
+          <a:bodyPr/>
+          <a:lstStyle/>
+          <a:p>
+            <a:endParaRPr lang="en-US"/>
+          </a:p>
+        </p:txBody>
+      </p:sp>
+      <p:sp>
+        <p:nvSpPr>
+          <p:cNvPr id="33" name="Text 31">
+            <a:extLst>
+              <a:ext uri="{FF2B5EF4-FFF2-40B4-BE49-F238E27FC236}">
+                <a16:creationId xmlns:a16="http://schemas.microsoft.com/office/drawing/2014/main" id="{1663E01A-E10F-D658-1695-4F1F722B020A}"/>
+              </a:ext>
+            </a:extLst>
+          </p:cNvPr>
+          <p:cNvSpPr/>
+          <p:nvPr/>
+        </p:nvSpPr>
+        <p:spPr>
+          <a:xfrm>
+            <a:off x="1673352" y="3447288"/>
+            <a:ext cx="713232" cy="475488"/>
+          </a:xfrm>
+          <a:prstGeom prst="rect">
+            <a:avLst/>
+          </a:prstGeom>
+          <a:noFill/>
+          <a:ln/>
+        </p:spPr>
+        <p:txBody>
+          <a:bodyPr wrap="square" lIns="0" tIns="0" rIns="0" bIns="0" rtlCol="0" anchor="ctr"/>
+          <a:lstStyle/>
+          <a:p>
+            <a:pPr marL="0" indent="0" algn="ctr">
+              <a:buNone/>
+            </a:pPr>
+            <a:r>
+              <a:rPr lang="en-US" sz="1500" b="1" dirty="0">
+                <a:solidFill>
+                  <a:srgbClr val="1E2A3A"/>
+                </a:solidFill>
+                <a:latin typeface="Consolas" pitchFamily="34" charset="0"/>
+                <a:ea typeface="Consolas" pitchFamily="34" charset="-122"/>
+                <a:cs typeface="Consolas" pitchFamily="34" charset="-120"/>
+              </a:rPr>
+              <a:t>1</a:t>
+            </a:r>
+            <a:endParaRPr lang="en-US" sz="1500" dirty="0"/>
+          </a:p>
+        </p:txBody>
+      </p:sp>
+      <p:sp>
+        <p:nvSpPr>
+          <p:cNvPr id="34" name="Shape 32">
+            <a:extLst>
+              <a:ext uri="{FF2B5EF4-FFF2-40B4-BE49-F238E27FC236}">
+                <a16:creationId xmlns:a16="http://schemas.microsoft.com/office/drawing/2014/main" id="{7202412A-0D2C-93E5-B7DE-813DF2E8EBA0}"/>
+              </a:ext>
+            </a:extLst>
+          </p:cNvPr>
+          <p:cNvSpPr/>
+          <p:nvPr/>
+        </p:nvSpPr>
+        <p:spPr>
+          <a:xfrm>
+            <a:off x="2386584" y="3447288"/>
+            <a:ext cx="713232" cy="475488"/>
+          </a:xfrm>
+          <a:prstGeom prst="rect">
+            <a:avLst/>
+          </a:prstGeom>
+          <a:solidFill>
+            <a:srgbClr val="C8E6C9"/>
+          </a:solidFill>
+          <a:ln w="19050">
+            <a:solidFill>
+              <a:srgbClr val="1E8449"/>
+            </a:solidFill>
+            <a:prstDash val="solid"/>
+          </a:ln>
+        </p:spPr>
+        <p:txBody>
+          <a:bodyPr/>
+          <a:lstStyle/>
+          <a:p>
+            <a:endParaRPr lang="en-US"/>
+          </a:p>
+        </p:txBody>
+      </p:sp>
+      <p:sp>
+        <p:nvSpPr>
+          <p:cNvPr id="35" name="Text 33">
+            <a:extLst>
+              <a:ext uri="{FF2B5EF4-FFF2-40B4-BE49-F238E27FC236}">
+                <a16:creationId xmlns:a16="http://schemas.microsoft.com/office/drawing/2014/main" id="{A6E1B95F-7988-649F-E158-399999F2409D}"/>
+              </a:ext>
+            </a:extLst>
+          </p:cNvPr>
+          <p:cNvSpPr/>
+          <p:nvPr/>
+        </p:nvSpPr>
+        <p:spPr>
+          <a:xfrm>
+            <a:off x="2386584" y="3447288"/>
+            <a:ext cx="713232" cy="475488"/>
+          </a:xfrm>
+          <a:prstGeom prst="rect">
+            <a:avLst/>
+          </a:prstGeom>
+          <a:noFill/>
+          <a:ln/>
+        </p:spPr>
+        <p:txBody>
+          <a:bodyPr wrap="square" lIns="0" tIns="0" rIns="0" bIns="0" rtlCol="0" anchor="ctr"/>
+          <a:lstStyle/>
+          <a:p>
+            <a:pPr marL="0" indent="0" algn="ctr">
+              <a:buNone/>
+            </a:pPr>
+            <a:r>
+              <a:rPr lang="en-US" sz="1500" b="1" dirty="0">
+                <a:solidFill>
+                  <a:srgbClr val="1E2A3A"/>
+                </a:solidFill>
+                <a:latin typeface="Consolas" pitchFamily="34" charset="0"/>
+                <a:ea typeface="Consolas" pitchFamily="34" charset="-122"/>
+                <a:cs typeface="Consolas" pitchFamily="34" charset="-120"/>
+              </a:rPr>
+              <a:t>2</a:t>
+            </a:r>
+            <a:endParaRPr lang="en-US" sz="1500" dirty="0"/>
+          </a:p>
+        </p:txBody>
+      </p:sp>
+      <p:sp>
+        <p:nvSpPr>
+          <p:cNvPr id="36" name="Shape 34">
+            <a:extLst>
+              <a:ext uri="{FF2B5EF4-FFF2-40B4-BE49-F238E27FC236}">
+                <a16:creationId xmlns:a16="http://schemas.microsoft.com/office/drawing/2014/main" id="{3B439C8B-5533-EC67-BE94-505166BA16E8}"/>
+              </a:ext>
+            </a:extLst>
+          </p:cNvPr>
+          <p:cNvSpPr/>
+          <p:nvPr/>
+        </p:nvSpPr>
+        <p:spPr>
+          <a:xfrm>
+            <a:off x="3099816" y="3447288"/>
+            <a:ext cx="713232" cy="475488"/>
+          </a:xfrm>
+          <a:prstGeom prst="rect">
+            <a:avLst/>
+          </a:prstGeom>
+          <a:solidFill>
+            <a:srgbClr val="C8E6C9"/>
+          </a:solidFill>
+          <a:ln w="19050">
+            <a:solidFill>
+              <a:srgbClr val="1E8449"/>
+            </a:solidFill>
+            <a:prstDash val="solid"/>
+          </a:ln>
+        </p:spPr>
+        <p:txBody>
+          <a:bodyPr/>
+          <a:lstStyle/>
+          <a:p>
+            <a:endParaRPr lang="en-US"/>
+          </a:p>
+        </p:txBody>
+      </p:sp>
+      <p:sp>
+        <p:nvSpPr>
+          <p:cNvPr id="37" name="Text 35">
+            <a:extLst>
+              <a:ext uri="{FF2B5EF4-FFF2-40B4-BE49-F238E27FC236}">
+                <a16:creationId xmlns:a16="http://schemas.microsoft.com/office/drawing/2014/main" id="{2432EEA8-0C6F-ACCB-98A6-370D9135B9CC}"/>
+              </a:ext>
+            </a:extLst>
+          </p:cNvPr>
+          <p:cNvSpPr/>
+          <p:nvPr/>
+        </p:nvSpPr>
+        <p:spPr>
+          <a:xfrm>
+            <a:off x="3099816" y="3447288"/>
+            <a:ext cx="713232" cy="475488"/>
+          </a:xfrm>
+          <a:prstGeom prst="rect">
+            <a:avLst/>
+          </a:prstGeom>
+          <a:noFill/>
+          <a:ln/>
+        </p:spPr>
+        <p:txBody>
+          <a:bodyPr wrap="square" lIns="0" tIns="0" rIns="0" bIns="0" rtlCol="0" anchor="ctr"/>
+          <a:lstStyle/>
+          <a:p>
+            <a:pPr marL="0" indent="0" algn="ctr">
+              <a:buNone/>
+            </a:pPr>
+            <a:r>
+              <a:rPr lang="en-US" sz="1500" b="1" dirty="0">
+                <a:solidFill>
+                  <a:srgbClr val="1E2A3A"/>
+                </a:solidFill>
+                <a:latin typeface="Consolas" pitchFamily="34" charset="0"/>
+                <a:ea typeface="Consolas" pitchFamily="34" charset="-122"/>
+                <a:cs typeface="Consolas" pitchFamily="34" charset="-120"/>
+              </a:rPr>
+              <a:t>3</a:t>
+            </a:r>
+            <a:endParaRPr lang="en-US" sz="1500" dirty="0"/>
+          </a:p>
+        </p:txBody>
+      </p:sp>
+      <p:sp>
+        <p:nvSpPr>
+          <p:cNvPr id="38" name="Shape 36">
+            <a:extLst>
+              <a:ext uri="{FF2B5EF4-FFF2-40B4-BE49-F238E27FC236}">
+                <a16:creationId xmlns:a16="http://schemas.microsoft.com/office/drawing/2014/main" id="{7CEF9B73-D78F-9924-7EF0-840087B10CC3}"/>
+              </a:ext>
+            </a:extLst>
+          </p:cNvPr>
+          <p:cNvSpPr/>
+          <p:nvPr/>
+        </p:nvSpPr>
+        <p:spPr>
+          <a:xfrm>
+            <a:off x="3813048" y="3447288"/>
+            <a:ext cx="713232" cy="475488"/>
+          </a:xfrm>
+          <a:prstGeom prst="rect">
+            <a:avLst/>
+          </a:prstGeom>
+          <a:solidFill>
+            <a:srgbClr val="C8E6C9"/>
+          </a:solidFill>
+          <a:ln w="19050">
+            <a:solidFill>
+              <a:srgbClr val="1E8449"/>
+            </a:solidFill>
+            <a:prstDash val="solid"/>
+          </a:ln>
+        </p:spPr>
+        <p:txBody>
+          <a:bodyPr/>
+          <a:lstStyle/>
+          <a:p>
+            <a:endParaRPr lang="en-US"/>
+          </a:p>
+        </p:txBody>
+      </p:sp>
+      <p:sp>
+        <p:nvSpPr>
+          <p:cNvPr id="39" name="Text 37">
+            <a:extLst>
+              <a:ext uri="{FF2B5EF4-FFF2-40B4-BE49-F238E27FC236}">
+                <a16:creationId xmlns:a16="http://schemas.microsoft.com/office/drawing/2014/main" id="{AB7B8AD2-7252-D61C-7471-2205BCAE510F}"/>
+              </a:ext>
+            </a:extLst>
+          </p:cNvPr>
+          <p:cNvSpPr/>
+          <p:nvPr/>
+        </p:nvSpPr>
+        <p:spPr>
+          <a:xfrm>
+            <a:off x="3813048" y="3447288"/>
+            <a:ext cx="713232" cy="475488"/>
+          </a:xfrm>
+          <a:prstGeom prst="rect">
+            <a:avLst/>
+          </a:prstGeom>
+          <a:noFill/>
+          <a:ln/>
+        </p:spPr>
+        <p:txBody>
+          <a:bodyPr wrap="square" lIns="0" tIns="0" rIns="0" bIns="0" rtlCol="0" anchor="ctr"/>
+          <a:lstStyle/>
+          <a:p>
+            <a:pPr marL="0" indent="0" algn="ctr">
+              <a:buNone/>
+            </a:pPr>
+            <a:r>
+              <a:rPr lang="en-US" sz="1500" b="1" dirty="0">
+                <a:solidFill>
+                  <a:srgbClr val="1E2A3A"/>
+                </a:solidFill>
+                <a:latin typeface="Consolas" pitchFamily="34" charset="0"/>
+                <a:ea typeface="Consolas" pitchFamily="34" charset="-122"/>
+                <a:cs typeface="Consolas" pitchFamily="34" charset="-120"/>
+              </a:rPr>
+              <a:t>4</a:t>
+            </a:r>
+            <a:endParaRPr lang="en-US" sz="1500" dirty="0"/>
+          </a:p>
+        </p:txBody>
+      </p:sp>
+      <p:sp>
+        <p:nvSpPr>
+          <p:cNvPr id="40" name="Shape 38">
+            <a:extLst>
+              <a:ext uri="{FF2B5EF4-FFF2-40B4-BE49-F238E27FC236}">
+                <a16:creationId xmlns:a16="http://schemas.microsoft.com/office/drawing/2014/main" id="{05978182-44EA-6F74-4279-BFABD0397142}"/>
+              </a:ext>
+            </a:extLst>
+          </p:cNvPr>
+          <p:cNvSpPr/>
+          <p:nvPr/>
+        </p:nvSpPr>
+        <p:spPr>
+          <a:xfrm>
+            <a:off x="4526280" y="3447288"/>
+            <a:ext cx="713232" cy="475488"/>
+          </a:xfrm>
+          <a:prstGeom prst="rect">
+            <a:avLst/>
+          </a:prstGeom>
+          <a:solidFill>
+            <a:srgbClr val="C8E6C9"/>
+          </a:solidFill>
+          <a:ln w="19050">
+            <a:solidFill>
+              <a:srgbClr val="1E8449"/>
+            </a:solidFill>
+            <a:prstDash val="solid"/>
+          </a:ln>
+        </p:spPr>
+        <p:txBody>
+          <a:bodyPr/>
+          <a:lstStyle/>
+          <a:p>
+            <a:endParaRPr lang="en-US"/>
+          </a:p>
+        </p:txBody>
+      </p:sp>
+      <p:sp>
+        <p:nvSpPr>
+          <p:cNvPr id="41" name="Text 39">
+            <a:extLst>
+              <a:ext uri="{FF2B5EF4-FFF2-40B4-BE49-F238E27FC236}">
+                <a16:creationId xmlns:a16="http://schemas.microsoft.com/office/drawing/2014/main" id="{3FA68710-64AF-D11C-B8F2-50AEF97F2468}"/>
+              </a:ext>
+            </a:extLst>
+          </p:cNvPr>
+          <p:cNvSpPr/>
+          <p:nvPr/>
+        </p:nvSpPr>
+        <p:spPr>
+          <a:xfrm>
+            <a:off x="4526280" y="3447288"/>
+            <a:ext cx="713232" cy="475488"/>
+          </a:xfrm>
+          <a:prstGeom prst="rect">
+            <a:avLst/>
+          </a:prstGeom>
+          <a:noFill/>
+          <a:ln/>
+        </p:spPr>
+        <p:txBody>
+          <a:bodyPr wrap="square" lIns="0" tIns="0" rIns="0" bIns="0" rtlCol="0" anchor="ctr"/>
+          <a:lstStyle/>
+          <a:p>
+            <a:pPr marL="0" indent="0" algn="ctr">
+              <a:buNone/>
+            </a:pPr>
+            <a:r>
+              <a:rPr lang="en-US" sz="1500" b="1" dirty="0">
+                <a:solidFill>
+                  <a:srgbClr val="1E2A3A"/>
+                </a:solidFill>
+                <a:latin typeface="Consolas" pitchFamily="34" charset="0"/>
+                <a:ea typeface="Consolas" pitchFamily="34" charset="-122"/>
+                <a:cs typeface="Consolas" pitchFamily="34" charset="-120"/>
+              </a:rPr>
+              <a:t>6</a:t>
+            </a:r>
+            <a:endParaRPr lang="en-US" sz="1500" dirty="0"/>
+          </a:p>
+        </p:txBody>
+      </p:sp>
+      <p:sp>
+        <p:nvSpPr>
+          <p:cNvPr id="42" name="Shape 40">
+            <a:extLst>
+              <a:ext uri="{FF2B5EF4-FFF2-40B4-BE49-F238E27FC236}">
+                <a16:creationId xmlns:a16="http://schemas.microsoft.com/office/drawing/2014/main" id="{02BC4073-E396-ABCB-E8FF-6BD290719861}"/>
+              </a:ext>
+            </a:extLst>
+          </p:cNvPr>
+          <p:cNvSpPr/>
+          <p:nvPr/>
+        </p:nvSpPr>
+        <p:spPr>
+          <a:xfrm>
+            <a:off x="5394960" y="1220724"/>
+            <a:ext cx="3611880" cy="3273552"/>
+          </a:xfrm>
+          <a:prstGeom prst="rect">
+            <a:avLst/>
+          </a:prstGeom>
+          <a:solidFill>
+            <a:srgbClr val="1C2833"/>
+          </a:solidFill>
+          <a:ln w="12700">
+            <a:solidFill>
+              <a:srgbClr val="2C4055"/>
+            </a:solidFill>
+            <a:prstDash val="solid"/>
+          </a:ln>
+        </p:spPr>
+        <p:txBody>
+          <a:bodyPr/>
+          <a:lstStyle/>
+          <a:p>
+            <a:endParaRPr lang="en-US"/>
+          </a:p>
+        </p:txBody>
+      </p:sp>
+      <p:sp>
+        <p:nvSpPr>
+          <p:cNvPr id="43" name="Text 41">
+            <a:extLst>
+              <a:ext uri="{FF2B5EF4-FFF2-40B4-BE49-F238E27FC236}">
+                <a16:creationId xmlns:a16="http://schemas.microsoft.com/office/drawing/2014/main" id="{404D6C80-66E3-D7BB-7D4F-34F195216DF8}"/>
+              </a:ext>
+            </a:extLst>
+          </p:cNvPr>
+          <p:cNvSpPr/>
+          <p:nvPr/>
+        </p:nvSpPr>
+        <p:spPr>
+          <a:xfrm>
+            <a:off x="5513832" y="1312164"/>
+            <a:ext cx="3374136" cy="3090672"/>
+          </a:xfrm>
+          <a:prstGeom prst="rect">
+            <a:avLst/>
+          </a:prstGeom>
+          <a:noFill/>
+          <a:ln/>
+        </p:spPr>
+        <p:txBody>
+          <a:bodyPr wrap="square" lIns="0" tIns="0" rIns="0" bIns="0" rtlCol="0" anchor="t"/>
+          <a:lstStyle/>
+          <a:p>
+            <a:pPr marL="0" indent="0">
+              <a:buNone/>
+            </a:pPr>
+            <a:r>
+              <a:rPr lang="en-US" sz="1200" dirty="0">
+                <a:solidFill>
+                  <a:srgbClr val="A9CCE3"/>
+                </a:solidFill>
+                <a:latin typeface="Consolas" pitchFamily="34" charset="0"/>
+                <a:ea typeface="Consolas" pitchFamily="34" charset="-122"/>
+                <a:cs typeface="Consolas" pitchFamily="34" charset="-120"/>
+              </a:rPr>
+              <a:t># Sort numbers ascending</a:t>
+            </a:r>
+            <a:endParaRPr lang="en-US" sz="1200" dirty="0"/>
+          </a:p>
+          <a:p>
+            <a:pPr marL="0" indent="0">
+              <a:buNone/>
+            </a:pPr>
+            <a:r>
+              <a:rPr lang="en-US" sz="1200" dirty="0">
+                <a:solidFill>
+                  <a:srgbClr val="A9CCE3"/>
+                </a:solidFill>
+                <a:latin typeface="Consolas" pitchFamily="34" charset="0"/>
+                <a:ea typeface="Consolas" pitchFamily="34" charset="-122"/>
+                <a:cs typeface="Consolas" pitchFamily="34" charset="-120"/>
+              </a:rPr>
+              <a:t>nums = [4, 1, 6, 1, 3, 2]</a:t>
+            </a:r>
+            <a:endParaRPr lang="en-US" sz="1200" dirty="0"/>
+          </a:p>
+          <a:p>
+            <a:pPr marL="0" indent="0">
+              <a:buNone/>
+            </a:pPr>
+            <a:r>
+              <a:rPr lang="en-US" sz="1200" dirty="0">
+                <a:solidFill>
+                  <a:srgbClr val="A9CCE3"/>
+                </a:solidFill>
+                <a:latin typeface="Consolas" pitchFamily="34" charset="0"/>
+                <a:ea typeface="Consolas" pitchFamily="34" charset="-122"/>
+                <a:cs typeface="Consolas" pitchFamily="34" charset="-120"/>
+              </a:rPr>
+              <a:t>nums.sort()</a:t>
+            </a:r>
+            <a:endParaRPr lang="en-US" sz="1200" dirty="0"/>
+          </a:p>
+          <a:p>
+            <a:pPr marL="0" indent="0">
+              <a:buNone/>
+            </a:pPr>
+            <a:r>
+              <a:rPr lang="en-US" sz="1200" dirty="0">
+                <a:solidFill>
+                  <a:srgbClr val="A9CCE3"/>
+                </a:solidFill>
+                <a:latin typeface="Consolas" pitchFamily="34" charset="0"/>
+                <a:ea typeface="Consolas" pitchFamily="34" charset="-122"/>
+                <a:cs typeface="Consolas" pitchFamily="34" charset="-120"/>
+              </a:rPr>
+              <a:t>print(nums)  # [1, 1, 2, 3, 4, 6]</a:t>
+            </a:r>
+            <a:endParaRPr lang="en-US" sz="1200" dirty="0"/>
+          </a:p>
+          <a:p>
+            <a:pPr marL="0" indent="0">
+              <a:buNone/>
+            </a:pPr>
+            <a:endParaRPr lang="en-US" sz="1200" dirty="0"/>
+          </a:p>
+          <a:p>
+            <a:pPr marL="0" indent="0">
+              <a:buNone/>
+            </a:pPr>
+            <a:r>
+              <a:rPr lang="en-US" sz="1200" dirty="0">
+                <a:solidFill>
+                  <a:srgbClr val="A9CCE3"/>
+                </a:solidFill>
+                <a:latin typeface="Consolas" pitchFamily="34" charset="0"/>
+                <a:ea typeface="Consolas" pitchFamily="34" charset="-122"/>
+                <a:cs typeface="Consolas" pitchFamily="34" charset="-120"/>
+              </a:rPr>
+              <a:t># Sort descending</a:t>
+            </a:r>
+            <a:endParaRPr lang="en-US" sz="1200" dirty="0"/>
+          </a:p>
+          <a:p>
+            <a:pPr marL="0" indent="0">
+              <a:buNone/>
+            </a:pPr>
+            <a:r>
+              <a:rPr lang="en-US" sz="1200" dirty="0">
+                <a:solidFill>
+                  <a:srgbClr val="A9CCE3"/>
+                </a:solidFill>
+                <a:latin typeface="Consolas" pitchFamily="34" charset="0"/>
+                <a:ea typeface="Consolas" pitchFamily="34" charset="-122"/>
+                <a:cs typeface="Consolas" pitchFamily="34" charset="-120"/>
+              </a:rPr>
+              <a:t>nums.sort()</a:t>
+            </a:r>
+            <a:endParaRPr lang="en-US" sz="1200" dirty="0"/>
+          </a:p>
+          <a:p>
+            <a:pPr marL="0" indent="0">
+              <a:buNone/>
+            </a:pPr>
+            <a:r>
+              <a:rPr lang="en-US" sz="1200" dirty="0">
+                <a:solidFill>
+                  <a:srgbClr val="A9CCE3"/>
+                </a:solidFill>
+                <a:latin typeface="Consolas" pitchFamily="34" charset="0"/>
+                <a:ea typeface="Consolas" pitchFamily="34" charset="-122"/>
+                <a:cs typeface="Consolas" pitchFamily="34" charset="-120"/>
+              </a:rPr>
+              <a:t>nums.reverse()</a:t>
+            </a:r>
+            <a:endParaRPr lang="en-US" sz="1200" dirty="0"/>
+          </a:p>
+          <a:p>
+            <a:pPr marL="0" indent="0">
+              <a:buNone/>
+            </a:pPr>
+            <a:r>
+              <a:rPr lang="en-US" sz="1200" dirty="0">
+                <a:solidFill>
+                  <a:srgbClr val="A9CCE3"/>
+                </a:solidFill>
+                <a:latin typeface="Consolas" pitchFamily="34" charset="0"/>
+                <a:ea typeface="Consolas" pitchFamily="34" charset="-122"/>
+                <a:cs typeface="Consolas" pitchFamily="34" charset="-120"/>
+              </a:rPr>
+              <a:t>print(nums)  # [6, 4, 3, 2, 1, 1]</a:t>
+            </a:r>
+          </a:p>
+          <a:p>
+            <a:pPr marL="0" indent="0">
+              <a:buNone/>
+            </a:pPr>
+            <a:endParaRPr lang="en-US" sz="1200" dirty="0"/>
+          </a:p>
+          <a:p>
+            <a:pPr marL="0" indent="0">
+              <a:buNone/>
+            </a:pPr>
+            <a:r>
+              <a:rPr lang="en-US" sz="1200" dirty="0">
+                <a:solidFill>
+                  <a:srgbClr val="A9CCE3"/>
+                </a:solidFill>
+                <a:latin typeface="Consolas" pitchFamily="34" charset="0"/>
+                <a:ea typeface="Consolas" pitchFamily="34" charset="-122"/>
+                <a:cs typeface="Consolas" pitchFamily="34" charset="-120"/>
+              </a:rPr>
+              <a:t># Sort strings alphabetically</a:t>
+            </a:r>
+            <a:endParaRPr lang="en-US" sz="1200" dirty="0"/>
+          </a:p>
+          <a:p>
+            <a:pPr marL="0" indent="0">
+              <a:buNone/>
+            </a:pPr>
+            <a:r>
+              <a:rPr lang="en-US" sz="1200" dirty="0">
+                <a:solidFill>
+                  <a:srgbClr val="A9CCE3"/>
+                </a:solidFill>
+                <a:latin typeface="Consolas" pitchFamily="34" charset="0"/>
+                <a:ea typeface="Consolas" pitchFamily="34" charset="-122"/>
+                <a:cs typeface="Consolas" pitchFamily="34" charset="-120"/>
+              </a:rPr>
+              <a:t>pets = ["dog", "zebra", "cat"]</a:t>
+            </a:r>
+            <a:endParaRPr lang="en-US" sz="1200" dirty="0"/>
+          </a:p>
+          <a:p>
+            <a:pPr marL="0" indent="0">
+              <a:buNone/>
+            </a:pPr>
+            <a:r>
+              <a:rPr lang="en-US" sz="1200" dirty="0" err="1">
+                <a:solidFill>
+                  <a:srgbClr val="A9CCE3"/>
+                </a:solidFill>
+                <a:latin typeface="Consolas" pitchFamily="34" charset="0"/>
+                <a:ea typeface="Consolas" pitchFamily="34" charset="-122"/>
+                <a:cs typeface="Consolas" pitchFamily="34" charset="-120"/>
+              </a:rPr>
+              <a:t>pets.sort</a:t>
+            </a:r>
+            <a:r>
+              <a:rPr lang="en-US" sz="1200" dirty="0">
+                <a:solidFill>
+                  <a:srgbClr val="A9CCE3"/>
+                </a:solidFill>
+                <a:latin typeface="Consolas" pitchFamily="34" charset="0"/>
+                <a:ea typeface="Consolas" pitchFamily="34" charset="-122"/>
+                <a:cs typeface="Consolas" pitchFamily="34" charset="-120"/>
+              </a:rPr>
+              <a:t>()</a:t>
+            </a:r>
+            <a:endParaRPr lang="en-US" sz="1200" dirty="0"/>
+          </a:p>
+          <a:p>
+            <a:pPr marL="0" indent="0">
+              <a:buNone/>
+            </a:pPr>
+            <a:r>
+              <a:rPr lang="en-US" sz="1200" dirty="0">
+                <a:solidFill>
+                  <a:srgbClr val="A9CCE3"/>
+                </a:solidFill>
+                <a:latin typeface="Consolas" pitchFamily="34" charset="0"/>
+                <a:ea typeface="Consolas" pitchFamily="34" charset="-122"/>
+                <a:cs typeface="Consolas" pitchFamily="34" charset="-120"/>
+              </a:rPr>
+              <a:t>print(pets)  # ["cat", "dog", "zebra"]</a:t>
+            </a:r>
+            <a:endParaRPr lang="en-US" sz="1200" dirty="0"/>
+          </a:p>
+        </p:txBody>
+      </p:sp>
+      <p:sp>
+        <p:nvSpPr>
+          <p:cNvPr id="44" name="Down Arrow 43">
+            <a:extLst>
+              <a:ext uri="{FF2B5EF4-FFF2-40B4-BE49-F238E27FC236}">
+                <a16:creationId xmlns:a16="http://schemas.microsoft.com/office/drawing/2014/main" id="{A5A7D12D-D25E-DEF5-150E-FBBA21AEFC9B}"/>
+              </a:ext>
+            </a:extLst>
+          </p:cNvPr>
+          <p:cNvSpPr/>
+          <p:nvPr/>
+        </p:nvSpPr>
+        <p:spPr>
+          <a:xfrm>
+            <a:off x="2881140" y="2174971"/>
+            <a:ext cx="133592" cy="1099882"/>
+          </a:xfrm>
+          <a:prstGeom prst="downArrow">
+            <a:avLst/>
+          </a:prstGeom>
+          <a:solidFill>
+            <a:schemeClr val="accent5">
+              <a:lumMod val="40000"/>
+              <a:lumOff val="60000"/>
+            </a:schemeClr>
+          </a:solidFill>
+          <a:ln>
+            <a:noFill/>
+          </a:ln>
+        </p:spPr>
+        <p:style>
+          <a:lnRef idx="2">
+            <a:schemeClr val="accent1">
+              <a:shade val="15000"/>
+            </a:schemeClr>
+          </a:lnRef>
+          <a:fillRef idx="1">
+            <a:schemeClr val="accent1"/>
+          </a:fillRef>
+          <a:effectRef idx="0">
+            <a:schemeClr val="accent1"/>
+          </a:effectRef>
+          <a:fontRef idx="minor">
+            <a:schemeClr val="lt1"/>
+          </a:fontRef>
+        </p:style>
+        <p:txBody>
+          <a:bodyPr rtlCol="0" anchor="ctr"/>
+          <a:lstStyle/>
+          <a:p>
+            <a:pPr algn="ctr"/>
+            <a:endParaRPr lang="en-US" dirty="0"/>
+          </a:p>
+        </p:txBody>
+      </p:sp>
+      <mc:AlternateContent xmlns:mc="http://schemas.openxmlformats.org/markup-compatibility/2006">
+        <mc:Choice xmlns:p14="http://schemas.microsoft.com/office/powerpoint/2010/main" Requires="p14">
+          <p:contentPart p14:bwMode="auto" r:id="rId3">
+            <p14:nvContentPartPr>
+              <p14:cNvPr id="26" name="Ink 25">
+                <a:extLst>
+                  <a:ext uri="{FF2B5EF4-FFF2-40B4-BE49-F238E27FC236}">
+                    <a16:creationId xmlns:a16="http://schemas.microsoft.com/office/drawing/2014/main" id="{0067D845-3E70-37BA-D631-FF990E39F2DE}"/>
+                  </a:ext>
+                </a:extLst>
+              </p14:cNvPr>
+              <p14:cNvContentPartPr/>
+              <p14:nvPr/>
+            </p14:nvContentPartPr>
+            <p14:xfrm>
+              <a:off x="6119640" y="3418920"/>
+              <a:ext cx="2491200" cy="715320"/>
+            </p14:xfrm>
+          </p:contentPart>
+        </mc:Choice>
+        <mc:Fallback>
+          <p:pic>
+            <p:nvPicPr>
+              <p:cNvPr id="26" name="Ink 25">
+                <a:extLst>
+                  <a:ext uri="{FF2B5EF4-FFF2-40B4-BE49-F238E27FC236}">
+                    <a16:creationId xmlns:a16="http://schemas.microsoft.com/office/drawing/2014/main" id="{0067D845-3E70-37BA-D631-FF990E39F2DE}"/>
+                  </a:ext>
+                </a:extLst>
+              </p:cNvPr>
+              <p:cNvPicPr/>
+              <p:nvPr/>
+            </p:nvPicPr>
+            <p:blipFill>
+              <a:blip r:embed="rId4"/>
+              <a:stretch>
+                <a:fillRect/>
+              </a:stretch>
+            </p:blipFill>
+            <p:spPr>
+              <a:xfrm>
+                <a:off x="6110280" y="3409560"/>
+                <a:ext cx="2509920" cy="734040"/>
+              </a:xfrm>
+              <a:prstGeom prst="rect">
+                <a:avLst/>
+              </a:prstGeom>
+            </p:spPr>
+          </p:pic>
+        </mc:Fallback>
+      </mc:AlternateContent>
+    </p:spTree>
+    <p:extLst>
+      <p:ext uri="{BB962C8B-B14F-4D97-AF65-F5344CB8AC3E}">
+        <p14:creationId xmlns:p14="http://schemas.microsoft.com/office/powerpoint/2010/main" val="1683319995"/>
+      </p:ext>
+    </p:extLst>
+  </p:cSld>
+  <p:clrMapOvr>
+    <a:masterClrMapping/>
+  </p:clrMapOvr>
+</p:sld>
+</file>
+
+<file path=ppt/slides/slide23.xml><?xml version="1.0" encoding="utf-8"?>
+<p:sld xmlns:a="http://schemas.openxmlformats.org/drawingml/2006/main" xmlns:r="http://schemas.openxmlformats.org/officeDocument/2006/relationships" xmlns:p="http://schemas.openxmlformats.org/presentationml/2006/main">
   <p:cSld name="Slide 20">
     <p:bg>
       <p:bgPr>
@@ -13549,7 +19267,7 @@
 </p:sld>
 </file>
 
-<file path=ppt/slides/slide21.xml><?xml version="1.0" encoding="utf-8"?>
+<file path=ppt/slides/slide24.xml><?xml version="1.0" encoding="utf-8"?>
 <p:sld xmlns:a="http://schemas.openxmlformats.org/drawingml/2006/main" xmlns:r="http://schemas.openxmlformats.org/officeDocument/2006/relationships" xmlns:p="http://schemas.openxmlformats.org/presentationml/2006/main">
   <p:cSld name="Slide 21">
     <p:bg>
@@ -14513,7 +20231,7 @@
               <a:buNone/>
             </a:pPr>
             <a:r>
-              <a:rPr lang="en-US" sz="1050" dirty="0">
+              <a:rPr lang="en-US" sz="1050" dirty="0" err="1">
                 <a:solidFill>
                   <a:srgbClr val="85C1E9"/>
                 </a:solidFill>
@@ -14521,12 +20239,96 @@
                 <a:ea typeface="Consolas" pitchFamily="34" charset="-122"/>
                 <a:cs typeface="Consolas" pitchFamily="34" charset="-120"/>
               </a:rPr>
-              <a:t>L.sort()  then  L.reverse() for desc</a:t>
+              <a:t>L.sort</a:t>
+            </a:r>
+            <a:r>
+              <a:rPr lang="en-US" sz="1050" dirty="0">
+                <a:solidFill>
+                  <a:srgbClr val="85C1E9"/>
+                </a:solidFill>
+                <a:latin typeface="Consolas" pitchFamily="34" charset="0"/>
+                <a:ea typeface="Consolas" pitchFamily="34" charset="-122"/>
+                <a:cs typeface="Consolas" pitchFamily="34" charset="-120"/>
+              </a:rPr>
+              <a:t>().    </a:t>
+            </a:r>
+            <a:r>
+              <a:rPr lang="en-US" sz="1050" dirty="0" err="1">
+                <a:solidFill>
+                  <a:srgbClr val="85C1E9"/>
+                </a:solidFill>
+                <a:latin typeface="Consolas" pitchFamily="34" charset="0"/>
+                <a:ea typeface="Consolas" pitchFamily="34" charset="-122"/>
+                <a:cs typeface="Consolas" pitchFamily="34" charset="-120"/>
+              </a:rPr>
+              <a:t>L.reverse</a:t>
+            </a:r>
+            <a:r>
+              <a:rPr lang="en-US" sz="1050" dirty="0">
+                <a:solidFill>
+                  <a:srgbClr val="85C1E9"/>
+                </a:solidFill>
+                <a:latin typeface="Consolas" pitchFamily="34" charset="0"/>
+                <a:ea typeface="Consolas" pitchFamily="34" charset="-122"/>
+                <a:cs typeface="Consolas" pitchFamily="34" charset="-120"/>
+              </a:rPr>
+              <a:t>()</a:t>
             </a:r>
             <a:endParaRPr lang="en-US" sz="1050" dirty="0"/>
           </a:p>
         </p:txBody>
       </p:sp>
+      <mc:AlternateContent xmlns:mc="http://schemas.openxmlformats.org/markup-compatibility/2006">
+        <mc:Choice xmlns:p14="http://schemas.microsoft.com/office/powerpoint/2010/main" Requires="p14">
+          <p:contentPart p14:bwMode="auto" r:id="rId3">
+            <p14:nvContentPartPr>
+              <p14:cNvPr id="29" name="Ink 28">
+                <a:extLst>
+                  <a:ext uri="{FF2B5EF4-FFF2-40B4-BE49-F238E27FC236}">
+                    <a16:creationId xmlns:a16="http://schemas.microsoft.com/office/drawing/2014/main" id="{6E4A094A-126A-EB60-BE51-89025A6026B0}"/>
+                  </a:ext>
+                </a:extLst>
+              </p14:cNvPr>
+              <p14:cNvContentPartPr/>
+              <p14:nvPr/>
+            </p14:nvContentPartPr>
+            <p14:xfrm>
+              <a:off x="723960" y="1775880"/>
+              <a:ext cx="7844040" cy="1453680"/>
+            </p14:xfrm>
+          </p:contentPart>
+        </mc:Choice>
+        <mc:Fallback>
+          <p:pic>
+            <p:nvPicPr>
+              <p:cNvPr id="29" name="Ink 28">
+                <a:extLst>
+                  <a:ext uri="{FF2B5EF4-FFF2-40B4-BE49-F238E27FC236}">
+                    <a16:creationId xmlns:a16="http://schemas.microsoft.com/office/drawing/2014/main" id="{6E4A094A-126A-EB60-BE51-89025A6026B0}"/>
+                  </a:ext>
+                </a:extLst>
+              </p:cNvPr>
+              <p:cNvPicPr/>
+              <p:nvPr/>
+            </p:nvPicPr>
+            <p:blipFill>
+              <a:blip r:embed="rId4"/>
+              <a:stretch>
+                <a:fillRect/>
+              </a:stretch>
+            </p:blipFill>
+            <p:spPr>
+              <a:xfrm>
+                <a:off x="714600" y="1766520"/>
+                <a:ext cx="7862760" cy="1472400"/>
+              </a:xfrm>
+              <a:prstGeom prst="rect">
+                <a:avLst/>
+              </a:prstGeom>
+            </p:spPr>
+          </p:pic>
+        </mc:Fallback>
+      </mc:AlternateContent>
     </p:spTree>
   </p:cSld>
   <p:clrMapOvr>
@@ -16061,8 +21863,8 @@
           </a:p>
         </p:txBody>
       </p:sp>
-      <mc:AlternateContent xmlns:mc="http://schemas.openxmlformats.org/markup-compatibility/2006">
-        <mc:Choice xmlns:p14="http://schemas.microsoft.com/office/powerpoint/2010/main" Requires="p14">
+      <mc:AlternateContent xmlns:mc="http://schemas.openxmlformats.org/markup-compatibility/2006" xmlns:p14="http://schemas.microsoft.com/office/powerpoint/2010/main">
+        <mc:Choice Requires="p14">
           <p:contentPart p14:bwMode="auto" r:id="rId3">
             <p14:nvContentPartPr>
               <p14:cNvPr id="37" name="Ink 36">
@@ -16081,7 +21883,7 @@
             </p14:xfrm>
           </p:contentPart>
         </mc:Choice>
-        <mc:Fallback>
+        <mc:Fallback xmlns="">
           <p:pic>
             <p:nvPicPr>
               <p:cNvPr id="37" name="Ink 36">
@@ -17393,8 +23195,8 @@
           </a:p>
         </p:txBody>
       </p:sp>
-      <mc:AlternateContent xmlns:mc="http://schemas.openxmlformats.org/markup-compatibility/2006">
-        <mc:Choice xmlns:p14="http://schemas.microsoft.com/office/powerpoint/2010/main" Requires="p14">
+      <mc:AlternateContent xmlns:mc="http://schemas.openxmlformats.org/markup-compatibility/2006" xmlns:p14="http://schemas.microsoft.com/office/powerpoint/2010/main">
+        <mc:Choice Requires="p14">
           <p:contentPart p14:bwMode="auto" r:id="rId3">
             <p14:nvContentPartPr>
               <p14:cNvPr id="27" name="Ink 26">
@@ -17413,7 +23215,7 @@
             </p14:xfrm>
           </p:contentPart>
         </mc:Choice>
-        <mc:Fallback>
+        <mc:Fallback xmlns="">
           <p:pic>
             <p:nvPicPr>
               <p:cNvPr id="27" name="Ink 26">
@@ -18564,8 +24366,8 @@
           </a:p>
         </p:txBody>
       </p:sp>
-      <mc:AlternateContent xmlns:mc="http://schemas.openxmlformats.org/markup-compatibility/2006">
-        <mc:Choice xmlns:p14="http://schemas.microsoft.com/office/powerpoint/2010/main" Requires="p14">
+      <mc:AlternateContent xmlns:mc="http://schemas.openxmlformats.org/markup-compatibility/2006" xmlns:p14="http://schemas.microsoft.com/office/powerpoint/2010/main">
+        <mc:Choice Requires="p14">
           <p:contentPart p14:bwMode="auto" r:id="rId3">
             <p14:nvContentPartPr>
               <p14:cNvPr id="16" name="Ink 15">
@@ -18584,7 +24386,7 @@
             </p14:xfrm>
           </p:contentPart>
         </mc:Choice>
-        <mc:Fallback>
+        <mc:Fallback xmlns="">
           <p:pic>
             <p:nvPicPr>
               <p:cNvPr id="16" name="Ink 15">
@@ -19793,8 +25595,8 @@
           </a:fontRef>
         </p:style>
       </p:cxnSp>
-      <mc:AlternateContent xmlns:mc="http://schemas.openxmlformats.org/markup-compatibility/2006">
-        <mc:Choice xmlns:p14="http://schemas.microsoft.com/office/powerpoint/2010/main" Requires="p14">
+      <mc:AlternateContent xmlns:mc="http://schemas.openxmlformats.org/markup-compatibility/2006" xmlns:p14="http://schemas.microsoft.com/office/powerpoint/2010/main">
+        <mc:Choice Requires="p14">
           <p:contentPart p14:bwMode="auto" r:id="rId3">
             <p14:nvContentPartPr>
               <p14:cNvPr id="31" name="Ink 30">
@@ -19813,7 +25615,7 @@
             </p14:xfrm>
           </p:contentPart>
         </mc:Choice>
-        <mc:Fallback>
+        <mc:Fallback xmlns="">
           <p:pic>
             <p:nvPicPr>
               <p:cNvPr id="31" name="Ink 30">
@@ -20498,8 +26300,8 @@
           </a:p>
         </p:txBody>
       </p:sp>
-      <mc:AlternateContent xmlns:mc="http://schemas.openxmlformats.org/markup-compatibility/2006">
-        <mc:Choice xmlns:p14="http://schemas.microsoft.com/office/powerpoint/2010/main" Requires="p14">
+      <mc:AlternateContent xmlns:mc="http://schemas.openxmlformats.org/markup-compatibility/2006" xmlns:p14="http://schemas.microsoft.com/office/powerpoint/2010/main">
+        <mc:Choice Requires="p14">
           <p:contentPart p14:bwMode="auto" r:id="rId3">
             <p14:nvContentPartPr>
               <p14:cNvPr id="14" name="Ink 13">
@@ -20518,7 +26320,7 @@
             </p14:xfrm>
           </p:contentPart>
         </mc:Choice>
-        <mc:Fallback>
+        <mc:Fallback xmlns="">
           <p:pic>
             <p:nvPicPr>
               <p:cNvPr id="14" name="Ink 13">
